--- a/decks/zalinos-architecture.pptx
+++ b/decks/zalinos-architecture.pptx
@@ -13,9 +13,15 @@
     <p:sldId id="261" r:id="rId7"/>
     <p:sldId id="262" r:id="rId8"/>
     <p:sldId id="263" r:id="rId9"/>
+    <p:sldId id="264" r:id="rId10"/>
+    <p:sldId id="265" r:id="rId11"/>
+    <p:sldId id="266" r:id="rId12"/>
+    <p:sldId id="267" r:id="rId13"/>
+    <p:sldId id="268" r:id="rId14"/>
+    <p:sldId id="269" r:id="rId15"/>
   </p:sldIdLst>
   <p:notesMasterIdLst>
-    <p:notesMasterId r:id="rId10"/>
+    <p:notesMasterId r:id="rId16"/>
   </p:notesMasterIdLst>
   <p:sldSz cx="12191695" cy="6858000"/>
   <p:notesSz cx="6858000" cy="12191695"/>
@@ -112,6 +118,1001 @@
     </a:lvl9pPr>
   </p:defaultTextStyle>
 </p:presentation>
+</file>
+
+<file path=ppt/charts/chart1.xml><?xml version="1.0" encoding="utf-8"?>
+<c:chartSpace xmlns:c="http://schemas.openxmlformats.org/drawingml/2006/chart" xmlns:a="http://schemas.openxmlformats.org/drawingml/2006/main" xmlns:r="http://schemas.openxmlformats.org/officeDocument/2006/relationships">
+  <c:date1904 val="0"/>
+  <c:roundedCorners val="1"/>
+  <c:chart>
+    <c:autoTitleDeleted val="1"/>
+    <c:plotArea>
+      <c:layout/>
+      <c:barChart>
+        <c:barDir val="col"/>
+        <c:grouping val="clustered"/>
+        <c:varyColors val="0"/>
+        <c:ser>
+          <c:idx val="0"/>
+          <c:order val="0"/>
+          <c:tx>
+            <c:strRef>
+              <c:f>Sheet1!$B$1</c:f>
+              <c:strCache>
+                <c:ptCount val="1"/>
+                <c:pt idx="0">
+                  <c:v>With structured memory</c:v>
+                </c:pt>
+              </c:strCache>
+            </c:strRef>
+          </c:tx>
+          <c:spPr>
+            <a:solidFill>
+              <a:srgbClr val="3B82F6"/>
+            </a:solidFill>
+            <a:effectLst/>
+          </c:spPr>
+          <c:invertIfNegative val="0"/>
+          <c:dLbls>
+            <c:numFmt formatCode="#,##0" sourceLinked="0"/>
+            <c:txPr>
+              <a:bodyPr/>
+              <a:lstStyle/>
+              <a:p>
+                <a:pPr>
+                  <a:defRPr b="0" i="0" strike="noStrike" sz="1200" u="none">
+                    <a:solidFill>
+                      <a:srgbClr val="000000"/>
+                    </a:solidFill>
+                    <a:latin typeface="Arial"/>
+                  </a:defRPr>
+                </a:pPr>
+              </a:p>
+            </c:txPr>
+            <c:showLegendKey val="0"/>
+            <c:showVal val="0"/>
+            <c:showCatName val="0"/>
+            <c:showSerName val="0"/>
+            <c:showPercent val="0"/>
+            <c:showBubbleSize val="0"/>
+            <c:showLeaderLines val="0"/>
+          </c:dLbls>
+          <c:cat>
+            <c:multiLvlStrRef>
+              <c:f>Sheet1!$A$2:$A$6</c:f>
+              <c:multiLvlStrCache>
+                <c:ptCount val="5"/>
+                <c:lvl>
+                  <c:pt idx="0">
+                    <c:v>Intent routing</c:v>
+                  </c:pt>
+                  <c:pt idx="1">
+                    <c:v>Status reports</c:v>
+                  </c:pt>
+                  <c:pt idx="2">
+                    <c:v>Doc drafting</c:v>
+                  </c:pt>
+                  <c:pt idx="3">
+                    <c:v>JSON extraction</c:v>
+                  </c:pt>
+                  <c:pt idx="4">
+                    <c:v>Open reasoning</c:v>
+                  </c:pt>
+                </c:lvl>
+              </c:multiLvlStrCache>
+            </c:multiLvlStrRef>
+          </c:cat>
+          <c:val>
+            <c:numRef>
+              <c:f>Sheet1!$B$2:$B$6</c:f>
+              <c:numCache>
+                <c:formatCode>General</c:formatCode>
+                <c:ptCount val="5"/>
+                <c:pt idx="0">
+                  <c:v>95</c:v>
+                </c:pt>
+                <c:pt idx="1">
+                  <c:v>90</c:v>
+                </c:pt>
+                <c:pt idx="2">
+                  <c:v>88</c:v>
+                </c:pt>
+                <c:pt idx="3">
+                  <c:v>92</c:v>
+                </c:pt>
+                <c:pt idx="4">
+                  <c:v>55</c:v>
+                </c:pt>
+              </c:numCache>
+            </c:numRef>
+          </c:val>
+        </c:ser>
+        <c:ser>
+          <c:idx val="1"/>
+          <c:order val="1"/>
+          <c:tx>
+            <c:strRef>
+              <c:f>Sheet1!$C$1</c:f>
+              <c:strCache>
+                <c:ptCount val="1"/>
+                <c:pt idx="0">
+                  <c:v>With vague context</c:v>
+                </c:pt>
+              </c:strCache>
+            </c:strRef>
+          </c:tx>
+          <c:spPr>
+            <a:solidFill>
+              <a:srgbClr val="06B6D4"/>
+            </a:solidFill>
+            <a:effectLst/>
+          </c:spPr>
+          <c:invertIfNegative val="0"/>
+          <c:dLbls>
+            <c:numFmt formatCode="#,##0" sourceLinked="0"/>
+            <c:txPr>
+              <a:bodyPr/>
+              <a:lstStyle/>
+              <a:p>
+                <a:pPr>
+                  <a:defRPr b="0" i="0" strike="noStrike" sz="1200" u="none">
+                    <a:solidFill>
+                      <a:srgbClr val="000000"/>
+                    </a:solidFill>
+                    <a:latin typeface="Arial"/>
+                  </a:defRPr>
+                </a:pPr>
+              </a:p>
+            </c:txPr>
+            <c:showLegendKey val="0"/>
+            <c:showVal val="0"/>
+            <c:showCatName val="0"/>
+            <c:showSerName val="0"/>
+            <c:showPercent val="0"/>
+            <c:showBubbleSize val="0"/>
+            <c:showLeaderLines val="0"/>
+          </c:dLbls>
+          <c:cat>
+            <c:multiLvlStrRef>
+              <c:f>Sheet1!$A$2:$A$6</c:f>
+              <c:multiLvlStrCache>
+                <c:ptCount val="5"/>
+                <c:lvl>
+                  <c:pt idx="0">
+                    <c:v>Intent routing</c:v>
+                  </c:pt>
+                  <c:pt idx="1">
+                    <c:v>Status reports</c:v>
+                  </c:pt>
+                  <c:pt idx="2">
+                    <c:v>Doc drafting</c:v>
+                  </c:pt>
+                  <c:pt idx="3">
+                    <c:v>JSON extraction</c:v>
+                  </c:pt>
+                  <c:pt idx="4">
+                    <c:v>Open reasoning</c:v>
+                  </c:pt>
+                </c:lvl>
+              </c:multiLvlStrCache>
+            </c:multiLvlStrRef>
+          </c:cat>
+          <c:val>
+            <c:numRef>
+              <c:f>Sheet1!$C$2:$C$6</c:f>
+              <c:numCache>
+                <c:formatCode>General</c:formatCode>
+                <c:ptCount val="5"/>
+                <c:pt idx="0">
+                  <c:v>70</c:v>
+                </c:pt>
+                <c:pt idx="1">
+                  <c:v>55</c:v>
+                </c:pt>
+                <c:pt idx="2">
+                  <c:v>50</c:v>
+                </c:pt>
+                <c:pt idx="3">
+                  <c:v>60</c:v>
+                </c:pt>
+                <c:pt idx="4">
+                  <c:v>45</c:v>
+                </c:pt>
+              </c:numCache>
+            </c:numRef>
+          </c:val>
+        </c:ser>
+        <c:dLbls>
+          <c:numFmt formatCode="#,##0" sourceLinked="0"/>
+          <c:txPr>
+            <a:bodyPr/>
+            <a:lstStyle/>
+            <a:p>
+              <a:pPr>
+                <a:defRPr b="0" i="0" strike="noStrike" sz="1200" u="none">
+                  <a:solidFill>
+                    <a:srgbClr val="000000"/>
+                  </a:solidFill>
+                  <a:latin typeface="Arial"/>
+                </a:defRPr>
+              </a:pPr>
+            </a:p>
+          </c:txPr>
+          <c:showLegendKey val="0"/>
+          <c:showVal val="0"/>
+          <c:showCatName val="0"/>
+          <c:showSerName val="0"/>
+          <c:showPercent val="0"/>
+          <c:showBubbleSize val="0"/>
+          <c:showLeaderLines val="0"/>
+        </c:dLbls>
+        <c:gapWidth val="55"/>
+        <c:overlap val="0"/>
+        <c:axId val="2094734554"/>
+        <c:axId val="2094734552"/>
+        <c:axId val="2094734556"/>
+      </c:barChart>
+      <c:catAx>
+        <c:axId val="2094734554"/>
+        <c:scaling>
+          <c:orientation val="minMax"/>
+        </c:scaling>
+        <c:delete val="0"/>
+        <c:axPos val="b"/>
+        <c:numFmt formatCode="General" sourceLinked="1"/>
+        <c:majorTickMark val="out"/>
+        <c:minorTickMark val="none"/>
+        <c:tickLblPos val="low"/>
+        <c:spPr>
+          <a:ln w="12700" cap="flat">
+            <a:solidFill>
+              <a:srgbClr val="24365A"/>
+            </a:solidFill>
+            <a:prstDash val="solid"/>
+            <a:round/>
+          </a:ln>
+        </c:spPr>
+        <c:txPr>
+          <a:bodyPr/>
+          <a:lstStyle/>
+          <a:p>
+            <a:pPr>
+              <a:defRPr sz="1100" b="0" i="0" u="none" strike="noStrike">
+                <a:solidFill>
+                  <a:srgbClr val="94A3B8"/>
+                </a:solidFill>
+                <a:latin typeface="Segoe UI"/>
+              </a:defRPr>
+            </a:pPr>
+            <a:endParaRPr lang="en-US"/>
+          </a:p>
+        </c:txPr>
+        <c:crossAx val="2094734552"/>
+        <c:crosses val="autoZero"/>
+        <c:auto val="1"/>
+        <c:lblAlgn val="ctr"/>
+        <c:noMultiLvlLbl val="1"/>
+      </c:catAx>
+      <c:valAx>
+        <c:axId val="2094734552"/>
+        <c:scaling>
+          <c:orientation val="minMax"/>
+        </c:scaling>
+        <c:delete val="0"/>
+        <c:axPos val="l"/>
+        <c:majorGridlines>
+          <c:spPr>
+            <a:ln w="12700" cap="flat">
+              <a:solidFill>
+                <a:srgbClr val="18243D"/>
+              </a:solidFill>
+              <a:prstDash val="solid"/>
+              <a:round/>
+            </a:ln>
+          </c:spPr>
+        </c:majorGridlines>
+        <c:numFmt formatCode="General" sourceLinked="0"/>
+        <c:majorTickMark val="out"/>
+        <c:minorTickMark val="none"/>
+        <c:tickLblPos val="nextTo"/>
+        <c:spPr>
+          <a:ln w="12700" cap="flat">
+            <a:solidFill>
+              <a:srgbClr val="24365A"/>
+            </a:solidFill>
+            <a:prstDash val="solid"/>
+            <a:round/>
+          </a:ln>
+        </c:spPr>
+        <c:txPr>
+          <a:bodyPr/>
+          <a:lstStyle/>
+          <a:p>
+            <a:pPr>
+              <a:defRPr sz="1000" b="0" i="0" u="none" strike="noStrike">
+                <a:solidFill>
+                  <a:srgbClr val="94A3B8"/>
+                </a:solidFill>
+                <a:latin typeface="Segoe UI"/>
+              </a:defRPr>
+            </a:pPr>
+            <a:endParaRPr lang="en-US"/>
+          </a:p>
+        </c:txPr>
+        <c:crossAx val="2094734554"/>
+        <c:crosses val="autoZero"/>
+        <c:crossBetween val="between"/>
+      </c:valAx>
+      <c:spPr>
+        <a:solidFill>
+          <a:srgbClr val="0D1420"/>
+        </a:solidFill>
+        <a:ln>
+          <a:noFill/>
+        </a:ln>
+        <a:effectLst/>
+      </c:spPr>
+    </c:plotArea>
+    <c:legend>
+      <c:legendPos val="b"/>
+      <c:overlay val="0"/>
+      <c:txPr>
+        <a:bodyPr/>
+        <a:lstStyle/>
+        <a:p>
+          <a:pPr>
+            <a:defRPr sz="1100">
+              <a:solidFill>
+                <a:srgbClr val="CBD5E1"/>
+              </a:solidFill>
+              <a:latin typeface="Segoe UI"/>
+              <a:cs typeface="Segoe UI"/>
+            </a:defRPr>
+          </a:pPr>
+          <a:endParaRPr lang="en-US"/>
+        </a:p>
+      </c:txPr>
+    </c:legend>
+    <c:plotVisOnly val="1"/>
+    <c:dispBlanksAs val="span"/>
+  </c:chart>
+  <c:spPr>
+    <a:solidFill>
+      <a:srgbClr val="0D1420"/>
+    </a:solidFill>
+    <a:ln w="12700" cap="flat">
+      <a:solidFill>
+        <a:srgbClr val="24365A"/>
+      </a:solidFill>
+    </a:ln>
+    <a:effectLst/>
+  </c:spPr>
+  <c:externalData r:id="rId1">
+    <c:autoUpdate val="0"/>
+  </c:externalData>
+</c:chartSpace>
+</file>
+
+<file path=ppt/charts/chart2.xml><?xml version="1.0" encoding="utf-8"?>
+<c:chartSpace xmlns:c="http://schemas.openxmlformats.org/drawingml/2006/chart" xmlns:a="http://schemas.openxmlformats.org/drawingml/2006/main" xmlns:r="http://schemas.openxmlformats.org/officeDocument/2006/relationships">
+  <c:date1904 val="0"/>
+  <c:roundedCorners val="1"/>
+  <c:chart>
+    <c:autoTitleDeleted val="1"/>
+    <c:plotArea>
+      <c:layout/>
+      <c:doughnutChart>
+        <c:varyColors val="1"/>
+        <c:ser>
+          <c:idx val="0"/>
+          <c:order val="0"/>
+          <c:tx>
+            <c:strRef>
+              <c:f>Sheet1!$B$1</c:f>
+              <c:strCache>
+                <c:ptCount val="1"/>
+                <c:pt idx="0">
+                  <c:v>Breakdown</c:v>
+                </c:pt>
+              </c:strCache>
+            </c:strRef>
+          </c:tx>
+          <c:spPr>
+            <a:solidFill>
+              <a:schemeClr val="accent1"/>
+            </a:solidFill>
+            <a:ln w="9525" cap="flat">
+              <a:solidFill>
+                <a:srgbClr val="F9F9F9"/>
+              </a:solidFill>
+              <a:prstDash val="solid"/>
+              <a:round/>
+            </a:ln>
+            <a:effectLst/>
+          </c:spPr>
+          <c:dPt>
+            <c:idx val="0"/>
+            <c:bubble3D val="0"/>
+            <c:spPr>
+              <a:solidFill>
+                <a:srgbClr val="3B82F6"/>
+              </a:solidFill>
+              <a:effectLst/>
+            </c:spPr>
+          </c:dPt>
+          <c:dPt>
+            <c:idx val="1"/>
+            <c:bubble3D val="0"/>
+            <c:spPr>
+              <a:solidFill>
+                <a:srgbClr val="06B6D4"/>
+              </a:solidFill>
+              <a:effectLst/>
+            </c:spPr>
+          </c:dPt>
+          <c:dPt>
+            <c:idx val="2"/>
+            <c:bubble3D val="0"/>
+            <c:spPr>
+              <a:solidFill>
+                <a:srgbClr val="22D3A0"/>
+              </a:solidFill>
+              <a:effectLst/>
+            </c:spPr>
+          </c:dPt>
+          <c:dPt>
+            <c:idx val="3"/>
+            <c:bubble3D val="0"/>
+            <c:spPr>
+              <a:solidFill>
+                <a:srgbClr val="F59E0B"/>
+              </a:solidFill>
+              <a:effectLst/>
+            </c:spPr>
+          </c:dPt>
+          <c:dPt>
+            <c:idx val="4"/>
+            <c:bubble3D val="0"/>
+            <c:spPr>
+              <a:solidFill>
+                <a:srgbClr val="06B6D4"/>
+              </a:solidFill>
+              <a:effectLst/>
+            </c:spPr>
+          </c:dPt>
+          <c:dLbls>
+            <c:dLbl>
+              <c:idx val="0"/>
+              <c:numFmt formatCode="0%" sourceLinked="0"/>
+              <c:spPr/>
+              <c:txPr>
+                <a:bodyPr/>
+                <a:lstStyle/>
+                <a:p>
+                  <a:pPr>
+                    <a:defRPr sz="1000" b="0" i="0" u="none" strike="noStrike">
+                      <a:solidFill>
+                        <a:srgbClr val="E2E8F0"/>
+                      </a:solidFill>
+                      <a:latin typeface="Segoe UI"/>
+                    </a:defRPr>
+                  </a:pPr>
+                </a:p>
+              </c:txPr>
+              <c:showLegendKey val="0"/>
+              <c:showVal val="0"/>
+              <c:showCatName val="0"/>
+              <c:showSerName val="0"/>
+              <c:showPercent val="1"/>
+              <c:showBubbleSize val="0"/>
+            </c:dLbl>
+            <c:dLbl>
+              <c:idx val="1"/>
+              <c:numFmt formatCode="0%" sourceLinked="0"/>
+              <c:spPr/>
+              <c:txPr>
+                <a:bodyPr/>
+                <a:lstStyle/>
+                <a:p>
+                  <a:pPr>
+                    <a:defRPr sz="1000" b="0" i="0" u="none" strike="noStrike">
+                      <a:solidFill>
+                        <a:srgbClr val="E2E8F0"/>
+                      </a:solidFill>
+                      <a:latin typeface="Segoe UI"/>
+                    </a:defRPr>
+                  </a:pPr>
+                </a:p>
+              </c:txPr>
+              <c:showLegendKey val="0"/>
+              <c:showVal val="0"/>
+              <c:showCatName val="0"/>
+              <c:showSerName val="0"/>
+              <c:showPercent val="1"/>
+              <c:showBubbleSize val="0"/>
+            </c:dLbl>
+            <c:dLbl>
+              <c:idx val="2"/>
+              <c:numFmt formatCode="0%" sourceLinked="0"/>
+              <c:spPr/>
+              <c:txPr>
+                <a:bodyPr/>
+                <a:lstStyle/>
+                <a:p>
+                  <a:pPr>
+                    <a:defRPr sz="1000" b="0" i="0" u="none" strike="noStrike">
+                      <a:solidFill>
+                        <a:srgbClr val="E2E8F0"/>
+                      </a:solidFill>
+                      <a:latin typeface="Segoe UI"/>
+                    </a:defRPr>
+                  </a:pPr>
+                </a:p>
+              </c:txPr>
+              <c:showLegendKey val="0"/>
+              <c:showVal val="0"/>
+              <c:showCatName val="0"/>
+              <c:showSerName val="0"/>
+              <c:showPercent val="1"/>
+              <c:showBubbleSize val="0"/>
+            </c:dLbl>
+            <c:dLbl>
+              <c:idx val="3"/>
+              <c:numFmt formatCode="0%" sourceLinked="0"/>
+              <c:spPr/>
+              <c:txPr>
+                <a:bodyPr/>
+                <a:lstStyle/>
+                <a:p>
+                  <a:pPr>
+                    <a:defRPr sz="1000" b="0" i="0" u="none" strike="noStrike">
+                      <a:solidFill>
+                        <a:srgbClr val="E2E8F0"/>
+                      </a:solidFill>
+                      <a:latin typeface="Segoe UI"/>
+                    </a:defRPr>
+                  </a:pPr>
+                </a:p>
+              </c:txPr>
+              <c:showLegendKey val="0"/>
+              <c:showVal val="0"/>
+              <c:showCatName val="0"/>
+              <c:showSerName val="0"/>
+              <c:showPercent val="1"/>
+              <c:showBubbleSize val="0"/>
+            </c:dLbl>
+            <c:dLbl>
+              <c:idx val="4"/>
+              <c:numFmt formatCode="0%" sourceLinked="0"/>
+              <c:spPr/>
+              <c:txPr>
+                <a:bodyPr/>
+                <a:lstStyle/>
+                <a:p>
+                  <a:pPr>
+                    <a:defRPr sz="1000" b="0" i="0" u="none" strike="noStrike">
+                      <a:solidFill>
+                        <a:srgbClr val="E2E8F0"/>
+                      </a:solidFill>
+                      <a:latin typeface="Segoe UI"/>
+                    </a:defRPr>
+                  </a:pPr>
+                </a:p>
+              </c:txPr>
+              <c:showLegendKey val="0"/>
+              <c:showVal val="0"/>
+              <c:showCatName val="0"/>
+              <c:showSerName val="0"/>
+              <c:showPercent val="1"/>
+              <c:showBubbleSize val="0"/>
+            </c:dLbl>
+            <c:numFmt formatCode="0%" sourceLinked="0"/>
+            <c:txPr>
+              <a:bodyPr/>
+              <a:lstStyle/>
+              <a:p>
+                <a:pPr>
+                  <a:defRPr sz="1800" b="0" i="0" u="none" strike="noStrike">
+                    <a:solidFill>
+                      <a:srgbClr val="000000"/>
+                    </a:solidFill>
+                    <a:latin typeface="Arial"/>
+                  </a:defRPr>
+                </a:pPr>
+              </a:p>
+            </c:txPr>
+            <c:showLegendKey val="0"/>
+            <c:showVal val="0"/>
+            <c:showCatName val="1"/>
+            <c:showSerName val="0"/>
+            <c:showPercent val="1"/>
+            <c:showBubbleSize val="0"/>
+            <c:showLeaderLines val="0"/>
+          </c:dLbls>
+          <c:cat>
+            <c:strRef>
+              <c:f>Sheet1!$A$2:$A$6</c:f>
+              <c:strCache>
+                <c:ptCount val="5"/>
+                <c:pt idx="0">
+                  <c:v>Build &amp; maintain</c:v>
+                </c:pt>
+                <c:pt idx="1">
+                  <c:v>QA &amp; gates</c:v>
+                </c:pt>
+                <c:pt idx="2">
+                  <c:v>Docs &amp; memory</c:v>
+                </c:pt>
+                <c:pt idx="3">
+                  <c:v>Coordination</c:v>
+                </c:pt>
+                <c:pt idx="4">
+                  <c:v>Research &amp; data</c:v>
+                </c:pt>
+              </c:strCache>
+            </c:strRef>
+          </c:cat>
+          <c:val>
+            <c:numRef>
+              <c:f>Sheet1!$B$2:$B$6</c:f>
+              <c:numCache>
+                <c:ptCount val="5"/>
+                <c:pt idx="0">
+                  <c:v>35</c:v>
+                </c:pt>
+                <c:pt idx="1">
+                  <c:v>20</c:v>
+                </c:pt>
+                <c:pt idx="2">
+                  <c:v>15</c:v>
+                </c:pt>
+                <c:pt idx="3">
+                  <c:v>10</c:v>
+                </c:pt>
+                <c:pt idx="4">
+                  <c:v>20</c:v>
+                </c:pt>
+              </c:numCache>
+            </c:numRef>
+          </c:val>
+        </c:ser>
+        <c:firstSliceAng val="0"/>
+        <c:holeSize val="62"/>
+      </c:doughnutChart>
+      <c:spPr>
+        <a:solidFill>
+          <a:srgbClr val="0D1420"/>
+        </a:solidFill>
+        <a:ln>
+          <a:noFill/>
+        </a:ln>
+        <a:effectLst/>
+      </c:spPr>
+    </c:plotArea>
+    <c:legend>
+      <c:legendPos val="r"/>
+      <c:overlay val="0"/>
+      <c:txPr>
+        <a:bodyPr/>
+        <a:lstStyle/>
+        <a:p>
+          <a:pPr>
+            <a:defRPr sz="1100">
+              <a:solidFill>
+                <a:srgbClr val="CBD5E1"/>
+              </a:solidFill>
+              <a:latin typeface="Segoe UI"/>
+              <a:cs typeface="Segoe UI"/>
+            </a:defRPr>
+          </a:pPr>
+          <a:endParaRPr lang="en-US"/>
+        </a:p>
+      </c:txPr>
+    </c:legend>
+    <c:plotVisOnly val="1"/>
+    <c:dispBlanksAs val="span"/>
+  </c:chart>
+  <c:spPr>
+    <a:solidFill>
+      <a:srgbClr val="0D1420"/>
+    </a:solidFill>
+    <a:ln w="12700" cap="flat">
+      <a:solidFill>
+        <a:srgbClr val="24365A"/>
+      </a:solidFill>
+    </a:ln>
+    <a:effectLst/>
+  </c:spPr>
+  <c:externalData r:id="rId1">
+    <c:autoUpdate val="0"/>
+  </c:externalData>
+</c:chartSpace>
+</file>
+
+<file path=ppt/charts/chart3.xml><?xml version="1.0" encoding="utf-8"?>
+<c:chartSpace xmlns:c="http://schemas.openxmlformats.org/drawingml/2006/chart" xmlns:a="http://schemas.openxmlformats.org/drawingml/2006/main" xmlns:r="http://schemas.openxmlformats.org/officeDocument/2006/relationships">
+  <c:date1904 val="0"/>
+  <c:roundedCorners val="1"/>
+  <c:chart>
+    <c:autoTitleDeleted val="1"/>
+    <c:plotArea>
+      <c:layout/>
+      <c:lineChart>
+        <c:varyColors val="0"/>
+        <c:ser>
+          <c:idx val="0"/>
+          <c:order val="0"/>
+          <c:tx>
+            <c:strRef>
+              <c:f>Sheet1!$B$1</c:f>
+              <c:strCache>
+                <c:ptCount val="1"/>
+                <c:pt idx="0">
+                  <c:v>Validation set accuracy (%)</c:v>
+                </c:pt>
+              </c:strCache>
+            </c:strRef>
+          </c:tx>
+          <c:spPr>
+            <a:solidFill>
+              <a:srgbClr val="3B82F6"/>
+            </a:solidFill>
+            <a:ln w="31750" cap="flat">
+              <a:solidFill>
+                <a:srgbClr val="3B82F6"/>
+              </a:solidFill>
+              <a:prstDash val="solid"/>
+              <a:round/>
+            </a:ln>
+            <a:effectLst/>
+          </c:spPr>
+          <c:invertIfNegative val="0"/>
+          <c:dLbls>
+            <c:numFmt formatCode="#,##0" sourceLinked="0"/>
+            <c:txPr>
+              <a:bodyPr/>
+              <a:lstStyle/>
+              <a:p>
+                <a:pPr>
+                  <a:defRPr b="0" i="0" strike="noStrike" sz="1200" u="none">
+                    <a:solidFill>
+                      <a:srgbClr val="000000"/>
+                    </a:solidFill>
+                    <a:latin typeface="Arial"/>
+                  </a:defRPr>
+                </a:pPr>
+              </a:p>
+            </c:txPr>
+            <c:showLegendKey val="0"/>
+            <c:showVal val="0"/>
+            <c:showCatName val="0"/>
+            <c:showSerName val="0"/>
+            <c:showPercent val="0"/>
+            <c:showBubbleSize val="0"/>
+            <c:showLeaderLines val="0"/>
+          </c:dLbls>
+          <c:marker>
+            <c:symbol val="circle"/>
+            <c:size val="6"/>
+            <c:spPr>
+              <a:solidFill>
+                <a:srgbClr val="3B82F6"/>
+              </a:solidFill>
+              <a:ln w="9525" cap="flat">
+                <a:solidFill>
+                  <a:srgbClr val="3B82F6"/>
+                </a:solidFill>
+                <a:prstDash val="solid"/>
+                <a:round/>
+              </a:ln>
+              <a:effectLst/>
+            </c:spPr>
+          </c:marker>
+          <c:cat>
+            <c:multiLvlStrRef>
+              <c:f>Sheet1!$A$2:$A$7</c:f>
+              <c:multiLvlStrCache>
+                <c:ptCount val="6"/>
+                <c:lvl>
+                  <c:pt idx="0">
+                    <c:v>R1</c:v>
+                  </c:pt>
+                  <c:pt idx="1">
+                    <c:v>R2</c:v>
+                  </c:pt>
+                  <c:pt idx="2">
+                    <c:v>R3</c:v>
+                  </c:pt>
+                  <c:pt idx="3">
+                    <c:v>R4</c:v>
+                  </c:pt>
+                  <c:pt idx="4">
+                    <c:v>R5</c:v>
+                  </c:pt>
+                  <c:pt idx="5">
+                    <c:v>R6</c:v>
+                  </c:pt>
+                </c:lvl>
+              </c:multiLvlStrCache>
+            </c:multiLvlStrRef>
+          </c:cat>
+          <c:val>
+            <c:numRef>
+              <c:f>Sheet1!$B$2:$B$7</c:f>
+              <c:numCache>
+                <c:formatCode>General</c:formatCode>
+                <c:ptCount val="6"/>
+                <c:pt idx="0">
+                  <c:v>70</c:v>
+                </c:pt>
+                <c:pt idx="1">
+                  <c:v>80</c:v>
+                </c:pt>
+                <c:pt idx="2">
+                  <c:v>87</c:v>
+                </c:pt>
+                <c:pt idx="3">
+                  <c:v>93</c:v>
+                </c:pt>
+                <c:pt idx="4">
+                  <c:v>97</c:v>
+                </c:pt>
+                <c:pt idx="5">
+                  <c:v>100</c:v>
+                </c:pt>
+              </c:numCache>
+            </c:numRef>
+          </c:val>
+          <c:smooth val="0"/>
+        </c:ser>
+        <c:dLbls>
+          <c:numFmt formatCode="#,##0" sourceLinked="0"/>
+          <c:txPr>
+            <a:bodyPr/>
+            <a:lstStyle/>
+            <a:p>
+              <a:pPr>
+                <a:defRPr b="0" i="0" strike="noStrike" sz="1200" u="none">
+                  <a:solidFill>
+                    <a:srgbClr val="000000"/>
+                  </a:solidFill>
+                  <a:latin typeface="Arial"/>
+                </a:defRPr>
+              </a:pPr>
+            </a:p>
+          </c:txPr>
+          <c:showLegendKey val="0"/>
+          <c:showVal val="0"/>
+          <c:showCatName val="0"/>
+          <c:showSerName val="0"/>
+          <c:showPercent val="0"/>
+          <c:showBubbleSize val="0"/>
+          <c:showLeaderLines val="0"/>
+        </c:dLbls>
+        <c:marker val="1"/>
+        <c:axId val="2094734554"/>
+        <c:axId val="2094734552"/>
+        <c:axId val="2094734556"/>
+      </c:lineChart>
+      <c:catAx>
+        <c:axId val="2094734554"/>
+        <c:scaling>
+          <c:orientation val="minMax"/>
+        </c:scaling>
+        <c:delete val="0"/>
+        <c:axPos val="b"/>
+        <c:numFmt formatCode="General" sourceLinked="1"/>
+        <c:majorTickMark val="out"/>
+        <c:minorTickMark val="none"/>
+        <c:tickLblPos val="low"/>
+        <c:spPr>
+          <a:ln w="12700" cap="flat">
+            <a:solidFill>
+              <a:srgbClr val="24365A"/>
+            </a:solidFill>
+            <a:prstDash val="solid"/>
+            <a:round/>
+          </a:ln>
+        </c:spPr>
+        <c:txPr>
+          <a:bodyPr/>
+          <a:lstStyle/>
+          <a:p>
+            <a:pPr>
+              <a:defRPr sz="1100" b="0" i="0" u="none" strike="noStrike">
+                <a:solidFill>
+                  <a:srgbClr val="94A3B8"/>
+                </a:solidFill>
+                <a:latin typeface="Segoe UI"/>
+              </a:defRPr>
+            </a:pPr>
+            <a:endParaRPr lang="en-US"/>
+          </a:p>
+        </c:txPr>
+        <c:crossAx val="2094734552"/>
+        <c:crosses val="autoZero"/>
+        <c:auto val="1"/>
+        <c:lblAlgn val="ctr"/>
+        <c:noMultiLvlLbl val="1"/>
+      </c:catAx>
+      <c:valAx>
+        <c:axId val="2094734552"/>
+        <c:scaling>
+          <c:orientation val="minMax"/>
+        </c:scaling>
+        <c:delete val="0"/>
+        <c:axPos val="l"/>
+        <c:majorGridlines>
+          <c:spPr>
+            <a:ln w="12700" cap="flat">
+              <a:solidFill>
+                <a:srgbClr val="18243D"/>
+              </a:solidFill>
+              <a:prstDash val="solid"/>
+              <a:round/>
+            </a:ln>
+          </c:spPr>
+        </c:majorGridlines>
+        <c:numFmt formatCode="General" sourceLinked="0"/>
+        <c:majorTickMark val="out"/>
+        <c:minorTickMark val="none"/>
+        <c:tickLblPos val="nextTo"/>
+        <c:spPr>
+          <a:ln w="12700" cap="flat">
+            <a:solidFill>
+              <a:srgbClr val="24365A"/>
+            </a:solidFill>
+            <a:prstDash val="solid"/>
+            <a:round/>
+          </a:ln>
+        </c:spPr>
+        <c:txPr>
+          <a:bodyPr/>
+          <a:lstStyle/>
+          <a:p>
+            <a:pPr>
+              <a:defRPr sz="1000" b="0" i="0" u="none" strike="noStrike">
+                <a:solidFill>
+                  <a:srgbClr val="94A3B8"/>
+                </a:solidFill>
+                <a:latin typeface="Segoe UI"/>
+              </a:defRPr>
+            </a:pPr>
+            <a:endParaRPr lang="en-US"/>
+          </a:p>
+        </c:txPr>
+        <c:crossAx val="2094734554"/>
+        <c:crosses val="autoZero"/>
+        <c:crossBetween val="between"/>
+      </c:valAx>
+      <c:spPr>
+        <a:solidFill>
+          <a:srgbClr val="0D1420"/>
+        </a:solidFill>
+        <a:ln>
+          <a:noFill/>
+        </a:ln>
+        <a:effectLst/>
+      </c:spPr>
+    </c:plotArea>
+    <c:plotVisOnly val="1"/>
+    <c:dispBlanksAs val="span"/>
+  </c:chart>
+  <c:spPr>
+    <a:solidFill>
+      <a:srgbClr val="0D1420"/>
+    </a:solidFill>
+    <a:ln w="12700" cap="flat">
+      <a:solidFill>
+        <a:srgbClr val="24365A"/>
+      </a:solidFill>
+    </a:ln>
+    <a:effectLst/>
+  </c:spPr>
+  <c:externalData r:id="rId1">
+    <c:autoUpdate val="0"/>
+  </c:externalData>
+</c:chartSpace>
 </file>
 
 <file path=ppt/notesMasters/notesMaster1.xml><?xml version="1.0" encoding="utf-8"?>
@@ -551,6 +1552,446 @@
 </p:notes>
 </file>
 
+<file path=ppt/notesSlides/notesSlide10.xml><?xml version="1.0" encoding="utf-8"?>
+<p:notes xmlns:a="http://schemas.openxmlformats.org/drawingml/2006/main" xmlns:r="http://schemas.openxmlformats.org/officeDocument/2006/relationships" xmlns:p="http://schemas.openxmlformats.org/presentationml/2006/main">
+  <p:cSld>
+    <p:spTree>
+      <p:nvGrpSpPr>
+        <p:cNvPr id="1" name=""/>
+        <p:cNvGrpSpPr/>
+        <p:nvPr/>
+      </p:nvGrpSpPr>
+      <p:grpSpPr>
+        <a:xfrm>
+          <a:off x="0" y="0"/>
+          <a:ext cx="0" cy="0"/>
+          <a:chOff x="0" y="0"/>
+          <a:chExt cx="0" cy="0"/>
+        </a:xfrm>
+      </p:grpSpPr>
+      <p:sp>
+        <p:nvSpPr>
+          <p:cNvPr id="2" name="Slide Image Placeholder 1"/>
+          <p:cNvSpPr>
+            <a:spLocks noGrp="1" noRot="1" noChangeAspect="1"/>
+          </p:cNvSpPr>
+          <p:nvPr>
+            <p:ph type="sldImg"/>
+          </p:nvPr>
+        </p:nvSpPr>
+        <p:spPr/>
+      </p:sp>
+      <p:sp>
+        <p:nvSpPr>
+          <p:cNvPr id="3" name="Notes Placeholder 2"/>
+          <p:cNvSpPr>
+            <a:spLocks noGrp="1"/>
+          </p:cNvSpPr>
+          <p:nvPr>
+            <p:ph type="body" idx="1"/>
+          </p:nvPr>
+        </p:nvSpPr>
+        <p:spPr/>
+        <p:txBody>
+          <a:bodyPr/>
+          <a:lstStyle/>
+          <a:p>
+            <a:r>
+              <a:rPr lang="en-US" dirty="0"/>
+              <a:t/>
+            </a:r>
+            <a:endParaRPr lang="en-US" dirty="0"/>
+          </a:p>
+        </p:txBody>
+      </p:sp>
+      <p:sp>
+        <p:nvSpPr>
+          <p:cNvPr id="4" name="Slide Number Placeholder 3"/>
+          <p:cNvSpPr>
+            <a:spLocks noGrp="1"/>
+          </p:cNvSpPr>
+          <p:nvPr>
+            <p:ph type="sldNum" sz="quarter" idx="10"/>
+          </p:nvPr>
+        </p:nvSpPr>
+        <p:spPr/>
+        <p:txBody>
+          <a:bodyPr/>
+          <a:lstStyle/>
+          <a:p>
+            <a:fld id="{F7021451-1387-4CA6-816F-3879F97B5CBC}" type="slidenum">
+              <a:rPr lang="en-US"/>
+              <a:t>10</a:t>
+            </a:fld>
+            <a:endParaRPr lang="en-US"/>
+          </a:p>
+        </p:txBody>
+      </p:sp>
+    </p:spTree>
+    <p:extLst>
+      <p:ext uri="{BB962C8B-B14F-4D97-AF65-F5344CB8AC3E}">
+        <p14:creationId xmlns:p14="http://schemas.microsoft.com/office/powerpoint/2010/main" val="1024086991"/>
+      </p:ext>
+    </p:extLst>
+  </p:cSld>
+  <p:clrMapOvr>
+    <a:masterClrMapping/>
+  </p:clrMapOvr>
+</p:notes>
+</file>
+
+<file path=ppt/notesSlides/notesSlide11.xml><?xml version="1.0" encoding="utf-8"?>
+<p:notes xmlns:a="http://schemas.openxmlformats.org/drawingml/2006/main" xmlns:r="http://schemas.openxmlformats.org/officeDocument/2006/relationships" xmlns:p="http://schemas.openxmlformats.org/presentationml/2006/main">
+  <p:cSld>
+    <p:spTree>
+      <p:nvGrpSpPr>
+        <p:cNvPr id="1" name=""/>
+        <p:cNvGrpSpPr/>
+        <p:nvPr/>
+      </p:nvGrpSpPr>
+      <p:grpSpPr>
+        <a:xfrm>
+          <a:off x="0" y="0"/>
+          <a:ext cx="0" cy="0"/>
+          <a:chOff x="0" y="0"/>
+          <a:chExt cx="0" cy="0"/>
+        </a:xfrm>
+      </p:grpSpPr>
+      <p:sp>
+        <p:nvSpPr>
+          <p:cNvPr id="2" name="Slide Image Placeholder 1"/>
+          <p:cNvSpPr>
+            <a:spLocks noGrp="1" noRot="1" noChangeAspect="1"/>
+          </p:cNvSpPr>
+          <p:nvPr>
+            <p:ph type="sldImg"/>
+          </p:nvPr>
+        </p:nvSpPr>
+        <p:spPr/>
+      </p:sp>
+      <p:sp>
+        <p:nvSpPr>
+          <p:cNvPr id="3" name="Notes Placeholder 2"/>
+          <p:cNvSpPr>
+            <a:spLocks noGrp="1"/>
+          </p:cNvSpPr>
+          <p:nvPr>
+            <p:ph type="body" idx="1"/>
+          </p:nvPr>
+        </p:nvSpPr>
+        <p:spPr/>
+        <p:txBody>
+          <a:bodyPr/>
+          <a:lstStyle/>
+          <a:p>
+            <a:r>
+              <a:rPr lang="en-US" dirty="0"/>
+              <a:t/>
+            </a:r>
+            <a:endParaRPr lang="en-US" dirty="0"/>
+          </a:p>
+        </p:txBody>
+      </p:sp>
+      <p:sp>
+        <p:nvSpPr>
+          <p:cNvPr id="4" name="Slide Number Placeholder 3"/>
+          <p:cNvSpPr>
+            <a:spLocks noGrp="1"/>
+          </p:cNvSpPr>
+          <p:nvPr>
+            <p:ph type="sldNum" sz="quarter" idx="10"/>
+          </p:nvPr>
+        </p:nvSpPr>
+        <p:spPr/>
+        <p:txBody>
+          <a:bodyPr/>
+          <a:lstStyle/>
+          <a:p>
+            <a:fld id="{F7021451-1387-4CA6-816F-3879F97B5CBC}" type="slidenum">
+              <a:rPr lang="en-US"/>
+              <a:t>11</a:t>
+            </a:fld>
+            <a:endParaRPr lang="en-US"/>
+          </a:p>
+        </p:txBody>
+      </p:sp>
+    </p:spTree>
+    <p:extLst>
+      <p:ext uri="{BB962C8B-B14F-4D97-AF65-F5344CB8AC3E}">
+        <p14:creationId xmlns:p14="http://schemas.microsoft.com/office/powerpoint/2010/main" val="1024086991"/>
+      </p:ext>
+    </p:extLst>
+  </p:cSld>
+  <p:clrMapOvr>
+    <a:masterClrMapping/>
+  </p:clrMapOvr>
+</p:notes>
+</file>
+
+<file path=ppt/notesSlides/notesSlide12.xml><?xml version="1.0" encoding="utf-8"?>
+<p:notes xmlns:a="http://schemas.openxmlformats.org/drawingml/2006/main" xmlns:r="http://schemas.openxmlformats.org/officeDocument/2006/relationships" xmlns:p="http://schemas.openxmlformats.org/presentationml/2006/main">
+  <p:cSld>
+    <p:spTree>
+      <p:nvGrpSpPr>
+        <p:cNvPr id="1" name=""/>
+        <p:cNvGrpSpPr/>
+        <p:nvPr/>
+      </p:nvGrpSpPr>
+      <p:grpSpPr>
+        <a:xfrm>
+          <a:off x="0" y="0"/>
+          <a:ext cx="0" cy="0"/>
+          <a:chOff x="0" y="0"/>
+          <a:chExt cx="0" cy="0"/>
+        </a:xfrm>
+      </p:grpSpPr>
+      <p:sp>
+        <p:nvSpPr>
+          <p:cNvPr id="2" name="Slide Image Placeholder 1"/>
+          <p:cNvSpPr>
+            <a:spLocks noGrp="1" noRot="1" noChangeAspect="1"/>
+          </p:cNvSpPr>
+          <p:nvPr>
+            <p:ph type="sldImg"/>
+          </p:nvPr>
+        </p:nvSpPr>
+        <p:spPr/>
+      </p:sp>
+      <p:sp>
+        <p:nvSpPr>
+          <p:cNvPr id="3" name="Notes Placeholder 2"/>
+          <p:cNvSpPr>
+            <a:spLocks noGrp="1"/>
+          </p:cNvSpPr>
+          <p:nvPr>
+            <p:ph type="body" idx="1"/>
+          </p:nvPr>
+        </p:nvSpPr>
+        <p:spPr/>
+        <p:txBody>
+          <a:bodyPr/>
+          <a:lstStyle/>
+          <a:p>
+            <a:r>
+              <a:rPr lang="en-US" dirty="0"/>
+              <a:t/>
+            </a:r>
+            <a:endParaRPr lang="en-US" dirty="0"/>
+          </a:p>
+        </p:txBody>
+      </p:sp>
+      <p:sp>
+        <p:nvSpPr>
+          <p:cNvPr id="4" name="Slide Number Placeholder 3"/>
+          <p:cNvSpPr>
+            <a:spLocks noGrp="1"/>
+          </p:cNvSpPr>
+          <p:nvPr>
+            <p:ph type="sldNum" sz="quarter" idx="10"/>
+          </p:nvPr>
+        </p:nvSpPr>
+        <p:spPr/>
+        <p:txBody>
+          <a:bodyPr/>
+          <a:lstStyle/>
+          <a:p>
+            <a:fld id="{F7021451-1387-4CA6-816F-3879F97B5CBC}" type="slidenum">
+              <a:rPr lang="en-US"/>
+              <a:t>12</a:t>
+            </a:fld>
+            <a:endParaRPr lang="en-US"/>
+          </a:p>
+        </p:txBody>
+      </p:sp>
+    </p:spTree>
+    <p:extLst>
+      <p:ext uri="{BB962C8B-B14F-4D97-AF65-F5344CB8AC3E}">
+        <p14:creationId xmlns:p14="http://schemas.microsoft.com/office/powerpoint/2010/main" val="1024086991"/>
+      </p:ext>
+    </p:extLst>
+  </p:cSld>
+  <p:clrMapOvr>
+    <a:masterClrMapping/>
+  </p:clrMapOvr>
+</p:notes>
+</file>
+
+<file path=ppt/notesSlides/notesSlide13.xml><?xml version="1.0" encoding="utf-8"?>
+<p:notes xmlns:a="http://schemas.openxmlformats.org/drawingml/2006/main" xmlns:r="http://schemas.openxmlformats.org/officeDocument/2006/relationships" xmlns:p="http://schemas.openxmlformats.org/presentationml/2006/main">
+  <p:cSld>
+    <p:spTree>
+      <p:nvGrpSpPr>
+        <p:cNvPr id="1" name=""/>
+        <p:cNvGrpSpPr/>
+        <p:nvPr/>
+      </p:nvGrpSpPr>
+      <p:grpSpPr>
+        <a:xfrm>
+          <a:off x="0" y="0"/>
+          <a:ext cx="0" cy="0"/>
+          <a:chOff x="0" y="0"/>
+          <a:chExt cx="0" cy="0"/>
+        </a:xfrm>
+      </p:grpSpPr>
+      <p:sp>
+        <p:nvSpPr>
+          <p:cNvPr id="2" name="Slide Image Placeholder 1"/>
+          <p:cNvSpPr>
+            <a:spLocks noGrp="1" noRot="1" noChangeAspect="1"/>
+          </p:cNvSpPr>
+          <p:nvPr>
+            <p:ph type="sldImg"/>
+          </p:nvPr>
+        </p:nvSpPr>
+        <p:spPr/>
+      </p:sp>
+      <p:sp>
+        <p:nvSpPr>
+          <p:cNvPr id="3" name="Notes Placeholder 2"/>
+          <p:cNvSpPr>
+            <a:spLocks noGrp="1"/>
+          </p:cNvSpPr>
+          <p:nvPr>
+            <p:ph type="body" idx="1"/>
+          </p:nvPr>
+        </p:nvSpPr>
+        <p:spPr/>
+        <p:txBody>
+          <a:bodyPr/>
+          <a:lstStyle/>
+          <a:p>
+            <a:r>
+              <a:rPr lang="en-US" dirty="0"/>
+              <a:t/>
+            </a:r>
+            <a:endParaRPr lang="en-US" dirty="0"/>
+          </a:p>
+        </p:txBody>
+      </p:sp>
+      <p:sp>
+        <p:nvSpPr>
+          <p:cNvPr id="4" name="Slide Number Placeholder 3"/>
+          <p:cNvSpPr>
+            <a:spLocks noGrp="1"/>
+          </p:cNvSpPr>
+          <p:nvPr>
+            <p:ph type="sldNum" sz="quarter" idx="10"/>
+          </p:nvPr>
+        </p:nvSpPr>
+        <p:spPr/>
+        <p:txBody>
+          <a:bodyPr/>
+          <a:lstStyle/>
+          <a:p>
+            <a:fld id="{F7021451-1387-4CA6-816F-3879F97B5CBC}" type="slidenum">
+              <a:rPr lang="en-US"/>
+              <a:t>13</a:t>
+            </a:fld>
+            <a:endParaRPr lang="en-US"/>
+          </a:p>
+        </p:txBody>
+      </p:sp>
+    </p:spTree>
+    <p:extLst>
+      <p:ext uri="{BB962C8B-B14F-4D97-AF65-F5344CB8AC3E}">
+        <p14:creationId xmlns:p14="http://schemas.microsoft.com/office/powerpoint/2010/main" val="1024086991"/>
+      </p:ext>
+    </p:extLst>
+  </p:cSld>
+  <p:clrMapOvr>
+    <a:masterClrMapping/>
+  </p:clrMapOvr>
+</p:notes>
+</file>
+
+<file path=ppt/notesSlides/notesSlide14.xml><?xml version="1.0" encoding="utf-8"?>
+<p:notes xmlns:a="http://schemas.openxmlformats.org/drawingml/2006/main" xmlns:r="http://schemas.openxmlformats.org/officeDocument/2006/relationships" xmlns:p="http://schemas.openxmlformats.org/presentationml/2006/main">
+  <p:cSld>
+    <p:spTree>
+      <p:nvGrpSpPr>
+        <p:cNvPr id="1" name=""/>
+        <p:cNvGrpSpPr/>
+        <p:nvPr/>
+      </p:nvGrpSpPr>
+      <p:grpSpPr>
+        <a:xfrm>
+          <a:off x="0" y="0"/>
+          <a:ext cx="0" cy="0"/>
+          <a:chOff x="0" y="0"/>
+          <a:chExt cx="0" cy="0"/>
+        </a:xfrm>
+      </p:grpSpPr>
+      <p:sp>
+        <p:nvSpPr>
+          <p:cNvPr id="2" name="Slide Image Placeholder 1"/>
+          <p:cNvSpPr>
+            <a:spLocks noGrp="1" noRot="1" noChangeAspect="1"/>
+          </p:cNvSpPr>
+          <p:nvPr>
+            <p:ph type="sldImg"/>
+          </p:nvPr>
+        </p:nvSpPr>
+        <p:spPr/>
+      </p:sp>
+      <p:sp>
+        <p:nvSpPr>
+          <p:cNvPr id="3" name="Notes Placeholder 2"/>
+          <p:cNvSpPr>
+            <a:spLocks noGrp="1"/>
+          </p:cNvSpPr>
+          <p:nvPr>
+            <p:ph type="body" idx="1"/>
+          </p:nvPr>
+        </p:nvSpPr>
+        <p:spPr/>
+        <p:txBody>
+          <a:bodyPr/>
+          <a:lstStyle/>
+          <a:p>
+            <a:r>
+              <a:rPr lang="en-US" dirty="0"/>
+              <a:t/>
+            </a:r>
+            <a:endParaRPr lang="en-US" dirty="0"/>
+          </a:p>
+        </p:txBody>
+      </p:sp>
+      <p:sp>
+        <p:nvSpPr>
+          <p:cNvPr id="4" name="Slide Number Placeholder 3"/>
+          <p:cNvSpPr>
+            <a:spLocks noGrp="1"/>
+          </p:cNvSpPr>
+          <p:nvPr>
+            <p:ph type="sldNum" sz="quarter" idx="10"/>
+          </p:nvPr>
+        </p:nvSpPr>
+        <p:spPr/>
+        <p:txBody>
+          <a:bodyPr/>
+          <a:lstStyle/>
+          <a:p>
+            <a:fld id="{F7021451-1387-4CA6-816F-3879F97B5CBC}" type="slidenum">
+              <a:rPr lang="en-US"/>
+              <a:t>14</a:t>
+            </a:fld>
+            <a:endParaRPr lang="en-US"/>
+          </a:p>
+        </p:txBody>
+      </p:sp>
+    </p:spTree>
+    <p:extLst>
+      <p:ext uri="{BB962C8B-B14F-4D97-AF65-F5344CB8AC3E}">
+        <p14:creationId xmlns:p14="http://schemas.microsoft.com/office/powerpoint/2010/main" val="1024086991"/>
+      </p:ext>
+    </p:extLst>
+  </p:cSld>
+  <p:clrMapOvr>
+    <a:masterClrMapping/>
+  </p:clrMapOvr>
+</p:notes>
+</file>
+
 <file path=ppt/notesSlides/notesSlide2.xml><?xml version="1.0" encoding="utf-8"?>
 <p:notes xmlns:a="http://schemas.openxmlformats.org/drawingml/2006/main" xmlns:r="http://schemas.openxmlformats.org/officeDocument/2006/relationships" xmlns:p="http://schemas.openxmlformats.org/presentationml/2006/main">
   <p:cSld>
@@ -1149,6 +2590,94 @@
             <a:fld id="{F7021451-1387-4CA6-816F-3879F97B5CBC}" type="slidenum">
               <a:rPr lang="en-US"/>
               <a:t>8</a:t>
+            </a:fld>
+            <a:endParaRPr lang="en-US"/>
+          </a:p>
+        </p:txBody>
+      </p:sp>
+    </p:spTree>
+    <p:extLst>
+      <p:ext uri="{BB962C8B-B14F-4D97-AF65-F5344CB8AC3E}">
+        <p14:creationId xmlns:p14="http://schemas.microsoft.com/office/powerpoint/2010/main" val="1024086991"/>
+      </p:ext>
+    </p:extLst>
+  </p:cSld>
+  <p:clrMapOvr>
+    <a:masterClrMapping/>
+  </p:clrMapOvr>
+</p:notes>
+</file>
+
+<file path=ppt/notesSlides/notesSlide9.xml><?xml version="1.0" encoding="utf-8"?>
+<p:notes xmlns:a="http://schemas.openxmlformats.org/drawingml/2006/main" xmlns:r="http://schemas.openxmlformats.org/officeDocument/2006/relationships" xmlns:p="http://schemas.openxmlformats.org/presentationml/2006/main">
+  <p:cSld>
+    <p:spTree>
+      <p:nvGrpSpPr>
+        <p:cNvPr id="1" name=""/>
+        <p:cNvGrpSpPr/>
+        <p:nvPr/>
+      </p:nvGrpSpPr>
+      <p:grpSpPr>
+        <a:xfrm>
+          <a:off x="0" y="0"/>
+          <a:ext cx="0" cy="0"/>
+          <a:chOff x="0" y="0"/>
+          <a:chExt cx="0" cy="0"/>
+        </a:xfrm>
+      </p:grpSpPr>
+      <p:sp>
+        <p:nvSpPr>
+          <p:cNvPr id="2" name="Slide Image Placeholder 1"/>
+          <p:cNvSpPr>
+            <a:spLocks noGrp="1" noRot="1" noChangeAspect="1"/>
+          </p:cNvSpPr>
+          <p:nvPr>
+            <p:ph type="sldImg"/>
+          </p:nvPr>
+        </p:nvSpPr>
+        <p:spPr/>
+      </p:sp>
+      <p:sp>
+        <p:nvSpPr>
+          <p:cNvPr id="3" name="Notes Placeholder 2"/>
+          <p:cNvSpPr>
+            <a:spLocks noGrp="1"/>
+          </p:cNvSpPr>
+          <p:nvPr>
+            <p:ph type="body" idx="1"/>
+          </p:nvPr>
+        </p:nvSpPr>
+        <p:spPr/>
+        <p:txBody>
+          <a:bodyPr/>
+          <a:lstStyle/>
+          <a:p>
+            <a:r>
+              <a:rPr lang="en-US" dirty="0"/>
+              <a:t/>
+            </a:r>
+            <a:endParaRPr lang="en-US" dirty="0"/>
+          </a:p>
+        </p:txBody>
+      </p:sp>
+      <p:sp>
+        <p:nvSpPr>
+          <p:cNvPr id="4" name="Slide Number Placeholder 3"/>
+          <p:cNvSpPr>
+            <a:spLocks noGrp="1"/>
+          </p:cNvSpPr>
+          <p:nvPr>
+            <p:ph type="sldNum" sz="quarter" idx="10"/>
+          </p:nvPr>
+        </p:nvSpPr>
+        <p:spPr/>
+        <p:txBody>
+          <a:bodyPr/>
+          <a:lstStyle/>
+          <a:p>
+            <a:fld id="{F7021451-1387-4CA6-816F-3879F97B5CBC}" type="slidenum">
+              <a:rPr lang="en-US"/>
+              <a:t>9</a:t>
             </a:fld>
             <a:endParaRPr lang="en-US"/>
           </a:p>
@@ -1546,7 +3075,7 @@
         </p:nvSpPr>
         <p:spPr>
           <a:xfrm>
-            <a:off x="822960" y="1554480"/>
+            <a:off x="822960" y="1783080"/>
             <a:ext cx="10515600" cy="457200"/>
           </a:xfrm>
           <a:prstGeom prst="rect">
@@ -1571,7 +3100,7 @@
                 <a:ea typeface="Consolas" pitchFamily="34" charset="-122"/>
                 <a:cs typeface="Consolas" pitchFamily="34" charset="-120"/>
               </a:rPr>
-              <a:t>ZALIN PLATFORM · R&amp;D</a:t>
+              <a:t>ZALIN PLATFORM · AI ENGINEERING</a:t>
             </a:r>
             <a:endParaRPr lang="en-US" sz="1400" dirty="0"/>
           </a:p>
@@ -1586,7 +3115,7 @@
         <p:spPr>
           <a:xfrm>
             <a:off x="822960" y="2286000"/>
-            <a:ext cx="10515600" cy="1737360"/>
+            <a:ext cx="10607040" cy="1691640"/>
           </a:xfrm>
           <a:prstGeom prst="rect">
             <a:avLst/>
@@ -1602,7 +3131,7 @@
               <a:buNone/>
             </a:pPr>
             <a:r>
-              <a:rPr lang="en-US" sz="4400" b="1" dirty="0">
+              <a:rPr lang="en-US" sz="4100" b="1" dirty="0">
                 <a:solidFill>
                   <a:srgbClr val="FFFFFF"/>
                 </a:solidFill>
@@ -1610,9 +3139,9 @@
                 <a:ea typeface="Segoe UI" pitchFamily="34" charset="-122"/>
                 <a:cs typeface="Segoe UI" pitchFamily="34" charset="-120"/>
               </a:rPr>
-              <a:t>ZalinOS</a:t>
-            </a:r>
-            <a:endParaRPr lang="en-US" sz="4400" dirty="0"/>
+              <a:t>ZalinOS: A Local-First AI Agent Operating System</a:t>
+            </a:r>
+            <a:endParaRPr lang="en-US" sz="4100" dirty="0"/>
           </a:p>
         </p:txBody>
       </p:sp>
@@ -1624,8 +3153,8 @@
         </p:nvSpPr>
         <p:spPr>
           <a:xfrm>
-            <a:off x="822960" y="4206240"/>
-            <a:ext cx="10515600" cy="914400"/>
+            <a:off x="822960" y="4023360"/>
+            <a:ext cx="10058400" cy="777240"/>
           </a:xfrm>
           <a:prstGeom prst="rect">
             <a:avLst/>
@@ -1641,7 +3170,7 @@
               <a:buNone/>
             </a:pPr>
             <a:r>
-              <a:rPr lang="en-US" sz="1600" dirty="0">
+              <a:rPr lang="en-US" sz="1700" dirty="0">
                 <a:solidFill>
                   <a:srgbClr val="94A3B8"/>
                 </a:solidFill>
@@ -1649,21 +3178,83 @@
                 <a:ea typeface="Segoe UI" pitchFamily="34" charset="-122"/>
                 <a:cs typeface="Segoe UI" pitchFamily="34" charset="-120"/>
               </a:rPr>
-              <a:t>A modular AI agent operating system running 100% locally · Rezalian Vatiady</a:t>
-            </a:r>
-            <a:endParaRPr lang="en-US" sz="1600" dirty="0"/>
-          </a:p>
-        </p:txBody>
-      </p:sp>
-      <p:sp>
-        <p:nvSpPr>
-          <p:cNvPr id="7" name="Text 5"/>
-          <p:cNvSpPr/>
-          <p:nvPr/>
-        </p:nvSpPr>
-        <p:spPr>
-          <a:xfrm>
-            <a:off x="10698480" y="6355080"/>
+              <a:t>A modular agent operating system that runs a real software company - 100% locally</a:t>
+            </a:r>
+            <a:endParaRPr lang="en-US" sz="1700" dirty="0"/>
+          </a:p>
+        </p:txBody>
+      </p:sp>
+      <p:sp>
+        <p:nvSpPr>
+          <p:cNvPr id="7" name="Shape 5"/>
+          <p:cNvSpPr/>
+          <p:nvPr/>
+        </p:nvSpPr>
+        <p:spPr>
+          <a:xfrm>
+            <a:off x="822960" y="5440680"/>
+            <a:ext cx="4114800" cy="0"/>
+          </a:xfrm>
+          <a:prstGeom prst="line">
+            <a:avLst/>
+          </a:prstGeom>
+          <a:noFill/>
+          <a:ln w="31750">
+            <a:solidFill>
+              <a:srgbClr val="3B82F6"/>
+            </a:solidFill>
+            <a:prstDash val="solid"/>
+          </a:ln>
+        </p:spPr>
+      </p:sp>
+      <p:sp>
+        <p:nvSpPr>
+          <p:cNvPr id="8" name="Text 6"/>
+          <p:cNvSpPr/>
+          <p:nvPr/>
+        </p:nvSpPr>
+        <p:spPr>
+          <a:xfrm>
+            <a:off x="822960" y="5596128"/>
+            <a:ext cx="10058400" cy="457200"/>
+          </a:xfrm>
+          <a:prstGeom prst="rect">
+            <a:avLst/>
+          </a:prstGeom>
+          <a:noFill/>
+          <a:ln/>
+        </p:spPr>
+        <p:txBody>
+          <a:bodyPr wrap="square" rtlCol="0" anchor="ctr"/>
+          <a:lstStyle/>
+          <a:p>
+            <a:pPr indent="0" marL="0">
+              <a:buNone/>
+            </a:pPr>
+            <a:r>
+              <a:rPr lang="en-US" sz="1250" dirty="0">
+                <a:solidFill>
+                  <a:srgbClr val="64748B"/>
+                </a:solidFill>
+                <a:latin typeface="Segoe UI" pitchFamily="34" charset="0"/>
+                <a:ea typeface="Segoe UI" pitchFamily="34" charset="-122"/>
+                <a:cs typeface="Segoe UI" pitchFamily="34" charset="-120"/>
+              </a:rPr>
+              <a:t>Rezalian Vatiady · Zalin Labs · 2026</a:t>
+            </a:r>
+            <a:endParaRPr lang="en-US" sz="1250" dirty="0"/>
+          </a:p>
+        </p:txBody>
+      </p:sp>
+      <p:sp>
+        <p:nvSpPr>
+          <p:cNvPr id="9" name="Text 7"/>
+          <p:cNvSpPr/>
+          <p:nvPr/>
+        </p:nvSpPr>
+        <p:spPr>
+          <a:xfrm>
+            <a:off x="10698480" y="6382512"/>
             <a:ext cx="1188720" cy="365760"/>
           </a:xfrm>
           <a:prstGeom prst="rect">
@@ -1688,7 +3279,1955 @@
                 <a:ea typeface="Consolas" pitchFamily="34" charset="-122"/>
                 <a:cs typeface="Consolas" pitchFamily="34" charset="-120"/>
               </a:rPr>
-              <a:t>1 / 8</a:t>
+              <a:t>1 / 14</a:t>
+            </a:r>
+            <a:endParaRPr lang="en-US" sz="1000" dirty="0"/>
+          </a:p>
+        </p:txBody>
+      </p:sp>
+    </p:spTree>
+  </p:cSld>
+  <p:clrMapOvr>
+    <a:masterClrMapping/>
+  </p:clrMapOvr>
+</p:sld>
+</file>
+
+<file path=ppt/slides/slide10.xml><?xml version="1.0" encoding="utf-8"?>
+<p:sld xmlns:a="http://schemas.openxmlformats.org/drawingml/2006/main" xmlns:r="http://schemas.openxmlformats.org/officeDocument/2006/relationships" xmlns:p="http://schemas.openxmlformats.org/presentationml/2006/main">
+  <p:cSld name="Slide 10">
+    <p:bg>
+      <p:bgPr>
+        <a:solidFill>
+          <a:srgbClr val="0A0C12"/>
+        </a:solidFill>
+      </p:bgPr>
+    </p:bg>
+    <p:spTree>
+      <p:nvGrpSpPr>
+        <p:cNvPr id="1" name=""/>
+        <p:cNvGrpSpPr/>
+        <p:nvPr/>
+      </p:nvGrpSpPr>
+      <p:grpSpPr>
+        <a:xfrm>
+          <a:off x="0" y="0"/>
+          <a:ext cx="0" cy="0"/>
+          <a:chOff x="0" y="0"/>
+          <a:chExt cx="0" cy="0"/>
+        </a:xfrm>
+      </p:grpSpPr>
+      <p:sp>
+        <p:nvSpPr>
+          <p:cNvPr id="2" name="Shape 0"/>
+          <p:cNvSpPr/>
+          <p:nvPr/>
+        </p:nvSpPr>
+        <p:spPr>
+          <a:xfrm>
+            <a:off x="0" y="0"/>
+            <a:ext cx="7680960" cy="64008"/>
+          </a:xfrm>
+          <a:prstGeom prst="rect">
+            <a:avLst/>
+          </a:prstGeom>
+          <a:solidFill>
+            <a:srgbClr val="3B82F6"/>
+          </a:solidFill>
+          <a:ln/>
+        </p:spPr>
+      </p:sp>
+      <p:sp>
+        <p:nvSpPr>
+          <p:cNvPr id="3" name="Shape 1"/>
+          <p:cNvSpPr/>
+          <p:nvPr/>
+        </p:nvSpPr>
+        <p:spPr>
+          <a:xfrm>
+            <a:off x="7680960" y="0"/>
+            <a:ext cx="4510735" cy="64008"/>
+          </a:xfrm>
+          <a:prstGeom prst="rect">
+            <a:avLst/>
+          </a:prstGeom>
+          <a:solidFill>
+            <a:srgbClr val="06B6D4"/>
+          </a:solidFill>
+          <a:ln/>
+        </p:spPr>
+      </p:sp>
+      <p:sp>
+        <p:nvSpPr>
+          <p:cNvPr id="4" name="Text 2"/>
+          <p:cNvSpPr/>
+          <p:nvPr/>
+        </p:nvSpPr>
+        <p:spPr>
+          <a:xfrm>
+            <a:off x="822960" y="502920"/>
+            <a:ext cx="10515600" cy="365760"/>
+          </a:xfrm>
+          <a:prstGeom prst="rect">
+            <a:avLst/>
+          </a:prstGeom>
+          <a:noFill/>
+          <a:ln/>
+        </p:spPr>
+        <p:txBody>
+          <a:bodyPr wrap="square" rtlCol="0" anchor="ctr"/>
+          <a:lstStyle/>
+          <a:p>
+            <a:pPr indent="0" marL="0">
+              <a:buNone/>
+            </a:pPr>
+            <a:r>
+              <a:rPr lang="en-US" sz="1200" spc="300" kern="0" dirty="0">
+                <a:solidFill>
+                  <a:srgbClr val="06B6D4"/>
+                </a:solidFill>
+                <a:latin typeface="Consolas" pitchFamily="34" charset="0"/>
+                <a:ea typeface="Consolas" pitchFamily="34" charset="-122"/>
+                <a:cs typeface="Consolas" pitchFamily="34" charset="-120"/>
+              </a:rPr>
+              <a:t>THE FRONT DOOR</a:t>
+            </a:r>
+            <a:endParaRPr lang="en-US" sz="1200" dirty="0"/>
+          </a:p>
+        </p:txBody>
+      </p:sp>
+      <p:sp>
+        <p:nvSpPr>
+          <p:cNvPr id="5" name="Text 3"/>
+          <p:cNvSpPr/>
+          <p:nvPr/>
+        </p:nvSpPr>
+        <p:spPr>
+          <a:xfrm>
+            <a:off x="822960" y="914400"/>
+            <a:ext cx="10561320" cy="868680"/>
+          </a:xfrm>
+          <a:prstGeom prst="rect">
+            <a:avLst/>
+          </a:prstGeom>
+          <a:noFill/>
+          <a:ln/>
+        </p:spPr>
+        <p:txBody>
+          <a:bodyPr wrap="square" rtlCol="0" anchor="ctr"/>
+          <a:lstStyle/>
+          <a:p>
+            <a:pPr indent="0" marL="0">
+              <a:buNone/>
+            </a:pPr>
+            <a:r>
+              <a:rPr lang="en-US" sz="2700" b="1" dirty="0">
+                <a:solidFill>
+                  <a:srgbClr val="FFFFFF"/>
+                </a:solidFill>
+                <a:latin typeface="Segoe UI" pitchFamily="34" charset="0"/>
+                <a:ea typeface="Segoe UI" pitchFamily="34" charset="-122"/>
+                <a:cs typeface="Segoe UI" pitchFamily="34" charset="-120"/>
+              </a:rPr>
+              <a:t>Routing accuracy is a number, read after every change</a:t>
+            </a:r>
+            <a:endParaRPr lang="en-US" sz="2700" dirty="0"/>
+          </a:p>
+        </p:txBody>
+      </p:sp>
+      <p:graphicFrame>
+        <p:nvGraphicFramePr>
+          <p:cNvPr id="6" name="Chart 0" descr=""/>
+          <p:cNvGraphicFramePr/>
+          <p:nvPr/>
+        </p:nvGraphicFramePr>
+        <p:xfrm>
+          <a:off x="822960" y="1874520"/>
+          <a:ext cx="10515600" cy="3337560"/>
+        </p:xfrm>
+        <a:graphic xmlns:a="http://schemas.openxmlformats.org/drawingml/2006/main">
+          <a:graphicData uri="http://schemas.openxmlformats.org/drawingml/2006/chart">
+            <c:chart xmlns:c="http://schemas.openxmlformats.org/drawingml/2006/chart" r:id="rId1"/>
+          </a:graphicData>
+        </a:graphic>
+      </p:graphicFrame>
+      <p:sp>
+        <p:nvSpPr>
+          <p:cNvPr id="7" name="Shape 4"/>
+          <p:cNvSpPr/>
+          <p:nvPr/>
+        </p:nvSpPr>
+        <p:spPr>
+          <a:xfrm>
+            <a:off x="822960" y="5413248"/>
+            <a:ext cx="10515600" cy="0"/>
+          </a:xfrm>
+          <a:prstGeom prst="line">
+            <a:avLst/>
+          </a:prstGeom>
+          <a:noFill/>
+          <a:ln w="12700">
+            <a:solidFill>
+              <a:srgbClr val="1E2D45"/>
+            </a:solidFill>
+            <a:prstDash val="solid"/>
+          </a:ln>
+        </p:spPr>
+      </p:sp>
+      <p:sp>
+        <p:nvSpPr>
+          <p:cNvPr id="8" name="Text 5"/>
+          <p:cNvSpPr/>
+          <p:nvPr/>
+        </p:nvSpPr>
+        <p:spPr>
+          <a:xfrm>
+            <a:off x="822960" y="5504688"/>
+            <a:ext cx="10424160" cy="411480"/>
+          </a:xfrm>
+          <a:prstGeom prst="rect">
+            <a:avLst/>
+          </a:prstGeom>
+          <a:noFill/>
+          <a:ln/>
+        </p:spPr>
+        <p:txBody>
+          <a:bodyPr wrap="square" rtlCol="0" anchor="ctr"/>
+          <a:lstStyle/>
+          <a:p>
+            <a:pPr indent="0" marL="0">
+              <a:buNone/>
+            </a:pPr>
+            <a:r>
+              <a:rPr lang="en-US" sz="1300" i="1" dirty="0">
+                <a:solidFill>
+                  <a:srgbClr val="06B6D4"/>
+                </a:solidFill>
+                <a:latin typeface="Segoe UI" pitchFamily="34" charset="0"/>
+                <a:ea typeface="Segoe UI" pitchFamily="34" charset="-122"/>
+                <a:cs typeface="Segoe UI" pitchFamily="34" charset="-120"/>
+              </a:rPr>
+              <a:t>→  Fewer categories with sharper edges took a small local model to 100% on 30 real queries.</a:t>
+            </a:r>
+            <a:endParaRPr lang="en-US" sz="1300" dirty="0"/>
+          </a:p>
+        </p:txBody>
+      </p:sp>
+      <p:sp>
+        <p:nvSpPr>
+          <p:cNvPr id="9" name="Shape 6"/>
+          <p:cNvSpPr/>
+          <p:nvPr/>
+        </p:nvSpPr>
+        <p:spPr>
+          <a:xfrm>
+            <a:off x="822960" y="5961888"/>
+            <a:ext cx="10515600" cy="0"/>
+          </a:xfrm>
+          <a:prstGeom prst="line">
+            <a:avLst/>
+          </a:prstGeom>
+          <a:noFill/>
+          <a:ln w="12700">
+            <a:solidFill>
+              <a:srgbClr val="1E2D45"/>
+            </a:solidFill>
+            <a:prstDash val="solid"/>
+          </a:ln>
+        </p:spPr>
+      </p:sp>
+      <p:sp>
+        <p:nvSpPr>
+          <p:cNvPr id="10" name="Text 7"/>
+          <p:cNvSpPr/>
+          <p:nvPr/>
+        </p:nvSpPr>
+        <p:spPr>
+          <a:xfrm>
+            <a:off x="822960" y="6053328"/>
+            <a:ext cx="9692640" cy="457200"/>
+          </a:xfrm>
+          <a:prstGeom prst="rect">
+            <a:avLst/>
+          </a:prstGeom>
+          <a:noFill/>
+          <a:ln/>
+        </p:spPr>
+        <p:txBody>
+          <a:bodyPr wrap="square" rtlCol="0" anchor="ctr"/>
+          <a:lstStyle/>
+          <a:p>
+            <a:pPr indent="0" marL="0">
+              <a:buNone/>
+            </a:pPr>
+            <a:r>
+              <a:rPr lang="en-US" sz="1150" dirty="0">
+                <a:solidFill>
+                  <a:srgbClr val="64748B"/>
+                </a:solidFill>
+                <a:latin typeface="Segoe UI" pitchFamily="34" charset="0"/>
+                <a:ea typeface="Segoe UI" pitchFamily="34" charset="-122"/>
+                <a:cs typeface="Segoe UI" pitchFamily="34" charset="-120"/>
+              </a:rPr>
+              <a:t>Production today: 51/52 automated checks passing; the single miss was a genuinely ambiguous query.</a:t>
+            </a:r>
+            <a:endParaRPr lang="en-US" sz="1150" dirty="0"/>
+          </a:p>
+        </p:txBody>
+      </p:sp>
+      <p:sp>
+        <p:nvSpPr>
+          <p:cNvPr id="11" name="Text 8"/>
+          <p:cNvSpPr/>
+          <p:nvPr/>
+        </p:nvSpPr>
+        <p:spPr>
+          <a:xfrm>
+            <a:off x="10698480" y="6382512"/>
+            <a:ext cx="1188720" cy="365760"/>
+          </a:xfrm>
+          <a:prstGeom prst="rect">
+            <a:avLst/>
+          </a:prstGeom>
+          <a:noFill/>
+          <a:ln/>
+        </p:spPr>
+        <p:txBody>
+          <a:bodyPr wrap="square" rtlCol="0" anchor="ctr"/>
+          <a:lstStyle/>
+          <a:p>
+            <a:pPr algn="r" indent="0" marL="0">
+              <a:buNone/>
+            </a:pPr>
+            <a:r>
+              <a:rPr lang="en-US" sz="1000" dirty="0">
+                <a:solidFill>
+                  <a:srgbClr val="64748B"/>
+                </a:solidFill>
+                <a:latin typeface="Consolas" pitchFamily="34" charset="0"/>
+                <a:ea typeface="Consolas" pitchFamily="34" charset="-122"/>
+                <a:cs typeface="Consolas" pitchFamily="34" charset="-120"/>
+              </a:rPr>
+              <a:t>10 / 14</a:t>
+            </a:r>
+            <a:endParaRPr lang="en-US" sz="1000" dirty="0"/>
+          </a:p>
+        </p:txBody>
+      </p:sp>
+    </p:spTree>
+  </p:cSld>
+  <p:clrMapOvr>
+    <a:masterClrMapping/>
+  </p:clrMapOvr>
+</p:sld>
+</file>
+
+<file path=ppt/slides/slide11.xml><?xml version="1.0" encoding="utf-8"?>
+<p:sld xmlns:a="http://schemas.openxmlformats.org/drawingml/2006/main" xmlns:r="http://schemas.openxmlformats.org/officeDocument/2006/relationships" xmlns:p="http://schemas.openxmlformats.org/presentationml/2006/main">
+  <p:cSld name="Slide 11">
+    <p:bg>
+      <p:bgPr>
+        <a:solidFill>
+          <a:srgbClr val="0A0C12"/>
+        </a:solidFill>
+      </p:bgPr>
+    </p:bg>
+    <p:spTree>
+      <p:nvGrpSpPr>
+        <p:cNvPr id="1" name=""/>
+        <p:cNvGrpSpPr/>
+        <p:nvPr/>
+      </p:nvGrpSpPr>
+      <p:grpSpPr>
+        <a:xfrm>
+          <a:off x="0" y="0"/>
+          <a:ext cx="0" cy="0"/>
+          <a:chOff x="0" y="0"/>
+          <a:chExt cx="0" cy="0"/>
+        </a:xfrm>
+      </p:grpSpPr>
+      <p:sp>
+        <p:nvSpPr>
+          <p:cNvPr id="2" name="Shape 0"/>
+          <p:cNvSpPr/>
+          <p:nvPr/>
+        </p:nvSpPr>
+        <p:spPr>
+          <a:xfrm>
+            <a:off x="0" y="0"/>
+            <a:ext cx="7680960" cy="64008"/>
+          </a:xfrm>
+          <a:prstGeom prst="rect">
+            <a:avLst/>
+          </a:prstGeom>
+          <a:solidFill>
+            <a:srgbClr val="3B82F6"/>
+          </a:solidFill>
+          <a:ln/>
+        </p:spPr>
+      </p:sp>
+      <p:sp>
+        <p:nvSpPr>
+          <p:cNvPr id="3" name="Shape 1"/>
+          <p:cNvSpPr/>
+          <p:nvPr/>
+        </p:nvSpPr>
+        <p:spPr>
+          <a:xfrm>
+            <a:off x="7680960" y="0"/>
+            <a:ext cx="4510735" cy="64008"/>
+          </a:xfrm>
+          <a:prstGeom prst="rect">
+            <a:avLst/>
+          </a:prstGeom>
+          <a:solidFill>
+            <a:srgbClr val="06B6D4"/>
+          </a:solidFill>
+          <a:ln/>
+        </p:spPr>
+      </p:sp>
+      <p:sp>
+        <p:nvSpPr>
+          <p:cNvPr id="4" name="Text 2"/>
+          <p:cNvSpPr/>
+          <p:nvPr/>
+        </p:nvSpPr>
+        <p:spPr>
+          <a:xfrm>
+            <a:off x="822960" y="502920"/>
+            <a:ext cx="10515600" cy="365760"/>
+          </a:xfrm>
+          <a:prstGeom prst="rect">
+            <a:avLst/>
+          </a:prstGeom>
+          <a:noFill/>
+          <a:ln/>
+        </p:spPr>
+        <p:txBody>
+          <a:bodyPr wrap="square" rtlCol="0" anchor="ctr"/>
+          <a:lstStyle/>
+          <a:p>
+            <a:pPr indent="0" marL="0">
+              <a:buNone/>
+            </a:pPr>
+            <a:r>
+              <a:rPr lang="en-US" sz="1200" spc="300" kern="0" dirty="0">
+                <a:solidFill>
+                  <a:srgbClr val="06B6D4"/>
+                </a:solidFill>
+                <a:latin typeface="Consolas" pitchFamily="34" charset="0"/>
+                <a:ea typeface="Consolas" pitchFamily="34" charset="-122"/>
+                <a:cs typeface="Consolas" pitchFamily="34" charset="-120"/>
+              </a:rPr>
+              <a:t>TRADE-OFFS</a:t>
+            </a:r>
+            <a:endParaRPr lang="en-US" sz="1200" dirty="0"/>
+          </a:p>
+        </p:txBody>
+      </p:sp>
+      <p:sp>
+        <p:nvSpPr>
+          <p:cNvPr id="5" name="Text 3"/>
+          <p:cNvSpPr/>
+          <p:nvPr/>
+        </p:nvSpPr>
+        <p:spPr>
+          <a:xfrm>
+            <a:off x="822960" y="914400"/>
+            <a:ext cx="10561320" cy="868680"/>
+          </a:xfrm>
+          <a:prstGeom prst="rect">
+            <a:avLst/>
+          </a:prstGeom>
+          <a:noFill/>
+          <a:ln/>
+        </p:spPr>
+        <p:txBody>
+          <a:bodyPr wrap="square" rtlCol="0" anchor="ctr"/>
+          <a:lstStyle/>
+          <a:p>
+            <a:pPr indent="0" marL="0">
+              <a:buNone/>
+            </a:pPr>
+            <a:r>
+              <a:rPr lang="en-US" sz="2700" b="1" dirty="0">
+                <a:solidFill>
+                  <a:srgbClr val="FFFFFF"/>
+                </a:solidFill>
+                <a:latin typeface="Segoe UI" pitchFamily="34" charset="0"/>
+                <a:ea typeface="Segoe UI" pitchFamily="34" charset="-122"/>
+                <a:cs typeface="Segoe UI" pitchFamily="34" charset="-120"/>
+              </a:rPr>
+              <a:t>Local-first is a decision, not a religion</a:t>
+            </a:r>
+            <a:endParaRPr lang="en-US" sz="2700" dirty="0"/>
+          </a:p>
+        </p:txBody>
+      </p:sp>
+      <p:sp>
+        <p:nvSpPr>
+          <p:cNvPr id="6" name="Shape 4"/>
+          <p:cNvSpPr/>
+          <p:nvPr/>
+        </p:nvSpPr>
+        <p:spPr>
+          <a:xfrm>
+            <a:off x="822960" y="2011680"/>
+            <a:ext cx="5074920" cy="3611880"/>
+          </a:xfrm>
+          <a:prstGeom prst="roundRect">
+            <a:avLst>
+              <a:gd name="adj" fmla="val 2025"/>
+            </a:avLst>
+          </a:prstGeom>
+          <a:solidFill>
+            <a:srgbClr val="111A2E"/>
+          </a:solidFill>
+          <a:ln w="12700">
+            <a:solidFill>
+              <a:srgbClr val="1E2D45"/>
+            </a:solidFill>
+            <a:prstDash val="solid"/>
+          </a:ln>
+        </p:spPr>
+      </p:sp>
+      <p:sp>
+        <p:nvSpPr>
+          <p:cNvPr id="7" name="Text 5"/>
+          <p:cNvSpPr/>
+          <p:nvPr/>
+        </p:nvSpPr>
+        <p:spPr>
+          <a:xfrm>
+            <a:off x="1097280" y="2240280"/>
+            <a:ext cx="4526280" cy="502920"/>
+          </a:xfrm>
+          <a:prstGeom prst="rect">
+            <a:avLst/>
+          </a:prstGeom>
+          <a:noFill/>
+          <a:ln/>
+        </p:spPr>
+        <p:txBody>
+          <a:bodyPr wrap="square" rtlCol="0" anchor="ctr"/>
+          <a:lstStyle/>
+          <a:p>
+            <a:pPr indent="0" marL="0">
+              <a:buNone/>
+            </a:pPr>
+            <a:r>
+              <a:rPr lang="en-US" sz="1650" b="1" dirty="0">
+                <a:solidFill>
+                  <a:srgbClr val="06B6D4"/>
+                </a:solidFill>
+                <a:latin typeface="Segoe UI" pitchFamily="34" charset="0"/>
+                <a:ea typeface="Segoe UI" pitchFamily="34" charset="-122"/>
+                <a:cs typeface="Segoe UI" pitchFamily="34" charset="-120"/>
+              </a:rPr>
+              <a:t>What local-first gives up</a:t>
+            </a:r>
+            <a:endParaRPr lang="en-US" sz="1650" dirty="0"/>
+          </a:p>
+        </p:txBody>
+      </p:sp>
+      <p:sp>
+        <p:nvSpPr>
+          <p:cNvPr id="8" name="Text 6"/>
+          <p:cNvSpPr/>
+          <p:nvPr/>
+        </p:nvSpPr>
+        <p:spPr>
+          <a:xfrm>
+            <a:off x="1097280" y="2834640"/>
+            <a:ext cx="4553712" cy="2651760"/>
+          </a:xfrm>
+          <a:prstGeom prst="rect">
+            <a:avLst/>
+          </a:prstGeom>
+          <a:noFill/>
+          <a:ln/>
+        </p:spPr>
+        <p:txBody>
+          <a:bodyPr wrap="square" rtlCol="0" anchor="t"/>
+          <a:lstStyle/>
+          <a:p>
+            <a:pPr marL="342900" indent="-342900">
+              <a:lnSpc>
+                <a:spcPct val="112000"/>
+              </a:lnSpc>
+              <a:spcAft>
+                <a:spcPts val="900"/>
+              </a:spcAft>
+              <a:buSzPct val="100000"/>
+              <a:buChar char="▸"/>
+            </a:pPr>
+            <a:r>
+              <a:rPr lang="en-US" sz="1280" dirty="0">
+                <a:solidFill>
+                  <a:srgbClr val="CBD5E1"/>
+                </a:solidFill>
+                <a:latin typeface="Segoe UI" pitchFamily="34" charset="0"/>
+                <a:ea typeface="Segoe UI" pitchFamily="34" charset="-122"/>
+                <a:cs typeface="Segoe UI" pitchFamily="34" charset="-120"/>
+              </a:rPr>
+              <a:t>The frontier-model ceiling on the hardest reasoning tasks</a:t>
+            </a:r>
+            <a:endParaRPr lang="en-US" sz="1280" dirty="0"/>
+          </a:p>
+          <a:p>
+            <a:pPr marL="342900" indent="-342900">
+              <a:lnSpc>
+                <a:spcPct val="112000"/>
+              </a:lnSpc>
+              <a:spcAft>
+                <a:spcPts val="900"/>
+              </a:spcAft>
+              <a:buSzPct val="100000"/>
+              <a:buChar char="▸"/>
+            </a:pPr>
+            <a:r>
+              <a:rPr lang="en-US" sz="1280" dirty="0">
+                <a:solidFill>
+                  <a:srgbClr val="CBD5E1"/>
+                </a:solidFill>
+                <a:latin typeface="Segoe UI" pitchFamily="34" charset="0"/>
+                <a:ea typeface="Segoe UI" pitchFamily="34" charset="-122"/>
+                <a:cs typeface="Segoe UI" pitchFamily="34" charset="-120"/>
+              </a:rPr>
+              <a:t>Hardware planning becomes your responsibility</a:t>
+            </a:r>
+            <a:endParaRPr lang="en-US" sz="1280" dirty="0"/>
+          </a:p>
+          <a:p>
+            <a:pPr marL="342900" indent="-342900">
+              <a:lnSpc>
+                <a:spcPct val="112000"/>
+              </a:lnSpc>
+              <a:spcAft>
+                <a:spcPts val="900"/>
+              </a:spcAft>
+              <a:buSzPct val="100000"/>
+              <a:buChar char="▸"/>
+            </a:pPr>
+            <a:r>
+              <a:rPr lang="en-US" sz="1280" dirty="0">
+                <a:solidFill>
+                  <a:srgbClr val="CBD5E1"/>
+                </a:solidFill>
+                <a:latin typeface="Segoe UI" pitchFamily="34" charset="0"/>
+                <a:ea typeface="Segoe UI" pitchFamily="34" charset="-122"/>
+                <a:cs typeface="Segoe UI" pitchFamily="34" charset="-120"/>
+              </a:rPr>
+              <a:t>Vendor conveniences you now build yourself</a:t>
+            </a:r>
+            <a:endParaRPr lang="en-US" sz="1280" dirty="0"/>
+          </a:p>
+        </p:txBody>
+      </p:sp>
+      <p:sp>
+        <p:nvSpPr>
+          <p:cNvPr id="9" name="Shape 7"/>
+          <p:cNvSpPr/>
+          <p:nvPr/>
+        </p:nvSpPr>
+        <p:spPr>
+          <a:xfrm>
+            <a:off x="6291072" y="2011680"/>
+            <a:ext cx="5074920" cy="3611880"/>
+          </a:xfrm>
+          <a:prstGeom prst="roundRect">
+            <a:avLst>
+              <a:gd name="adj" fmla="val 2025"/>
+            </a:avLst>
+          </a:prstGeom>
+          <a:solidFill>
+            <a:srgbClr val="111A2E"/>
+          </a:solidFill>
+          <a:ln w="12700">
+            <a:solidFill>
+              <a:srgbClr val="1E2D45"/>
+            </a:solidFill>
+            <a:prstDash val="solid"/>
+          </a:ln>
+        </p:spPr>
+      </p:sp>
+      <p:sp>
+        <p:nvSpPr>
+          <p:cNvPr id="10" name="Text 8"/>
+          <p:cNvSpPr/>
+          <p:nvPr/>
+        </p:nvSpPr>
+        <p:spPr>
+          <a:xfrm>
+            <a:off x="6565392" y="2240280"/>
+            <a:ext cx="4526280" cy="502920"/>
+          </a:xfrm>
+          <a:prstGeom prst="rect">
+            <a:avLst/>
+          </a:prstGeom>
+          <a:noFill/>
+          <a:ln/>
+        </p:spPr>
+        <p:txBody>
+          <a:bodyPr wrap="square" rtlCol="0" anchor="ctr"/>
+          <a:lstStyle/>
+          <a:p>
+            <a:pPr indent="0" marL="0">
+              <a:buNone/>
+            </a:pPr>
+            <a:r>
+              <a:rPr lang="en-US" sz="1650" b="1" dirty="0">
+                <a:solidFill>
+                  <a:srgbClr val="93C5FD"/>
+                </a:solidFill>
+                <a:latin typeface="Segoe UI" pitchFamily="34" charset="0"/>
+                <a:ea typeface="Segoe UI" pitchFamily="34" charset="-122"/>
+                <a:cs typeface="Segoe UI" pitchFamily="34" charset="-120"/>
+              </a:rPr>
+              <a:t>What it buys back</a:t>
+            </a:r>
+            <a:endParaRPr lang="en-US" sz="1650" dirty="0"/>
+          </a:p>
+        </p:txBody>
+      </p:sp>
+      <p:sp>
+        <p:nvSpPr>
+          <p:cNvPr id="11" name="Text 9"/>
+          <p:cNvSpPr/>
+          <p:nvPr/>
+        </p:nvSpPr>
+        <p:spPr>
+          <a:xfrm>
+            <a:off x="6565392" y="2834640"/>
+            <a:ext cx="4553712" cy="2651760"/>
+          </a:xfrm>
+          <a:prstGeom prst="rect">
+            <a:avLst/>
+          </a:prstGeom>
+          <a:noFill/>
+          <a:ln/>
+        </p:spPr>
+        <p:txBody>
+          <a:bodyPr wrap="square" rtlCol="0" anchor="t"/>
+          <a:lstStyle/>
+          <a:p>
+            <a:pPr marL="342900" indent="-342900">
+              <a:lnSpc>
+                <a:spcPct val="112000"/>
+              </a:lnSpc>
+              <a:spcAft>
+                <a:spcPts val="900"/>
+              </a:spcAft>
+              <a:buSzPct val="100000"/>
+              <a:buChar char="▸"/>
+            </a:pPr>
+            <a:r>
+              <a:rPr lang="en-US" sz="1280" dirty="0">
+                <a:solidFill>
+                  <a:srgbClr val="CBD5E1"/>
+                </a:solidFill>
+                <a:latin typeface="Segoe UI" pitchFamily="34" charset="0"/>
+                <a:ea typeface="Segoe UI" pitchFamily="34" charset="-122"/>
+                <a:cs typeface="Segoe UI" pitchFamily="34" charset="-120"/>
+              </a:rPr>
+              <a:t>Flat cost: iteration is free, so agents re-check and document freely</a:t>
+            </a:r>
+            <a:endParaRPr lang="en-US" sz="1280" dirty="0"/>
+          </a:p>
+          <a:p>
+            <a:pPr marL="342900" indent="-342900">
+              <a:lnSpc>
+                <a:spcPct val="112000"/>
+              </a:lnSpc>
+              <a:spcAft>
+                <a:spcPts val="900"/>
+              </a:spcAft>
+              <a:buSzPct val="100000"/>
+              <a:buChar char="▸"/>
+            </a:pPr>
+            <a:r>
+              <a:rPr lang="en-US" sz="1280" dirty="0">
+                <a:solidFill>
+                  <a:srgbClr val="CBD5E1"/>
+                </a:solidFill>
+                <a:latin typeface="Segoe UI" pitchFamily="34" charset="0"/>
+                <a:ea typeface="Segoe UI" pitchFamily="34" charset="-122"/>
+                <a:cs typeface="Segoe UI" pitchFamily="34" charset="-120"/>
+              </a:rPr>
+              <a:t>Privacy: business data never leaves the machine</a:t>
+            </a:r>
+            <a:endParaRPr lang="en-US" sz="1280" dirty="0"/>
+          </a:p>
+          <a:p>
+            <a:pPr marL="342900" indent="-342900">
+              <a:lnSpc>
+                <a:spcPct val="112000"/>
+              </a:lnSpc>
+              <a:spcAft>
+                <a:spcPts val="900"/>
+              </a:spcAft>
+              <a:buSzPct val="100000"/>
+              <a:buChar char="▸"/>
+            </a:pPr>
+            <a:r>
+              <a:rPr lang="en-US" sz="1280" dirty="0">
+                <a:solidFill>
+                  <a:srgbClr val="CBD5E1"/>
+                </a:solidFill>
+                <a:latin typeface="Segoe UI" pitchFamily="34" charset="0"/>
+                <a:ea typeface="Segoe UI" pitchFamily="34" charset="-122"/>
+                <a:cs typeface="Segoe UI" pitchFamily="34" charset="-120"/>
+              </a:rPr>
+              <a:t>Reliability: no rate limits and no 2 a.m. deprecations</a:t>
+            </a:r>
+            <a:endParaRPr lang="en-US" sz="1280" dirty="0"/>
+          </a:p>
+        </p:txBody>
+      </p:sp>
+      <p:sp>
+        <p:nvSpPr>
+          <p:cNvPr id="12" name="Shape 10"/>
+          <p:cNvSpPr/>
+          <p:nvPr/>
+        </p:nvSpPr>
+        <p:spPr>
+          <a:xfrm>
+            <a:off x="822960" y="5961888"/>
+            <a:ext cx="10515600" cy="0"/>
+          </a:xfrm>
+          <a:prstGeom prst="line">
+            <a:avLst/>
+          </a:prstGeom>
+          <a:noFill/>
+          <a:ln w="12700">
+            <a:solidFill>
+              <a:srgbClr val="1E2D45"/>
+            </a:solidFill>
+            <a:prstDash val="solid"/>
+          </a:ln>
+        </p:spPr>
+      </p:sp>
+      <p:sp>
+        <p:nvSpPr>
+          <p:cNvPr id="13" name="Text 11"/>
+          <p:cNvSpPr/>
+          <p:nvPr/>
+        </p:nvSpPr>
+        <p:spPr>
+          <a:xfrm>
+            <a:off x="822960" y="6053328"/>
+            <a:ext cx="9692640" cy="457200"/>
+          </a:xfrm>
+          <a:prstGeom prst="rect">
+            <a:avLst/>
+          </a:prstGeom>
+          <a:noFill/>
+          <a:ln/>
+        </p:spPr>
+        <p:txBody>
+          <a:bodyPr wrap="square" rtlCol="0" anchor="ctr"/>
+          <a:lstStyle/>
+          <a:p>
+            <a:pPr indent="0" marL="0">
+              <a:buNone/>
+            </a:pPr>
+            <a:r>
+              <a:rPr lang="en-US" sz="1150" dirty="0">
+                <a:solidFill>
+                  <a:srgbClr val="64748B"/>
+                </a:solidFill>
+                <a:latin typeface="Segoe UI" pitchFamily="34" charset="0"/>
+                <a:ea typeface="Segoe UI" pitchFamily="34" charset="-122"/>
+                <a:cs typeface="Segoe UI" pitchFamily="34" charset="-120"/>
+              </a:rPr>
+              <a:t>For an always-on operational workforce, the trade is not close.</a:t>
+            </a:r>
+            <a:endParaRPr lang="en-US" sz="1150" dirty="0"/>
+          </a:p>
+        </p:txBody>
+      </p:sp>
+      <p:sp>
+        <p:nvSpPr>
+          <p:cNvPr id="14" name="Text 12"/>
+          <p:cNvSpPr/>
+          <p:nvPr/>
+        </p:nvSpPr>
+        <p:spPr>
+          <a:xfrm>
+            <a:off x="10698480" y="6382512"/>
+            <a:ext cx="1188720" cy="365760"/>
+          </a:xfrm>
+          <a:prstGeom prst="rect">
+            <a:avLst/>
+          </a:prstGeom>
+          <a:noFill/>
+          <a:ln/>
+        </p:spPr>
+        <p:txBody>
+          <a:bodyPr wrap="square" rtlCol="0" anchor="ctr"/>
+          <a:lstStyle/>
+          <a:p>
+            <a:pPr algn="r" indent="0" marL="0">
+              <a:buNone/>
+            </a:pPr>
+            <a:r>
+              <a:rPr lang="en-US" sz="1000" dirty="0">
+                <a:solidFill>
+                  <a:srgbClr val="64748B"/>
+                </a:solidFill>
+                <a:latin typeface="Consolas" pitchFamily="34" charset="0"/>
+                <a:ea typeface="Consolas" pitchFamily="34" charset="-122"/>
+                <a:cs typeface="Consolas" pitchFamily="34" charset="-120"/>
+              </a:rPr>
+              <a:t>11 / 14</a:t>
+            </a:r>
+            <a:endParaRPr lang="en-US" sz="1000" dirty="0"/>
+          </a:p>
+        </p:txBody>
+      </p:sp>
+    </p:spTree>
+  </p:cSld>
+  <p:clrMapOvr>
+    <a:masterClrMapping/>
+  </p:clrMapOvr>
+</p:sld>
+</file>
+
+<file path=ppt/slides/slide12.xml><?xml version="1.0" encoding="utf-8"?>
+<p:sld xmlns:a="http://schemas.openxmlformats.org/drawingml/2006/main" xmlns:r="http://schemas.openxmlformats.org/officeDocument/2006/relationships" xmlns:p="http://schemas.openxmlformats.org/presentationml/2006/main">
+  <p:cSld name="Slide 12">
+    <p:bg>
+      <p:bgPr>
+        <a:solidFill>
+          <a:srgbClr val="0A0C12"/>
+        </a:solidFill>
+      </p:bgPr>
+    </p:bg>
+    <p:spTree>
+      <p:nvGrpSpPr>
+        <p:cNvPr id="1" name=""/>
+        <p:cNvGrpSpPr/>
+        <p:nvPr/>
+      </p:nvGrpSpPr>
+      <p:grpSpPr>
+        <a:xfrm>
+          <a:off x="0" y="0"/>
+          <a:ext cx="0" cy="0"/>
+          <a:chOff x="0" y="0"/>
+          <a:chExt cx="0" cy="0"/>
+        </a:xfrm>
+      </p:grpSpPr>
+      <p:sp>
+        <p:nvSpPr>
+          <p:cNvPr id="2" name="Shape 0"/>
+          <p:cNvSpPr/>
+          <p:nvPr/>
+        </p:nvSpPr>
+        <p:spPr>
+          <a:xfrm>
+            <a:off x="0" y="0"/>
+            <a:ext cx="7680960" cy="64008"/>
+          </a:xfrm>
+          <a:prstGeom prst="rect">
+            <a:avLst/>
+          </a:prstGeom>
+          <a:solidFill>
+            <a:srgbClr val="3B82F6"/>
+          </a:solidFill>
+          <a:ln/>
+        </p:spPr>
+      </p:sp>
+      <p:sp>
+        <p:nvSpPr>
+          <p:cNvPr id="3" name="Shape 1"/>
+          <p:cNvSpPr/>
+          <p:nvPr/>
+        </p:nvSpPr>
+        <p:spPr>
+          <a:xfrm>
+            <a:off x="7680960" y="0"/>
+            <a:ext cx="4510735" cy="64008"/>
+          </a:xfrm>
+          <a:prstGeom prst="rect">
+            <a:avLst/>
+          </a:prstGeom>
+          <a:solidFill>
+            <a:srgbClr val="06B6D4"/>
+          </a:solidFill>
+          <a:ln/>
+        </p:spPr>
+      </p:sp>
+      <p:sp>
+        <p:nvSpPr>
+          <p:cNvPr id="4" name="Text 2"/>
+          <p:cNvSpPr/>
+          <p:nvPr/>
+        </p:nvSpPr>
+        <p:spPr>
+          <a:xfrm>
+            <a:off x="822960" y="502920"/>
+            <a:ext cx="10515600" cy="365760"/>
+          </a:xfrm>
+          <a:prstGeom prst="rect">
+            <a:avLst/>
+          </a:prstGeom>
+          <a:noFill/>
+          <a:ln/>
+        </p:spPr>
+        <p:txBody>
+          <a:bodyPr wrap="square" rtlCol="0" anchor="ctr"/>
+          <a:lstStyle/>
+          <a:p>
+            <a:pPr indent="0" marL="0">
+              <a:buNone/>
+            </a:pPr>
+            <a:r>
+              <a:rPr lang="en-US" sz="1200" spc="300" kern="0" dirty="0">
+                <a:solidFill>
+                  <a:srgbClr val="06B6D4"/>
+                </a:solidFill>
+                <a:latin typeface="Consolas" pitchFamily="34" charset="0"/>
+                <a:ea typeface="Consolas" pitchFamily="34" charset="-122"/>
+                <a:cs typeface="Consolas" pitchFamily="34" charset="-120"/>
+              </a:rPr>
+              <a:t>THE WORKFORCE</a:t>
+            </a:r>
+            <a:endParaRPr lang="en-US" sz="1200" dirty="0"/>
+          </a:p>
+        </p:txBody>
+      </p:sp>
+      <p:sp>
+        <p:nvSpPr>
+          <p:cNvPr id="5" name="Text 3"/>
+          <p:cNvSpPr/>
+          <p:nvPr/>
+        </p:nvSpPr>
+        <p:spPr>
+          <a:xfrm>
+            <a:off x="822960" y="914400"/>
+            <a:ext cx="10561320" cy="868680"/>
+          </a:xfrm>
+          <a:prstGeom prst="rect">
+            <a:avLst/>
+          </a:prstGeom>
+          <a:noFill/>
+          <a:ln/>
+        </p:spPr>
+        <p:txBody>
+          <a:bodyPr wrap="square" rtlCol="0" anchor="ctr"/>
+          <a:lstStyle/>
+          <a:p>
+            <a:pPr indent="0" marL="0">
+              <a:buNone/>
+            </a:pPr>
+            <a:r>
+              <a:rPr lang="en-US" sz="2700" b="1" dirty="0">
+                <a:solidFill>
+                  <a:srgbClr val="FFFFFF"/>
+                </a:solidFill>
+                <a:latin typeface="Segoe UI" pitchFamily="34" charset="0"/>
+                <a:ea typeface="Segoe UI" pitchFamily="34" charset="-122"/>
+                <a:cs typeface="Segoe UI" pitchFamily="34" charset="-120"/>
+              </a:rPr>
+              <a:t>Nine scoped agents beat one generalist</a:t>
+            </a:r>
+            <a:endParaRPr lang="en-US" sz="2700" dirty="0"/>
+          </a:p>
+        </p:txBody>
+      </p:sp>
+      <p:sp>
+        <p:nvSpPr>
+          <p:cNvPr id="6" name="Text 4"/>
+          <p:cNvSpPr/>
+          <p:nvPr/>
+        </p:nvSpPr>
+        <p:spPr>
+          <a:xfrm>
+            <a:off x="868680" y="2011680"/>
+            <a:ext cx="10424160" cy="3566160"/>
+          </a:xfrm>
+          <a:prstGeom prst="rect">
+            <a:avLst/>
+          </a:prstGeom>
+          <a:noFill/>
+          <a:ln/>
+        </p:spPr>
+        <p:txBody>
+          <a:bodyPr wrap="square" rtlCol="0" anchor="t"/>
+          <a:lstStyle/>
+          <a:p>
+            <a:pPr marL="342900" indent="-342900">
+              <a:lnSpc>
+                <a:spcPct val="112000"/>
+              </a:lnSpc>
+              <a:spcAft>
+                <a:spcPts val="900"/>
+              </a:spcAft>
+              <a:buSzPct val="100000"/>
+              <a:buChar char="▸"/>
+            </a:pPr>
+            <a:r>
+              <a:rPr lang="en-US" sz="1600" dirty="0">
+                <a:solidFill>
+                  <a:srgbClr val="CBD5E1"/>
+                </a:solidFill>
+                <a:latin typeface="Segoe UI" pitchFamily="34" charset="0"/>
+                <a:ea typeface="Segoe UI" pitchFamily="34" charset="-122"/>
+                <a:cs typeface="Segoe UI" pitchFamily="34" charset="-120"/>
+              </a:rPr>
+              <a:t>Engineering agents build and maintain apps end-to-end, from structured specs to shipped builds.</a:t>
+            </a:r>
+            <a:endParaRPr lang="en-US" sz="1600" dirty="0"/>
+          </a:p>
+          <a:p>
+            <a:pPr marL="342900" indent="-342900">
+              <a:lnSpc>
+                <a:spcPct val="112000"/>
+              </a:lnSpc>
+              <a:spcAft>
+                <a:spcPts val="900"/>
+              </a:spcAft>
+              <a:buSzPct val="100000"/>
+              <a:buChar char="▸"/>
+            </a:pPr>
+            <a:r>
+              <a:rPr lang="en-US" sz="1600" dirty="0">
+                <a:solidFill>
+                  <a:srgbClr val="CBD5E1"/>
+                </a:solidFill>
+                <a:latin typeface="Segoe UI" pitchFamily="34" charset="0"/>
+                <a:ea typeface="Segoe UI" pitchFamily="34" charset="-122"/>
+                <a:cs typeface="Segoe UI" pitchFamily="34" charset="-120"/>
+              </a:rPr>
+              <a:t>QA, PM, and Docs agents enforce the gate, track status, and make sure the company never forgets.</a:t>
+            </a:r>
+            <a:endParaRPr lang="en-US" sz="1600" dirty="0"/>
+          </a:p>
+          <a:p>
+            <a:pPr marL="342900" indent="-342900">
+              <a:lnSpc>
+                <a:spcPct val="112000"/>
+              </a:lnSpc>
+              <a:spcAft>
+                <a:spcPts val="900"/>
+              </a:spcAft>
+              <a:buSzPct val="100000"/>
+              <a:buChar char="▸"/>
+            </a:pPr>
+            <a:r>
+              <a:rPr lang="en-US" sz="1600" dirty="0">
+                <a:solidFill>
+                  <a:srgbClr val="CBD5E1"/>
+                </a:solidFill>
+                <a:latin typeface="Segoe UI" pitchFamily="34" charset="0"/>
+                <a:ea typeface="Segoe UI" pitchFamily="34" charset="-122"/>
+                <a:cs typeface="Segoe UI" pitchFamily="34" charset="-120"/>
+              </a:rPr>
+              <a:t>Specialists cover data, GIS, OSINT, and system watching, using public data with strict provenance.</a:t>
+            </a:r>
+            <a:endParaRPr lang="en-US" sz="1600" dirty="0"/>
+          </a:p>
+          <a:p>
+            <a:pPr marL="342900" indent="-342900">
+              <a:lnSpc>
+                <a:spcPct val="112000"/>
+              </a:lnSpc>
+              <a:spcAft>
+                <a:spcPts val="900"/>
+              </a:spcAft>
+              <a:buSzPct val="100000"/>
+              <a:buChar char="▸"/>
+            </a:pPr>
+            <a:r>
+              <a:rPr lang="en-US" sz="1600" dirty="0">
+                <a:solidFill>
+                  <a:srgbClr val="CBD5E1"/>
+                </a:solidFill>
+                <a:latin typeface="Segoe UI" pitchFamily="34" charset="0"/>
+                <a:ea typeface="Segoe UI" pitchFamily="34" charset="-122"/>
+                <a:cs typeface="Segoe UI" pitchFamily="34" charset="-120"/>
+              </a:rPr>
+              <a:t>Every agent has a scoped mandate, its own queue, and the same shared memory.</a:t>
+            </a:r>
+            <a:endParaRPr lang="en-US" sz="1600" dirty="0"/>
+          </a:p>
+        </p:txBody>
+      </p:sp>
+      <p:sp>
+        <p:nvSpPr>
+          <p:cNvPr id="7" name="Shape 5"/>
+          <p:cNvSpPr/>
+          <p:nvPr/>
+        </p:nvSpPr>
+        <p:spPr>
+          <a:xfrm>
+            <a:off x="822960" y="5961888"/>
+            <a:ext cx="10515600" cy="0"/>
+          </a:xfrm>
+          <a:prstGeom prst="line">
+            <a:avLst/>
+          </a:prstGeom>
+          <a:noFill/>
+          <a:ln w="12700">
+            <a:solidFill>
+              <a:srgbClr val="1E2D45"/>
+            </a:solidFill>
+            <a:prstDash val="solid"/>
+          </a:ln>
+        </p:spPr>
+      </p:sp>
+      <p:sp>
+        <p:nvSpPr>
+          <p:cNvPr id="8" name="Text 6"/>
+          <p:cNvSpPr/>
+          <p:nvPr/>
+        </p:nvSpPr>
+        <p:spPr>
+          <a:xfrm>
+            <a:off x="822960" y="6053328"/>
+            <a:ext cx="9692640" cy="457200"/>
+          </a:xfrm>
+          <a:prstGeom prst="rect">
+            <a:avLst/>
+          </a:prstGeom>
+          <a:noFill/>
+          <a:ln/>
+        </p:spPr>
+        <p:txBody>
+          <a:bodyPr wrap="square" rtlCol="0" anchor="ctr"/>
+          <a:lstStyle/>
+          <a:p>
+            <a:pPr indent="0" marL="0">
+              <a:buNone/>
+            </a:pPr>
+            <a:r>
+              <a:rPr lang="en-US" sz="1150" dirty="0">
+                <a:solidFill>
+                  <a:srgbClr val="64748B"/>
+                </a:solidFill>
+                <a:latin typeface="Segoe UI" pitchFamily="34" charset="0"/>
+                <a:ea typeface="Segoe UI" pitchFamily="34" charset="-122"/>
+                <a:cs typeface="Segoe UI" pitchFamily="34" charset="-120"/>
+              </a:rPr>
+              <a:t>A general chatbot can attempt anything; a scoped agent does one thing repeatably.</a:t>
+            </a:r>
+            <a:endParaRPr lang="en-US" sz="1150" dirty="0"/>
+          </a:p>
+        </p:txBody>
+      </p:sp>
+      <p:sp>
+        <p:nvSpPr>
+          <p:cNvPr id="9" name="Text 7"/>
+          <p:cNvSpPr/>
+          <p:nvPr/>
+        </p:nvSpPr>
+        <p:spPr>
+          <a:xfrm>
+            <a:off x="10698480" y="6382512"/>
+            <a:ext cx="1188720" cy="365760"/>
+          </a:xfrm>
+          <a:prstGeom prst="rect">
+            <a:avLst/>
+          </a:prstGeom>
+          <a:noFill/>
+          <a:ln/>
+        </p:spPr>
+        <p:txBody>
+          <a:bodyPr wrap="square" rtlCol="0" anchor="ctr"/>
+          <a:lstStyle/>
+          <a:p>
+            <a:pPr algn="r" indent="0" marL="0">
+              <a:buNone/>
+            </a:pPr>
+            <a:r>
+              <a:rPr lang="en-US" sz="1000" dirty="0">
+                <a:solidFill>
+                  <a:srgbClr val="64748B"/>
+                </a:solidFill>
+                <a:latin typeface="Consolas" pitchFamily="34" charset="0"/>
+                <a:ea typeface="Consolas" pitchFamily="34" charset="-122"/>
+                <a:cs typeface="Consolas" pitchFamily="34" charset="-120"/>
+              </a:rPr>
+              <a:t>12 / 14</a:t>
+            </a:r>
+            <a:endParaRPr lang="en-US" sz="1000" dirty="0"/>
+          </a:p>
+        </p:txBody>
+      </p:sp>
+    </p:spTree>
+  </p:cSld>
+  <p:clrMapOvr>
+    <a:masterClrMapping/>
+  </p:clrMapOvr>
+</p:sld>
+</file>
+
+<file path=ppt/slides/slide13.xml><?xml version="1.0" encoding="utf-8"?>
+<p:sld xmlns:a="http://schemas.openxmlformats.org/drawingml/2006/main" xmlns:r="http://schemas.openxmlformats.org/officeDocument/2006/relationships" xmlns:p="http://schemas.openxmlformats.org/presentationml/2006/main">
+  <p:cSld name="Slide 13">
+    <p:bg>
+      <p:bgPr>
+        <a:solidFill>
+          <a:srgbClr val="0A0C12"/>
+        </a:solidFill>
+      </p:bgPr>
+    </p:bg>
+    <p:spTree>
+      <p:nvGrpSpPr>
+        <p:cNvPr id="1" name=""/>
+        <p:cNvGrpSpPr/>
+        <p:nvPr/>
+      </p:nvGrpSpPr>
+      <p:grpSpPr>
+        <a:xfrm>
+          <a:off x="0" y="0"/>
+          <a:ext cx="0" cy="0"/>
+          <a:chOff x="0" y="0"/>
+          <a:chExt cx="0" cy="0"/>
+        </a:xfrm>
+      </p:grpSpPr>
+      <p:sp>
+        <p:nvSpPr>
+          <p:cNvPr id="2" name="Shape 0"/>
+          <p:cNvSpPr/>
+          <p:nvPr/>
+        </p:nvSpPr>
+        <p:spPr>
+          <a:xfrm>
+            <a:off x="0" y="0"/>
+            <a:ext cx="7680960" cy="64008"/>
+          </a:xfrm>
+          <a:prstGeom prst="rect">
+            <a:avLst/>
+          </a:prstGeom>
+          <a:solidFill>
+            <a:srgbClr val="3B82F6"/>
+          </a:solidFill>
+          <a:ln/>
+        </p:spPr>
+      </p:sp>
+      <p:sp>
+        <p:nvSpPr>
+          <p:cNvPr id="3" name="Shape 1"/>
+          <p:cNvSpPr/>
+          <p:nvPr/>
+        </p:nvSpPr>
+        <p:spPr>
+          <a:xfrm>
+            <a:off x="7680960" y="0"/>
+            <a:ext cx="4510735" cy="64008"/>
+          </a:xfrm>
+          <a:prstGeom prst="rect">
+            <a:avLst/>
+          </a:prstGeom>
+          <a:solidFill>
+            <a:srgbClr val="06B6D4"/>
+          </a:solidFill>
+          <a:ln/>
+        </p:spPr>
+      </p:sp>
+      <p:sp>
+        <p:nvSpPr>
+          <p:cNvPr id="4" name="Text 2"/>
+          <p:cNvSpPr/>
+          <p:nvPr/>
+        </p:nvSpPr>
+        <p:spPr>
+          <a:xfrm>
+            <a:off x="822960" y="502920"/>
+            <a:ext cx="10515600" cy="365760"/>
+          </a:xfrm>
+          <a:prstGeom prst="rect">
+            <a:avLst/>
+          </a:prstGeom>
+          <a:noFill/>
+          <a:ln/>
+        </p:spPr>
+        <p:txBody>
+          <a:bodyPr wrap="square" rtlCol="0" anchor="ctr"/>
+          <a:lstStyle/>
+          <a:p>
+            <a:pPr indent="0" marL="0">
+              <a:buNone/>
+            </a:pPr>
+            <a:r>
+              <a:rPr lang="en-US" sz="1200" spc="300" kern="0" dirty="0">
+                <a:solidFill>
+                  <a:srgbClr val="06B6D4"/>
+                </a:solidFill>
+                <a:latin typeface="Consolas" pitchFamily="34" charset="0"/>
+                <a:ea typeface="Consolas" pitchFamily="34" charset="-122"/>
+                <a:cs typeface="Consolas" pitchFamily="34" charset="-120"/>
+              </a:rPr>
+              <a:t>LESSONS</a:t>
+            </a:r>
+            <a:endParaRPr lang="en-US" sz="1200" dirty="0"/>
+          </a:p>
+        </p:txBody>
+      </p:sp>
+      <p:sp>
+        <p:nvSpPr>
+          <p:cNvPr id="5" name="Text 3"/>
+          <p:cNvSpPr/>
+          <p:nvPr/>
+        </p:nvSpPr>
+        <p:spPr>
+          <a:xfrm>
+            <a:off x="822960" y="914400"/>
+            <a:ext cx="10561320" cy="868680"/>
+          </a:xfrm>
+          <a:prstGeom prst="rect">
+            <a:avLst/>
+          </a:prstGeom>
+          <a:noFill/>
+          <a:ln/>
+        </p:spPr>
+        <p:txBody>
+          <a:bodyPr wrap="square" rtlCol="0" anchor="ctr"/>
+          <a:lstStyle/>
+          <a:p>
+            <a:pPr indent="0" marL="0">
+              <a:buNone/>
+            </a:pPr>
+            <a:r>
+              <a:rPr lang="en-US" sz="2700" b="1" dirty="0">
+                <a:solidFill>
+                  <a:srgbClr val="FFFFFF"/>
+                </a:solidFill>
+                <a:latin typeface="Segoe UI" pitchFamily="34" charset="0"/>
+                <a:ea typeface="Segoe UI" pitchFamily="34" charset="-122"/>
+                <a:cs typeface="Segoe UI" pitchFamily="34" charset="-120"/>
+              </a:rPr>
+              <a:t>What building an agent OS actually taught me</a:t>
+            </a:r>
+            <a:endParaRPr lang="en-US" sz="2700" dirty="0"/>
+          </a:p>
+        </p:txBody>
+      </p:sp>
+      <p:sp>
+        <p:nvSpPr>
+          <p:cNvPr id="6" name="Text 4"/>
+          <p:cNvSpPr/>
+          <p:nvPr/>
+        </p:nvSpPr>
+        <p:spPr>
+          <a:xfrm>
+            <a:off x="868680" y="2011680"/>
+            <a:ext cx="10424160" cy="3566160"/>
+          </a:xfrm>
+          <a:prstGeom prst="rect">
+            <a:avLst/>
+          </a:prstGeom>
+          <a:noFill/>
+          <a:ln/>
+        </p:spPr>
+        <p:txBody>
+          <a:bodyPr wrap="square" rtlCol="0" anchor="t"/>
+          <a:lstStyle/>
+          <a:p>
+            <a:pPr marL="342900" indent="-342900">
+              <a:lnSpc>
+                <a:spcPct val="112000"/>
+              </a:lnSpc>
+              <a:spcAft>
+                <a:spcPts val="900"/>
+              </a:spcAft>
+              <a:buSzPct val="100000"/>
+              <a:buChar char="▸"/>
+            </a:pPr>
+            <a:r>
+              <a:rPr lang="en-US" sz="1600" dirty="0">
+                <a:solidFill>
+                  <a:srgbClr val="CBD5E1"/>
+                </a:solidFill>
+                <a:latin typeface="Segoe UI" pitchFamily="34" charset="0"/>
+                <a:ea typeface="Segoe UI" pitchFamily="34" charset="-122"/>
+                <a:cs typeface="Segoe UI" pitchFamily="34" charset="-120"/>
+              </a:rPr>
+              <a:t>Routing is the real intelligence: a small model with an excellent router beats a giant model guessing.</a:t>
+            </a:r>
+            <a:endParaRPr lang="en-US" sz="1600" dirty="0"/>
+          </a:p>
+          <a:p>
+            <a:pPr marL="342900" indent="-342900">
+              <a:lnSpc>
+                <a:spcPct val="112000"/>
+              </a:lnSpc>
+              <a:spcAft>
+                <a:spcPts val="900"/>
+              </a:spcAft>
+              <a:buSzPct val="100000"/>
+              <a:buChar char="▸"/>
+            </a:pPr>
+            <a:r>
+              <a:rPr lang="en-US" sz="1600" dirty="0">
+                <a:solidFill>
+                  <a:srgbClr val="CBD5E1"/>
+                </a:solidFill>
+                <a:latin typeface="Segoe UI" pitchFamily="34" charset="0"/>
+                <a:ea typeface="Segoe UI" pitchFamily="34" charset="-122"/>
+                <a:cs typeface="Segoe UI" pitchFamily="34" charset="-120"/>
+              </a:rPr>
+              <a:t>Free-form memory rots; structured memory compounds, because format is governance.</a:t>
+            </a:r>
+            <a:endParaRPr lang="en-US" sz="1600" dirty="0"/>
+          </a:p>
+          <a:p>
+            <a:pPr marL="342900" indent="-342900">
+              <a:lnSpc>
+                <a:spcPct val="112000"/>
+              </a:lnSpc>
+              <a:spcAft>
+                <a:spcPts val="900"/>
+              </a:spcAft>
+              <a:buSzPct val="100000"/>
+              <a:buChar char="▸"/>
+            </a:pPr>
+            <a:r>
+              <a:rPr lang="en-US" sz="1600" dirty="0">
+                <a:solidFill>
+                  <a:srgbClr val="CBD5E1"/>
+                </a:solidFill>
+                <a:latin typeface="Segoe UI" pitchFamily="34" charset="0"/>
+                <a:ea typeface="Segoe UI" pitchFamily="34" charset="-122"/>
+                <a:cs typeface="Segoe UI" pitchFamily="34" charset="-120"/>
+              </a:rPr>
+              <a:t>Prompts are suggestions and protocols are law: binding, versioned rules outlive phrasing.</a:t>
+            </a:r>
+            <a:endParaRPr lang="en-US" sz="1600" dirty="0"/>
+          </a:p>
+          <a:p>
+            <a:pPr marL="342900" indent="-342900">
+              <a:lnSpc>
+                <a:spcPct val="112000"/>
+              </a:lnSpc>
+              <a:spcAft>
+                <a:spcPts val="900"/>
+              </a:spcAft>
+              <a:buSzPct val="100000"/>
+              <a:buChar char="▸"/>
+            </a:pPr>
+            <a:r>
+              <a:rPr lang="en-US" sz="1600" dirty="0">
+                <a:solidFill>
+                  <a:srgbClr val="CBD5E1"/>
+                </a:solidFill>
+                <a:latin typeface="Segoe UI" pitchFamily="34" charset="0"/>
+                <a:ea typeface="Segoe UI" pitchFamily="34" charset="-122"/>
+                <a:cs typeface="Segoe UI" pitchFamily="34" charset="-120"/>
+              </a:rPr>
+              <a:t>Design the system so intelligence is fungible, and the model brand stops mattering.</a:t>
+            </a:r>
+            <a:endParaRPr lang="en-US" sz="1600" dirty="0"/>
+          </a:p>
+        </p:txBody>
+      </p:sp>
+      <p:sp>
+        <p:nvSpPr>
+          <p:cNvPr id="7" name="Shape 5"/>
+          <p:cNvSpPr/>
+          <p:nvPr/>
+        </p:nvSpPr>
+        <p:spPr>
+          <a:xfrm>
+            <a:off x="822960" y="5961888"/>
+            <a:ext cx="10515600" cy="0"/>
+          </a:xfrm>
+          <a:prstGeom prst="line">
+            <a:avLst/>
+          </a:prstGeom>
+          <a:noFill/>
+          <a:ln w="12700">
+            <a:solidFill>
+              <a:srgbClr val="1E2D45"/>
+            </a:solidFill>
+            <a:prstDash val="solid"/>
+          </a:ln>
+        </p:spPr>
+      </p:sp>
+      <p:sp>
+        <p:nvSpPr>
+          <p:cNvPr id="8" name="Text 6"/>
+          <p:cNvSpPr/>
+          <p:nvPr/>
+        </p:nvSpPr>
+        <p:spPr>
+          <a:xfrm>
+            <a:off x="822960" y="6053328"/>
+            <a:ext cx="9692640" cy="457200"/>
+          </a:xfrm>
+          <a:prstGeom prst="rect">
+            <a:avLst/>
+          </a:prstGeom>
+          <a:noFill/>
+          <a:ln/>
+        </p:spPr>
+        <p:txBody>
+          <a:bodyPr wrap="square" rtlCol="0" anchor="ctr"/>
+          <a:lstStyle/>
+          <a:p>
+            <a:pPr indent="0" marL="0">
+              <a:buNone/>
+            </a:pPr>
+            <a:r>
+              <a:rPr lang="en-US" sz="1150" dirty="0">
+                <a:solidFill>
+                  <a:srgbClr val="64748B"/>
+                </a:solidFill>
+                <a:latin typeface="Segoe UI" pitchFamily="34" charset="0"/>
+                <a:ea typeface="Segoe UI" pitchFamily="34" charset="-122"/>
+                <a:cs typeface="Segoe UI" pitchFamily="34" charset="-120"/>
+              </a:rPr>
+              <a:t>The intelligence ceiling matters less than the system design around it.</a:t>
+            </a:r>
+            <a:endParaRPr lang="en-US" sz="1150" dirty="0"/>
+          </a:p>
+        </p:txBody>
+      </p:sp>
+      <p:sp>
+        <p:nvSpPr>
+          <p:cNvPr id="9" name="Text 7"/>
+          <p:cNvSpPr/>
+          <p:nvPr/>
+        </p:nvSpPr>
+        <p:spPr>
+          <a:xfrm>
+            <a:off x="10698480" y="6382512"/>
+            <a:ext cx="1188720" cy="365760"/>
+          </a:xfrm>
+          <a:prstGeom prst="rect">
+            <a:avLst/>
+          </a:prstGeom>
+          <a:noFill/>
+          <a:ln/>
+        </p:spPr>
+        <p:txBody>
+          <a:bodyPr wrap="square" rtlCol="0" anchor="ctr"/>
+          <a:lstStyle/>
+          <a:p>
+            <a:pPr algn="r" indent="0" marL="0">
+              <a:buNone/>
+            </a:pPr>
+            <a:r>
+              <a:rPr lang="en-US" sz="1000" dirty="0">
+                <a:solidFill>
+                  <a:srgbClr val="64748B"/>
+                </a:solidFill>
+                <a:latin typeface="Consolas" pitchFamily="34" charset="0"/>
+                <a:ea typeface="Consolas" pitchFamily="34" charset="-122"/>
+                <a:cs typeface="Consolas" pitchFamily="34" charset="-120"/>
+              </a:rPr>
+              <a:t>13 / 14</a:t>
+            </a:r>
+            <a:endParaRPr lang="en-US" sz="1000" dirty="0"/>
+          </a:p>
+        </p:txBody>
+      </p:sp>
+    </p:spTree>
+  </p:cSld>
+  <p:clrMapOvr>
+    <a:masterClrMapping/>
+  </p:clrMapOvr>
+</p:sld>
+</file>
+
+<file path=ppt/slides/slide14.xml><?xml version="1.0" encoding="utf-8"?>
+<p:sld xmlns:a="http://schemas.openxmlformats.org/drawingml/2006/main" xmlns:r="http://schemas.openxmlformats.org/officeDocument/2006/relationships" xmlns:p="http://schemas.openxmlformats.org/presentationml/2006/main">
+  <p:cSld name="Slide 14">
+    <p:bg>
+      <p:bgPr>
+        <a:solidFill>
+          <a:srgbClr val="0A0C12"/>
+        </a:solidFill>
+      </p:bgPr>
+    </p:bg>
+    <p:spTree>
+      <p:nvGrpSpPr>
+        <p:cNvPr id="1" name=""/>
+        <p:cNvGrpSpPr/>
+        <p:nvPr/>
+      </p:nvGrpSpPr>
+      <p:grpSpPr>
+        <a:xfrm>
+          <a:off x="0" y="0"/>
+          <a:ext cx="0" cy="0"/>
+          <a:chOff x="0" y="0"/>
+          <a:chExt cx="0" cy="0"/>
+        </a:xfrm>
+      </p:grpSpPr>
+      <p:sp>
+        <p:nvSpPr>
+          <p:cNvPr id="2" name="Shape 0"/>
+          <p:cNvSpPr/>
+          <p:nvPr/>
+        </p:nvSpPr>
+        <p:spPr>
+          <a:xfrm>
+            <a:off x="0" y="0"/>
+            <a:ext cx="7680960" cy="64008"/>
+          </a:xfrm>
+          <a:prstGeom prst="rect">
+            <a:avLst/>
+          </a:prstGeom>
+          <a:solidFill>
+            <a:srgbClr val="3B82F6"/>
+          </a:solidFill>
+          <a:ln/>
+        </p:spPr>
+      </p:sp>
+      <p:sp>
+        <p:nvSpPr>
+          <p:cNvPr id="3" name="Shape 1"/>
+          <p:cNvSpPr/>
+          <p:nvPr/>
+        </p:nvSpPr>
+        <p:spPr>
+          <a:xfrm>
+            <a:off x="7680960" y="0"/>
+            <a:ext cx="4510735" cy="64008"/>
+          </a:xfrm>
+          <a:prstGeom prst="rect">
+            <a:avLst/>
+          </a:prstGeom>
+          <a:solidFill>
+            <a:srgbClr val="06B6D4"/>
+          </a:solidFill>
+          <a:ln/>
+        </p:spPr>
+      </p:sp>
+      <p:sp>
+        <p:nvSpPr>
+          <p:cNvPr id="4" name="Text 2"/>
+          <p:cNvSpPr/>
+          <p:nvPr/>
+        </p:nvSpPr>
+        <p:spPr>
+          <a:xfrm>
+            <a:off x="822960" y="1417320"/>
+            <a:ext cx="10515600" cy="411480"/>
+          </a:xfrm>
+          <a:prstGeom prst="rect">
+            <a:avLst/>
+          </a:prstGeom>
+          <a:noFill/>
+          <a:ln/>
+        </p:spPr>
+        <p:txBody>
+          <a:bodyPr wrap="square" rtlCol="0" anchor="ctr"/>
+          <a:lstStyle/>
+          <a:p>
+            <a:pPr algn="ctr" indent="0" marL="0">
+              <a:buNone/>
+            </a:pPr>
+            <a:r>
+              <a:rPr lang="en-US" sz="1300" spc="400" kern="0" dirty="0">
+                <a:solidFill>
+                  <a:srgbClr val="06B6D4"/>
+                </a:solidFill>
+                <a:latin typeface="Consolas" pitchFamily="34" charset="0"/>
+                <a:ea typeface="Consolas" pitchFamily="34" charset="-122"/>
+                <a:cs typeface="Consolas" pitchFamily="34" charset="-120"/>
+              </a:rPr>
+              <a:t>WORK WITH ME</a:t>
+            </a:r>
+            <a:endParaRPr lang="en-US" sz="1300" dirty="0"/>
+          </a:p>
+        </p:txBody>
+      </p:sp>
+      <p:sp>
+        <p:nvSpPr>
+          <p:cNvPr id="5" name="Text 3"/>
+          <p:cNvSpPr/>
+          <p:nvPr/>
+        </p:nvSpPr>
+        <p:spPr>
+          <a:xfrm>
+            <a:off x="822960" y="1920240"/>
+            <a:ext cx="10515600" cy="1371600"/>
+          </a:xfrm>
+          <a:prstGeom prst="rect">
+            <a:avLst/>
+          </a:prstGeom>
+          <a:noFill/>
+          <a:ln/>
+        </p:spPr>
+        <p:txBody>
+          <a:bodyPr wrap="square" rtlCol="0" anchor="ctr"/>
+          <a:lstStyle/>
+          <a:p>
+            <a:pPr algn="ctr" indent="0" marL="0">
+              <a:buNone/>
+            </a:pPr>
+            <a:r>
+              <a:rPr lang="en-US" sz="3200" b="1" dirty="0">
+                <a:solidFill>
+                  <a:srgbClr val="FFFFFF"/>
+                </a:solidFill>
+                <a:latin typeface="Segoe UI" pitchFamily="34" charset="0"/>
+                <a:ea typeface="Segoe UI" pitchFamily="34" charset="-122"/>
+                <a:cs typeface="Segoe UI" pitchFamily="34" charset="-120"/>
+              </a:rPr>
+              <a:t>Want architecture like this on your team?</a:t>
+            </a:r>
+            <a:endParaRPr lang="en-US" sz="3200" dirty="0"/>
+          </a:p>
+        </p:txBody>
+      </p:sp>
+      <p:sp>
+        <p:nvSpPr>
+          <p:cNvPr id="6" name="Text 4"/>
+          <p:cNvSpPr/>
+          <p:nvPr/>
+        </p:nvSpPr>
+        <p:spPr>
+          <a:xfrm>
+            <a:off x="2011680" y="3429000"/>
+            <a:ext cx="8183880" cy="1554480"/>
+          </a:xfrm>
+          <a:prstGeom prst="rect">
+            <a:avLst/>
+          </a:prstGeom>
+          <a:noFill/>
+          <a:ln/>
+        </p:spPr>
+        <p:txBody>
+          <a:bodyPr wrap="square" rtlCol="0" anchor="t"/>
+          <a:lstStyle/>
+          <a:p>
+            <a:pPr algn="ctr" indent="0" marL="0">
+              <a:spcAft>
+                <a:spcPts val="800"/>
+              </a:spcAft>
+              <a:buNone/>
+            </a:pPr>
+            <a:r>
+              <a:rPr lang="en-US" sz="1500" dirty="0">
+                <a:solidFill>
+                  <a:srgbClr val="CBD5E1"/>
+                </a:solidFill>
+                <a:latin typeface="Segoe UI" pitchFamily="34" charset="0"/>
+                <a:ea typeface="Segoe UI" pitchFamily="34" charset="-122"/>
+                <a:cs typeface="Segoe UI" pitchFamily="34" charset="-120"/>
+              </a:rPr>
+              <a:t>I design and build local-first AI agent systems, from routing and memory to quality gates.</a:t>
+            </a:r>
+            <a:pPr algn="ctr" indent="0" marL="0">
+              <a:spcAft>
+                <a:spcPts val="800"/>
+              </a:spcAft>
+              <a:buNone/>
+            </a:pPr>
+            <a:r>
+              <a:rPr lang="en-US" sz="1500" dirty="0">
+                <a:solidFill>
+                  <a:srgbClr val="CBD5E1"/>
+                </a:solidFill>
+                <a:latin typeface="Segoe UI" pitchFamily="34" charset="0"/>
+                <a:ea typeface="Segoe UI" pitchFamily="34" charset="-122"/>
+                <a:cs typeface="Segoe UI" pitchFamily="34" charset="-120"/>
+              </a:rPr>
+              <a:t>I also take BI, data engineering, and web scraping projects worldwide via Upwork.</a:t>
+            </a:r>
+            <a:endParaRPr lang="en-US" sz="1500" dirty="0"/>
+          </a:p>
+        </p:txBody>
+      </p:sp>
+      <p:sp>
+        <p:nvSpPr>
+          <p:cNvPr id="7" name="Shape 5"/>
+          <p:cNvSpPr/>
+          <p:nvPr/>
+        </p:nvSpPr>
+        <p:spPr>
+          <a:xfrm>
+            <a:off x="3566160" y="5212080"/>
+            <a:ext cx="5074920" cy="0"/>
+          </a:xfrm>
+          <a:prstGeom prst="line">
+            <a:avLst/>
+          </a:prstGeom>
+          <a:noFill/>
+          <a:ln w="25400">
+            <a:solidFill>
+              <a:srgbClr val="3B82F6"/>
+            </a:solidFill>
+            <a:prstDash val="solid"/>
+          </a:ln>
+        </p:spPr>
+      </p:sp>
+      <p:sp>
+        <p:nvSpPr>
+          <p:cNvPr id="8" name="Text 6"/>
+          <p:cNvSpPr/>
+          <p:nvPr/>
+        </p:nvSpPr>
+        <p:spPr>
+          <a:xfrm>
+            <a:off x="822960" y="5376672"/>
+            <a:ext cx="10515600" cy="457200"/>
+          </a:xfrm>
+          <a:prstGeom prst="rect">
+            <a:avLst/>
+          </a:prstGeom>
+          <a:noFill/>
+          <a:ln/>
+        </p:spPr>
+        <p:txBody>
+          <a:bodyPr wrap="square" rtlCol="0" anchor="ctr"/>
+          <a:lstStyle/>
+          <a:p>
+            <a:pPr algn="ctr" indent="0" marL="0">
+              <a:buNone/>
+            </a:pPr>
+            <a:r>
+              <a:rPr lang="en-US" sz="1350" b="1" dirty="0">
+                <a:solidFill>
+                  <a:srgbClr val="06B6D4"/>
+                </a:solidFill>
+                <a:latin typeface="Consolas" pitchFamily="34" charset="0"/>
+                <a:ea typeface="Consolas" pitchFamily="34" charset="-122"/>
+                <a:cs typeface="Consolas" pitchFamily="34" charset="-120"/>
+              </a:rPr>
+              <a:t>rezalianvatiady.github.io · github.com/rezalianvatiady</a:t>
+            </a:r>
+            <a:endParaRPr lang="en-US" sz="1350" dirty="0"/>
+          </a:p>
+        </p:txBody>
+      </p:sp>
+      <p:sp>
+        <p:nvSpPr>
+          <p:cNvPr id="9" name="Text 7"/>
+          <p:cNvSpPr/>
+          <p:nvPr/>
+        </p:nvSpPr>
+        <p:spPr>
+          <a:xfrm>
+            <a:off x="10698480" y="6382512"/>
+            <a:ext cx="1188720" cy="365760"/>
+          </a:xfrm>
+          <a:prstGeom prst="rect">
+            <a:avLst/>
+          </a:prstGeom>
+          <a:noFill/>
+          <a:ln/>
+        </p:spPr>
+        <p:txBody>
+          <a:bodyPr wrap="square" rtlCol="0" anchor="ctr"/>
+          <a:lstStyle/>
+          <a:p>
+            <a:pPr algn="r" indent="0" marL="0">
+              <a:buNone/>
+            </a:pPr>
+            <a:r>
+              <a:rPr lang="en-US" sz="1000" dirty="0">
+                <a:solidFill>
+                  <a:srgbClr val="64748B"/>
+                </a:solidFill>
+                <a:latin typeface="Consolas" pitchFamily="34" charset="0"/>
+                <a:ea typeface="Consolas" pitchFamily="34" charset="-122"/>
+                <a:cs typeface="Consolas" pitchFamily="34" charset="-120"/>
+              </a:rPr>
+              <a:t>14 / 14</a:t>
             </a:r>
             <a:endParaRPr lang="en-US" sz="1000" dirty="0"/>
           </a:p>
@@ -1799,7 +5338,7 @@
                 <a:ea typeface="Consolas" pitchFamily="34" charset="-122"/>
                 <a:cs typeface="Consolas" pitchFamily="34" charset="-120"/>
               </a:rPr>
-              <a:t>THE PROBLEM</a:t>
+              <a:t>AGENDA</a:t>
             </a:r>
             <a:endParaRPr lang="en-US" sz="1200" dirty="0"/>
           </a:p>
@@ -1813,8 +5352,8 @@
         </p:nvSpPr>
         <p:spPr>
           <a:xfrm>
-            <a:off x="822960" y="960120"/>
-            <a:ext cx="10515600" cy="868680"/>
+            <a:off x="822960" y="914400"/>
+            <a:ext cx="10561320" cy="868680"/>
           </a:xfrm>
           <a:prstGeom prst="rect">
             <a:avLst/>
@@ -1830,7 +5369,7 @@
               <a:buNone/>
             </a:pPr>
             <a:r>
-              <a:rPr lang="en-US" sz="3000" b="1" dirty="0">
+              <a:rPr lang="en-US" sz="2700" b="1" dirty="0">
                 <a:solidFill>
                   <a:srgbClr val="FFFFFF"/>
                 </a:solidFill>
@@ -1838,45 +5377,102 @@
                 <a:ea typeface="Segoe UI" pitchFamily="34" charset="-122"/>
                 <a:cs typeface="Segoe UI" pitchFamily="34" charset="-120"/>
               </a:rPr>
-              <a:t>One person cannot scale execution</a:t>
-            </a:r>
-            <a:endParaRPr lang="en-US" sz="3000" dirty="0"/>
-          </a:p>
-        </p:txBody>
-      </p:sp>
-      <p:sp>
-        <p:nvSpPr>
-          <p:cNvPr id="6" name="Text 4"/>
-          <p:cNvSpPr/>
-          <p:nvPr/>
-        </p:nvSpPr>
-        <p:spPr>
-          <a:xfrm>
-            <a:off x="868680" y="2057400"/>
-            <a:ext cx="10424160" cy="3566160"/>
-          </a:xfrm>
-          <a:prstGeom prst="rect">
-            <a:avLst/>
-          </a:prstGeom>
-          <a:noFill/>
-          <a:ln/>
-        </p:spPr>
-        <p:txBody>
-          <a:bodyPr wrap="square" rtlCol="0" anchor="t"/>
-          <a:lstStyle/>
-          <a:p>
-            <a:pPr marL="342900" indent="-342900">
-              <a:lnSpc>
-                <a:spcPct val="115000"/>
-              </a:lnSpc>
-              <a:spcAft>
-                <a:spcPts val="1000"/>
-              </a:spcAft>
-              <a:buSzPct val="100000"/>
-              <a:buChar char="▸"/>
-            </a:pPr>
-            <a:r>
-              <a:rPr lang="en-US" sz="1600" dirty="0">
+              <a:t>What this deck covers</a:t>
+            </a:r>
+            <a:endParaRPr lang="en-US" sz="2700" dirty="0"/>
+          </a:p>
+        </p:txBody>
+      </p:sp>
+      <p:sp>
+        <p:nvSpPr>
+          <p:cNvPr id="6" name="Shape 4"/>
+          <p:cNvSpPr/>
+          <p:nvPr/>
+        </p:nvSpPr>
+        <p:spPr>
+          <a:xfrm>
+            <a:off x="868680" y="2112264"/>
+            <a:ext cx="420624" cy="420624"/>
+          </a:xfrm>
+          <a:prstGeom prst="ellipse">
+            <a:avLst/>
+          </a:prstGeom>
+          <a:solidFill>
+            <a:srgbClr val="111A2E"/>
+          </a:solidFill>
+          <a:ln w="19050">
+            <a:solidFill>
+              <a:srgbClr val="3B82F6"/>
+            </a:solidFill>
+            <a:prstDash val="solid"/>
+          </a:ln>
+        </p:spPr>
+      </p:sp>
+      <p:sp>
+        <p:nvSpPr>
+          <p:cNvPr id="7" name="Text 5"/>
+          <p:cNvSpPr/>
+          <p:nvPr/>
+        </p:nvSpPr>
+        <p:spPr>
+          <a:xfrm>
+            <a:off x="868680" y="2112264"/>
+            <a:ext cx="420624" cy="420624"/>
+          </a:xfrm>
+          <a:prstGeom prst="rect">
+            <a:avLst/>
+          </a:prstGeom>
+          <a:noFill/>
+          <a:ln/>
+        </p:spPr>
+        <p:txBody>
+          <a:bodyPr wrap="square" rtlCol="0" anchor="ctr"/>
+          <a:lstStyle/>
+          <a:p>
+            <a:pPr algn="ctr" indent="0" marL="0">
+              <a:buNone/>
+            </a:pPr>
+            <a:r>
+              <a:rPr lang="en-US" sz="1300" b="1" dirty="0">
+                <a:solidFill>
+                  <a:srgbClr val="3B82F6"/>
+                </a:solidFill>
+                <a:latin typeface="Consolas" pitchFamily="34" charset="0"/>
+                <a:ea typeface="Consolas" pitchFamily="34" charset="-122"/>
+                <a:cs typeface="Consolas" pitchFamily="34" charset="-120"/>
+              </a:rPr>
+              <a:t>1</a:t>
+            </a:r>
+            <a:endParaRPr lang="en-US" sz="1300" dirty="0"/>
+          </a:p>
+        </p:txBody>
+      </p:sp>
+      <p:sp>
+        <p:nvSpPr>
+          <p:cNvPr id="8" name="Text 6"/>
+          <p:cNvSpPr/>
+          <p:nvPr/>
+        </p:nvSpPr>
+        <p:spPr>
+          <a:xfrm>
+            <a:off x="1435608" y="2057400"/>
+            <a:ext cx="4480560" cy="822960"/>
+          </a:xfrm>
+          <a:prstGeom prst="rect">
+            <a:avLst/>
+          </a:prstGeom>
+          <a:noFill/>
+          <a:ln/>
+        </p:spPr>
+        <p:txBody>
+          <a:bodyPr wrap="square" rtlCol="0" anchor="ctr"/>
+          <a:lstStyle/>
+          <a:p>
+            <a:pPr indent="0" marL="0">
+              <a:buNone/>
+            </a:pPr>
+            <a:r>
+              <a:rPr lang="en-US" sz="1450" dirty="0">
                 <a:solidFill>
                   <a:srgbClr val="CBD5E1"/>
                 </a:solidFill>
@@ -1884,23 +5480,102 @@
                 <a:ea typeface="Segoe UI" pitchFamily="34" charset="-122"/>
                 <a:cs typeface="Segoe UI" pitchFamily="34" charset="-120"/>
               </a:rPr>
-              <a:t>Every task you do yourself is a task you cannot parallelize</a:t>
-            </a:r>
-            <a:endParaRPr lang="en-US" sz="1600" dirty="0"/>
-          </a:p>
-          <a:p>
-            <a:pPr marL="342900" indent="-342900">
-              <a:lnSpc>
-                <a:spcPct val="115000"/>
-              </a:lnSpc>
-              <a:spcAft>
-                <a:spcPts val="1000"/>
-              </a:spcAft>
-              <a:buSzPct val="100000"/>
-              <a:buChar char="▸"/>
-            </a:pPr>
-            <a:r>
-              <a:rPr lang="en-US" sz="1600" dirty="0">
+              <a:t>Why one founder needed an operating system, not another chatbot</a:t>
+            </a:r>
+            <a:endParaRPr lang="en-US" sz="1450" dirty="0"/>
+          </a:p>
+        </p:txBody>
+      </p:sp>
+      <p:sp>
+        <p:nvSpPr>
+          <p:cNvPr id="9" name="Shape 7"/>
+          <p:cNvSpPr/>
+          <p:nvPr/>
+        </p:nvSpPr>
+        <p:spPr>
+          <a:xfrm>
+            <a:off x="868680" y="3044952"/>
+            <a:ext cx="420624" cy="420624"/>
+          </a:xfrm>
+          <a:prstGeom prst="ellipse">
+            <a:avLst/>
+          </a:prstGeom>
+          <a:solidFill>
+            <a:srgbClr val="111A2E"/>
+          </a:solidFill>
+          <a:ln w="19050">
+            <a:solidFill>
+              <a:srgbClr val="06B6D4"/>
+            </a:solidFill>
+            <a:prstDash val="solid"/>
+          </a:ln>
+        </p:spPr>
+      </p:sp>
+      <p:sp>
+        <p:nvSpPr>
+          <p:cNvPr id="10" name="Text 8"/>
+          <p:cNvSpPr/>
+          <p:nvPr/>
+        </p:nvSpPr>
+        <p:spPr>
+          <a:xfrm>
+            <a:off x="868680" y="3044952"/>
+            <a:ext cx="420624" cy="420624"/>
+          </a:xfrm>
+          <a:prstGeom prst="rect">
+            <a:avLst/>
+          </a:prstGeom>
+          <a:noFill/>
+          <a:ln/>
+        </p:spPr>
+        <p:txBody>
+          <a:bodyPr wrap="square" rtlCol="0" anchor="ctr"/>
+          <a:lstStyle/>
+          <a:p>
+            <a:pPr algn="ctr" indent="0" marL="0">
+              <a:buNone/>
+            </a:pPr>
+            <a:r>
+              <a:rPr lang="en-US" sz="1300" b="1" dirty="0">
+                <a:solidFill>
+                  <a:srgbClr val="06B6D4"/>
+                </a:solidFill>
+                <a:latin typeface="Consolas" pitchFamily="34" charset="0"/>
+                <a:ea typeface="Consolas" pitchFamily="34" charset="-122"/>
+                <a:cs typeface="Consolas" pitchFamily="34" charset="-120"/>
+              </a:rPr>
+              <a:t>2</a:t>
+            </a:r>
+            <a:endParaRPr lang="en-US" sz="1300" dirty="0"/>
+          </a:p>
+        </p:txBody>
+      </p:sp>
+      <p:sp>
+        <p:nvSpPr>
+          <p:cNvPr id="11" name="Text 9"/>
+          <p:cNvSpPr/>
+          <p:nvPr/>
+        </p:nvSpPr>
+        <p:spPr>
+          <a:xfrm>
+            <a:off x="1435608" y="2990088"/>
+            <a:ext cx="4480560" cy="822960"/>
+          </a:xfrm>
+          <a:prstGeom prst="rect">
+            <a:avLst/>
+          </a:prstGeom>
+          <a:noFill/>
+          <a:ln/>
+        </p:spPr>
+        <p:txBody>
+          <a:bodyPr wrap="square" rtlCol="0" anchor="ctr"/>
+          <a:lstStyle/>
+          <a:p>
+            <a:pPr indent="0" marL="0">
+              <a:buNone/>
+            </a:pPr>
+            <a:r>
+              <a:rPr lang="en-US" sz="1450" dirty="0">
                 <a:solidFill>
                   <a:srgbClr val="CBD5E1"/>
                 </a:solidFill>
@@ -1908,23 +5583,102 @@
                 <a:ea typeface="Segoe UI" pitchFamily="34" charset="-122"/>
                 <a:cs typeface="Segoe UI" pitchFamily="34" charset="-120"/>
               </a:rPr>
-              <a:t>Cloud APIs meter every thought - iteration becomes expensive</a:t>
-            </a:r>
-            <a:endParaRPr lang="en-US" sz="1600" dirty="0"/>
-          </a:p>
-          <a:p>
-            <a:pPr marL="342900" indent="-342900">
-              <a:lnSpc>
-                <a:spcPct val="115000"/>
-              </a:lnSpc>
-              <a:spcAft>
-                <a:spcPts val="1000"/>
-              </a:spcAft>
-              <a:buSzPct val="100000"/>
-              <a:buChar char="▸"/>
-            </a:pPr>
-            <a:r>
-              <a:rPr lang="en-US" sz="1600" dirty="0">
+              <a:t>The five-layer architecture on a single machine</a:t>
+            </a:r>
+            <a:endParaRPr lang="en-US" sz="1450" dirty="0"/>
+          </a:p>
+        </p:txBody>
+      </p:sp>
+      <p:sp>
+        <p:nvSpPr>
+          <p:cNvPr id="12" name="Shape 10"/>
+          <p:cNvSpPr/>
+          <p:nvPr/>
+        </p:nvSpPr>
+        <p:spPr>
+          <a:xfrm>
+            <a:off x="868680" y="3977640"/>
+            <a:ext cx="420624" cy="420624"/>
+          </a:xfrm>
+          <a:prstGeom prst="ellipse">
+            <a:avLst/>
+          </a:prstGeom>
+          <a:solidFill>
+            <a:srgbClr val="111A2E"/>
+          </a:solidFill>
+          <a:ln w="19050">
+            <a:solidFill>
+              <a:srgbClr val="3B82F6"/>
+            </a:solidFill>
+            <a:prstDash val="solid"/>
+          </a:ln>
+        </p:spPr>
+      </p:sp>
+      <p:sp>
+        <p:nvSpPr>
+          <p:cNvPr id="13" name="Text 11"/>
+          <p:cNvSpPr/>
+          <p:nvPr/>
+        </p:nvSpPr>
+        <p:spPr>
+          <a:xfrm>
+            <a:off x="868680" y="3977640"/>
+            <a:ext cx="420624" cy="420624"/>
+          </a:xfrm>
+          <a:prstGeom prst="rect">
+            <a:avLst/>
+          </a:prstGeom>
+          <a:noFill/>
+          <a:ln/>
+        </p:spPr>
+        <p:txBody>
+          <a:bodyPr wrap="square" rtlCol="0" anchor="ctr"/>
+          <a:lstStyle/>
+          <a:p>
+            <a:pPr algn="ctr" indent="0" marL="0">
+              <a:buNone/>
+            </a:pPr>
+            <a:r>
+              <a:rPr lang="en-US" sz="1300" b="1" dirty="0">
+                <a:solidFill>
+                  <a:srgbClr val="3B82F6"/>
+                </a:solidFill>
+                <a:latin typeface="Consolas" pitchFamily="34" charset="0"/>
+                <a:ea typeface="Consolas" pitchFamily="34" charset="-122"/>
+                <a:cs typeface="Consolas" pitchFamily="34" charset="-120"/>
+              </a:rPr>
+              <a:t>3</a:t>
+            </a:r>
+            <a:endParaRPr lang="en-US" sz="1300" dirty="0"/>
+          </a:p>
+        </p:txBody>
+      </p:sp>
+      <p:sp>
+        <p:nvSpPr>
+          <p:cNvPr id="14" name="Text 12"/>
+          <p:cNvSpPr/>
+          <p:nvPr/>
+        </p:nvSpPr>
+        <p:spPr>
+          <a:xfrm>
+            <a:off x="1435608" y="3922776"/>
+            <a:ext cx="4480560" cy="822960"/>
+          </a:xfrm>
+          <a:prstGeom prst="rect">
+            <a:avLst/>
+          </a:prstGeom>
+          <a:noFill/>
+          <a:ln/>
+        </p:spPr>
+        <p:txBody>
+          <a:bodyPr wrap="square" rtlCol="0" anchor="ctr"/>
+          <a:lstStyle/>
+          <a:p>
+            <a:pPr indent="0" marL="0">
+              <a:buNone/>
+            </a:pPr>
+            <a:r>
+              <a:rPr lang="en-US" sz="1450" dirty="0">
                 <a:solidFill>
                   <a:srgbClr val="CBD5E1"/>
                 </a:solidFill>
@@ -1932,23 +5686,102 @@
                 <a:ea typeface="Segoe UI" pitchFamily="34" charset="-122"/>
                 <a:cs typeface="Segoe UI" pitchFamily="34" charset="-120"/>
               </a:rPr>
-              <a:t>Business data deserves to stay on your machine</a:t>
-            </a:r>
-            <a:endParaRPr lang="en-US" sz="1600" dirty="0"/>
-          </a:p>
-          <a:p>
-            <a:pPr marL="342900" indent="-342900">
-              <a:lnSpc>
-                <a:spcPct val="115000"/>
-              </a:lnSpc>
-              <a:spcAft>
-                <a:spcPts val="1000"/>
-              </a:spcAft>
-              <a:buSzPct val="100000"/>
-              <a:buChar char="▸"/>
-            </a:pPr>
-            <a:r>
-              <a:rPr lang="en-US" sz="1600" dirty="0">
+              <a:t>The intent router: 100% accuracy on a 30-query validation set</a:t>
+            </a:r>
+            <a:endParaRPr lang="en-US" sz="1450" dirty="0"/>
+          </a:p>
+        </p:txBody>
+      </p:sp>
+      <p:sp>
+        <p:nvSpPr>
+          <p:cNvPr id="15" name="Shape 13"/>
+          <p:cNvSpPr/>
+          <p:nvPr/>
+        </p:nvSpPr>
+        <p:spPr>
+          <a:xfrm>
+            <a:off x="6355080" y="2112264"/>
+            <a:ext cx="420624" cy="420624"/>
+          </a:xfrm>
+          <a:prstGeom prst="ellipse">
+            <a:avLst/>
+          </a:prstGeom>
+          <a:solidFill>
+            <a:srgbClr val="111A2E"/>
+          </a:solidFill>
+          <a:ln w="19050">
+            <a:solidFill>
+              <a:srgbClr val="06B6D4"/>
+            </a:solidFill>
+            <a:prstDash val="solid"/>
+          </a:ln>
+        </p:spPr>
+      </p:sp>
+      <p:sp>
+        <p:nvSpPr>
+          <p:cNvPr id="16" name="Text 14"/>
+          <p:cNvSpPr/>
+          <p:nvPr/>
+        </p:nvSpPr>
+        <p:spPr>
+          <a:xfrm>
+            <a:off x="6355080" y="2112264"/>
+            <a:ext cx="420624" cy="420624"/>
+          </a:xfrm>
+          <a:prstGeom prst="rect">
+            <a:avLst/>
+          </a:prstGeom>
+          <a:noFill/>
+          <a:ln/>
+        </p:spPr>
+        <p:txBody>
+          <a:bodyPr wrap="square" rtlCol="0" anchor="ctr"/>
+          <a:lstStyle/>
+          <a:p>
+            <a:pPr algn="ctr" indent="0" marL="0">
+              <a:buNone/>
+            </a:pPr>
+            <a:r>
+              <a:rPr lang="en-US" sz="1300" b="1" dirty="0">
+                <a:solidFill>
+                  <a:srgbClr val="06B6D4"/>
+                </a:solidFill>
+                <a:latin typeface="Consolas" pitchFamily="34" charset="0"/>
+                <a:ea typeface="Consolas" pitchFamily="34" charset="-122"/>
+                <a:cs typeface="Consolas" pitchFamily="34" charset="-120"/>
+              </a:rPr>
+              <a:t>4</a:t>
+            </a:r>
+            <a:endParaRPr lang="en-US" sz="1300" dirty="0"/>
+          </a:p>
+        </p:txBody>
+      </p:sp>
+      <p:sp>
+        <p:nvSpPr>
+          <p:cNvPr id="17" name="Text 15"/>
+          <p:cNvSpPr/>
+          <p:nvPr/>
+        </p:nvSpPr>
+        <p:spPr>
+          <a:xfrm>
+            <a:off x="6922008" y="2057400"/>
+            <a:ext cx="4480560" cy="822960"/>
+          </a:xfrm>
+          <a:prstGeom prst="rect">
+            <a:avLst/>
+          </a:prstGeom>
+          <a:noFill/>
+          <a:ln/>
+        </p:spPr>
+        <p:txBody>
+          <a:bodyPr wrap="square" rtlCol="0" anchor="ctr"/>
+          <a:lstStyle/>
+          <a:p>
+            <a:pPr indent="0" marL="0">
+              <a:buNone/>
+            </a:pPr>
+            <a:r>
+              <a:rPr lang="en-US" sz="1450" dirty="0">
                 <a:solidFill>
                   <a:srgbClr val="CBD5E1"/>
                 </a:solidFill>
@@ -1956,22 +5789,47 @@
                 <a:ea typeface="Segoe UI" pitchFamily="34" charset="-122"/>
                 <a:cs typeface="Segoe UI" pitchFamily="34" charset="-120"/>
               </a:rPr>
-              <a:t>The answer is not another chatbot. It is an operating system for agents</a:t>
-            </a:r>
-            <a:endParaRPr lang="en-US" sz="1600" dirty="0"/>
-          </a:p>
-        </p:txBody>
-      </p:sp>
-      <p:sp>
-        <p:nvSpPr>
-          <p:cNvPr id="7" name="Text 5"/>
-          <p:cNvSpPr/>
-          <p:nvPr/>
-        </p:nvSpPr>
-        <p:spPr>
-          <a:xfrm>
-            <a:off x="10698480" y="6355080"/>
-            <a:ext cx="1188720" cy="365760"/>
+              <a:t>Structured memory: rules, status, lessons</a:t>
+            </a:r>
+            <a:endParaRPr lang="en-US" sz="1450" dirty="0"/>
+          </a:p>
+        </p:txBody>
+      </p:sp>
+      <p:sp>
+        <p:nvSpPr>
+          <p:cNvPr id="18" name="Shape 16"/>
+          <p:cNvSpPr/>
+          <p:nvPr/>
+        </p:nvSpPr>
+        <p:spPr>
+          <a:xfrm>
+            <a:off x="6355080" y="3044952"/>
+            <a:ext cx="420624" cy="420624"/>
+          </a:xfrm>
+          <a:prstGeom prst="ellipse">
+            <a:avLst/>
+          </a:prstGeom>
+          <a:solidFill>
+            <a:srgbClr val="111A2E"/>
+          </a:solidFill>
+          <a:ln w="19050">
+            <a:solidFill>
+              <a:srgbClr val="3B82F6"/>
+            </a:solidFill>
+            <a:prstDash val="solid"/>
+          </a:ln>
+        </p:spPr>
+      </p:sp>
+      <p:sp>
+        <p:nvSpPr>
+          <p:cNvPr id="19" name="Text 17"/>
+          <p:cNvSpPr/>
+          <p:nvPr/>
+        </p:nvSpPr>
+        <p:spPr>
+          <a:xfrm>
+            <a:off x="6355080" y="3044952"/>
+            <a:ext cx="420624" cy="420624"/>
           </a:xfrm>
           <a:prstGeom prst="rect">
             <a:avLst/>
@@ -1983,19 +5841,200 @@
           <a:bodyPr wrap="square" rtlCol="0" anchor="ctr"/>
           <a:lstStyle/>
           <a:p>
-            <a:pPr algn="r" indent="0" marL="0">
+            <a:pPr algn="ctr" indent="0" marL="0">
               <a:buNone/>
             </a:pPr>
             <a:r>
-              <a:rPr lang="en-US" sz="1000" dirty="0">
-                <a:solidFill>
-                  <a:srgbClr val="64748B"/>
+              <a:rPr lang="en-US" sz="1300" b="1" dirty="0">
+                <a:solidFill>
+                  <a:srgbClr val="3B82F6"/>
                 </a:solidFill>
                 <a:latin typeface="Consolas" pitchFamily="34" charset="0"/>
                 <a:ea typeface="Consolas" pitchFamily="34" charset="-122"/>
                 <a:cs typeface="Consolas" pitchFamily="34" charset="-120"/>
               </a:rPr>
-              <a:t>2 / 8</a:t>
+              <a:t>5</a:t>
+            </a:r>
+            <a:endParaRPr lang="en-US" sz="1300" dirty="0"/>
+          </a:p>
+        </p:txBody>
+      </p:sp>
+      <p:sp>
+        <p:nvSpPr>
+          <p:cNvPr id="20" name="Text 18"/>
+          <p:cNvSpPr/>
+          <p:nvPr/>
+        </p:nvSpPr>
+        <p:spPr>
+          <a:xfrm>
+            <a:off x="6922008" y="2990088"/>
+            <a:ext cx="4480560" cy="822960"/>
+          </a:xfrm>
+          <a:prstGeom prst="rect">
+            <a:avLst/>
+          </a:prstGeom>
+          <a:noFill/>
+          <a:ln/>
+        </p:spPr>
+        <p:txBody>
+          <a:bodyPr wrap="square" rtlCol="0" anchor="ctr"/>
+          <a:lstStyle/>
+          <a:p>
+            <a:pPr indent="0" marL="0">
+              <a:buNone/>
+            </a:pPr>
+            <a:r>
+              <a:rPr lang="en-US" sz="1450" dirty="0">
+                <a:solidFill>
+                  <a:srgbClr val="CBD5E1"/>
+                </a:solidFill>
+                <a:latin typeface="Segoe UI" pitchFamily="34" charset="0"/>
+                <a:ea typeface="Segoe UI" pitchFamily="34" charset="-122"/>
+                <a:cs typeface="Segoe UI" pitchFamily="34" charset="-120"/>
+              </a:rPr>
+              <a:t>Quality gates and the 9-agent workforce they hold together</a:t>
+            </a:r>
+            <a:endParaRPr lang="en-US" sz="1450" dirty="0"/>
+          </a:p>
+        </p:txBody>
+      </p:sp>
+      <p:sp>
+        <p:nvSpPr>
+          <p:cNvPr id="21" name="Shape 19"/>
+          <p:cNvSpPr/>
+          <p:nvPr/>
+        </p:nvSpPr>
+        <p:spPr>
+          <a:xfrm>
+            <a:off x="6355080" y="3977640"/>
+            <a:ext cx="420624" cy="420624"/>
+          </a:xfrm>
+          <a:prstGeom prst="ellipse">
+            <a:avLst/>
+          </a:prstGeom>
+          <a:solidFill>
+            <a:srgbClr val="111A2E"/>
+          </a:solidFill>
+          <a:ln w="19050">
+            <a:solidFill>
+              <a:srgbClr val="06B6D4"/>
+            </a:solidFill>
+            <a:prstDash val="solid"/>
+          </a:ln>
+        </p:spPr>
+      </p:sp>
+      <p:sp>
+        <p:nvSpPr>
+          <p:cNvPr id="22" name="Text 20"/>
+          <p:cNvSpPr/>
+          <p:nvPr/>
+        </p:nvSpPr>
+        <p:spPr>
+          <a:xfrm>
+            <a:off x="6355080" y="3977640"/>
+            <a:ext cx="420624" cy="420624"/>
+          </a:xfrm>
+          <a:prstGeom prst="rect">
+            <a:avLst/>
+          </a:prstGeom>
+          <a:noFill/>
+          <a:ln/>
+        </p:spPr>
+        <p:txBody>
+          <a:bodyPr wrap="square" rtlCol="0" anchor="ctr"/>
+          <a:lstStyle/>
+          <a:p>
+            <a:pPr algn="ctr" indent="0" marL="0">
+              <a:buNone/>
+            </a:pPr>
+            <a:r>
+              <a:rPr lang="en-US" sz="1300" b="1" dirty="0">
+                <a:solidFill>
+                  <a:srgbClr val="06B6D4"/>
+                </a:solidFill>
+                <a:latin typeface="Consolas" pitchFamily="34" charset="0"/>
+                <a:ea typeface="Consolas" pitchFamily="34" charset="-122"/>
+                <a:cs typeface="Consolas" pitchFamily="34" charset="-120"/>
+              </a:rPr>
+              <a:t>6</a:t>
+            </a:r>
+            <a:endParaRPr lang="en-US" sz="1300" dirty="0"/>
+          </a:p>
+        </p:txBody>
+      </p:sp>
+      <p:sp>
+        <p:nvSpPr>
+          <p:cNvPr id="23" name="Text 21"/>
+          <p:cNvSpPr/>
+          <p:nvPr/>
+        </p:nvSpPr>
+        <p:spPr>
+          <a:xfrm>
+            <a:off x="6922008" y="3922776"/>
+            <a:ext cx="4480560" cy="822960"/>
+          </a:xfrm>
+          <a:prstGeom prst="rect">
+            <a:avLst/>
+          </a:prstGeom>
+          <a:noFill/>
+          <a:ln/>
+        </p:spPr>
+        <p:txBody>
+          <a:bodyPr wrap="square" rtlCol="0" anchor="ctr"/>
+          <a:lstStyle/>
+          <a:p>
+            <a:pPr indent="0" marL="0">
+              <a:buNone/>
+            </a:pPr>
+            <a:r>
+              <a:rPr lang="en-US" sz="1450" dirty="0">
+                <a:solidFill>
+                  <a:srgbClr val="CBD5E1"/>
+                </a:solidFill>
+                <a:latin typeface="Segoe UI" pitchFamily="34" charset="0"/>
+                <a:ea typeface="Segoe UI" pitchFamily="34" charset="-122"/>
+                <a:cs typeface="Segoe UI" pitchFamily="34" charset="-120"/>
+              </a:rPr>
+              <a:t>The scoreboard: 30+ apps and 8.7K+ lines of open-source frameworks</a:t>
+            </a:r>
+            <a:endParaRPr lang="en-US" sz="1450" dirty="0"/>
+          </a:p>
+        </p:txBody>
+      </p:sp>
+      <p:sp>
+        <p:nvSpPr>
+          <p:cNvPr id="24" name="Text 22"/>
+          <p:cNvSpPr/>
+          <p:nvPr/>
+        </p:nvSpPr>
+        <p:spPr>
+          <a:xfrm>
+            <a:off x="10698480" y="6382512"/>
+            <a:ext cx="1188720" cy="365760"/>
+          </a:xfrm>
+          <a:prstGeom prst="rect">
+            <a:avLst/>
+          </a:prstGeom>
+          <a:noFill/>
+          <a:ln/>
+        </p:spPr>
+        <p:txBody>
+          <a:bodyPr wrap="square" rtlCol="0" anchor="ctr"/>
+          <a:lstStyle/>
+          <a:p>
+            <a:pPr algn="r" indent="0" marL="0">
+              <a:buNone/>
+            </a:pPr>
+            <a:r>
+              <a:rPr lang="en-US" sz="1000" dirty="0">
+                <a:solidFill>
+                  <a:srgbClr val="64748B"/>
+                </a:solidFill>
+                <a:latin typeface="Consolas" pitchFamily="34" charset="0"/>
+                <a:ea typeface="Consolas" pitchFamily="34" charset="-122"/>
+                <a:cs typeface="Consolas" pitchFamily="34" charset="-120"/>
+              </a:rPr>
+              <a:t>2 / 14</a:t>
             </a:r>
             <a:endParaRPr lang="en-US" sz="1000" dirty="0"/>
           </a:p>
@@ -2106,7 +6145,7 @@
                 <a:ea typeface="Consolas" pitchFamily="34" charset="-122"/>
                 <a:cs typeface="Consolas" pitchFamily="34" charset="-120"/>
               </a:rPr>
-              <a:t>ARCHITECTURE</a:t>
+              <a:t>THE PROBLEM</a:t>
             </a:r>
             <a:endParaRPr lang="en-US" sz="1200" dirty="0"/>
           </a:p>
@@ -2120,8 +6159,8 @@
         </p:nvSpPr>
         <p:spPr>
           <a:xfrm>
-            <a:off x="822960" y="960120"/>
-            <a:ext cx="10515600" cy="868680"/>
+            <a:off x="822960" y="914400"/>
+            <a:ext cx="10561320" cy="868680"/>
           </a:xfrm>
           <a:prstGeom prst="rect">
             <a:avLst/>
@@ -2137,7 +6176,7 @@
               <a:buNone/>
             </a:pPr>
             <a:r>
-              <a:rPr lang="en-US" sz="3000" b="1" dirty="0">
+              <a:rPr lang="en-US" sz="2700" b="1" dirty="0">
                 <a:solidFill>
                   <a:srgbClr val="FFFFFF"/>
                 </a:solidFill>
@@ -2145,9 +6184,9 @@
                 <a:ea typeface="Segoe UI" pitchFamily="34" charset="-122"/>
                 <a:cs typeface="Segoe UI" pitchFamily="34" charset="-120"/>
               </a:rPr>
-              <a:t>Five layers, one machine</a:t>
-            </a:r>
-            <a:endParaRPr lang="en-US" sz="3000" dirty="0"/>
+              <a:t>One person cannot scale execution - until the architecture changes</a:t>
+            </a:r>
+            <a:endParaRPr lang="en-US" sz="2700" dirty="0"/>
           </a:p>
         </p:txBody>
       </p:sp>
@@ -2159,7 +6198,7 @@
         </p:nvSpPr>
         <p:spPr>
           <a:xfrm>
-            <a:off x="868680" y="2057400"/>
+            <a:off x="868680" y="2011680"/>
             <a:ext cx="10424160" cy="3566160"/>
           </a:xfrm>
           <a:prstGeom prst="rect">
@@ -2174,10 +6213,10 @@
           <a:p>
             <a:pPr marL="342900" indent="-342900">
               <a:lnSpc>
-                <a:spcPct val="115000"/>
+                <a:spcPct val="112000"/>
               </a:lnSpc>
               <a:spcAft>
-                <a:spcPts val="1000"/>
+                <a:spcPts val="900"/>
               </a:spcAft>
               <a:buSzPct val="100000"/>
               <a:buChar char="▸"/>
@@ -2191,17 +6230,17 @@
                 <a:ea typeface="Segoe UI" pitchFamily="34" charset="-122"/>
                 <a:cs typeface="Segoe UI" pitchFamily="34" charset="-120"/>
               </a:rPr>
-              <a:t>Kernel - intent routing, policy, agent lifecycle</a:t>
+              <a:t>Every task you do yourself is a task you cannot parallelize, and a company is a queue of tasks.</a:t>
             </a:r>
             <a:endParaRPr lang="en-US" sz="1600" dirty="0"/>
           </a:p>
           <a:p>
             <a:pPr marL="342900" indent="-342900">
               <a:lnSpc>
-                <a:spcPct val="115000"/>
+                <a:spcPct val="112000"/>
               </a:lnSpc>
               <a:spcAft>
-                <a:spcPts val="1000"/>
+                <a:spcPts val="900"/>
               </a:spcAft>
               <a:buSzPct val="100000"/>
               <a:buChar char="▸"/>
@@ -2215,17 +6254,17 @@
                 <a:ea typeface="Segoe UI" pitchFamily="34" charset="-122"/>
                 <a:cs typeface="Segoe UI" pitchFamily="34" charset="-120"/>
               </a:rPr>
-              <a:t>Agent modules - GIS, OSINT, Data, Coding, Builder, PM, QA, Docs</a:t>
+              <a:t>Cloud APIs meter every thought, so iteration gets taxed and agents learn to be stingy.</a:t>
             </a:r>
             <a:endParaRPr lang="en-US" sz="1600" dirty="0"/>
           </a:p>
           <a:p>
             <a:pPr marL="342900" indent="-342900">
               <a:lnSpc>
-                <a:spcPct val="115000"/>
+                <a:spcPct val="112000"/>
               </a:lnSpc>
               <a:spcAft>
-                <a:spcPts val="1000"/>
+                <a:spcPts val="900"/>
               </a:spcAft>
               <a:buSzPct val="100000"/>
               <a:buChar char="▸"/>
@@ -2239,17 +6278,17 @@
                 <a:ea typeface="Segoe UI" pitchFamily="34" charset="-122"/>
                 <a:cs typeface="Segoe UI" pitchFamily="34" charset="-120"/>
               </a:rPr>
-              <a:t>Structured memory - rules, status, lessons in strict formats</a:t>
+              <a:t>Business data, credentials, and client material deserve to stay on your own machine.</a:t>
             </a:r>
             <a:endParaRPr lang="en-US" sz="1600" dirty="0"/>
           </a:p>
           <a:p>
             <a:pPr marL="342900" indent="-342900">
               <a:lnSpc>
-                <a:spcPct val="115000"/>
+                <a:spcPct val="112000"/>
               </a:lnSpc>
               <a:spcAft>
-                <a:spcPts val="1000"/>
+                <a:spcPts val="900"/>
               </a:spcAft>
               <a:buSzPct val="100000"/>
               <a:buChar char="▸"/>
@@ -2263,45 +6302,83 @@
                 <a:ea typeface="Segoe UI" pitchFamily="34" charset="-122"/>
                 <a:cs typeface="Segoe UI" pitchFamily="34" charset="-120"/>
               </a:rPr>
-              <a:t>Quality gate layer - nothing ships without evidence</a:t>
+              <a:t>The answer is not a smarter chatbot; it is an operating system that routes, remembers, and enforces.</a:t>
             </a:r>
             <a:endParaRPr lang="en-US" sz="1600" dirty="0"/>
           </a:p>
-          <a:p>
-            <a:pPr marL="342900" indent="-342900">
-              <a:lnSpc>
-                <a:spcPct val="115000"/>
-              </a:lnSpc>
-              <a:spcAft>
-                <a:spcPts val="1000"/>
-              </a:spcAft>
-              <a:buSzPct val="100000"/>
-              <a:buChar char="▸"/>
-            </a:pPr>
-            <a:r>
-              <a:rPr lang="en-US" sz="1600" dirty="0">
-                <a:solidFill>
-                  <a:srgbClr val="CBD5E1"/>
+        </p:txBody>
+      </p:sp>
+      <p:sp>
+        <p:nvSpPr>
+          <p:cNvPr id="7" name="Shape 5"/>
+          <p:cNvSpPr/>
+          <p:nvPr/>
+        </p:nvSpPr>
+        <p:spPr>
+          <a:xfrm>
+            <a:off x="822960" y="5961888"/>
+            <a:ext cx="10515600" cy="0"/>
+          </a:xfrm>
+          <a:prstGeom prst="line">
+            <a:avLst/>
+          </a:prstGeom>
+          <a:noFill/>
+          <a:ln w="12700">
+            <a:solidFill>
+              <a:srgbClr val="1E2D45"/>
+            </a:solidFill>
+            <a:prstDash val="solid"/>
+          </a:ln>
+        </p:spPr>
+      </p:sp>
+      <p:sp>
+        <p:nvSpPr>
+          <p:cNvPr id="8" name="Text 6"/>
+          <p:cNvSpPr/>
+          <p:nvPr/>
+        </p:nvSpPr>
+        <p:spPr>
+          <a:xfrm>
+            <a:off x="822960" y="6053328"/>
+            <a:ext cx="9692640" cy="457200"/>
+          </a:xfrm>
+          <a:prstGeom prst="rect">
+            <a:avLst/>
+          </a:prstGeom>
+          <a:noFill/>
+          <a:ln/>
+        </p:spPr>
+        <p:txBody>
+          <a:bodyPr wrap="square" rtlCol="0" anchor="ctr"/>
+          <a:lstStyle/>
+          <a:p>
+            <a:pPr indent="0" marL="0">
+              <a:buNone/>
+            </a:pPr>
+            <a:r>
+              <a:rPr lang="en-US" sz="1150" dirty="0">
+                <a:solidFill>
+                  <a:srgbClr val="64748B"/>
                 </a:solidFill>
                 <a:latin typeface="Segoe UI" pitchFamily="34" charset="0"/>
                 <a:ea typeface="Segoe UI" pitchFamily="34" charset="-122"/>
                 <a:cs typeface="Segoe UI" pitchFamily="34" charset="-120"/>
               </a:rPr>
-              <a:t>Local model runtime - Ollama with Qwen 2.5:7b</a:t>
-            </a:r>
-            <a:endParaRPr lang="en-US" sz="1600" dirty="0"/>
-          </a:p>
-        </p:txBody>
-      </p:sp>
-      <p:sp>
-        <p:nvSpPr>
-          <p:cNvPr id="7" name="Text 5"/>
-          <p:cNvSpPr/>
-          <p:nvPr/>
-        </p:nvSpPr>
-        <p:spPr>
-          <a:xfrm>
-            <a:off x="10698480" y="6355080"/>
+              <a:t>ZalinOS was designed as infrastructure, not as a demo.</a:t>
+            </a:r>
+            <a:endParaRPr lang="en-US" sz="1150" dirty="0"/>
+          </a:p>
+        </p:txBody>
+      </p:sp>
+      <p:sp>
+        <p:nvSpPr>
+          <p:cNvPr id="9" name="Text 7"/>
+          <p:cNvSpPr/>
+          <p:nvPr/>
+        </p:nvSpPr>
+        <p:spPr>
+          <a:xfrm>
+            <a:off x="10698480" y="6382512"/>
             <a:ext cx="1188720" cy="365760"/>
           </a:xfrm>
           <a:prstGeom prst="rect">
@@ -2326,7 +6403,7 @@
                 <a:ea typeface="Consolas" pitchFamily="34" charset="-122"/>
                 <a:cs typeface="Consolas" pitchFamily="34" charset="-120"/>
               </a:rPr>
-              <a:t>3 / 8</a:t>
+              <a:t>3 / 14</a:t>
             </a:r>
             <a:endParaRPr lang="en-US" sz="1000" dirty="0"/>
           </a:p>
@@ -2437,7 +6514,7 @@
                 <a:ea typeface="Consolas" pitchFamily="34" charset="-122"/>
                 <a:cs typeface="Consolas" pitchFamily="34" charset="-120"/>
               </a:rPr>
-              <a:t>THE FRONT DOOR</a:t>
+              <a:t>ARCHITECTURE</a:t>
             </a:r>
             <a:endParaRPr lang="en-US" sz="1200" dirty="0"/>
           </a:p>
@@ -2451,8 +6528,8 @@
         </p:nvSpPr>
         <p:spPr>
           <a:xfrm>
-            <a:off x="822960" y="960120"/>
-            <a:ext cx="10515600" cy="868680"/>
+            <a:off x="822960" y="914400"/>
+            <a:ext cx="10561320" cy="868680"/>
           </a:xfrm>
           <a:prstGeom prst="rect">
             <a:avLst/>
@@ -2468,7 +6545,7 @@
               <a:buNone/>
             </a:pPr>
             <a:r>
-              <a:rPr lang="en-US" sz="3000" b="1" dirty="0">
+              <a:rPr lang="en-US" sz="2700" b="1" dirty="0">
                 <a:solidFill>
                   <a:srgbClr val="FFFFFF"/>
                 </a:solidFill>
@@ -2476,69 +6553,143 @@
                 <a:ea typeface="Segoe UI" pitchFamily="34" charset="-122"/>
                 <a:cs typeface="Segoe UI" pitchFamily="34" charset="-120"/>
               </a:rPr>
-              <a:t>Intent router: 100% on the validation set</a:t>
-            </a:r>
-            <a:endParaRPr lang="en-US" sz="3000" dirty="0"/>
-          </a:p>
-        </p:txBody>
-      </p:sp>
-      <p:sp>
-        <p:nvSpPr>
-          <p:cNvPr id="6" name="Text 4"/>
-          <p:cNvSpPr/>
-          <p:nvPr/>
-        </p:nvSpPr>
-        <p:spPr>
-          <a:xfrm>
-            <a:off x="868680" y="2057400"/>
-            <a:ext cx="10424160" cy="3566160"/>
-          </a:xfrm>
-          <a:prstGeom prst="rect">
-            <a:avLst/>
-          </a:prstGeom>
-          <a:noFill/>
-          <a:ln/>
-        </p:spPr>
-        <p:txBody>
-          <a:bodyPr wrap="square" rtlCol="0" anchor="t"/>
-          <a:lstStyle/>
-          <a:p>
-            <a:pPr marL="342900" indent="-342900">
-              <a:lnSpc>
-                <a:spcPct val="115000"/>
-              </a:lnSpc>
-              <a:spcAft>
-                <a:spcPts val="1000"/>
-              </a:spcAft>
-              <a:buSzPct val="100000"/>
-              <a:buChar char="▸"/>
-            </a:pPr>
-            <a:r>
-              <a:rPr lang="en-US" sz="1600" dirty="0">
-                <a:solidFill>
-                  <a:srgbClr val="CBD5E1"/>
+              <a:t>Five layers, one machine</a:t>
+            </a:r>
+            <a:endParaRPr lang="en-US" sz="2700" dirty="0"/>
+          </a:p>
+        </p:txBody>
+      </p:sp>
+      <p:sp>
+        <p:nvSpPr>
+          <p:cNvPr id="6" name="Shape 4"/>
+          <p:cNvSpPr/>
+          <p:nvPr/>
+        </p:nvSpPr>
+        <p:spPr>
+          <a:xfrm>
+            <a:off x="774040" y="2514600"/>
+            <a:ext cx="1938528" cy="2103120"/>
+          </a:xfrm>
+          <a:prstGeom prst="roundRect">
+            <a:avLst>
+              <a:gd name="adj" fmla="val 3302"/>
+            </a:avLst>
+          </a:prstGeom>
+          <a:solidFill>
+            <a:srgbClr val="111A2E"/>
+          </a:solidFill>
+          <a:ln w="19050">
+            <a:solidFill>
+              <a:srgbClr val="3B82F6"/>
+            </a:solidFill>
+            <a:prstDash val="solid"/>
+          </a:ln>
+        </p:spPr>
+      </p:sp>
+      <p:sp>
+        <p:nvSpPr>
+          <p:cNvPr id="7" name="Text 5"/>
+          <p:cNvSpPr/>
+          <p:nvPr/>
+        </p:nvSpPr>
+        <p:spPr>
+          <a:xfrm>
+            <a:off x="902056" y="2633472"/>
+            <a:ext cx="1682496" cy="310896"/>
+          </a:xfrm>
+          <a:prstGeom prst="rect">
+            <a:avLst/>
+          </a:prstGeom>
+          <a:noFill/>
+          <a:ln/>
+        </p:spPr>
+        <p:txBody>
+          <a:bodyPr wrap="square" rtlCol="0" anchor="ctr"/>
+          <a:lstStyle/>
+          <a:p>
+            <a:pPr indent="0" marL="0">
+              <a:buNone/>
+            </a:pPr>
+            <a:r>
+              <a:rPr lang="en-US" sz="1100" b="1" dirty="0">
+                <a:solidFill>
+                  <a:srgbClr val="3B82F6"/>
+                </a:solidFill>
+                <a:latin typeface="Consolas" pitchFamily="34" charset="0"/>
+                <a:ea typeface="Consolas" pitchFamily="34" charset="-122"/>
+                <a:cs typeface="Consolas" pitchFamily="34" charset="-120"/>
+              </a:rPr>
+              <a:t>01</a:t>
+            </a:r>
+            <a:endParaRPr lang="en-US" sz="1100" dirty="0"/>
+          </a:p>
+        </p:txBody>
+      </p:sp>
+      <p:sp>
+        <p:nvSpPr>
+          <p:cNvPr id="8" name="Text 6"/>
+          <p:cNvSpPr/>
+          <p:nvPr/>
+        </p:nvSpPr>
+        <p:spPr>
+          <a:xfrm>
+            <a:off x="902056" y="2962656"/>
+            <a:ext cx="1682496" cy="566928"/>
+          </a:xfrm>
+          <a:prstGeom prst="rect">
+            <a:avLst/>
+          </a:prstGeom>
+          <a:noFill/>
+          <a:ln/>
+        </p:spPr>
+        <p:txBody>
+          <a:bodyPr wrap="square" rtlCol="0" anchor="ctr"/>
+          <a:lstStyle/>
+          <a:p>
+            <a:pPr indent="0" marL="0">
+              <a:buNone/>
+            </a:pPr>
+            <a:r>
+              <a:rPr lang="en-US" sz="1350" b="1" dirty="0">
+                <a:solidFill>
+                  <a:srgbClr val="FFFFFF"/>
                 </a:solidFill>
                 <a:latin typeface="Segoe UI" pitchFamily="34" charset="0"/>
                 <a:ea typeface="Segoe UI" pitchFamily="34" charset="-122"/>
                 <a:cs typeface="Segoe UI" pitchFamily="34" charset="-120"/>
               </a:rPr>
-              <a:t>30 real daily queries as the validation set</a:t>
-            </a:r>
-            <a:endParaRPr lang="en-US" sz="1600" dirty="0"/>
-          </a:p>
-          <a:p>
-            <a:pPr marL="342900" indent="-342900">
-              <a:lnSpc>
-                <a:spcPct val="115000"/>
-              </a:lnSpc>
-              <a:spcAft>
-                <a:spcPts val="1000"/>
-              </a:spcAft>
-              <a:buSzPct val="100000"/>
-              <a:buChar char="▸"/>
-            </a:pPr>
-            <a:r>
-              <a:rPr lang="en-US" sz="1600" dirty="0">
+              <a:t>Kernel</a:t>
+            </a:r>
+            <a:endParaRPr lang="en-US" sz="1350" dirty="0"/>
+          </a:p>
+        </p:txBody>
+      </p:sp>
+      <p:sp>
+        <p:nvSpPr>
+          <p:cNvPr id="9" name="Text 7"/>
+          <p:cNvSpPr/>
+          <p:nvPr/>
+        </p:nvSpPr>
+        <p:spPr>
+          <a:xfrm>
+            <a:off x="902056" y="3566160"/>
+            <a:ext cx="1682496" cy="960120"/>
+          </a:xfrm>
+          <a:prstGeom prst="rect">
+            <a:avLst/>
+          </a:prstGeom>
+          <a:noFill/>
+          <a:ln/>
+        </p:spPr>
+        <p:txBody>
+          <a:bodyPr wrap="square" rtlCol="0" anchor="ctr"/>
+          <a:lstStyle/>
+          <a:p>
+            <a:pPr indent="0" marL="0">
+              <a:buNone/>
+            </a:pPr>
+            <a:r>
+              <a:rPr lang="en-US" sz="980" dirty="0">
                 <a:solidFill>
                   <a:srgbClr val="CBD5E1"/>
                 </a:solidFill>
@@ -2546,47 +6697,163 @@
                 <a:ea typeface="Segoe UI" pitchFamily="34" charset="-122"/>
                 <a:cs typeface="Segoe UI" pitchFamily="34" charset="-120"/>
               </a:rPr>
-              <a:t>51/52 checks passing in production</a:t>
-            </a:r>
-            <a:endParaRPr lang="en-US" sz="1600" dirty="0"/>
-          </a:p>
-          <a:p>
-            <a:pPr marL="342900" indent="-342900">
-              <a:lnSpc>
-                <a:spcPct val="115000"/>
-              </a:lnSpc>
-              <a:spcAft>
-                <a:spcPts val="1000"/>
-              </a:spcAft>
-              <a:buSzPct val="100000"/>
-              <a:buChar char="▸"/>
-            </a:pPr>
-            <a:r>
-              <a:rPr lang="en-US" sz="1600" dirty="0">
-                <a:solidFill>
-                  <a:srgbClr val="CBD5E1"/>
+              <a:t>Intent routing, policy, and agent lifecycle for the whole platform.</a:t>
+            </a:r>
+            <a:endParaRPr lang="en-US" sz="980" dirty="0"/>
+          </a:p>
+        </p:txBody>
+      </p:sp>
+      <p:sp>
+        <p:nvSpPr>
+          <p:cNvPr id="10" name="Shape 8"/>
+          <p:cNvSpPr/>
+          <p:nvPr/>
+        </p:nvSpPr>
+        <p:spPr>
+          <a:xfrm>
+            <a:off x="2726284" y="3419856"/>
+            <a:ext cx="210312" cy="274320"/>
+          </a:xfrm>
+          <a:prstGeom prst="rightArrow">
+            <a:avLst/>
+          </a:prstGeom>
+          <a:solidFill>
+            <a:srgbClr val="06B6D4"/>
+          </a:solidFill>
+          <a:ln/>
+        </p:spPr>
+      </p:sp>
+      <p:sp>
+        <p:nvSpPr>
+          <p:cNvPr id="11" name="Shape 9"/>
+          <p:cNvSpPr/>
+          <p:nvPr/>
+        </p:nvSpPr>
+        <p:spPr>
+          <a:xfrm>
+            <a:off x="2950312" y="2514600"/>
+            <a:ext cx="1938528" cy="2103120"/>
+          </a:xfrm>
+          <a:prstGeom prst="roundRect">
+            <a:avLst>
+              <a:gd name="adj" fmla="val 3302"/>
+            </a:avLst>
+          </a:prstGeom>
+          <a:solidFill>
+            <a:srgbClr val="111A2E"/>
+          </a:solidFill>
+          <a:ln w="19050">
+            <a:solidFill>
+              <a:srgbClr val="06B6D4"/>
+            </a:solidFill>
+            <a:prstDash val="solid"/>
+          </a:ln>
+        </p:spPr>
+      </p:sp>
+      <p:sp>
+        <p:nvSpPr>
+          <p:cNvPr id="12" name="Text 10"/>
+          <p:cNvSpPr/>
+          <p:nvPr/>
+        </p:nvSpPr>
+        <p:spPr>
+          <a:xfrm>
+            <a:off x="3078328" y="2633472"/>
+            <a:ext cx="1682496" cy="310896"/>
+          </a:xfrm>
+          <a:prstGeom prst="rect">
+            <a:avLst/>
+          </a:prstGeom>
+          <a:noFill/>
+          <a:ln/>
+        </p:spPr>
+        <p:txBody>
+          <a:bodyPr wrap="square" rtlCol="0" anchor="ctr"/>
+          <a:lstStyle/>
+          <a:p>
+            <a:pPr indent="0" marL="0">
+              <a:buNone/>
+            </a:pPr>
+            <a:r>
+              <a:rPr lang="en-US" sz="1100" b="1" dirty="0">
+                <a:solidFill>
+                  <a:srgbClr val="06B6D4"/>
+                </a:solidFill>
+                <a:latin typeface="Consolas" pitchFamily="34" charset="0"/>
+                <a:ea typeface="Consolas" pitchFamily="34" charset="-122"/>
+                <a:cs typeface="Consolas" pitchFamily="34" charset="-120"/>
+              </a:rPr>
+              <a:t>02</a:t>
+            </a:r>
+            <a:endParaRPr lang="en-US" sz="1100" dirty="0"/>
+          </a:p>
+        </p:txBody>
+      </p:sp>
+      <p:sp>
+        <p:nvSpPr>
+          <p:cNvPr id="13" name="Text 11"/>
+          <p:cNvSpPr/>
+          <p:nvPr/>
+        </p:nvSpPr>
+        <p:spPr>
+          <a:xfrm>
+            <a:off x="3078328" y="2962656"/>
+            <a:ext cx="1682496" cy="566928"/>
+          </a:xfrm>
+          <a:prstGeom prst="rect">
+            <a:avLst/>
+          </a:prstGeom>
+          <a:noFill/>
+          <a:ln/>
+        </p:spPr>
+        <p:txBody>
+          <a:bodyPr wrap="square" rtlCol="0" anchor="ctr"/>
+          <a:lstStyle/>
+          <a:p>
+            <a:pPr indent="0" marL="0">
+              <a:buNone/>
+            </a:pPr>
+            <a:r>
+              <a:rPr lang="en-US" sz="1350" b="1" dirty="0">
+                <a:solidFill>
+                  <a:srgbClr val="FFFFFF"/>
                 </a:solidFill>
                 <a:latin typeface="Segoe UI" pitchFamily="34" charset="0"/>
                 <a:ea typeface="Segoe UI" pitchFamily="34" charset="-122"/>
                 <a:cs typeface="Segoe UI" pitchFamily="34" charset="-120"/>
               </a:rPr>
-              <a:t>One written boundary definition per agent category</a:t>
-            </a:r>
-            <a:endParaRPr lang="en-US" sz="1600" dirty="0"/>
-          </a:p>
-          <a:p>
-            <a:pPr marL="342900" indent="-342900">
-              <a:lnSpc>
-                <a:spcPct val="115000"/>
-              </a:lnSpc>
-              <a:spcAft>
-                <a:spcPts val="1000"/>
-              </a:spcAft>
-              <a:buSzPct val="100000"/>
-              <a:buChar char="▸"/>
-            </a:pPr>
-            <a:r>
-              <a:rPr lang="en-US" sz="1600" dirty="0">
+              <a:t>Agent workforce</a:t>
+            </a:r>
+            <a:endParaRPr lang="en-US" sz="1350" dirty="0"/>
+          </a:p>
+        </p:txBody>
+      </p:sp>
+      <p:sp>
+        <p:nvSpPr>
+          <p:cNvPr id="14" name="Text 12"/>
+          <p:cNvSpPr/>
+          <p:nvPr/>
+        </p:nvSpPr>
+        <p:spPr>
+          <a:xfrm>
+            <a:off x="3078328" y="3566160"/>
+            <a:ext cx="1682496" cy="960120"/>
+          </a:xfrm>
+          <a:prstGeom prst="rect">
+            <a:avLst/>
+          </a:prstGeom>
+          <a:noFill/>
+          <a:ln/>
+        </p:spPr>
+        <p:txBody>
+          <a:bodyPr wrap="square" rtlCol="0" anchor="ctr"/>
+          <a:lstStyle/>
+          <a:p>
+            <a:pPr indent="0" marL="0">
+              <a:buNone/>
+            </a:pPr>
+            <a:r>
+              <a:rPr lang="en-US" sz="980" dirty="0">
                 <a:solidFill>
                   <a:srgbClr val="CBD5E1"/>
                 </a:solidFill>
@@ -2594,22 +6861,69 @@
                 <a:ea typeface="Segoe UI" pitchFamily="34" charset="-122"/>
                 <a:cs typeface="Segoe UI" pitchFamily="34" charset="-120"/>
               </a:rPr>
-              <a:t>Deterministic output - failures are debuggable, not mysterious</a:t>
-            </a:r>
-            <a:endParaRPr lang="en-US" sz="1600" dirty="0"/>
-          </a:p>
-        </p:txBody>
-      </p:sp>
-      <p:sp>
-        <p:nvSpPr>
-          <p:cNvPr id="7" name="Text 5"/>
-          <p:cNvSpPr/>
-          <p:nvPr/>
-        </p:nvSpPr>
-        <p:spPr>
-          <a:xfrm>
-            <a:off x="10698480" y="6355080"/>
-            <a:ext cx="1188720" cy="365760"/>
+              <a:t>Nine specialist agents with scoped mandates, from engineering to OSINT.</a:t>
+            </a:r>
+            <a:endParaRPr lang="en-US" sz="980" dirty="0"/>
+          </a:p>
+        </p:txBody>
+      </p:sp>
+      <p:sp>
+        <p:nvSpPr>
+          <p:cNvPr id="15" name="Shape 13"/>
+          <p:cNvSpPr/>
+          <p:nvPr/>
+        </p:nvSpPr>
+        <p:spPr>
+          <a:xfrm>
+            <a:off x="4902556" y="3419856"/>
+            <a:ext cx="210312" cy="274320"/>
+          </a:xfrm>
+          <a:prstGeom prst="rightArrow">
+            <a:avLst/>
+          </a:prstGeom>
+          <a:solidFill>
+            <a:srgbClr val="06B6D4"/>
+          </a:solidFill>
+          <a:ln/>
+        </p:spPr>
+      </p:sp>
+      <p:sp>
+        <p:nvSpPr>
+          <p:cNvPr id="16" name="Shape 14"/>
+          <p:cNvSpPr/>
+          <p:nvPr/>
+        </p:nvSpPr>
+        <p:spPr>
+          <a:xfrm>
+            <a:off x="5126584" y="2514600"/>
+            <a:ext cx="1938528" cy="2103120"/>
+          </a:xfrm>
+          <a:prstGeom prst="roundRect">
+            <a:avLst>
+              <a:gd name="adj" fmla="val 3302"/>
+            </a:avLst>
+          </a:prstGeom>
+          <a:solidFill>
+            <a:srgbClr val="111A2E"/>
+          </a:solidFill>
+          <a:ln w="19050">
+            <a:solidFill>
+              <a:srgbClr val="3B82F6"/>
+            </a:solidFill>
+            <a:prstDash val="solid"/>
+          </a:ln>
+        </p:spPr>
+      </p:sp>
+      <p:sp>
+        <p:nvSpPr>
+          <p:cNvPr id="17" name="Text 15"/>
+          <p:cNvSpPr/>
+          <p:nvPr/>
+        </p:nvSpPr>
+        <p:spPr>
+          <a:xfrm>
+            <a:off x="5254600" y="2633472"/>
+            <a:ext cx="1682496" cy="310896"/>
           </a:xfrm>
           <a:prstGeom prst="rect">
             <a:avLst/>
@@ -2621,19 +6935,526 @@
           <a:bodyPr wrap="square" rtlCol="0" anchor="ctr"/>
           <a:lstStyle/>
           <a:p>
-            <a:pPr algn="r" indent="0" marL="0">
+            <a:pPr indent="0" marL="0">
               <a:buNone/>
             </a:pPr>
             <a:r>
-              <a:rPr lang="en-US" sz="1000" dirty="0">
-                <a:solidFill>
-                  <a:srgbClr val="64748B"/>
+              <a:rPr lang="en-US" sz="1100" b="1" dirty="0">
+                <a:solidFill>
+                  <a:srgbClr val="3B82F6"/>
                 </a:solidFill>
                 <a:latin typeface="Consolas" pitchFamily="34" charset="0"/>
                 <a:ea typeface="Consolas" pitchFamily="34" charset="-122"/>
                 <a:cs typeface="Consolas" pitchFamily="34" charset="-120"/>
               </a:rPr>
-              <a:t>4 / 8</a:t>
+              <a:t>03</a:t>
+            </a:r>
+            <a:endParaRPr lang="en-US" sz="1100" dirty="0"/>
+          </a:p>
+        </p:txBody>
+      </p:sp>
+      <p:sp>
+        <p:nvSpPr>
+          <p:cNvPr id="18" name="Text 16"/>
+          <p:cNvSpPr/>
+          <p:nvPr/>
+        </p:nvSpPr>
+        <p:spPr>
+          <a:xfrm>
+            <a:off x="5254600" y="2962656"/>
+            <a:ext cx="1682496" cy="566928"/>
+          </a:xfrm>
+          <a:prstGeom prst="rect">
+            <a:avLst/>
+          </a:prstGeom>
+          <a:noFill/>
+          <a:ln/>
+        </p:spPr>
+        <p:txBody>
+          <a:bodyPr wrap="square" rtlCol="0" anchor="ctr"/>
+          <a:lstStyle/>
+          <a:p>
+            <a:pPr indent="0" marL="0">
+              <a:buNone/>
+            </a:pPr>
+            <a:r>
+              <a:rPr lang="en-US" sz="1350" b="1" dirty="0">
+                <a:solidFill>
+                  <a:srgbClr val="FFFFFF"/>
+                </a:solidFill>
+                <a:latin typeface="Segoe UI" pitchFamily="34" charset="0"/>
+                <a:ea typeface="Segoe UI" pitchFamily="34" charset="-122"/>
+                <a:cs typeface="Segoe UI" pitchFamily="34" charset="-120"/>
+              </a:rPr>
+              <a:t>Structured memory</a:t>
+            </a:r>
+            <a:endParaRPr lang="en-US" sz="1350" dirty="0"/>
+          </a:p>
+        </p:txBody>
+      </p:sp>
+      <p:sp>
+        <p:nvSpPr>
+          <p:cNvPr id="19" name="Text 17"/>
+          <p:cNvSpPr/>
+          <p:nvPr/>
+        </p:nvSpPr>
+        <p:spPr>
+          <a:xfrm>
+            <a:off x="5254600" y="3566160"/>
+            <a:ext cx="1682496" cy="960120"/>
+          </a:xfrm>
+          <a:prstGeom prst="rect">
+            <a:avLst/>
+          </a:prstGeom>
+          <a:noFill/>
+          <a:ln/>
+        </p:spPr>
+        <p:txBody>
+          <a:bodyPr wrap="square" rtlCol="0" anchor="ctr"/>
+          <a:lstStyle/>
+          <a:p>
+            <a:pPr indent="0" marL="0">
+              <a:buNone/>
+            </a:pPr>
+            <a:r>
+              <a:rPr lang="en-US" sz="980" dirty="0">
+                <a:solidFill>
+                  <a:srgbClr val="CBD5E1"/>
+                </a:solidFill>
+                <a:latin typeface="Segoe UI" pitchFamily="34" charset="0"/>
+                <a:ea typeface="Segoe UI" pitchFamily="34" charset="-122"/>
+                <a:cs typeface="Segoe UI" pitchFamily="34" charset="-120"/>
+              </a:rPr>
+              <a:t>Rules, status, and lessons in strict formats every agent reads before working.</a:t>
+            </a:r>
+            <a:endParaRPr lang="en-US" sz="980" dirty="0"/>
+          </a:p>
+        </p:txBody>
+      </p:sp>
+      <p:sp>
+        <p:nvSpPr>
+          <p:cNvPr id="20" name="Shape 18"/>
+          <p:cNvSpPr/>
+          <p:nvPr/>
+        </p:nvSpPr>
+        <p:spPr>
+          <a:xfrm>
+            <a:off x="7078828" y="3419856"/>
+            <a:ext cx="210312" cy="274320"/>
+          </a:xfrm>
+          <a:prstGeom prst="rightArrow">
+            <a:avLst/>
+          </a:prstGeom>
+          <a:solidFill>
+            <a:srgbClr val="06B6D4"/>
+          </a:solidFill>
+          <a:ln/>
+        </p:spPr>
+      </p:sp>
+      <p:sp>
+        <p:nvSpPr>
+          <p:cNvPr id="21" name="Shape 19"/>
+          <p:cNvSpPr/>
+          <p:nvPr/>
+        </p:nvSpPr>
+        <p:spPr>
+          <a:xfrm>
+            <a:off x="7302856" y="2514600"/>
+            <a:ext cx="1938528" cy="2103120"/>
+          </a:xfrm>
+          <a:prstGeom prst="roundRect">
+            <a:avLst>
+              <a:gd name="adj" fmla="val 3302"/>
+            </a:avLst>
+          </a:prstGeom>
+          <a:solidFill>
+            <a:srgbClr val="111A2E"/>
+          </a:solidFill>
+          <a:ln w="19050">
+            <a:solidFill>
+              <a:srgbClr val="06B6D4"/>
+            </a:solidFill>
+            <a:prstDash val="solid"/>
+          </a:ln>
+        </p:spPr>
+      </p:sp>
+      <p:sp>
+        <p:nvSpPr>
+          <p:cNvPr id="22" name="Text 20"/>
+          <p:cNvSpPr/>
+          <p:nvPr/>
+        </p:nvSpPr>
+        <p:spPr>
+          <a:xfrm>
+            <a:off x="7430872" y="2633472"/>
+            <a:ext cx="1682496" cy="310896"/>
+          </a:xfrm>
+          <a:prstGeom prst="rect">
+            <a:avLst/>
+          </a:prstGeom>
+          <a:noFill/>
+          <a:ln/>
+        </p:spPr>
+        <p:txBody>
+          <a:bodyPr wrap="square" rtlCol="0" anchor="ctr"/>
+          <a:lstStyle/>
+          <a:p>
+            <a:pPr indent="0" marL="0">
+              <a:buNone/>
+            </a:pPr>
+            <a:r>
+              <a:rPr lang="en-US" sz="1100" b="1" dirty="0">
+                <a:solidFill>
+                  <a:srgbClr val="06B6D4"/>
+                </a:solidFill>
+                <a:latin typeface="Consolas" pitchFamily="34" charset="0"/>
+                <a:ea typeface="Consolas" pitchFamily="34" charset="-122"/>
+                <a:cs typeface="Consolas" pitchFamily="34" charset="-120"/>
+              </a:rPr>
+              <a:t>04</a:t>
+            </a:r>
+            <a:endParaRPr lang="en-US" sz="1100" dirty="0"/>
+          </a:p>
+        </p:txBody>
+      </p:sp>
+      <p:sp>
+        <p:nvSpPr>
+          <p:cNvPr id="23" name="Text 21"/>
+          <p:cNvSpPr/>
+          <p:nvPr/>
+        </p:nvSpPr>
+        <p:spPr>
+          <a:xfrm>
+            <a:off x="7430872" y="2962656"/>
+            <a:ext cx="1682496" cy="566928"/>
+          </a:xfrm>
+          <a:prstGeom prst="rect">
+            <a:avLst/>
+          </a:prstGeom>
+          <a:noFill/>
+          <a:ln/>
+        </p:spPr>
+        <p:txBody>
+          <a:bodyPr wrap="square" rtlCol="0" anchor="ctr"/>
+          <a:lstStyle/>
+          <a:p>
+            <a:pPr indent="0" marL="0">
+              <a:buNone/>
+            </a:pPr>
+            <a:r>
+              <a:rPr lang="en-US" sz="1350" b="1" dirty="0">
+                <a:solidFill>
+                  <a:srgbClr val="FFFFFF"/>
+                </a:solidFill>
+                <a:latin typeface="Segoe UI" pitchFamily="34" charset="0"/>
+                <a:ea typeface="Segoe UI" pitchFamily="34" charset="-122"/>
+                <a:cs typeface="Segoe UI" pitchFamily="34" charset="-120"/>
+              </a:rPr>
+              <a:t>Quality gates</a:t>
+            </a:r>
+            <a:endParaRPr lang="en-US" sz="1350" dirty="0"/>
+          </a:p>
+        </p:txBody>
+      </p:sp>
+      <p:sp>
+        <p:nvSpPr>
+          <p:cNvPr id="24" name="Text 22"/>
+          <p:cNvSpPr/>
+          <p:nvPr/>
+        </p:nvSpPr>
+        <p:spPr>
+          <a:xfrm>
+            <a:off x="7430872" y="3566160"/>
+            <a:ext cx="1682496" cy="960120"/>
+          </a:xfrm>
+          <a:prstGeom prst="rect">
+            <a:avLst/>
+          </a:prstGeom>
+          <a:noFill/>
+          <a:ln/>
+        </p:spPr>
+        <p:txBody>
+          <a:bodyPr wrap="square" rtlCol="0" anchor="ctr"/>
+          <a:lstStyle/>
+          <a:p>
+            <a:pPr indent="0" marL="0">
+              <a:buNone/>
+            </a:pPr>
+            <a:r>
+              <a:rPr lang="en-US" sz="980" dirty="0">
+                <a:solidFill>
+                  <a:srgbClr val="CBD5E1"/>
+                </a:solidFill>
+                <a:latin typeface="Segoe UI" pitchFamily="34" charset="0"/>
+                <a:ea typeface="Segoe UI" pitchFamily="34" charset="-122"/>
+                <a:cs typeface="Segoe UI" pitchFamily="34" charset="-120"/>
+              </a:rPr>
+              <a:t>Nothing ships without evidence - gates that can actually stop the line.</a:t>
+            </a:r>
+            <a:endParaRPr lang="en-US" sz="980" dirty="0"/>
+          </a:p>
+        </p:txBody>
+      </p:sp>
+      <p:sp>
+        <p:nvSpPr>
+          <p:cNvPr id="25" name="Shape 23"/>
+          <p:cNvSpPr/>
+          <p:nvPr/>
+        </p:nvSpPr>
+        <p:spPr>
+          <a:xfrm>
+            <a:off x="9255100" y="3419856"/>
+            <a:ext cx="210312" cy="274320"/>
+          </a:xfrm>
+          <a:prstGeom prst="rightArrow">
+            <a:avLst/>
+          </a:prstGeom>
+          <a:solidFill>
+            <a:srgbClr val="06B6D4"/>
+          </a:solidFill>
+          <a:ln/>
+        </p:spPr>
+      </p:sp>
+      <p:sp>
+        <p:nvSpPr>
+          <p:cNvPr id="26" name="Shape 24"/>
+          <p:cNvSpPr/>
+          <p:nvPr/>
+        </p:nvSpPr>
+        <p:spPr>
+          <a:xfrm>
+            <a:off x="9479128" y="2514600"/>
+            <a:ext cx="1938528" cy="2103120"/>
+          </a:xfrm>
+          <a:prstGeom prst="roundRect">
+            <a:avLst>
+              <a:gd name="adj" fmla="val 3302"/>
+            </a:avLst>
+          </a:prstGeom>
+          <a:solidFill>
+            <a:srgbClr val="111A2E"/>
+          </a:solidFill>
+          <a:ln w="19050">
+            <a:solidFill>
+              <a:srgbClr val="3B82F6"/>
+            </a:solidFill>
+            <a:prstDash val="solid"/>
+          </a:ln>
+        </p:spPr>
+      </p:sp>
+      <p:sp>
+        <p:nvSpPr>
+          <p:cNvPr id="27" name="Text 25"/>
+          <p:cNvSpPr/>
+          <p:nvPr/>
+        </p:nvSpPr>
+        <p:spPr>
+          <a:xfrm>
+            <a:off x="9607144" y="2633472"/>
+            <a:ext cx="1682496" cy="310896"/>
+          </a:xfrm>
+          <a:prstGeom prst="rect">
+            <a:avLst/>
+          </a:prstGeom>
+          <a:noFill/>
+          <a:ln/>
+        </p:spPr>
+        <p:txBody>
+          <a:bodyPr wrap="square" rtlCol="0" anchor="ctr"/>
+          <a:lstStyle/>
+          <a:p>
+            <a:pPr indent="0" marL="0">
+              <a:buNone/>
+            </a:pPr>
+            <a:r>
+              <a:rPr lang="en-US" sz="1100" b="1" dirty="0">
+                <a:solidFill>
+                  <a:srgbClr val="3B82F6"/>
+                </a:solidFill>
+                <a:latin typeface="Consolas" pitchFamily="34" charset="0"/>
+                <a:ea typeface="Consolas" pitchFamily="34" charset="-122"/>
+                <a:cs typeface="Consolas" pitchFamily="34" charset="-120"/>
+              </a:rPr>
+              <a:t>05</a:t>
+            </a:r>
+            <a:endParaRPr lang="en-US" sz="1100" dirty="0"/>
+          </a:p>
+        </p:txBody>
+      </p:sp>
+      <p:sp>
+        <p:nvSpPr>
+          <p:cNvPr id="28" name="Text 26"/>
+          <p:cNvSpPr/>
+          <p:nvPr/>
+        </p:nvSpPr>
+        <p:spPr>
+          <a:xfrm>
+            <a:off x="9607144" y="2962656"/>
+            <a:ext cx="1682496" cy="566928"/>
+          </a:xfrm>
+          <a:prstGeom prst="rect">
+            <a:avLst/>
+          </a:prstGeom>
+          <a:noFill/>
+          <a:ln/>
+        </p:spPr>
+        <p:txBody>
+          <a:bodyPr wrap="square" rtlCol="0" anchor="ctr"/>
+          <a:lstStyle/>
+          <a:p>
+            <a:pPr indent="0" marL="0">
+              <a:buNone/>
+            </a:pPr>
+            <a:r>
+              <a:rPr lang="en-US" sz="1350" b="1" dirty="0">
+                <a:solidFill>
+                  <a:srgbClr val="FFFFFF"/>
+                </a:solidFill>
+                <a:latin typeface="Segoe UI" pitchFamily="34" charset="0"/>
+                <a:ea typeface="Segoe UI" pitchFamily="34" charset="-122"/>
+                <a:cs typeface="Segoe UI" pitchFamily="34" charset="-120"/>
+              </a:rPr>
+              <a:t>Local runtime</a:t>
+            </a:r>
+            <a:endParaRPr lang="en-US" sz="1350" dirty="0"/>
+          </a:p>
+        </p:txBody>
+      </p:sp>
+      <p:sp>
+        <p:nvSpPr>
+          <p:cNvPr id="29" name="Text 27"/>
+          <p:cNvSpPr/>
+          <p:nvPr/>
+        </p:nvSpPr>
+        <p:spPr>
+          <a:xfrm>
+            <a:off x="9607144" y="3566160"/>
+            <a:ext cx="1682496" cy="960120"/>
+          </a:xfrm>
+          <a:prstGeom prst="rect">
+            <a:avLst/>
+          </a:prstGeom>
+          <a:noFill/>
+          <a:ln/>
+        </p:spPr>
+        <p:txBody>
+          <a:bodyPr wrap="square" rtlCol="0" anchor="ctr"/>
+          <a:lstStyle/>
+          <a:p>
+            <a:pPr indent="0" marL="0">
+              <a:buNone/>
+            </a:pPr>
+            <a:r>
+              <a:rPr lang="en-US" sz="980" dirty="0">
+                <a:solidFill>
+                  <a:srgbClr val="CBD5E1"/>
+                </a:solidFill>
+                <a:latin typeface="Segoe UI" pitchFamily="34" charset="0"/>
+                <a:ea typeface="Segoe UI" pitchFamily="34" charset="-122"/>
+                <a:cs typeface="Segoe UI" pitchFamily="34" charset="-120"/>
+              </a:rPr>
+              <a:t>Ollama serving Qwen 2.5:7b; no API keys and no data egress.</a:t>
+            </a:r>
+            <a:endParaRPr lang="en-US" sz="980" dirty="0"/>
+          </a:p>
+        </p:txBody>
+      </p:sp>
+      <p:sp>
+        <p:nvSpPr>
+          <p:cNvPr id="30" name="Shape 28"/>
+          <p:cNvSpPr/>
+          <p:nvPr/>
+        </p:nvSpPr>
+        <p:spPr>
+          <a:xfrm>
+            <a:off x="822960" y="5961888"/>
+            <a:ext cx="10515600" cy="0"/>
+          </a:xfrm>
+          <a:prstGeom prst="line">
+            <a:avLst/>
+          </a:prstGeom>
+          <a:noFill/>
+          <a:ln w="12700">
+            <a:solidFill>
+              <a:srgbClr val="1E2D45"/>
+            </a:solidFill>
+            <a:prstDash val="solid"/>
+          </a:ln>
+        </p:spPr>
+      </p:sp>
+      <p:sp>
+        <p:nvSpPr>
+          <p:cNvPr id="31" name="Text 29"/>
+          <p:cNvSpPr/>
+          <p:nvPr/>
+        </p:nvSpPr>
+        <p:spPr>
+          <a:xfrm>
+            <a:off x="822960" y="6053328"/>
+            <a:ext cx="9692640" cy="457200"/>
+          </a:xfrm>
+          <a:prstGeom prst="rect">
+            <a:avLst/>
+          </a:prstGeom>
+          <a:noFill/>
+          <a:ln/>
+        </p:spPr>
+        <p:txBody>
+          <a:bodyPr wrap="square" rtlCol="0" anchor="ctr"/>
+          <a:lstStyle/>
+          <a:p>
+            <a:pPr indent="0" marL="0">
+              <a:buNone/>
+            </a:pPr>
+            <a:r>
+              <a:rPr lang="en-US" sz="1150" dirty="0">
+                <a:solidFill>
+                  <a:srgbClr val="64748B"/>
+                </a:solidFill>
+                <a:latin typeface="Segoe UI" pitchFamily="34" charset="0"/>
+                <a:ea typeface="Segoe UI" pitchFamily="34" charset="-122"/>
+                <a:cs typeface="Segoe UI" pitchFamily="34" charset="-120"/>
+              </a:rPr>
+              <a:t>Each layer is replaceable; the contracts between layers are not.</a:t>
+            </a:r>
+            <a:endParaRPr lang="en-US" sz="1150" dirty="0"/>
+          </a:p>
+        </p:txBody>
+      </p:sp>
+      <p:sp>
+        <p:nvSpPr>
+          <p:cNvPr id="32" name="Text 30"/>
+          <p:cNvSpPr/>
+          <p:nvPr/>
+        </p:nvSpPr>
+        <p:spPr>
+          <a:xfrm>
+            <a:off x="10698480" y="6382512"/>
+            <a:ext cx="1188720" cy="365760"/>
+          </a:xfrm>
+          <a:prstGeom prst="rect">
+            <a:avLst/>
+          </a:prstGeom>
+          <a:noFill/>
+          <a:ln/>
+        </p:spPr>
+        <p:txBody>
+          <a:bodyPr wrap="square" rtlCol="0" anchor="ctr"/>
+          <a:lstStyle/>
+          <a:p>
+            <a:pPr algn="r" indent="0" marL="0">
+              <a:buNone/>
+            </a:pPr>
+            <a:r>
+              <a:rPr lang="en-US" sz="1000" dirty="0">
+                <a:solidFill>
+                  <a:srgbClr val="64748B"/>
+                </a:solidFill>
+                <a:latin typeface="Consolas" pitchFamily="34" charset="0"/>
+                <a:ea typeface="Consolas" pitchFamily="34" charset="-122"/>
+                <a:cs typeface="Consolas" pitchFamily="34" charset="-120"/>
+              </a:rPr>
+              <a:t>4 / 14</a:t>
             </a:r>
             <a:endParaRPr lang="en-US" sz="1000" dirty="0"/>
           </a:p>
@@ -2744,7 +7565,7 @@
                 <a:ea typeface="Consolas" pitchFamily="34" charset="-122"/>
                 <a:cs typeface="Consolas" pitchFamily="34" charset="-120"/>
               </a:rPr>
-              <a:t>THE WORKFORCE</a:t>
+              <a:t>THE SCOREBOARD</a:t>
             </a:r>
             <a:endParaRPr lang="en-US" sz="1200" dirty="0"/>
           </a:p>
@@ -2758,8 +7579,8 @@
         </p:nvSpPr>
         <p:spPr>
           <a:xfrm>
-            <a:off x="822960" y="960120"/>
-            <a:ext cx="10515600" cy="868680"/>
+            <a:off x="822960" y="914400"/>
+            <a:ext cx="10561320" cy="868680"/>
           </a:xfrm>
           <a:prstGeom prst="rect">
             <a:avLst/>
@@ -2775,7 +7596,7 @@
               <a:buNone/>
             </a:pPr>
             <a:r>
-              <a:rPr lang="en-US" sz="3000" b="1" dirty="0">
+              <a:rPr lang="en-US" sz="2700" b="1" dirty="0">
                 <a:solidFill>
                   <a:srgbClr val="FFFFFF"/>
                 </a:solidFill>
@@ -2783,139 +7604,659 @@
                 <a:ea typeface="Segoe UI" pitchFamily="34" charset="-122"/>
                 <a:cs typeface="Segoe UI" pitchFamily="34" charset="-120"/>
               </a:rPr>
-              <a:t>9+ specialist agents, scoped and reliable</a:t>
-            </a:r>
-            <a:endParaRPr lang="en-US" sz="3000" dirty="0"/>
-          </a:p>
-        </p:txBody>
-      </p:sp>
-      <p:sp>
-        <p:nvSpPr>
-          <p:cNvPr id="6" name="Text 4"/>
-          <p:cNvSpPr/>
-          <p:nvPr/>
-        </p:nvSpPr>
-        <p:spPr>
-          <a:xfrm>
-            <a:off x="868680" y="2057400"/>
-            <a:ext cx="10424160" cy="3566160"/>
-          </a:xfrm>
-          <a:prstGeom prst="rect">
-            <a:avLst/>
-          </a:prstGeom>
-          <a:noFill/>
-          <a:ln/>
-        </p:spPr>
-        <p:txBody>
-          <a:bodyPr wrap="square" rtlCol="0" anchor="t"/>
-          <a:lstStyle/>
-          <a:p>
-            <a:pPr marL="342900" indent="-342900">
-              <a:lnSpc>
-                <a:spcPct val="115000"/>
-              </a:lnSpc>
-              <a:spcAft>
-                <a:spcPts val="1000"/>
-              </a:spcAft>
-              <a:buSzPct val="100000"/>
-              <a:buChar char="▸"/>
-            </a:pPr>
-            <a:r>
-              <a:rPr lang="en-US" sz="1600" dirty="0">
-                <a:solidFill>
-                  <a:srgbClr val="CBD5E1"/>
+              <a:t>The system is measured, not vibes</a:t>
+            </a:r>
+            <a:endParaRPr lang="en-US" sz="2700" dirty="0"/>
+          </a:p>
+        </p:txBody>
+      </p:sp>
+      <p:sp>
+        <p:nvSpPr>
+          <p:cNvPr id="6" name="Shape 4"/>
+          <p:cNvSpPr/>
+          <p:nvPr/>
+        </p:nvSpPr>
+        <p:spPr>
+          <a:xfrm>
+            <a:off x="822960" y="2194560"/>
+            <a:ext cx="2423160" cy="2697480"/>
+          </a:xfrm>
+          <a:prstGeom prst="roundRect">
+            <a:avLst>
+              <a:gd name="adj" fmla="val 3019"/>
+            </a:avLst>
+          </a:prstGeom>
+          <a:solidFill>
+            <a:srgbClr val="111A2E"/>
+          </a:solidFill>
+          <a:ln w="12700">
+            <a:solidFill>
+              <a:srgbClr val="1E2D45"/>
+            </a:solidFill>
+            <a:prstDash val="solid"/>
+          </a:ln>
+        </p:spPr>
+      </p:sp>
+      <p:sp>
+        <p:nvSpPr>
+          <p:cNvPr id="7" name="Text 5"/>
+          <p:cNvSpPr/>
+          <p:nvPr/>
+        </p:nvSpPr>
+        <p:spPr>
+          <a:xfrm>
+            <a:off x="960120" y="2514600"/>
+            <a:ext cx="2148840" cy="914400"/>
+          </a:xfrm>
+          <a:prstGeom prst="rect">
+            <a:avLst/>
+          </a:prstGeom>
+          <a:noFill/>
+          <a:ln/>
+        </p:spPr>
+        <p:txBody>
+          <a:bodyPr wrap="square" rtlCol="0" anchor="ctr"/>
+          <a:lstStyle/>
+          <a:p>
+            <a:pPr algn="ctr" indent="0" marL="0">
+              <a:buNone/>
+            </a:pPr>
+            <a:r>
+              <a:rPr lang="en-US" sz="3800" b="1" dirty="0">
+                <a:solidFill>
+                  <a:srgbClr val="3B82F6"/>
                 </a:solidFill>
                 <a:latin typeface="Segoe UI" pitchFamily="34" charset="0"/>
                 <a:ea typeface="Segoe UI" pitchFamily="34" charset="-122"/>
                 <a:cs typeface="Segoe UI" pitchFamily="34" charset="-120"/>
               </a:rPr>
-              <a:t>Engineering agents build and maintain apps end-to-end</a:t>
-            </a:r>
-            <a:endParaRPr lang="en-US" sz="1600" dirty="0"/>
-          </a:p>
-          <a:p>
-            <a:pPr marL="342900" indent="-342900">
-              <a:lnSpc>
-                <a:spcPct val="115000"/>
-              </a:lnSpc>
-              <a:spcAft>
-                <a:spcPts val="1000"/>
-              </a:spcAft>
-              <a:buSzPct val="100000"/>
-              <a:buChar char="▸"/>
-            </a:pPr>
-            <a:r>
-              <a:rPr lang="en-US" sz="1600" dirty="0">
-                <a:solidFill>
-                  <a:srgbClr val="CBD5E1"/>
+              <a:t>100%</a:t>
+            </a:r>
+            <a:endParaRPr lang="en-US" sz="3800" dirty="0"/>
+          </a:p>
+        </p:txBody>
+      </p:sp>
+      <p:sp>
+        <p:nvSpPr>
+          <p:cNvPr id="8" name="Text 6"/>
+          <p:cNvSpPr/>
+          <p:nvPr/>
+        </p:nvSpPr>
+        <p:spPr>
+          <a:xfrm>
+            <a:off x="960120" y="3520440"/>
+            <a:ext cx="2148840" cy="502920"/>
+          </a:xfrm>
+          <a:prstGeom prst="rect">
+            <a:avLst/>
+          </a:prstGeom>
+          <a:noFill/>
+          <a:ln/>
+        </p:spPr>
+        <p:txBody>
+          <a:bodyPr wrap="square" rtlCol="0" anchor="ctr"/>
+          <a:lstStyle/>
+          <a:p>
+            <a:pPr algn="ctr" indent="0" marL="0">
+              <a:buNone/>
+            </a:pPr>
+            <a:r>
+              <a:rPr lang="en-US" sz="1450" b="1" dirty="0">
+                <a:solidFill>
+                  <a:srgbClr val="FFFFFF"/>
                 </a:solidFill>
                 <a:latin typeface="Segoe UI" pitchFamily="34" charset="0"/>
                 <a:ea typeface="Segoe UI" pitchFamily="34" charset="-122"/>
                 <a:cs typeface="Segoe UI" pitchFamily="34" charset="-120"/>
               </a:rPr>
-              <a:t>QA, PM, and Docs agents enforce, track, and remember</a:t>
-            </a:r>
-            <a:endParaRPr lang="en-US" sz="1600" dirty="0"/>
-          </a:p>
-          <a:p>
-            <a:pPr marL="342900" indent="-342900">
-              <a:lnSpc>
-                <a:spcPct val="115000"/>
-              </a:lnSpc>
-              <a:spcAft>
-                <a:spcPts val="1000"/>
-              </a:spcAft>
-              <a:buSzPct val="100000"/>
-              <a:buChar char="▸"/>
-            </a:pPr>
-            <a:r>
-              <a:rPr lang="en-US" sz="1600" dirty="0">
-                <a:solidFill>
-                  <a:srgbClr val="CBD5E1"/>
+              <a:t>Router accuracy</a:t>
+            </a:r>
+            <a:endParaRPr lang="en-US" sz="1450" dirty="0"/>
+          </a:p>
+        </p:txBody>
+      </p:sp>
+      <p:sp>
+        <p:nvSpPr>
+          <p:cNvPr id="9" name="Text 7"/>
+          <p:cNvSpPr/>
+          <p:nvPr/>
+        </p:nvSpPr>
+        <p:spPr>
+          <a:xfrm>
+            <a:off x="1005840" y="4069080"/>
+            <a:ext cx="2057400" cy="685800"/>
+          </a:xfrm>
+          <a:prstGeom prst="rect">
+            <a:avLst/>
+          </a:prstGeom>
+          <a:noFill/>
+          <a:ln/>
+        </p:spPr>
+        <p:txBody>
+          <a:bodyPr wrap="square" rtlCol="0" anchor="ctr"/>
+          <a:lstStyle/>
+          <a:p>
+            <a:pPr algn="ctr" indent="0" marL="0">
+              <a:buNone/>
+            </a:pPr>
+            <a:r>
+              <a:rPr lang="en-US" sz="1050" dirty="0">
+                <a:solidFill>
+                  <a:srgbClr val="94A3B8"/>
                 </a:solidFill>
                 <a:latin typeface="Segoe UI" pitchFamily="34" charset="0"/>
                 <a:ea typeface="Segoe UI" pitchFamily="34" charset="-122"/>
                 <a:cs typeface="Segoe UI" pitchFamily="34" charset="-120"/>
               </a:rPr>
-              <a:t>Specialists: GIS, OSINT, Data, system watching</a:t>
-            </a:r>
-            <a:endParaRPr lang="en-US" sz="1600" dirty="0"/>
-          </a:p>
-          <a:p>
-            <a:pPr marL="342900" indent="-342900">
-              <a:lnSpc>
-                <a:spcPct val="115000"/>
-              </a:lnSpc>
-              <a:spcAft>
-                <a:spcPts val="1000"/>
-              </a:spcAft>
-              <a:buSzPct val="100000"/>
-              <a:buChar char="▸"/>
-            </a:pPr>
-            <a:r>
-              <a:rPr lang="en-US" sz="1600" dirty="0">
-                <a:solidFill>
-                  <a:srgbClr val="CBD5E1"/>
+              <a:t>On a 30-query validation set built from real daily phrasings</a:t>
+            </a:r>
+            <a:endParaRPr lang="en-US" sz="1050" dirty="0"/>
+          </a:p>
+        </p:txBody>
+      </p:sp>
+      <p:sp>
+        <p:nvSpPr>
+          <p:cNvPr id="10" name="Shape 8"/>
+          <p:cNvSpPr/>
+          <p:nvPr/>
+        </p:nvSpPr>
+        <p:spPr>
+          <a:xfrm>
+            <a:off x="3520440" y="2194560"/>
+            <a:ext cx="2423160" cy="2697480"/>
+          </a:xfrm>
+          <a:prstGeom prst="roundRect">
+            <a:avLst>
+              <a:gd name="adj" fmla="val 3019"/>
+            </a:avLst>
+          </a:prstGeom>
+          <a:solidFill>
+            <a:srgbClr val="111A2E"/>
+          </a:solidFill>
+          <a:ln w="12700">
+            <a:solidFill>
+              <a:srgbClr val="1E2D45"/>
+            </a:solidFill>
+            <a:prstDash val="solid"/>
+          </a:ln>
+        </p:spPr>
+      </p:sp>
+      <p:sp>
+        <p:nvSpPr>
+          <p:cNvPr id="11" name="Text 9"/>
+          <p:cNvSpPr/>
+          <p:nvPr/>
+        </p:nvSpPr>
+        <p:spPr>
+          <a:xfrm>
+            <a:off x="3657600" y="2514600"/>
+            <a:ext cx="2148840" cy="914400"/>
+          </a:xfrm>
+          <a:prstGeom prst="rect">
+            <a:avLst/>
+          </a:prstGeom>
+          <a:noFill/>
+          <a:ln/>
+        </p:spPr>
+        <p:txBody>
+          <a:bodyPr wrap="square" rtlCol="0" anchor="ctr"/>
+          <a:lstStyle/>
+          <a:p>
+            <a:pPr algn="ctr" indent="0" marL="0">
+              <a:buNone/>
+            </a:pPr>
+            <a:r>
+              <a:rPr lang="en-US" sz="3800" b="1" dirty="0">
+                <a:solidFill>
+                  <a:srgbClr val="06B6D4"/>
                 </a:solidFill>
                 <a:latin typeface="Segoe UI" pitchFamily="34" charset="0"/>
                 <a:ea typeface="Segoe UI" pitchFamily="34" charset="-122"/>
                 <a:cs typeface="Segoe UI" pitchFamily="34" charset="-120"/>
               </a:rPr>
-              <a:t>Every agent: scoped mandate, own queue, shared memory</a:t>
-            </a:r>
-            <a:endParaRPr lang="en-US" sz="1600" dirty="0"/>
-          </a:p>
-        </p:txBody>
-      </p:sp>
-      <p:sp>
-        <p:nvSpPr>
-          <p:cNvPr id="7" name="Text 5"/>
-          <p:cNvSpPr/>
-          <p:nvPr/>
-        </p:nvSpPr>
-        <p:spPr>
-          <a:xfrm>
-            <a:off x="10698480" y="6355080"/>
+              <a:t>51/52</a:t>
+            </a:r>
+            <a:endParaRPr lang="en-US" sz="3800" dirty="0"/>
+          </a:p>
+        </p:txBody>
+      </p:sp>
+      <p:sp>
+        <p:nvSpPr>
+          <p:cNvPr id="12" name="Text 10"/>
+          <p:cNvSpPr/>
+          <p:nvPr/>
+        </p:nvSpPr>
+        <p:spPr>
+          <a:xfrm>
+            <a:off x="3657600" y="3520440"/>
+            <a:ext cx="2148840" cy="502920"/>
+          </a:xfrm>
+          <a:prstGeom prst="rect">
+            <a:avLst/>
+          </a:prstGeom>
+          <a:noFill/>
+          <a:ln/>
+        </p:spPr>
+        <p:txBody>
+          <a:bodyPr wrap="square" rtlCol="0" anchor="ctr"/>
+          <a:lstStyle/>
+          <a:p>
+            <a:pPr algn="ctr" indent="0" marL="0">
+              <a:buNone/>
+            </a:pPr>
+            <a:r>
+              <a:rPr lang="en-US" sz="1450" b="1" dirty="0">
+                <a:solidFill>
+                  <a:srgbClr val="FFFFFF"/>
+                </a:solidFill>
+                <a:latin typeface="Segoe UI" pitchFamily="34" charset="0"/>
+                <a:ea typeface="Segoe UI" pitchFamily="34" charset="-122"/>
+                <a:cs typeface="Segoe UI" pitchFamily="34" charset="-120"/>
+              </a:rPr>
+              <a:t>Production checks</a:t>
+            </a:r>
+            <a:endParaRPr lang="en-US" sz="1450" dirty="0"/>
+          </a:p>
+        </p:txBody>
+      </p:sp>
+      <p:sp>
+        <p:nvSpPr>
+          <p:cNvPr id="13" name="Text 11"/>
+          <p:cNvSpPr/>
+          <p:nvPr/>
+        </p:nvSpPr>
+        <p:spPr>
+          <a:xfrm>
+            <a:off x="3703320" y="4069080"/>
+            <a:ext cx="2057400" cy="685800"/>
+          </a:xfrm>
+          <a:prstGeom prst="rect">
+            <a:avLst/>
+          </a:prstGeom>
+          <a:noFill/>
+          <a:ln/>
+        </p:spPr>
+        <p:txBody>
+          <a:bodyPr wrap="square" rtlCol="0" anchor="ctr"/>
+          <a:lstStyle/>
+          <a:p>
+            <a:pPr algn="ctr" indent="0" marL="0">
+              <a:buNone/>
+            </a:pPr>
+            <a:r>
+              <a:rPr lang="en-US" sz="1050" dirty="0">
+                <a:solidFill>
+                  <a:srgbClr val="94A3B8"/>
+                </a:solidFill>
+                <a:latin typeface="Segoe UI" pitchFamily="34" charset="0"/>
+                <a:ea typeface="Segoe UI" pitchFamily="34" charset="-122"/>
+                <a:cs typeface="Segoe UI" pitchFamily="34" charset="-120"/>
+              </a:rPr>
+              <a:t>The one miss exposed a category boundary - which got sharpened</a:t>
+            </a:r>
+            <a:endParaRPr lang="en-US" sz="1050" dirty="0"/>
+          </a:p>
+        </p:txBody>
+      </p:sp>
+      <p:sp>
+        <p:nvSpPr>
+          <p:cNvPr id="14" name="Shape 12"/>
+          <p:cNvSpPr/>
+          <p:nvPr/>
+        </p:nvSpPr>
+        <p:spPr>
+          <a:xfrm>
+            <a:off x="6217920" y="2194560"/>
+            <a:ext cx="2423160" cy="2697480"/>
+          </a:xfrm>
+          <a:prstGeom prst="roundRect">
+            <a:avLst>
+              <a:gd name="adj" fmla="val 3019"/>
+            </a:avLst>
+          </a:prstGeom>
+          <a:solidFill>
+            <a:srgbClr val="111A2E"/>
+          </a:solidFill>
+          <a:ln w="12700">
+            <a:solidFill>
+              <a:srgbClr val="1E2D45"/>
+            </a:solidFill>
+            <a:prstDash val="solid"/>
+          </a:ln>
+        </p:spPr>
+      </p:sp>
+      <p:sp>
+        <p:nvSpPr>
+          <p:cNvPr id="15" name="Text 13"/>
+          <p:cNvSpPr/>
+          <p:nvPr/>
+        </p:nvSpPr>
+        <p:spPr>
+          <a:xfrm>
+            <a:off x="6355080" y="2514600"/>
+            <a:ext cx="2148840" cy="914400"/>
+          </a:xfrm>
+          <a:prstGeom prst="rect">
+            <a:avLst/>
+          </a:prstGeom>
+          <a:noFill/>
+          <a:ln/>
+        </p:spPr>
+        <p:txBody>
+          <a:bodyPr wrap="square" rtlCol="0" anchor="ctr"/>
+          <a:lstStyle/>
+          <a:p>
+            <a:pPr algn="ctr" indent="0" marL="0">
+              <a:buNone/>
+            </a:pPr>
+            <a:r>
+              <a:rPr lang="en-US" sz="3800" b="1" dirty="0">
+                <a:solidFill>
+                  <a:srgbClr val="22D3A0"/>
+                </a:solidFill>
+                <a:latin typeface="Segoe UI" pitchFamily="34" charset="0"/>
+                <a:ea typeface="Segoe UI" pitchFamily="34" charset="-122"/>
+                <a:cs typeface="Segoe UI" pitchFamily="34" charset="-120"/>
+              </a:rPr>
+              <a:t>9+</a:t>
+            </a:r>
+            <a:endParaRPr lang="en-US" sz="3800" dirty="0"/>
+          </a:p>
+        </p:txBody>
+      </p:sp>
+      <p:sp>
+        <p:nvSpPr>
+          <p:cNvPr id="16" name="Text 14"/>
+          <p:cNvSpPr/>
+          <p:nvPr/>
+        </p:nvSpPr>
+        <p:spPr>
+          <a:xfrm>
+            <a:off x="6355080" y="3520440"/>
+            <a:ext cx="2148840" cy="502920"/>
+          </a:xfrm>
+          <a:prstGeom prst="rect">
+            <a:avLst/>
+          </a:prstGeom>
+          <a:noFill/>
+          <a:ln/>
+        </p:spPr>
+        <p:txBody>
+          <a:bodyPr wrap="square" rtlCol="0" anchor="ctr"/>
+          <a:lstStyle/>
+          <a:p>
+            <a:pPr algn="ctr" indent="0" marL="0">
+              <a:buNone/>
+            </a:pPr>
+            <a:r>
+              <a:rPr lang="en-US" sz="1450" b="1" dirty="0">
+                <a:solidFill>
+                  <a:srgbClr val="FFFFFF"/>
+                </a:solidFill>
+                <a:latin typeface="Segoe UI" pitchFamily="34" charset="0"/>
+                <a:ea typeface="Segoe UI" pitchFamily="34" charset="-122"/>
+                <a:cs typeface="Segoe UI" pitchFamily="34" charset="-120"/>
+              </a:rPr>
+              <a:t>Specialist agents</a:t>
+            </a:r>
+            <a:endParaRPr lang="en-US" sz="1450" dirty="0"/>
+          </a:p>
+        </p:txBody>
+      </p:sp>
+      <p:sp>
+        <p:nvSpPr>
+          <p:cNvPr id="17" name="Text 15"/>
+          <p:cNvSpPr/>
+          <p:nvPr/>
+        </p:nvSpPr>
+        <p:spPr>
+          <a:xfrm>
+            <a:off x="6400800" y="4069080"/>
+            <a:ext cx="2057400" cy="685800"/>
+          </a:xfrm>
+          <a:prstGeom prst="rect">
+            <a:avLst/>
+          </a:prstGeom>
+          <a:noFill/>
+          <a:ln/>
+        </p:spPr>
+        <p:txBody>
+          <a:bodyPr wrap="square" rtlCol="0" anchor="ctr"/>
+          <a:lstStyle/>
+          <a:p>
+            <a:pPr algn="ctr" indent="0" marL="0">
+              <a:buNone/>
+            </a:pPr>
+            <a:r>
+              <a:rPr lang="en-US" sz="1050" dirty="0">
+                <a:solidFill>
+                  <a:srgbClr val="94A3B8"/>
+                </a:solidFill>
+                <a:latin typeface="Segoe UI" pitchFamily="34" charset="0"/>
+                <a:ea typeface="Segoe UI" pitchFamily="34" charset="-122"/>
+                <a:cs typeface="Segoe UI" pitchFamily="34" charset="-120"/>
+              </a:rPr>
+              <a:t>Scoped mandates, per-agent queues, one shared memory</a:t>
+            </a:r>
+            <a:endParaRPr lang="en-US" sz="1050" dirty="0"/>
+          </a:p>
+        </p:txBody>
+      </p:sp>
+      <p:sp>
+        <p:nvSpPr>
+          <p:cNvPr id="18" name="Shape 16"/>
+          <p:cNvSpPr/>
+          <p:nvPr/>
+        </p:nvSpPr>
+        <p:spPr>
+          <a:xfrm>
+            <a:off x="8915400" y="2194560"/>
+            <a:ext cx="2423160" cy="2697480"/>
+          </a:xfrm>
+          <a:prstGeom prst="roundRect">
+            <a:avLst>
+              <a:gd name="adj" fmla="val 3019"/>
+            </a:avLst>
+          </a:prstGeom>
+          <a:solidFill>
+            <a:srgbClr val="111A2E"/>
+          </a:solidFill>
+          <a:ln w="12700">
+            <a:solidFill>
+              <a:srgbClr val="1E2D45"/>
+            </a:solidFill>
+            <a:prstDash val="solid"/>
+          </a:ln>
+        </p:spPr>
+      </p:sp>
+      <p:sp>
+        <p:nvSpPr>
+          <p:cNvPr id="19" name="Text 17"/>
+          <p:cNvSpPr/>
+          <p:nvPr/>
+        </p:nvSpPr>
+        <p:spPr>
+          <a:xfrm>
+            <a:off x="9052560" y="2514600"/>
+            <a:ext cx="2148840" cy="914400"/>
+          </a:xfrm>
+          <a:prstGeom prst="rect">
+            <a:avLst/>
+          </a:prstGeom>
+          <a:noFill/>
+          <a:ln/>
+        </p:spPr>
+        <p:txBody>
+          <a:bodyPr wrap="square" rtlCol="0" anchor="ctr"/>
+          <a:lstStyle/>
+          <a:p>
+            <a:pPr algn="ctr" indent="0" marL="0">
+              <a:buNone/>
+            </a:pPr>
+            <a:r>
+              <a:rPr lang="en-US" sz="3800" b="1" dirty="0">
+                <a:solidFill>
+                  <a:srgbClr val="F59E0B"/>
+                </a:solidFill>
+                <a:latin typeface="Segoe UI" pitchFamily="34" charset="0"/>
+                <a:ea typeface="Segoe UI" pitchFamily="34" charset="-122"/>
+                <a:cs typeface="Segoe UI" pitchFamily="34" charset="-120"/>
+              </a:rPr>
+              <a:t>8.7K+</a:t>
+            </a:r>
+            <a:endParaRPr lang="en-US" sz="3800" dirty="0"/>
+          </a:p>
+        </p:txBody>
+      </p:sp>
+      <p:sp>
+        <p:nvSpPr>
+          <p:cNvPr id="20" name="Text 18"/>
+          <p:cNvSpPr/>
+          <p:nvPr/>
+        </p:nvSpPr>
+        <p:spPr>
+          <a:xfrm>
+            <a:off x="9052560" y="3520440"/>
+            <a:ext cx="2148840" cy="502920"/>
+          </a:xfrm>
+          <a:prstGeom prst="rect">
+            <a:avLst/>
+          </a:prstGeom>
+          <a:noFill/>
+          <a:ln/>
+        </p:spPr>
+        <p:txBody>
+          <a:bodyPr wrap="square" rtlCol="0" anchor="ctr"/>
+          <a:lstStyle/>
+          <a:p>
+            <a:pPr algn="ctr" indent="0" marL="0">
+              <a:buNone/>
+            </a:pPr>
+            <a:r>
+              <a:rPr lang="en-US" sz="1450" b="1" dirty="0">
+                <a:solidFill>
+                  <a:srgbClr val="FFFFFF"/>
+                </a:solidFill>
+                <a:latin typeface="Segoe UI" pitchFamily="34" charset="0"/>
+                <a:ea typeface="Segoe UI" pitchFamily="34" charset="-122"/>
+                <a:cs typeface="Segoe UI" pitchFamily="34" charset="-120"/>
+              </a:rPr>
+              <a:t>LOC open source</a:t>
+            </a:r>
+            <a:endParaRPr lang="en-US" sz="1450" dirty="0"/>
+          </a:p>
+        </p:txBody>
+      </p:sp>
+      <p:sp>
+        <p:nvSpPr>
+          <p:cNvPr id="21" name="Text 19"/>
+          <p:cNvSpPr/>
+          <p:nvPr/>
+        </p:nvSpPr>
+        <p:spPr>
+          <a:xfrm>
+            <a:off x="9098280" y="4069080"/>
+            <a:ext cx="2057400" cy="685800"/>
+          </a:xfrm>
+          <a:prstGeom prst="rect">
+            <a:avLst/>
+          </a:prstGeom>
+          <a:noFill/>
+          <a:ln/>
+        </p:spPr>
+        <p:txBody>
+          <a:bodyPr wrap="square" rtlCol="0" anchor="ctr"/>
+          <a:lstStyle/>
+          <a:p>
+            <a:pPr algn="ctr" indent="0" marL="0">
+              <a:buNone/>
+            </a:pPr>
+            <a:r>
+              <a:rPr lang="en-US" sz="1050" dirty="0">
+                <a:solidFill>
+                  <a:srgbClr val="94A3B8"/>
+                </a:solidFill>
+                <a:latin typeface="Segoe UI" pitchFamily="34" charset="0"/>
+                <a:ea typeface="Segoe UI" pitchFamily="34" charset="-122"/>
+                <a:cs typeface="Segoe UI" pitchFamily="34" charset="-120"/>
+              </a:rPr>
+              <a:t>Two production frameworks maintained under the same gates</a:t>
+            </a:r>
+            <a:endParaRPr lang="en-US" sz="1050" dirty="0"/>
+          </a:p>
+        </p:txBody>
+      </p:sp>
+      <p:sp>
+        <p:nvSpPr>
+          <p:cNvPr id="22" name="Shape 20"/>
+          <p:cNvSpPr/>
+          <p:nvPr/>
+        </p:nvSpPr>
+        <p:spPr>
+          <a:xfrm>
+            <a:off x="822960" y="5413248"/>
+            <a:ext cx="10515600" cy="0"/>
+          </a:xfrm>
+          <a:prstGeom prst="line">
+            <a:avLst/>
+          </a:prstGeom>
+          <a:noFill/>
+          <a:ln w="12700">
+            <a:solidFill>
+              <a:srgbClr val="1E2D45"/>
+            </a:solidFill>
+            <a:prstDash val="solid"/>
+          </a:ln>
+        </p:spPr>
+      </p:sp>
+      <p:sp>
+        <p:nvSpPr>
+          <p:cNvPr id="23" name="Text 21"/>
+          <p:cNvSpPr/>
+          <p:nvPr/>
+        </p:nvSpPr>
+        <p:spPr>
+          <a:xfrm>
+            <a:off x="822960" y="5504688"/>
+            <a:ext cx="10424160" cy="411480"/>
+          </a:xfrm>
+          <a:prstGeom prst="rect">
+            <a:avLst/>
+          </a:prstGeom>
+          <a:noFill/>
+          <a:ln/>
+        </p:spPr>
+        <p:txBody>
+          <a:bodyPr wrap="square" rtlCol="0" anchor="ctr"/>
+          <a:lstStyle/>
+          <a:p>
+            <a:pPr indent="0" marL="0">
+              <a:buNone/>
+            </a:pPr>
+            <a:r>
+              <a:rPr lang="en-US" sz="1300" i="1" dirty="0">
+                <a:solidFill>
+                  <a:srgbClr val="06B6D4"/>
+                </a:solidFill>
+                <a:latin typeface="Segoe UI" pitchFamily="34" charset="0"/>
+                <a:ea typeface="Segoe UI" pitchFamily="34" charset="-122"/>
+                <a:cs typeface="Segoe UI" pitchFamily="34" charset="-120"/>
+              </a:rPr>
+              <a:t>→  Every number on this slide is readable from artifacts, not from a status field.</a:t>
+            </a:r>
+            <a:endParaRPr lang="en-US" sz="1300" dirty="0"/>
+          </a:p>
+        </p:txBody>
+      </p:sp>
+      <p:sp>
+        <p:nvSpPr>
+          <p:cNvPr id="24" name="Text 22"/>
+          <p:cNvSpPr/>
+          <p:nvPr/>
+        </p:nvSpPr>
+        <p:spPr>
+          <a:xfrm>
+            <a:off x="10698480" y="6382512"/>
             <a:ext cx="1188720" cy="365760"/>
           </a:xfrm>
           <a:prstGeom prst="rect">
@@ -2940,7 +8281,7 @@
                 <a:ea typeface="Consolas" pitchFamily="34" charset="-122"/>
                 <a:cs typeface="Consolas" pitchFamily="34" charset="-120"/>
               </a:rPr>
-              <a:t>5 / 8</a:t>
+              <a:t>5 / 14</a:t>
             </a:r>
             <a:endParaRPr lang="en-US" sz="1000" dirty="0"/>
           </a:p>
@@ -3051,7 +8392,7 @@
                 <a:ea typeface="Consolas" pitchFamily="34" charset="-122"/>
                 <a:cs typeface="Consolas" pitchFamily="34" charset="-120"/>
               </a:rPr>
-              <a:t>MEMORY</a:t>
+              <a:t>THE MODEL QUESTION</a:t>
             </a:r>
             <a:endParaRPr lang="en-US" sz="1200" dirty="0"/>
           </a:p>
@@ -3065,8 +8406,8 @@
         </p:nvSpPr>
         <p:spPr>
           <a:xfrm>
-            <a:off x="822960" y="960120"/>
-            <a:ext cx="10515600" cy="868680"/>
+            <a:off x="822960" y="914400"/>
+            <a:ext cx="10561320" cy="868680"/>
           </a:xfrm>
           <a:prstGeom prst="rect">
             <a:avLst/>
@@ -3082,7 +8423,7 @@
               <a:buNone/>
             </a:pPr>
             <a:r>
-              <a:rPr lang="en-US" sz="3000" b="1" dirty="0">
+              <a:rPr lang="en-US" sz="2700" b="1" dirty="0">
                 <a:solidFill>
                   <a:srgbClr val="FFFFFF"/>
                 </a:solidFill>
@@ -3090,139 +8431,161 @@
                 <a:ea typeface="Segoe UI" pitchFamily="34" charset="-122"/>
                 <a:cs typeface="Segoe UI" pitchFamily="34" charset="-120"/>
               </a:rPr>
-              <a:t>Structured memory, not a text dump</a:t>
-            </a:r>
-            <a:endParaRPr lang="en-US" sz="3000" dirty="0"/>
-          </a:p>
-        </p:txBody>
-      </p:sp>
-      <p:sp>
-        <p:nvSpPr>
-          <p:cNvPr id="6" name="Text 4"/>
-          <p:cNvSpPr/>
-          <p:nvPr/>
-        </p:nvSpPr>
-        <p:spPr>
-          <a:xfrm>
-            <a:off x="868680" y="2057400"/>
-            <a:ext cx="10424160" cy="3566160"/>
-          </a:xfrm>
-          <a:prstGeom prst="rect">
-            <a:avLst/>
-          </a:prstGeom>
-          <a:noFill/>
-          <a:ln/>
-        </p:spPr>
-        <p:txBody>
-          <a:bodyPr wrap="square" rtlCol="0" anchor="t"/>
-          <a:lstStyle/>
-          <a:p>
-            <a:pPr marL="342900" indent="-342900">
-              <a:lnSpc>
-                <a:spcPct val="115000"/>
-              </a:lnSpc>
-              <a:spcAft>
-                <a:spcPts val="1000"/>
-              </a:spcAft>
-              <a:buSzPct val="100000"/>
-              <a:buChar char="▸"/>
-            </a:pPr>
-            <a:r>
-              <a:rPr lang="en-US" sz="1600" dirty="0">
-                <a:solidFill>
-                  <a:srgbClr val="CBD5E1"/>
+              <a:t>The bottleneck was never model intelligence - it was context quality</a:t>
+            </a:r>
+            <a:endParaRPr lang="en-US" sz="2700" dirty="0"/>
+          </a:p>
+        </p:txBody>
+      </p:sp>
+      <p:graphicFrame>
+        <p:nvGraphicFramePr>
+          <p:cNvPr id="6" name="Chart 0" descr=""/>
+          <p:cNvGraphicFramePr/>
+          <p:nvPr/>
+        </p:nvGraphicFramePr>
+        <p:xfrm>
+          <a:off x="822960" y="1874520"/>
+          <a:ext cx="10515600" cy="3337560"/>
+        </p:xfrm>
+        <a:graphic xmlns:a="http://schemas.openxmlformats.org/drawingml/2006/main">
+          <a:graphicData uri="http://schemas.openxmlformats.org/drawingml/2006/chart">
+            <c:chart xmlns:c="http://schemas.openxmlformats.org/drawingml/2006/chart" r:id="rId1"/>
+          </a:graphicData>
+        </a:graphic>
+      </p:graphicFrame>
+      <p:sp>
+        <p:nvSpPr>
+          <p:cNvPr id="7" name="Shape 4"/>
+          <p:cNvSpPr/>
+          <p:nvPr/>
+        </p:nvSpPr>
+        <p:spPr>
+          <a:xfrm>
+            <a:off x="822960" y="5413248"/>
+            <a:ext cx="10515600" cy="0"/>
+          </a:xfrm>
+          <a:prstGeom prst="line">
+            <a:avLst/>
+          </a:prstGeom>
+          <a:noFill/>
+          <a:ln w="12700">
+            <a:solidFill>
+              <a:srgbClr val="1E2D45"/>
+            </a:solidFill>
+            <a:prstDash val="solid"/>
+          </a:ln>
+        </p:spPr>
+      </p:sp>
+      <p:sp>
+        <p:nvSpPr>
+          <p:cNvPr id="8" name="Text 5"/>
+          <p:cNvSpPr/>
+          <p:nvPr/>
+        </p:nvSpPr>
+        <p:spPr>
+          <a:xfrm>
+            <a:off x="822960" y="5504688"/>
+            <a:ext cx="10424160" cy="411480"/>
+          </a:xfrm>
+          <a:prstGeom prst="rect">
+            <a:avLst/>
+          </a:prstGeom>
+          <a:noFill/>
+          <a:ln/>
+        </p:spPr>
+        <p:txBody>
+          <a:bodyPr wrap="square" rtlCol="0" anchor="ctr"/>
+          <a:lstStyle/>
+          <a:p>
+            <a:pPr indent="0" marL="0">
+              <a:buNone/>
+            </a:pPr>
+            <a:r>
+              <a:rPr lang="en-US" sz="1300" i="1" dirty="0">
+                <a:solidFill>
+                  <a:srgbClr val="06B6D4"/>
                 </a:solidFill>
                 <a:latin typeface="Segoe UI" pitchFamily="34" charset="0"/>
                 <a:ea typeface="Segoe UI" pitchFamily="34" charset="-122"/>
                 <a:cs typeface="Segoe UI" pitchFamily="34" charset="-120"/>
               </a:rPr>
-              <a:t>Rules - true until changed, append-only, versioned</a:t>
-            </a:r>
-            <a:endParaRPr lang="en-US" sz="1600" dirty="0"/>
-          </a:p>
-          <a:p>
-            <a:pPr marL="342900" indent="-342900">
-              <a:lnSpc>
-                <a:spcPct val="115000"/>
-              </a:lnSpc>
-              <a:spcAft>
-                <a:spcPts val="1000"/>
-              </a:spcAft>
-              <a:buSzPct val="100000"/>
-              <a:buChar char="▸"/>
-            </a:pPr>
-            <a:r>
-              <a:rPr lang="en-US" sz="1600" dirty="0">
-                <a:solidFill>
-                  <a:srgbClr val="CBD5E1"/>
+              <a:t>→  The same 7B model produced mediocre output with vague context and excellent output with structured memory.</a:t>
+            </a:r>
+            <a:endParaRPr lang="en-US" sz="1300" dirty="0"/>
+          </a:p>
+        </p:txBody>
+      </p:sp>
+      <p:sp>
+        <p:nvSpPr>
+          <p:cNvPr id="9" name="Shape 6"/>
+          <p:cNvSpPr/>
+          <p:nvPr/>
+        </p:nvSpPr>
+        <p:spPr>
+          <a:xfrm>
+            <a:off x="822960" y="5961888"/>
+            <a:ext cx="10515600" cy="0"/>
+          </a:xfrm>
+          <a:prstGeom prst="line">
+            <a:avLst/>
+          </a:prstGeom>
+          <a:noFill/>
+          <a:ln w="12700">
+            <a:solidFill>
+              <a:srgbClr val="1E2D45"/>
+            </a:solidFill>
+            <a:prstDash val="solid"/>
+          </a:ln>
+        </p:spPr>
+      </p:sp>
+      <p:sp>
+        <p:nvSpPr>
+          <p:cNvPr id="10" name="Text 7"/>
+          <p:cNvSpPr/>
+          <p:nvPr/>
+        </p:nvSpPr>
+        <p:spPr>
+          <a:xfrm>
+            <a:off x="822960" y="6053328"/>
+            <a:ext cx="9692640" cy="457200"/>
+          </a:xfrm>
+          <a:prstGeom prst="rect">
+            <a:avLst/>
+          </a:prstGeom>
+          <a:noFill/>
+          <a:ln/>
+        </p:spPr>
+        <p:txBody>
+          <a:bodyPr wrap="square" rtlCol="0" anchor="ctr"/>
+          <a:lstStyle/>
+          <a:p>
+            <a:pPr indent="0" marL="0">
+              <a:buNone/>
+            </a:pPr>
+            <a:r>
+              <a:rPr lang="en-US" sz="1150" dirty="0">
+                <a:solidFill>
+                  <a:srgbClr val="64748B"/>
                 </a:solidFill>
                 <a:latin typeface="Segoe UI" pitchFamily="34" charset="0"/>
                 <a:ea typeface="Segoe UI" pitchFamily="34" charset="-122"/>
                 <a:cs typeface="Segoe UI" pitchFamily="34" charset="-120"/>
               </a:rPr>
-              <a:t>Status - what is happening now, always overwritten</a:t>
-            </a:r>
-            <a:endParaRPr lang="en-US" sz="1600" dirty="0"/>
-          </a:p>
-          <a:p>
-            <a:pPr marL="342900" indent="-342900">
-              <a:lnSpc>
-                <a:spcPct val="115000"/>
-              </a:lnSpc>
-              <a:spcAft>
-                <a:spcPts val="1000"/>
-              </a:spcAft>
-              <a:buSzPct val="100000"/>
-              <a:buChar char="▸"/>
-            </a:pPr>
-            <a:r>
-              <a:rPr lang="en-US" sz="1600" dirty="0">
-                <a:solidFill>
-                  <a:srgbClr val="CBD5E1"/>
-                </a:solidFill>
-                <a:latin typeface="Segoe UI" pitchFamily="34" charset="0"/>
-                <a:ea typeface="Segoe UI" pitchFamily="34" charset="-122"/>
-                <a:cs typeface="Segoe UI" pitchFamily="34" charset="-120"/>
-              </a:rPr>
-              <a:t>Lessons - what broke and the fix, attached to evidence</a:t>
-            </a:r>
-            <a:endParaRPr lang="en-US" sz="1600" dirty="0"/>
-          </a:p>
-          <a:p>
-            <a:pPr marL="342900" indent="-342900">
-              <a:lnSpc>
-                <a:spcPct val="115000"/>
-              </a:lnSpc>
-              <a:spcAft>
-                <a:spcPts val="1000"/>
-              </a:spcAft>
-              <a:buSzPct val="100000"/>
-              <a:buChar char="▸"/>
-            </a:pPr>
-            <a:r>
-              <a:rPr lang="en-US" sz="1600" dirty="0">
-                <a:solidFill>
-                  <a:srgbClr val="CBD5E1"/>
-                </a:solidFill>
-                <a:latin typeface="Segoe UI" pitchFamily="34" charset="0"/>
-                <a:ea typeface="Segoe UI" pitchFamily="34" charset="-122"/>
-                <a:cs typeface="Segoe UI" pitchFamily="34" charset="-120"/>
-              </a:rPr>
-              <a:t>Every agent reads all three before starting work</a:t>
-            </a:r>
-            <a:endParaRPr lang="en-US" sz="1600" dirty="0"/>
-          </a:p>
-        </p:txBody>
-      </p:sp>
-      <p:sp>
-        <p:nvSpPr>
-          <p:cNvPr id="7" name="Text 5"/>
-          <p:cNvSpPr/>
-          <p:nvPr/>
-        </p:nvSpPr>
-        <p:spPr>
-          <a:xfrm>
-            <a:off x="10698480" y="6355080"/>
+              <a:t>Task-quality index, illustrative - consistent with six months of production behavior.</a:t>
+            </a:r>
+            <a:endParaRPr lang="en-US" sz="1150" dirty="0"/>
+          </a:p>
+        </p:txBody>
+      </p:sp>
+      <p:sp>
+        <p:nvSpPr>
+          <p:cNvPr id="11" name="Text 8"/>
+          <p:cNvSpPr/>
+          <p:nvPr/>
+        </p:nvSpPr>
+        <p:spPr>
+          <a:xfrm>
+            <a:off x="10698480" y="6382512"/>
             <a:ext cx="1188720" cy="365760"/>
           </a:xfrm>
           <a:prstGeom prst="rect">
@@ -3247,7 +8610,7 @@
                 <a:ea typeface="Consolas" pitchFamily="34" charset="-122"/>
                 <a:cs typeface="Consolas" pitchFamily="34" charset="-120"/>
               </a:rPr>
-              <a:t>6 / 8</a:t>
+              <a:t>6 / 14</a:t>
             </a:r>
             <a:endParaRPr lang="en-US" sz="1000" dirty="0"/>
           </a:p>
@@ -3358,7 +8721,7 @@
                 <a:ea typeface="Consolas" pitchFamily="34" charset="-122"/>
                 <a:cs typeface="Consolas" pitchFamily="34" charset="-120"/>
               </a:rPr>
-              <a:t>RESULTS</a:t>
+              <a:t>MEMORY</a:t>
             </a:r>
             <a:endParaRPr lang="en-US" sz="1200" dirty="0"/>
           </a:p>
@@ -3372,8 +8735,8 @@
         </p:nvSpPr>
         <p:spPr>
           <a:xfrm>
-            <a:off x="822960" y="960120"/>
-            <a:ext cx="10515600" cy="868680"/>
+            <a:off x="822960" y="914400"/>
+            <a:ext cx="10561320" cy="868680"/>
           </a:xfrm>
           <a:prstGeom prst="rect">
             <a:avLst/>
@@ -3389,7 +8752,7 @@
               <a:buNone/>
             </a:pPr>
             <a:r>
-              <a:rPr lang="en-US" sz="3000" b="1" dirty="0">
+              <a:rPr lang="en-US" sz="2700" b="1" dirty="0">
                 <a:solidFill>
                   <a:srgbClr val="FFFFFF"/>
                 </a:solidFill>
@@ -3397,9 +8760,9 @@
                 <a:ea typeface="Segoe UI" pitchFamily="34" charset="-122"/>
                 <a:cs typeface="Segoe UI" pitchFamily="34" charset="-120"/>
               </a:rPr>
-              <a:t>What the system ships</a:t>
-            </a:r>
-            <a:endParaRPr lang="en-US" sz="3000" dirty="0"/>
+              <a:t>Structured memory, not a text dump</a:t>
+            </a:r>
+            <a:endParaRPr lang="en-US" sz="2700" dirty="0"/>
           </a:p>
         </p:txBody>
       </p:sp>
@@ -3411,7 +8774,7 @@
         </p:nvSpPr>
         <p:spPr>
           <a:xfrm>
-            <a:off x="868680" y="2057400"/>
+            <a:off x="868680" y="2011680"/>
             <a:ext cx="10424160" cy="3566160"/>
           </a:xfrm>
           <a:prstGeom prst="rect">
@@ -3426,10 +8789,10 @@
           <a:p>
             <a:pPr marL="342900" indent="-342900">
               <a:lnSpc>
-                <a:spcPct val="115000"/>
+                <a:spcPct val="112000"/>
               </a:lnSpc>
               <a:spcAft>
-                <a:spcPts val="1000"/>
+                <a:spcPts val="900"/>
               </a:spcAft>
               <a:buSzPct val="100000"/>
               <a:buChar char="▸"/>
@@ -3443,17 +8806,17 @@
                 <a:ea typeface="Segoe UI" pitchFamily="34" charset="-122"/>
                 <a:cs typeface="Segoe UI" pitchFamily="34" charset="-120"/>
               </a:rPr>
-              <a:t>30+ production Android apps under quality-gated releases</a:t>
+              <a:t>Rules are binding and append-only: true until changed, versioned, never silently edited.</a:t>
             </a:r>
             <a:endParaRPr lang="en-US" sz="1600" dirty="0"/>
           </a:p>
           <a:p>
             <a:pPr marL="342900" indent="-342900">
               <a:lnSpc>
-                <a:spcPct val="115000"/>
+                <a:spcPct val="112000"/>
               </a:lnSpc>
               <a:spcAft>
-                <a:spcPts val="1000"/>
+                <a:spcPts val="900"/>
               </a:spcAft>
               <a:buSzPct val="100000"/>
               <a:buChar char="▸"/>
@@ -3467,17 +8830,17 @@
                 <a:ea typeface="Segoe UI" pitchFamily="34" charset="-122"/>
                 <a:cs typeface="Segoe UI" pitchFamily="34" charset="-120"/>
               </a:rPr>
-              <a:t>Two open-source frameworks: 8.7K+ lines combined</a:t>
+              <a:t>Status is current truth: overwritten constantly, always what is happening right now.</a:t>
             </a:r>
             <a:endParaRPr lang="en-US" sz="1600" dirty="0"/>
           </a:p>
           <a:p>
             <a:pPr marL="342900" indent="-342900">
               <a:lnSpc>
-                <a:spcPct val="115000"/>
+                <a:spcPct val="112000"/>
               </a:lnSpc>
               <a:spcAft>
-                <a:spcPts val="1000"/>
+                <a:spcPts val="900"/>
               </a:spcAft>
               <a:buSzPct val="100000"/>
               <a:buChar char="▸"/>
@@ -3491,17 +8854,17 @@
                 <a:ea typeface="Segoe UI" pitchFamily="34" charset="-122"/>
                 <a:cs typeface="Segoe UI" pitchFamily="34" charset="-120"/>
               </a:rPr>
-              <a:t>100% router accuracy, measurable and maintained</a:t>
+              <a:t>Lessons are incident reports: what broke, why, and the fix, attached to evidence.</a:t>
             </a:r>
             <a:endParaRPr lang="en-US" sz="1600" dirty="0"/>
           </a:p>
           <a:p>
             <a:pPr marL="342900" indent="-342900">
               <a:lnSpc>
-                <a:spcPct val="115000"/>
+                <a:spcPct val="112000"/>
               </a:lnSpc>
               <a:spcAft>
-                <a:spcPts val="1000"/>
+                <a:spcPts val="900"/>
               </a:spcAft>
               <a:buSzPct val="100000"/>
               <a:buChar char="▸"/>
@@ -3515,7 +8878,7 @@
                 <a:ea typeface="Segoe UI" pitchFamily="34" charset="-122"/>
                 <a:cs typeface="Segoe UI" pitchFamily="34" charset="-120"/>
               </a:rPr>
-              <a:t>Flat zero API cost - iteration is free</a:t>
+              <a:t>Every agent reads all three before starting work, so every session starts with the full picture.</a:t>
             </a:r>
             <a:endParaRPr lang="en-US" sz="1600" dirty="0"/>
           </a:p>
@@ -3523,13 +8886,75 @@
       </p:sp>
       <p:sp>
         <p:nvSpPr>
-          <p:cNvPr id="7" name="Text 5"/>
-          <p:cNvSpPr/>
-          <p:nvPr/>
-        </p:nvSpPr>
-        <p:spPr>
-          <a:xfrm>
-            <a:off x="10698480" y="6355080"/>
+          <p:cNvPr id="7" name="Shape 5"/>
+          <p:cNvSpPr/>
+          <p:nvPr/>
+        </p:nvSpPr>
+        <p:spPr>
+          <a:xfrm>
+            <a:off x="822960" y="5961888"/>
+            <a:ext cx="10515600" cy="0"/>
+          </a:xfrm>
+          <a:prstGeom prst="line">
+            <a:avLst/>
+          </a:prstGeom>
+          <a:noFill/>
+          <a:ln w="12700">
+            <a:solidFill>
+              <a:srgbClr val="1E2D45"/>
+            </a:solidFill>
+            <a:prstDash val="solid"/>
+          </a:ln>
+        </p:spPr>
+      </p:sp>
+      <p:sp>
+        <p:nvSpPr>
+          <p:cNvPr id="8" name="Text 6"/>
+          <p:cNvSpPr/>
+          <p:nvPr/>
+        </p:nvSpPr>
+        <p:spPr>
+          <a:xfrm>
+            <a:off x="822960" y="6053328"/>
+            <a:ext cx="9692640" cy="457200"/>
+          </a:xfrm>
+          <a:prstGeom prst="rect">
+            <a:avLst/>
+          </a:prstGeom>
+          <a:noFill/>
+          <a:ln/>
+        </p:spPr>
+        <p:txBody>
+          <a:bodyPr wrap="square" rtlCol="0" anchor="ctr"/>
+          <a:lstStyle/>
+          <a:p>
+            <a:pPr indent="0" marL="0">
+              <a:buNone/>
+            </a:pPr>
+            <a:r>
+              <a:rPr lang="en-US" sz="1150" dirty="0">
+                <a:solidFill>
+                  <a:srgbClr val="64748B"/>
+                </a:solidFill>
+                <a:latin typeface="Segoe UI" pitchFamily="34" charset="0"/>
+                <a:ea typeface="Segoe UI" pitchFamily="34" charset="-122"/>
+                <a:cs typeface="Segoe UI" pitchFamily="34" charset="-120"/>
+              </a:rPr>
+              <a:t>Retrieval gives you text that looks relevant; structure gives you facts that are current.</a:t>
+            </a:r>
+            <a:endParaRPr lang="en-US" sz="1150" dirty="0"/>
+          </a:p>
+        </p:txBody>
+      </p:sp>
+      <p:sp>
+        <p:nvSpPr>
+          <p:cNvPr id="9" name="Text 7"/>
+          <p:cNvSpPr/>
+          <p:nvPr/>
+        </p:nvSpPr>
+        <p:spPr>
+          <a:xfrm>
+            <a:off x="10698480" y="6382512"/>
             <a:ext cx="1188720" cy="365760"/>
           </a:xfrm>
           <a:prstGeom prst="rect">
@@ -3554,7 +8979,7 @@
                 <a:ea typeface="Consolas" pitchFamily="34" charset="-122"/>
                 <a:cs typeface="Consolas" pitchFamily="34" charset="-120"/>
               </a:rPr>
-              <a:t>7 / 8</a:t>
+              <a:t>7 / 14</a:t>
             </a:r>
             <a:endParaRPr lang="en-US" sz="1000" dirty="0"/>
           </a:p>
@@ -3640,8 +9065,8 @@
         </p:nvSpPr>
         <p:spPr>
           <a:xfrm>
-            <a:off x="822960" y="1554480"/>
-            <a:ext cx="10515600" cy="457200"/>
+            <a:off x="822960" y="502920"/>
+            <a:ext cx="10515600" cy="365760"/>
           </a:xfrm>
           <a:prstGeom prst="rect">
             <a:avLst/>
@@ -3657,7 +9082,7 @@
               <a:buNone/>
             </a:pPr>
             <a:r>
-              <a:rPr lang="en-US" sz="1400" spc="400" kern="0" dirty="0">
+              <a:rPr lang="en-US" sz="1200" spc="300" kern="0" dirty="0">
                 <a:solidFill>
                   <a:srgbClr val="06B6D4"/>
                 </a:solidFill>
@@ -3665,9 +9090,9 @@
                 <a:ea typeface="Consolas" pitchFamily="34" charset="-122"/>
                 <a:cs typeface="Consolas" pitchFamily="34" charset="-120"/>
               </a:rPr>
-              <a:t>TAKEAWAY</a:t>
-            </a:r>
-            <a:endParaRPr lang="en-US" sz="1400" dirty="0"/>
+              <a:t>OPERATIONS</a:t>
+            </a:r>
+            <a:endParaRPr lang="en-US" sz="1200" dirty="0"/>
           </a:p>
         </p:txBody>
       </p:sp>
@@ -3679,8 +9104,8 @@
         </p:nvSpPr>
         <p:spPr>
           <a:xfrm>
-            <a:off x="822960" y="2286000"/>
-            <a:ext cx="10515600" cy="1737360"/>
+            <a:off x="822960" y="914400"/>
+            <a:ext cx="10561320" cy="868680"/>
           </a:xfrm>
           <a:prstGeom prst="rect">
             <a:avLst/>
@@ -3696,7 +9121,7 @@
               <a:buNone/>
             </a:pPr>
             <a:r>
-              <a:rPr lang="en-US" sz="4400" b="1" dirty="0">
+              <a:rPr lang="en-US" sz="2700" b="1" dirty="0">
                 <a:solidFill>
                   <a:srgbClr val="FFFFFF"/>
                 </a:solidFill>
@@ -3704,22 +9129,61 @@
                 <a:ea typeface="Segoe UI" pitchFamily="34" charset="-122"/>
                 <a:cs typeface="Segoe UI" pitchFamily="34" charset="-120"/>
               </a:rPr>
-              <a:t>Local models + good orchestration = production AI</a:t>
-            </a:r>
-            <a:endParaRPr lang="en-US" sz="4400" dirty="0"/>
-          </a:p>
-        </p:txBody>
-      </p:sp>
-      <p:sp>
-        <p:nvSpPr>
-          <p:cNvPr id="6" name="Text 4"/>
-          <p:cNvSpPr/>
-          <p:nvPr/>
-        </p:nvSpPr>
-        <p:spPr>
-          <a:xfrm>
-            <a:off x="822960" y="4206240"/>
-            <a:ext cx="10515600" cy="914400"/>
+              <a:t>A day of agent work is mostly well-specified, repeatable work</a:t>
+            </a:r>
+            <a:endParaRPr lang="en-US" sz="2700" dirty="0"/>
+          </a:p>
+        </p:txBody>
+      </p:sp>
+      <p:graphicFrame>
+        <p:nvGraphicFramePr>
+          <p:cNvPr id="6" name="Chart 0" descr=""/>
+          <p:cNvGraphicFramePr/>
+          <p:nvPr/>
+        </p:nvGraphicFramePr>
+        <p:xfrm>
+          <a:off x="822960" y="1874520"/>
+          <a:ext cx="10515600" cy="3337560"/>
+        </p:xfrm>
+        <a:graphic xmlns:a="http://schemas.openxmlformats.org/drawingml/2006/main">
+          <a:graphicData uri="http://schemas.openxmlformats.org/drawingml/2006/chart">
+            <c:chart xmlns:c="http://schemas.openxmlformats.org/drawingml/2006/chart" r:id="rId1"/>
+          </a:graphicData>
+        </a:graphic>
+      </p:graphicFrame>
+      <p:sp>
+        <p:nvSpPr>
+          <p:cNvPr id="7" name="Shape 4"/>
+          <p:cNvSpPr/>
+          <p:nvPr/>
+        </p:nvSpPr>
+        <p:spPr>
+          <a:xfrm>
+            <a:off x="822960" y="5413248"/>
+            <a:ext cx="10515600" cy="0"/>
+          </a:xfrm>
+          <a:prstGeom prst="line">
+            <a:avLst/>
+          </a:prstGeom>
+          <a:noFill/>
+          <a:ln w="12700">
+            <a:solidFill>
+              <a:srgbClr val="1E2D45"/>
+            </a:solidFill>
+            <a:prstDash val="solid"/>
+          </a:ln>
+        </p:spPr>
+      </p:sp>
+      <p:sp>
+        <p:nvSpPr>
+          <p:cNvPr id="8" name="Text 5"/>
+          <p:cNvSpPr/>
+          <p:nvPr/>
+        </p:nvSpPr>
+        <p:spPr>
+          <a:xfrm>
+            <a:off x="822960" y="5504688"/>
+            <a:ext cx="10424160" cy="411480"/>
           </a:xfrm>
           <a:prstGeom prst="rect">
             <a:avLst/>
@@ -3735,29 +9199,91 @@
               <a:buNone/>
             </a:pPr>
             <a:r>
-              <a:rPr lang="en-US" sz="1600" dirty="0">
-                <a:solidFill>
-                  <a:srgbClr val="94A3B8"/>
+              <a:rPr lang="en-US" sz="1300" i="1" dirty="0">
+                <a:solidFill>
+                  <a:srgbClr val="06B6D4"/>
                 </a:solidFill>
                 <a:latin typeface="Segoe UI" pitchFamily="34" charset="0"/>
                 <a:ea typeface="Segoe UI" pitchFamily="34" charset="-122"/>
                 <a:cs typeface="Segoe UI" pitchFamily="34" charset="-120"/>
               </a:rPr>
-              <a:t>The intelligence ceiling matters less than the system design around it · rezalianvatiady.github.io</a:t>
-            </a:r>
-            <a:endParaRPr lang="en-US" sz="1600" dirty="0"/>
-          </a:p>
-        </p:txBody>
-      </p:sp>
-      <p:sp>
-        <p:nvSpPr>
-          <p:cNvPr id="7" name="Text 5"/>
-          <p:cNvSpPr/>
-          <p:nvPr/>
-        </p:nvSpPr>
-        <p:spPr>
-          <a:xfrm>
-            <a:off x="10698480" y="6355080"/>
+              <a:t>→  That is exactly the work agents do reliably - and exactly the work that used to consume the founder.</a:t>
+            </a:r>
+            <a:endParaRPr lang="en-US" sz="1300" dirty="0"/>
+          </a:p>
+        </p:txBody>
+      </p:sp>
+      <p:sp>
+        <p:nvSpPr>
+          <p:cNvPr id="9" name="Shape 6"/>
+          <p:cNvSpPr/>
+          <p:nvPr/>
+        </p:nvSpPr>
+        <p:spPr>
+          <a:xfrm>
+            <a:off x="822960" y="5961888"/>
+            <a:ext cx="10515600" cy="0"/>
+          </a:xfrm>
+          <a:prstGeom prst="line">
+            <a:avLst/>
+          </a:prstGeom>
+          <a:noFill/>
+          <a:ln w="12700">
+            <a:solidFill>
+              <a:srgbClr val="1E2D45"/>
+            </a:solidFill>
+            <a:prstDash val="solid"/>
+          </a:ln>
+        </p:spPr>
+      </p:sp>
+      <p:sp>
+        <p:nvSpPr>
+          <p:cNvPr id="10" name="Text 7"/>
+          <p:cNvSpPr/>
+          <p:nvPr/>
+        </p:nvSpPr>
+        <p:spPr>
+          <a:xfrm>
+            <a:off x="822960" y="6053328"/>
+            <a:ext cx="9692640" cy="457200"/>
+          </a:xfrm>
+          <a:prstGeom prst="rect">
+            <a:avLst/>
+          </a:prstGeom>
+          <a:noFill/>
+          <a:ln/>
+        </p:spPr>
+        <p:txBody>
+          <a:bodyPr wrap="square" rtlCol="0" anchor="ctr"/>
+          <a:lstStyle/>
+          <a:p>
+            <a:pPr indent="0" marL="0">
+              <a:buNone/>
+            </a:pPr>
+            <a:r>
+              <a:rPr lang="en-US" sz="1150" dirty="0">
+                <a:solidFill>
+                  <a:srgbClr val="64748B"/>
+                </a:solidFill>
+                <a:latin typeface="Segoe UI" pitchFamily="34" charset="0"/>
+                <a:ea typeface="Segoe UI" pitchFamily="34" charset="-122"/>
+                <a:cs typeface="Segoe UI" pitchFamily="34" charset="-120"/>
+              </a:rPr>
+              <a:t>Illustrative effort distribution across the 9-agent workforce.</a:t>
+            </a:r>
+            <a:endParaRPr lang="en-US" sz="1150" dirty="0"/>
+          </a:p>
+        </p:txBody>
+      </p:sp>
+      <p:sp>
+        <p:nvSpPr>
+          <p:cNvPr id="11" name="Text 8"/>
+          <p:cNvSpPr/>
+          <p:nvPr/>
+        </p:nvSpPr>
+        <p:spPr>
+          <a:xfrm>
+            <a:off x="10698480" y="6382512"/>
             <a:ext cx="1188720" cy="365760"/>
           </a:xfrm>
           <a:prstGeom prst="rect">
@@ -3782,7 +9308,1525 @@
                 <a:ea typeface="Consolas" pitchFamily="34" charset="-122"/>
                 <a:cs typeface="Consolas" pitchFamily="34" charset="-120"/>
               </a:rPr>
-              <a:t>8 / 8</a:t>
+              <a:t>8 / 14</a:t>
+            </a:r>
+            <a:endParaRPr lang="en-US" sz="1000" dirty="0"/>
+          </a:p>
+        </p:txBody>
+      </p:sp>
+    </p:spTree>
+  </p:cSld>
+  <p:clrMapOvr>
+    <a:masterClrMapping/>
+  </p:clrMapOvr>
+</p:sld>
+</file>
+
+<file path=ppt/slides/slide9.xml><?xml version="1.0" encoding="utf-8"?>
+<p:sld xmlns:a="http://schemas.openxmlformats.org/drawingml/2006/main" xmlns:r="http://schemas.openxmlformats.org/officeDocument/2006/relationships" xmlns:p="http://schemas.openxmlformats.org/presentationml/2006/main">
+  <p:cSld name="Slide 9">
+    <p:bg>
+      <p:bgPr>
+        <a:solidFill>
+          <a:srgbClr val="0A0C12"/>
+        </a:solidFill>
+      </p:bgPr>
+    </p:bg>
+    <p:spTree>
+      <p:nvGrpSpPr>
+        <p:cNvPr id="1" name=""/>
+        <p:cNvGrpSpPr/>
+        <p:nvPr/>
+      </p:nvGrpSpPr>
+      <p:grpSpPr>
+        <a:xfrm>
+          <a:off x="0" y="0"/>
+          <a:ext cx="0" cy="0"/>
+          <a:chOff x="0" y="0"/>
+          <a:chExt cx="0" cy="0"/>
+        </a:xfrm>
+      </p:grpSpPr>
+      <p:sp>
+        <p:nvSpPr>
+          <p:cNvPr id="2" name="Shape 0"/>
+          <p:cNvSpPr/>
+          <p:nvPr/>
+        </p:nvSpPr>
+        <p:spPr>
+          <a:xfrm>
+            <a:off x="0" y="0"/>
+            <a:ext cx="7680960" cy="64008"/>
+          </a:xfrm>
+          <a:prstGeom prst="rect">
+            <a:avLst/>
+          </a:prstGeom>
+          <a:solidFill>
+            <a:srgbClr val="3B82F6"/>
+          </a:solidFill>
+          <a:ln/>
+        </p:spPr>
+      </p:sp>
+      <p:sp>
+        <p:nvSpPr>
+          <p:cNvPr id="3" name="Shape 1"/>
+          <p:cNvSpPr/>
+          <p:nvPr/>
+        </p:nvSpPr>
+        <p:spPr>
+          <a:xfrm>
+            <a:off x="7680960" y="0"/>
+            <a:ext cx="4510735" cy="64008"/>
+          </a:xfrm>
+          <a:prstGeom prst="rect">
+            <a:avLst/>
+          </a:prstGeom>
+          <a:solidFill>
+            <a:srgbClr val="06B6D4"/>
+          </a:solidFill>
+          <a:ln/>
+        </p:spPr>
+      </p:sp>
+      <p:sp>
+        <p:nvSpPr>
+          <p:cNvPr id="4" name="Text 2"/>
+          <p:cNvSpPr/>
+          <p:nvPr/>
+        </p:nvSpPr>
+        <p:spPr>
+          <a:xfrm>
+            <a:off x="822960" y="502920"/>
+            <a:ext cx="10515600" cy="365760"/>
+          </a:xfrm>
+          <a:prstGeom prst="rect">
+            <a:avLst/>
+          </a:prstGeom>
+          <a:noFill/>
+          <a:ln/>
+        </p:spPr>
+        <p:txBody>
+          <a:bodyPr wrap="square" rtlCol="0" anchor="ctr"/>
+          <a:lstStyle/>
+          <a:p>
+            <a:pPr indent="0" marL="0">
+              <a:buNone/>
+            </a:pPr>
+            <a:r>
+              <a:rPr lang="en-US" sz="1200" spc="300" kern="0" dirty="0">
+                <a:solidFill>
+                  <a:srgbClr val="06B6D4"/>
+                </a:solidFill>
+                <a:latin typeface="Consolas" pitchFamily="34" charset="0"/>
+                <a:ea typeface="Consolas" pitchFamily="34" charset="-122"/>
+                <a:cs typeface="Consolas" pitchFamily="34" charset="-120"/>
+              </a:rPr>
+              <a:t>QUALITY GATES</a:t>
+            </a:r>
+            <a:endParaRPr lang="en-US" sz="1200" dirty="0"/>
+          </a:p>
+        </p:txBody>
+      </p:sp>
+      <p:sp>
+        <p:nvSpPr>
+          <p:cNvPr id="5" name="Text 3"/>
+          <p:cNvSpPr/>
+          <p:nvPr/>
+        </p:nvSpPr>
+        <p:spPr>
+          <a:xfrm>
+            <a:off x="822960" y="914400"/>
+            <a:ext cx="10561320" cy="868680"/>
+          </a:xfrm>
+          <a:prstGeom prst="rect">
+            <a:avLst/>
+          </a:prstGeom>
+          <a:noFill/>
+          <a:ln/>
+        </p:spPr>
+        <p:txBody>
+          <a:bodyPr wrap="square" rtlCol="0" anchor="ctr"/>
+          <a:lstStyle/>
+          <a:p>
+            <a:pPr indent="0" marL="0">
+              <a:buNone/>
+            </a:pPr>
+            <a:r>
+              <a:rPr lang="en-US" sz="2700" b="1" dirty="0">
+                <a:solidFill>
+                  <a:srgbClr val="FFFFFF"/>
+                </a:solidFill>
+                <a:latin typeface="Segoe UI" pitchFamily="34" charset="0"/>
+                <a:ea typeface="Segoe UI" pitchFamily="34" charset="-122"/>
+                <a:cs typeface="Segoe UI" pitchFamily="34" charset="-120"/>
+              </a:rPr>
+              <a:t>Four gates plus one rule: a blocker stops the line</a:t>
+            </a:r>
+            <a:endParaRPr lang="en-US" sz="2700" dirty="0"/>
+          </a:p>
+        </p:txBody>
+      </p:sp>
+      <p:graphicFrame>
+        <p:nvGraphicFramePr>
+          <p:cNvPr id="10" name="Table 0"/>
+          <p:cNvGraphicFramePr>
+            <a:graphicFrameLocks noGrp="1"/>
+          </p:cNvGraphicFramePr>
+          <p:nvPr>
+            <p:extLst>
+              <p:ext uri="{D42A27DB-BD31-4B8C-83A1-F6EECF244321}">
+                <p14:modId xmlns:p14="http://schemas.microsoft.com/office/powerpoint/2010/main" val="1579011935"/>
+              </p:ext>
+            </p:extLst>
+          </p:nvPr>
+        </p:nvGraphicFramePr>
+        <p:xfrm>
+          <a:off x="822960" y="2011680"/>
+          <a:ext cx="10515600" cy="914400"/>
+        </p:xfrm>
+        <a:graphic>
+          <a:graphicData uri="http://schemas.openxmlformats.org/drawingml/2006/table">
+            <a:tbl>
+              <a:tblPr/>
+              <a:tblGrid>
+                <a:gridCol w="3505200"/>
+                <a:gridCol w="3505200"/>
+                <a:gridCol w="3505200"/>
+              </a:tblGrid>
+              <a:tr h="402336">
+                <a:tc>
+                  <a:txBody>
+                    <a:bodyPr/>
+                    <a:lstStyle/>
+                    <a:p>
+                      <a:pPr indent="0" marL="0">
+                        <a:buNone/>
+                      </a:pPr>
+                      <a:r>
+                        <a:rPr lang="en-US" sz="1150" b="1" dirty="0">
+                          <a:solidFill>
+                            <a:srgbClr val="FFFFFF"/>
+                          </a:solidFill>
+                          <a:latin typeface="Segoe UI" pitchFamily="34" charset="0"/>
+                          <a:ea typeface="Segoe UI" pitchFamily="34" charset="-122"/>
+                          <a:cs typeface="Segoe UI" pitchFamily="34" charset="-120"/>
+                        </a:rPr>
+                        <a:t>Gate</a:t>
+                      </a:r>
+                      <a:endParaRPr lang="en-US" sz="1150" dirty="0">
+                        <a:latin typeface="Segoe UI" charset="0"/>
+                        <a:ea typeface="Segoe UI" charset="0"/>
+                        <a:cs typeface="Segoe UI" charset="0"/>
+                      </a:endParaRPr>
+                    </a:p>
+                  </a:txBody>
+                  <a:tcPr marL="64008" marR="64008" marT="64008" marB="64008" anchor="ctr">
+                    <a:lnL w="6350" cap="flat" cmpd="sng" algn="ctr">
+                      <a:solidFill>
+                        <a:srgbClr val="24365A"/>
+                      </a:solidFill>
+                      <a:prstDash val="solid"/>
+                      <a:round/>
+                      <a:headEnd type="none" w="med" len="med"/>
+                      <a:tailEnd type="none" w="med" len="med"/>
+                    </a:lnL>
+                    <a:lnR w="6350" cap="flat" cmpd="sng" algn="ctr">
+                      <a:solidFill>
+                        <a:srgbClr val="24365A"/>
+                      </a:solidFill>
+                      <a:prstDash val="solid"/>
+                      <a:round/>
+                      <a:headEnd type="none" w="med" len="med"/>
+                      <a:tailEnd type="none" w="med" len="med"/>
+                    </a:lnR>
+                    <a:lnT w="6350" cap="flat" cmpd="sng" algn="ctr">
+                      <a:solidFill>
+                        <a:srgbClr val="24365A"/>
+                      </a:solidFill>
+                      <a:prstDash val="solid"/>
+                      <a:round/>
+                      <a:headEnd type="none" w="med" len="med"/>
+                      <a:tailEnd type="none" w="med" len="med"/>
+                    </a:lnT>
+                    <a:lnB w="6350" cap="flat" cmpd="sng" algn="ctr">
+                      <a:solidFill>
+                        <a:srgbClr val="24365A"/>
+                      </a:solidFill>
+                      <a:prstDash val="solid"/>
+                      <a:round/>
+                      <a:headEnd type="none" w="med" len="med"/>
+                      <a:tailEnd type="none" w="med" len="med"/>
+                    </a:lnB>
+                    <a:solidFill>
+                      <a:srgbClr val="16233B"/>
+                    </a:solidFill>
+                  </a:tcPr>
+                </a:tc>
+                <a:tc>
+                  <a:txBody>
+                    <a:bodyPr/>
+                    <a:lstStyle/>
+                    <a:p>
+                      <a:pPr indent="0" marL="0">
+                        <a:buNone/>
+                      </a:pPr>
+                      <a:r>
+                        <a:rPr lang="en-US" sz="1150" b="1" dirty="0">
+                          <a:solidFill>
+                            <a:srgbClr val="FFFFFF"/>
+                          </a:solidFill>
+                          <a:latin typeface="Segoe UI" pitchFamily="34" charset="0"/>
+                          <a:ea typeface="Segoe UI" pitchFamily="34" charset="-122"/>
+                          <a:cs typeface="Segoe UI" pitchFamily="34" charset="-120"/>
+                        </a:rPr>
+                        <a:t>Check</a:t>
+                      </a:r>
+                      <a:endParaRPr lang="en-US" sz="1150" dirty="0">
+                        <a:latin typeface="Segoe UI" charset="0"/>
+                        <a:ea typeface="Segoe UI" charset="0"/>
+                        <a:cs typeface="Segoe UI" charset="0"/>
+                      </a:endParaRPr>
+                    </a:p>
+                  </a:txBody>
+                  <a:tcPr marL="64008" marR="64008" marT="64008" marB="64008" anchor="ctr">
+                    <a:lnL w="6350" cap="flat" cmpd="sng" algn="ctr">
+                      <a:solidFill>
+                        <a:srgbClr val="24365A"/>
+                      </a:solidFill>
+                      <a:prstDash val="solid"/>
+                      <a:round/>
+                      <a:headEnd type="none" w="med" len="med"/>
+                      <a:tailEnd type="none" w="med" len="med"/>
+                    </a:lnL>
+                    <a:lnR w="6350" cap="flat" cmpd="sng" algn="ctr">
+                      <a:solidFill>
+                        <a:srgbClr val="24365A"/>
+                      </a:solidFill>
+                      <a:prstDash val="solid"/>
+                      <a:round/>
+                      <a:headEnd type="none" w="med" len="med"/>
+                      <a:tailEnd type="none" w="med" len="med"/>
+                    </a:lnR>
+                    <a:lnT w="6350" cap="flat" cmpd="sng" algn="ctr">
+                      <a:solidFill>
+                        <a:srgbClr val="24365A"/>
+                      </a:solidFill>
+                      <a:prstDash val="solid"/>
+                      <a:round/>
+                      <a:headEnd type="none" w="med" len="med"/>
+                      <a:tailEnd type="none" w="med" len="med"/>
+                    </a:lnT>
+                    <a:lnB w="6350" cap="flat" cmpd="sng" algn="ctr">
+                      <a:solidFill>
+                        <a:srgbClr val="24365A"/>
+                      </a:solidFill>
+                      <a:prstDash val="solid"/>
+                      <a:round/>
+                      <a:headEnd type="none" w="med" len="med"/>
+                      <a:tailEnd type="none" w="med" len="med"/>
+                    </a:lnB>
+                    <a:solidFill>
+                      <a:srgbClr val="16233B"/>
+                    </a:solidFill>
+                  </a:tcPr>
+                </a:tc>
+                <a:tc>
+                  <a:txBody>
+                    <a:bodyPr/>
+                    <a:lstStyle/>
+                    <a:p>
+                      <a:pPr indent="0" marL="0">
+                        <a:buNone/>
+                      </a:pPr>
+                      <a:r>
+                        <a:rPr lang="en-US" sz="1150" b="1" dirty="0">
+                          <a:solidFill>
+                            <a:srgbClr val="FFFFFF"/>
+                          </a:solidFill>
+                          <a:latin typeface="Segoe UI" pitchFamily="34" charset="0"/>
+                          <a:ea typeface="Segoe UI" pitchFamily="34" charset="-122"/>
+                          <a:cs typeface="Segoe UI" pitchFamily="34" charset="-120"/>
+                        </a:rPr>
+                        <a:t>Enforcement</a:t>
+                      </a:r>
+                      <a:endParaRPr lang="en-US" sz="1150" dirty="0">
+                        <a:latin typeface="Segoe UI" charset="0"/>
+                        <a:ea typeface="Segoe UI" charset="0"/>
+                        <a:cs typeface="Segoe UI" charset="0"/>
+                      </a:endParaRPr>
+                    </a:p>
+                  </a:txBody>
+                  <a:tcPr marL="64008" marR="64008" marT="64008" marB="64008" anchor="ctr">
+                    <a:lnL w="6350" cap="flat" cmpd="sng" algn="ctr">
+                      <a:solidFill>
+                        <a:srgbClr val="24365A"/>
+                      </a:solidFill>
+                      <a:prstDash val="solid"/>
+                      <a:round/>
+                      <a:headEnd type="none" w="med" len="med"/>
+                      <a:tailEnd type="none" w="med" len="med"/>
+                    </a:lnL>
+                    <a:lnR w="6350" cap="flat" cmpd="sng" algn="ctr">
+                      <a:solidFill>
+                        <a:srgbClr val="24365A"/>
+                      </a:solidFill>
+                      <a:prstDash val="solid"/>
+                      <a:round/>
+                      <a:headEnd type="none" w="med" len="med"/>
+                      <a:tailEnd type="none" w="med" len="med"/>
+                    </a:lnR>
+                    <a:lnT w="6350" cap="flat" cmpd="sng" algn="ctr">
+                      <a:solidFill>
+                        <a:srgbClr val="24365A"/>
+                      </a:solidFill>
+                      <a:prstDash val="solid"/>
+                      <a:round/>
+                      <a:headEnd type="none" w="med" len="med"/>
+                      <a:tailEnd type="none" w="med" len="med"/>
+                    </a:lnT>
+                    <a:lnB w="6350" cap="flat" cmpd="sng" algn="ctr">
+                      <a:solidFill>
+                        <a:srgbClr val="24365A"/>
+                      </a:solidFill>
+                      <a:prstDash val="solid"/>
+                      <a:round/>
+                      <a:headEnd type="none" w="med" len="med"/>
+                      <a:tailEnd type="none" w="med" len="med"/>
+                    </a:lnB>
+                    <a:solidFill>
+                      <a:srgbClr val="16233B"/>
+                    </a:solidFill>
+                  </a:tcPr>
+                </a:tc>
+              </a:tr>
+              <a:tr h="402336">
+                <a:tc>
+                  <a:txBody>
+                    <a:bodyPr/>
+                    <a:lstStyle/>
+                    <a:p>
+                      <a:pPr indent="0" marL="0">
+                        <a:buNone/>
+                      </a:pPr>
+                      <a:r>
+                        <a:rPr lang="en-US" sz="1080" dirty="0">
+                          <a:solidFill>
+                            <a:srgbClr val="CBD5E1"/>
+                          </a:solidFill>
+                          <a:latin typeface="Segoe UI" pitchFamily="34" charset="0"/>
+                          <a:ea typeface="Segoe UI" pitchFamily="34" charset="-122"/>
+                          <a:cs typeface="Segoe UI" pitchFamily="34" charset="-120"/>
+                        </a:rPr>
+                        <a:t>Golden path</a:t>
+                      </a:r>
+                      <a:endParaRPr lang="en-US" sz="1080" dirty="0">
+                        <a:latin typeface="Segoe UI" charset="0"/>
+                        <a:ea typeface="Segoe UI" charset="0"/>
+                        <a:cs typeface="Segoe UI" charset="0"/>
+                      </a:endParaRPr>
+                    </a:p>
+                  </a:txBody>
+                  <a:tcPr marL="64008" marR="64008" marT="64008" marB="64008" anchor="ctr">
+                    <a:lnL w="6350" cap="flat" cmpd="sng" algn="ctr">
+                      <a:solidFill>
+                        <a:srgbClr val="24365A"/>
+                      </a:solidFill>
+                      <a:prstDash val="solid"/>
+                      <a:round/>
+                      <a:headEnd type="none" w="med" len="med"/>
+                      <a:tailEnd type="none" w="med" len="med"/>
+                    </a:lnL>
+                    <a:lnR w="6350" cap="flat" cmpd="sng" algn="ctr">
+                      <a:solidFill>
+                        <a:srgbClr val="24365A"/>
+                      </a:solidFill>
+                      <a:prstDash val="solid"/>
+                      <a:round/>
+                      <a:headEnd type="none" w="med" len="med"/>
+                      <a:tailEnd type="none" w="med" len="med"/>
+                    </a:lnR>
+                    <a:lnT w="6350" cap="flat" cmpd="sng" algn="ctr">
+                      <a:solidFill>
+                        <a:srgbClr val="24365A"/>
+                      </a:solidFill>
+                      <a:prstDash val="solid"/>
+                      <a:round/>
+                      <a:headEnd type="none" w="med" len="med"/>
+                      <a:tailEnd type="none" w="med" len="med"/>
+                    </a:lnT>
+                    <a:lnB w="6350" cap="flat" cmpd="sng" algn="ctr">
+                      <a:solidFill>
+                        <a:srgbClr val="24365A"/>
+                      </a:solidFill>
+                      <a:prstDash val="solid"/>
+                      <a:round/>
+                      <a:headEnd type="none" w="med" len="med"/>
+                      <a:tailEnd type="none" w="med" len="med"/>
+                    </a:lnB>
+                    <a:solidFill>
+                      <a:srgbClr val="101A2D"/>
+                    </a:solidFill>
+                  </a:tcPr>
+                </a:tc>
+                <a:tc>
+                  <a:txBody>
+                    <a:bodyPr/>
+                    <a:lstStyle/>
+                    <a:p>
+                      <a:pPr indent="0" marL="0">
+                        <a:buNone/>
+                      </a:pPr>
+                      <a:r>
+                        <a:rPr lang="en-US" sz="1080" dirty="0">
+                          <a:solidFill>
+                            <a:srgbClr val="CBD5E1"/>
+                          </a:solidFill>
+                          <a:latin typeface="Segoe UI" pitchFamily="34" charset="0"/>
+                          <a:ea typeface="Segoe UI" pitchFamily="34" charset="-122"/>
+                          <a:cs typeface="Segoe UI" pitchFamily="34" charset="-120"/>
+                        </a:rPr>
+                        <a:t>The single most important user journey works end-to-end</a:t>
+                      </a:r>
+                      <a:endParaRPr lang="en-US" sz="1080" dirty="0">
+                        <a:latin typeface="Segoe UI" charset="0"/>
+                        <a:ea typeface="Segoe UI" charset="0"/>
+                        <a:cs typeface="Segoe UI" charset="0"/>
+                      </a:endParaRPr>
+                    </a:p>
+                  </a:txBody>
+                  <a:tcPr marL="64008" marR="64008" marT="64008" marB="64008" anchor="ctr">
+                    <a:lnL w="6350" cap="flat" cmpd="sng" algn="ctr">
+                      <a:solidFill>
+                        <a:srgbClr val="24365A"/>
+                      </a:solidFill>
+                      <a:prstDash val="solid"/>
+                      <a:round/>
+                      <a:headEnd type="none" w="med" len="med"/>
+                      <a:tailEnd type="none" w="med" len="med"/>
+                    </a:lnL>
+                    <a:lnR w="6350" cap="flat" cmpd="sng" algn="ctr">
+                      <a:solidFill>
+                        <a:srgbClr val="24365A"/>
+                      </a:solidFill>
+                      <a:prstDash val="solid"/>
+                      <a:round/>
+                      <a:headEnd type="none" w="med" len="med"/>
+                      <a:tailEnd type="none" w="med" len="med"/>
+                    </a:lnR>
+                    <a:lnT w="6350" cap="flat" cmpd="sng" algn="ctr">
+                      <a:solidFill>
+                        <a:srgbClr val="24365A"/>
+                      </a:solidFill>
+                      <a:prstDash val="solid"/>
+                      <a:round/>
+                      <a:headEnd type="none" w="med" len="med"/>
+                      <a:tailEnd type="none" w="med" len="med"/>
+                    </a:lnT>
+                    <a:lnB w="6350" cap="flat" cmpd="sng" algn="ctr">
+                      <a:solidFill>
+                        <a:srgbClr val="24365A"/>
+                      </a:solidFill>
+                      <a:prstDash val="solid"/>
+                      <a:round/>
+                      <a:headEnd type="none" w="med" len="med"/>
+                      <a:tailEnd type="none" w="med" len="med"/>
+                    </a:lnB>
+                    <a:solidFill>
+                      <a:srgbClr val="101A2D"/>
+                    </a:solidFill>
+                  </a:tcPr>
+                </a:tc>
+                <a:tc>
+                  <a:txBody>
+                    <a:bodyPr/>
+                    <a:lstStyle/>
+                    <a:p>
+                      <a:pPr indent="0" marL="0">
+                        <a:buNone/>
+                      </a:pPr>
+                      <a:r>
+                        <a:rPr lang="en-US" sz="1080" dirty="0">
+                          <a:solidFill>
+                            <a:srgbClr val="CBD5E1"/>
+                          </a:solidFill>
+                          <a:latin typeface="Segoe UI" pitchFamily="34" charset="0"/>
+                          <a:ea typeface="Segoe UI" pitchFamily="34" charset="-122"/>
+                          <a:cs typeface="Segoe UI" pitchFamily="34" charset="-120"/>
+                        </a:rPr>
+                        <a:t>If it breaks, the build does not ship</a:t>
+                      </a:r>
+                      <a:endParaRPr lang="en-US" sz="1080" dirty="0">
+                        <a:latin typeface="Segoe UI" charset="0"/>
+                        <a:ea typeface="Segoe UI" charset="0"/>
+                        <a:cs typeface="Segoe UI" charset="0"/>
+                      </a:endParaRPr>
+                    </a:p>
+                  </a:txBody>
+                  <a:tcPr marL="64008" marR="64008" marT="64008" marB="64008" anchor="ctr">
+                    <a:lnL w="6350" cap="flat" cmpd="sng" algn="ctr">
+                      <a:solidFill>
+                        <a:srgbClr val="24365A"/>
+                      </a:solidFill>
+                      <a:prstDash val="solid"/>
+                      <a:round/>
+                      <a:headEnd type="none" w="med" len="med"/>
+                      <a:tailEnd type="none" w="med" len="med"/>
+                    </a:lnL>
+                    <a:lnR w="6350" cap="flat" cmpd="sng" algn="ctr">
+                      <a:solidFill>
+                        <a:srgbClr val="24365A"/>
+                      </a:solidFill>
+                      <a:prstDash val="solid"/>
+                      <a:round/>
+                      <a:headEnd type="none" w="med" len="med"/>
+                      <a:tailEnd type="none" w="med" len="med"/>
+                    </a:lnR>
+                    <a:lnT w="6350" cap="flat" cmpd="sng" algn="ctr">
+                      <a:solidFill>
+                        <a:srgbClr val="24365A"/>
+                      </a:solidFill>
+                      <a:prstDash val="solid"/>
+                      <a:round/>
+                      <a:headEnd type="none" w="med" len="med"/>
+                      <a:tailEnd type="none" w="med" len="med"/>
+                    </a:lnT>
+                    <a:lnB w="6350" cap="flat" cmpd="sng" algn="ctr">
+                      <a:solidFill>
+                        <a:srgbClr val="24365A"/>
+                      </a:solidFill>
+                      <a:prstDash val="solid"/>
+                      <a:round/>
+                      <a:headEnd type="none" w="med" len="med"/>
+                      <a:tailEnd type="none" w="med" len="med"/>
+                    </a:lnB>
+                    <a:solidFill>
+                      <a:srgbClr val="101A2D"/>
+                    </a:solidFill>
+                  </a:tcPr>
+                </a:tc>
+              </a:tr>
+              <a:tr h="402336">
+                <a:tc>
+                  <a:txBody>
+                    <a:bodyPr/>
+                    <a:lstStyle/>
+                    <a:p>
+                      <a:pPr indent="0" marL="0">
+                        <a:buNone/>
+                      </a:pPr>
+                      <a:r>
+                        <a:rPr lang="en-US" sz="1080" dirty="0">
+                          <a:solidFill>
+                            <a:srgbClr val="CBD5E1"/>
+                          </a:solidFill>
+                          <a:latin typeface="Segoe UI" pitchFamily="34" charset="0"/>
+                          <a:ea typeface="Segoe UI" pitchFamily="34" charset="-122"/>
+                          <a:cs typeface="Segoe UI" pitchFamily="34" charset="-120"/>
+                        </a:rPr>
+                        <a:t>Zero dead buttons</a:t>
+                      </a:r>
+                      <a:endParaRPr lang="en-US" sz="1080" dirty="0">
+                        <a:latin typeface="Segoe UI" charset="0"/>
+                        <a:ea typeface="Segoe UI" charset="0"/>
+                        <a:cs typeface="Segoe UI" charset="0"/>
+                      </a:endParaRPr>
+                    </a:p>
+                  </a:txBody>
+                  <a:tcPr marL="64008" marR="64008" marT="64008" marB="64008" anchor="ctr">
+                    <a:lnL w="6350" cap="flat" cmpd="sng" algn="ctr">
+                      <a:solidFill>
+                        <a:srgbClr val="24365A"/>
+                      </a:solidFill>
+                      <a:prstDash val="solid"/>
+                      <a:round/>
+                      <a:headEnd type="none" w="med" len="med"/>
+                      <a:tailEnd type="none" w="med" len="med"/>
+                    </a:lnL>
+                    <a:lnR w="6350" cap="flat" cmpd="sng" algn="ctr">
+                      <a:solidFill>
+                        <a:srgbClr val="24365A"/>
+                      </a:solidFill>
+                      <a:prstDash val="solid"/>
+                      <a:round/>
+                      <a:headEnd type="none" w="med" len="med"/>
+                      <a:tailEnd type="none" w="med" len="med"/>
+                    </a:lnR>
+                    <a:lnT w="6350" cap="flat" cmpd="sng" algn="ctr">
+                      <a:solidFill>
+                        <a:srgbClr val="24365A"/>
+                      </a:solidFill>
+                      <a:prstDash val="solid"/>
+                      <a:round/>
+                      <a:headEnd type="none" w="med" len="med"/>
+                      <a:tailEnd type="none" w="med" len="med"/>
+                    </a:lnT>
+                    <a:lnB w="6350" cap="flat" cmpd="sng" algn="ctr">
+                      <a:solidFill>
+                        <a:srgbClr val="24365A"/>
+                      </a:solidFill>
+                      <a:prstDash val="solid"/>
+                      <a:round/>
+                      <a:headEnd type="none" w="med" len="med"/>
+                      <a:tailEnd type="none" w="med" len="med"/>
+                    </a:lnB>
+                    <a:solidFill>
+                      <a:srgbClr val="0D1420"/>
+                    </a:solidFill>
+                  </a:tcPr>
+                </a:tc>
+                <a:tc>
+                  <a:txBody>
+                    <a:bodyPr/>
+                    <a:lstStyle/>
+                    <a:p>
+                      <a:pPr indent="0" marL="0">
+                        <a:buNone/>
+                      </a:pPr>
+                      <a:r>
+                        <a:rPr lang="en-US" sz="1080" dirty="0">
+                          <a:solidFill>
+                            <a:srgbClr val="CBD5E1"/>
+                          </a:solidFill>
+                          <a:latin typeface="Segoe UI" pitchFamily="34" charset="0"/>
+                          <a:ea typeface="Segoe UI" pitchFamily="34" charset="-122"/>
+                          <a:cs typeface="Segoe UI" pitchFamily="34" charset="-120"/>
+                        </a:rPr>
+                        <a:t>Every interactive element does what it claims</a:t>
+                      </a:r>
+                      <a:endParaRPr lang="en-US" sz="1080" dirty="0">
+                        <a:latin typeface="Segoe UI" charset="0"/>
+                        <a:ea typeface="Segoe UI" charset="0"/>
+                        <a:cs typeface="Segoe UI" charset="0"/>
+                      </a:endParaRPr>
+                    </a:p>
+                  </a:txBody>
+                  <a:tcPr marL="64008" marR="64008" marT="64008" marB="64008" anchor="ctr">
+                    <a:lnL w="6350" cap="flat" cmpd="sng" algn="ctr">
+                      <a:solidFill>
+                        <a:srgbClr val="24365A"/>
+                      </a:solidFill>
+                      <a:prstDash val="solid"/>
+                      <a:round/>
+                      <a:headEnd type="none" w="med" len="med"/>
+                      <a:tailEnd type="none" w="med" len="med"/>
+                    </a:lnL>
+                    <a:lnR w="6350" cap="flat" cmpd="sng" algn="ctr">
+                      <a:solidFill>
+                        <a:srgbClr val="24365A"/>
+                      </a:solidFill>
+                      <a:prstDash val="solid"/>
+                      <a:round/>
+                      <a:headEnd type="none" w="med" len="med"/>
+                      <a:tailEnd type="none" w="med" len="med"/>
+                    </a:lnR>
+                    <a:lnT w="6350" cap="flat" cmpd="sng" algn="ctr">
+                      <a:solidFill>
+                        <a:srgbClr val="24365A"/>
+                      </a:solidFill>
+                      <a:prstDash val="solid"/>
+                      <a:round/>
+                      <a:headEnd type="none" w="med" len="med"/>
+                      <a:tailEnd type="none" w="med" len="med"/>
+                    </a:lnT>
+                    <a:lnB w="6350" cap="flat" cmpd="sng" algn="ctr">
+                      <a:solidFill>
+                        <a:srgbClr val="24365A"/>
+                      </a:solidFill>
+                      <a:prstDash val="solid"/>
+                      <a:round/>
+                      <a:headEnd type="none" w="med" len="med"/>
+                      <a:tailEnd type="none" w="med" len="med"/>
+                    </a:lnB>
+                    <a:solidFill>
+                      <a:srgbClr val="0D1420"/>
+                    </a:solidFill>
+                  </a:tcPr>
+                </a:tc>
+                <a:tc>
+                  <a:txBody>
+                    <a:bodyPr/>
+                    <a:lstStyle/>
+                    <a:p>
+                      <a:pPr indent="0" marL="0">
+                        <a:buNone/>
+                      </a:pPr>
+                      <a:r>
+                        <a:rPr lang="en-US" sz="1080" dirty="0">
+                          <a:solidFill>
+                            <a:srgbClr val="CBD5E1"/>
+                          </a:solidFill>
+                          <a:latin typeface="Segoe UI" pitchFamily="34" charset="0"/>
+                          <a:ea typeface="Segoe UI" pitchFamily="34" charset="-122"/>
+                          <a:cs typeface="Segoe UI" pitchFamily="34" charset="-120"/>
+                        </a:rPr>
+                        <a:t>Anything that lies is fixed or removed</a:t>
+                      </a:r>
+                      <a:endParaRPr lang="en-US" sz="1080" dirty="0">
+                        <a:latin typeface="Segoe UI" charset="0"/>
+                        <a:ea typeface="Segoe UI" charset="0"/>
+                        <a:cs typeface="Segoe UI" charset="0"/>
+                      </a:endParaRPr>
+                    </a:p>
+                  </a:txBody>
+                  <a:tcPr marL="64008" marR="64008" marT="64008" marB="64008" anchor="ctr">
+                    <a:lnL w="6350" cap="flat" cmpd="sng" algn="ctr">
+                      <a:solidFill>
+                        <a:srgbClr val="24365A"/>
+                      </a:solidFill>
+                      <a:prstDash val="solid"/>
+                      <a:round/>
+                      <a:headEnd type="none" w="med" len="med"/>
+                      <a:tailEnd type="none" w="med" len="med"/>
+                    </a:lnL>
+                    <a:lnR w="6350" cap="flat" cmpd="sng" algn="ctr">
+                      <a:solidFill>
+                        <a:srgbClr val="24365A"/>
+                      </a:solidFill>
+                      <a:prstDash val="solid"/>
+                      <a:round/>
+                      <a:headEnd type="none" w="med" len="med"/>
+                      <a:tailEnd type="none" w="med" len="med"/>
+                    </a:lnR>
+                    <a:lnT w="6350" cap="flat" cmpd="sng" algn="ctr">
+                      <a:solidFill>
+                        <a:srgbClr val="24365A"/>
+                      </a:solidFill>
+                      <a:prstDash val="solid"/>
+                      <a:round/>
+                      <a:headEnd type="none" w="med" len="med"/>
+                      <a:tailEnd type="none" w="med" len="med"/>
+                    </a:lnT>
+                    <a:lnB w="6350" cap="flat" cmpd="sng" algn="ctr">
+                      <a:solidFill>
+                        <a:srgbClr val="24365A"/>
+                      </a:solidFill>
+                      <a:prstDash val="solid"/>
+                      <a:round/>
+                      <a:headEnd type="none" w="med" len="med"/>
+                      <a:tailEnd type="none" w="med" len="med"/>
+                    </a:lnB>
+                    <a:solidFill>
+                      <a:srgbClr val="0D1420"/>
+                    </a:solidFill>
+                  </a:tcPr>
+                </a:tc>
+              </a:tr>
+              <a:tr h="402336">
+                <a:tc>
+                  <a:txBody>
+                    <a:bodyPr/>
+                    <a:lstStyle/>
+                    <a:p>
+                      <a:pPr indent="0" marL="0">
+                        <a:buNone/>
+                      </a:pPr>
+                      <a:r>
+                        <a:rPr lang="en-US" sz="1080" dirty="0">
+                          <a:solidFill>
+                            <a:srgbClr val="CBD5E1"/>
+                          </a:solidFill>
+                          <a:latin typeface="Segoe UI" pitchFamily="34" charset="0"/>
+                          <a:ea typeface="Segoe UI" pitchFamily="34" charset="-122"/>
+                          <a:cs typeface="Segoe UI" pitchFamily="34" charset="-120"/>
+                        </a:rPr>
+                        <a:t>Version bump + backup</a:t>
+                      </a:r>
+                      <a:endParaRPr lang="en-US" sz="1080" dirty="0">
+                        <a:latin typeface="Segoe UI" charset="0"/>
+                        <a:ea typeface="Segoe UI" charset="0"/>
+                        <a:cs typeface="Segoe UI" charset="0"/>
+                      </a:endParaRPr>
+                    </a:p>
+                  </a:txBody>
+                  <a:tcPr marL="64008" marR="64008" marT="64008" marB="64008" anchor="ctr">
+                    <a:lnL w="6350" cap="flat" cmpd="sng" algn="ctr">
+                      <a:solidFill>
+                        <a:srgbClr val="24365A"/>
+                      </a:solidFill>
+                      <a:prstDash val="solid"/>
+                      <a:round/>
+                      <a:headEnd type="none" w="med" len="med"/>
+                      <a:tailEnd type="none" w="med" len="med"/>
+                    </a:lnL>
+                    <a:lnR w="6350" cap="flat" cmpd="sng" algn="ctr">
+                      <a:solidFill>
+                        <a:srgbClr val="24365A"/>
+                      </a:solidFill>
+                      <a:prstDash val="solid"/>
+                      <a:round/>
+                      <a:headEnd type="none" w="med" len="med"/>
+                      <a:tailEnd type="none" w="med" len="med"/>
+                    </a:lnR>
+                    <a:lnT w="6350" cap="flat" cmpd="sng" algn="ctr">
+                      <a:solidFill>
+                        <a:srgbClr val="24365A"/>
+                      </a:solidFill>
+                      <a:prstDash val="solid"/>
+                      <a:round/>
+                      <a:headEnd type="none" w="med" len="med"/>
+                      <a:tailEnd type="none" w="med" len="med"/>
+                    </a:lnT>
+                    <a:lnB w="6350" cap="flat" cmpd="sng" algn="ctr">
+                      <a:solidFill>
+                        <a:srgbClr val="24365A"/>
+                      </a:solidFill>
+                      <a:prstDash val="solid"/>
+                      <a:round/>
+                      <a:headEnd type="none" w="med" len="med"/>
+                      <a:tailEnd type="none" w="med" len="med"/>
+                    </a:lnB>
+                    <a:solidFill>
+                      <a:srgbClr val="101A2D"/>
+                    </a:solidFill>
+                  </a:tcPr>
+                </a:tc>
+                <a:tc>
+                  <a:txBody>
+                    <a:bodyPr/>
+                    <a:lstStyle/>
+                    <a:p>
+                      <a:pPr indent="0" marL="0">
+                        <a:buNone/>
+                      </a:pPr>
+                      <a:r>
+                        <a:rPr lang="en-US" sz="1080" dirty="0">
+                          <a:solidFill>
+                            <a:srgbClr val="CBD5E1"/>
+                          </a:solidFill>
+                          <a:latin typeface="Segoe UI" pitchFamily="34" charset="0"/>
+                          <a:ea typeface="Segoe UI" pitchFamily="34" charset="-122"/>
+                          <a:cs typeface="Segoe UI" pitchFamily="34" charset="-120"/>
+                        </a:rPr>
+                        <a:t>Version increments and the previous build is archived</a:t>
+                      </a:r>
+                      <a:endParaRPr lang="en-US" sz="1080" dirty="0">
+                        <a:latin typeface="Segoe UI" charset="0"/>
+                        <a:ea typeface="Segoe UI" charset="0"/>
+                        <a:cs typeface="Segoe UI" charset="0"/>
+                      </a:endParaRPr>
+                    </a:p>
+                  </a:txBody>
+                  <a:tcPr marL="64008" marR="64008" marT="64008" marB="64008" anchor="ctr">
+                    <a:lnL w="6350" cap="flat" cmpd="sng" algn="ctr">
+                      <a:solidFill>
+                        <a:srgbClr val="24365A"/>
+                      </a:solidFill>
+                      <a:prstDash val="solid"/>
+                      <a:round/>
+                      <a:headEnd type="none" w="med" len="med"/>
+                      <a:tailEnd type="none" w="med" len="med"/>
+                    </a:lnL>
+                    <a:lnR w="6350" cap="flat" cmpd="sng" algn="ctr">
+                      <a:solidFill>
+                        <a:srgbClr val="24365A"/>
+                      </a:solidFill>
+                      <a:prstDash val="solid"/>
+                      <a:round/>
+                      <a:headEnd type="none" w="med" len="med"/>
+                      <a:tailEnd type="none" w="med" len="med"/>
+                    </a:lnR>
+                    <a:lnT w="6350" cap="flat" cmpd="sng" algn="ctr">
+                      <a:solidFill>
+                        <a:srgbClr val="24365A"/>
+                      </a:solidFill>
+                      <a:prstDash val="solid"/>
+                      <a:round/>
+                      <a:headEnd type="none" w="med" len="med"/>
+                      <a:tailEnd type="none" w="med" len="med"/>
+                    </a:lnT>
+                    <a:lnB w="6350" cap="flat" cmpd="sng" algn="ctr">
+                      <a:solidFill>
+                        <a:srgbClr val="24365A"/>
+                      </a:solidFill>
+                      <a:prstDash val="solid"/>
+                      <a:round/>
+                      <a:headEnd type="none" w="med" len="med"/>
+                      <a:tailEnd type="none" w="med" len="med"/>
+                    </a:lnB>
+                    <a:solidFill>
+                      <a:srgbClr val="101A2D"/>
+                    </a:solidFill>
+                  </a:tcPr>
+                </a:tc>
+                <a:tc>
+                  <a:txBody>
+                    <a:bodyPr/>
+                    <a:lstStyle/>
+                    <a:p>
+                      <a:pPr indent="0" marL="0">
+                        <a:buNone/>
+                      </a:pPr>
+                      <a:r>
+                        <a:rPr lang="en-US" sz="1080" dirty="0">
+                          <a:solidFill>
+                            <a:srgbClr val="CBD5E1"/>
+                          </a:solidFill>
+                          <a:latin typeface="Segoe UI" pitchFamily="34" charset="0"/>
+                          <a:ea typeface="Segoe UI" pitchFamily="34" charset="-122"/>
+                          <a:cs typeface="Segoe UI" pitchFamily="34" charset="-120"/>
+                        </a:rPr>
+                        <a:t>Rollback is routine, not an emergency</a:t>
+                      </a:r>
+                      <a:endParaRPr lang="en-US" sz="1080" dirty="0">
+                        <a:latin typeface="Segoe UI" charset="0"/>
+                        <a:ea typeface="Segoe UI" charset="0"/>
+                        <a:cs typeface="Segoe UI" charset="0"/>
+                      </a:endParaRPr>
+                    </a:p>
+                  </a:txBody>
+                  <a:tcPr marL="64008" marR="64008" marT="64008" marB="64008" anchor="ctr">
+                    <a:lnL w="6350" cap="flat" cmpd="sng" algn="ctr">
+                      <a:solidFill>
+                        <a:srgbClr val="24365A"/>
+                      </a:solidFill>
+                      <a:prstDash val="solid"/>
+                      <a:round/>
+                      <a:headEnd type="none" w="med" len="med"/>
+                      <a:tailEnd type="none" w="med" len="med"/>
+                    </a:lnL>
+                    <a:lnR w="6350" cap="flat" cmpd="sng" algn="ctr">
+                      <a:solidFill>
+                        <a:srgbClr val="24365A"/>
+                      </a:solidFill>
+                      <a:prstDash val="solid"/>
+                      <a:round/>
+                      <a:headEnd type="none" w="med" len="med"/>
+                      <a:tailEnd type="none" w="med" len="med"/>
+                    </a:lnR>
+                    <a:lnT w="6350" cap="flat" cmpd="sng" algn="ctr">
+                      <a:solidFill>
+                        <a:srgbClr val="24365A"/>
+                      </a:solidFill>
+                      <a:prstDash val="solid"/>
+                      <a:round/>
+                      <a:headEnd type="none" w="med" len="med"/>
+                      <a:tailEnd type="none" w="med" len="med"/>
+                    </a:lnT>
+                    <a:lnB w="6350" cap="flat" cmpd="sng" algn="ctr">
+                      <a:solidFill>
+                        <a:srgbClr val="24365A"/>
+                      </a:solidFill>
+                      <a:prstDash val="solid"/>
+                      <a:round/>
+                      <a:headEnd type="none" w="med" len="med"/>
+                      <a:tailEnd type="none" w="med" len="med"/>
+                    </a:lnB>
+                    <a:solidFill>
+                      <a:srgbClr val="101A2D"/>
+                    </a:solidFill>
+                  </a:tcPr>
+                </a:tc>
+              </a:tr>
+              <a:tr h="402336">
+                <a:tc>
+                  <a:txBody>
+                    <a:bodyPr/>
+                    <a:lstStyle/>
+                    <a:p>
+                      <a:pPr indent="0" marL="0">
+                        <a:buNone/>
+                      </a:pPr>
+                      <a:r>
+                        <a:rPr lang="en-US" sz="1080" dirty="0">
+                          <a:solidFill>
+                            <a:srgbClr val="CBD5E1"/>
+                          </a:solidFill>
+                          <a:latin typeface="Segoe UI" pitchFamily="34" charset="0"/>
+                          <a:ea typeface="Segoe UI" pitchFamily="34" charset="-122"/>
+                          <a:cs typeface="Segoe UI" pitchFamily="34" charset="-120"/>
+                        </a:rPr>
+                        <a:t>Physical evidence</a:t>
+                      </a:r>
+                      <a:endParaRPr lang="en-US" sz="1080" dirty="0">
+                        <a:latin typeface="Segoe UI" charset="0"/>
+                        <a:ea typeface="Segoe UI" charset="0"/>
+                        <a:cs typeface="Segoe UI" charset="0"/>
+                      </a:endParaRPr>
+                    </a:p>
+                  </a:txBody>
+                  <a:tcPr marL="64008" marR="64008" marT="64008" marB="64008" anchor="ctr">
+                    <a:lnL w="6350" cap="flat" cmpd="sng" algn="ctr">
+                      <a:solidFill>
+                        <a:srgbClr val="24365A"/>
+                      </a:solidFill>
+                      <a:prstDash val="solid"/>
+                      <a:round/>
+                      <a:headEnd type="none" w="med" len="med"/>
+                      <a:tailEnd type="none" w="med" len="med"/>
+                    </a:lnL>
+                    <a:lnR w="6350" cap="flat" cmpd="sng" algn="ctr">
+                      <a:solidFill>
+                        <a:srgbClr val="24365A"/>
+                      </a:solidFill>
+                      <a:prstDash val="solid"/>
+                      <a:round/>
+                      <a:headEnd type="none" w="med" len="med"/>
+                      <a:tailEnd type="none" w="med" len="med"/>
+                    </a:lnR>
+                    <a:lnT w="6350" cap="flat" cmpd="sng" algn="ctr">
+                      <a:solidFill>
+                        <a:srgbClr val="24365A"/>
+                      </a:solidFill>
+                      <a:prstDash val="solid"/>
+                      <a:round/>
+                      <a:headEnd type="none" w="med" len="med"/>
+                      <a:tailEnd type="none" w="med" len="med"/>
+                    </a:lnT>
+                    <a:lnB w="6350" cap="flat" cmpd="sng" algn="ctr">
+                      <a:solidFill>
+                        <a:srgbClr val="24365A"/>
+                      </a:solidFill>
+                      <a:prstDash val="solid"/>
+                      <a:round/>
+                      <a:headEnd type="none" w="med" len="med"/>
+                      <a:tailEnd type="none" w="med" len="med"/>
+                    </a:lnB>
+                    <a:solidFill>
+                      <a:srgbClr val="0D1420"/>
+                    </a:solidFill>
+                  </a:tcPr>
+                </a:tc>
+                <a:tc>
+                  <a:txBody>
+                    <a:bodyPr/>
+                    <a:lstStyle/>
+                    <a:p>
+                      <a:pPr indent="0" marL="0">
+                        <a:buNone/>
+                      </a:pPr>
+                      <a:r>
+                        <a:rPr lang="en-US" sz="1080" dirty="0">
+                          <a:solidFill>
+                            <a:srgbClr val="CBD5E1"/>
+                          </a:solidFill>
+                          <a:latin typeface="Segoe UI" pitchFamily="34" charset="0"/>
+                          <a:ea typeface="Segoe UI" pitchFamily="34" charset="-122"/>
+                          <a:cs typeface="Segoe UI" pitchFamily="34" charset="-120"/>
+                        </a:rPr>
+                        <a:t>A log, file, or marker a stranger could audit</a:t>
+                      </a:r>
+                      <a:endParaRPr lang="en-US" sz="1080" dirty="0">
+                        <a:latin typeface="Segoe UI" charset="0"/>
+                        <a:ea typeface="Segoe UI" charset="0"/>
+                        <a:cs typeface="Segoe UI" charset="0"/>
+                      </a:endParaRPr>
+                    </a:p>
+                  </a:txBody>
+                  <a:tcPr marL="64008" marR="64008" marT="64008" marB="64008" anchor="ctr">
+                    <a:lnL w="6350" cap="flat" cmpd="sng" algn="ctr">
+                      <a:solidFill>
+                        <a:srgbClr val="24365A"/>
+                      </a:solidFill>
+                      <a:prstDash val="solid"/>
+                      <a:round/>
+                      <a:headEnd type="none" w="med" len="med"/>
+                      <a:tailEnd type="none" w="med" len="med"/>
+                    </a:lnL>
+                    <a:lnR w="6350" cap="flat" cmpd="sng" algn="ctr">
+                      <a:solidFill>
+                        <a:srgbClr val="24365A"/>
+                      </a:solidFill>
+                      <a:prstDash val="solid"/>
+                      <a:round/>
+                      <a:headEnd type="none" w="med" len="med"/>
+                      <a:tailEnd type="none" w="med" len="med"/>
+                    </a:lnR>
+                    <a:lnT w="6350" cap="flat" cmpd="sng" algn="ctr">
+                      <a:solidFill>
+                        <a:srgbClr val="24365A"/>
+                      </a:solidFill>
+                      <a:prstDash val="solid"/>
+                      <a:round/>
+                      <a:headEnd type="none" w="med" len="med"/>
+                      <a:tailEnd type="none" w="med" len="med"/>
+                    </a:lnT>
+                    <a:lnB w="6350" cap="flat" cmpd="sng" algn="ctr">
+                      <a:solidFill>
+                        <a:srgbClr val="24365A"/>
+                      </a:solidFill>
+                      <a:prstDash val="solid"/>
+                      <a:round/>
+                      <a:headEnd type="none" w="med" len="med"/>
+                      <a:tailEnd type="none" w="med" len="med"/>
+                    </a:lnB>
+                    <a:solidFill>
+                      <a:srgbClr val="0D1420"/>
+                    </a:solidFill>
+                  </a:tcPr>
+                </a:tc>
+                <a:tc>
+                  <a:txBody>
+                    <a:bodyPr/>
+                    <a:lstStyle/>
+                    <a:p>
+                      <a:pPr indent="0" marL="0">
+                        <a:buNone/>
+                      </a:pPr>
+                      <a:r>
+                        <a:rPr lang="en-US" sz="1080" dirty="0">
+                          <a:solidFill>
+                            <a:srgbClr val="CBD5E1"/>
+                          </a:solidFill>
+                          <a:latin typeface="Segoe UI" pitchFamily="34" charset="0"/>
+                          <a:ea typeface="Segoe UI" pitchFamily="34" charset="-122"/>
+                          <a:cs typeface="Segoe UI" pitchFamily="34" charset="-120"/>
+                        </a:rPr>
+                        <a:t>A status field is not evidence</a:t>
+                      </a:r>
+                      <a:endParaRPr lang="en-US" sz="1080" dirty="0">
+                        <a:latin typeface="Segoe UI" charset="0"/>
+                        <a:ea typeface="Segoe UI" charset="0"/>
+                        <a:cs typeface="Segoe UI" charset="0"/>
+                      </a:endParaRPr>
+                    </a:p>
+                  </a:txBody>
+                  <a:tcPr marL="64008" marR="64008" marT="64008" marB="64008" anchor="ctr">
+                    <a:lnL w="6350" cap="flat" cmpd="sng" algn="ctr">
+                      <a:solidFill>
+                        <a:srgbClr val="24365A"/>
+                      </a:solidFill>
+                      <a:prstDash val="solid"/>
+                      <a:round/>
+                      <a:headEnd type="none" w="med" len="med"/>
+                      <a:tailEnd type="none" w="med" len="med"/>
+                    </a:lnL>
+                    <a:lnR w="6350" cap="flat" cmpd="sng" algn="ctr">
+                      <a:solidFill>
+                        <a:srgbClr val="24365A"/>
+                      </a:solidFill>
+                      <a:prstDash val="solid"/>
+                      <a:round/>
+                      <a:headEnd type="none" w="med" len="med"/>
+                      <a:tailEnd type="none" w="med" len="med"/>
+                    </a:lnR>
+                    <a:lnT w="6350" cap="flat" cmpd="sng" algn="ctr">
+                      <a:solidFill>
+                        <a:srgbClr val="24365A"/>
+                      </a:solidFill>
+                      <a:prstDash val="solid"/>
+                      <a:round/>
+                      <a:headEnd type="none" w="med" len="med"/>
+                      <a:tailEnd type="none" w="med" len="med"/>
+                    </a:lnT>
+                    <a:lnB w="6350" cap="flat" cmpd="sng" algn="ctr">
+                      <a:solidFill>
+                        <a:srgbClr val="24365A"/>
+                      </a:solidFill>
+                      <a:prstDash val="solid"/>
+                      <a:round/>
+                      <a:headEnd type="none" w="med" len="med"/>
+                      <a:tailEnd type="none" w="med" len="med"/>
+                    </a:lnB>
+                    <a:solidFill>
+                      <a:srgbClr val="0D1420"/>
+                    </a:solidFill>
+                  </a:tcPr>
+                </a:tc>
+              </a:tr>
+              <a:tr h="402336">
+                <a:tc>
+                  <a:txBody>
+                    <a:bodyPr/>
+                    <a:lstStyle/>
+                    <a:p>
+                      <a:pPr indent="0" marL="0">
+                        <a:buNone/>
+                      </a:pPr>
+                      <a:r>
+                        <a:rPr lang="en-US" sz="1080" dirty="0">
+                          <a:solidFill>
+                            <a:srgbClr val="CBD5E1"/>
+                          </a:solidFill>
+                          <a:latin typeface="Segoe UI" pitchFamily="34" charset="0"/>
+                          <a:ea typeface="Segoe UI" pitchFamily="34" charset="-122"/>
+                          <a:cs typeface="Segoe UI" pitchFamily="34" charset="-120"/>
+                        </a:rPr>
+                        <a:t>The rule</a:t>
+                      </a:r>
+                      <a:endParaRPr lang="en-US" sz="1080" dirty="0">
+                        <a:latin typeface="Segoe UI" charset="0"/>
+                        <a:ea typeface="Segoe UI" charset="0"/>
+                        <a:cs typeface="Segoe UI" charset="0"/>
+                      </a:endParaRPr>
+                    </a:p>
+                  </a:txBody>
+                  <a:tcPr marL="64008" marR="64008" marT="64008" marB="64008" anchor="ctr">
+                    <a:lnL w="6350" cap="flat" cmpd="sng" algn="ctr">
+                      <a:solidFill>
+                        <a:srgbClr val="24365A"/>
+                      </a:solidFill>
+                      <a:prstDash val="solid"/>
+                      <a:round/>
+                      <a:headEnd type="none" w="med" len="med"/>
+                      <a:tailEnd type="none" w="med" len="med"/>
+                    </a:lnL>
+                    <a:lnR w="6350" cap="flat" cmpd="sng" algn="ctr">
+                      <a:solidFill>
+                        <a:srgbClr val="24365A"/>
+                      </a:solidFill>
+                      <a:prstDash val="solid"/>
+                      <a:round/>
+                      <a:headEnd type="none" w="med" len="med"/>
+                      <a:tailEnd type="none" w="med" len="med"/>
+                    </a:lnR>
+                    <a:lnT w="6350" cap="flat" cmpd="sng" algn="ctr">
+                      <a:solidFill>
+                        <a:srgbClr val="24365A"/>
+                      </a:solidFill>
+                      <a:prstDash val="solid"/>
+                      <a:round/>
+                      <a:headEnd type="none" w="med" len="med"/>
+                      <a:tailEnd type="none" w="med" len="med"/>
+                    </a:lnT>
+                    <a:lnB w="6350" cap="flat" cmpd="sng" algn="ctr">
+                      <a:solidFill>
+                        <a:srgbClr val="24365A"/>
+                      </a:solidFill>
+                      <a:prstDash val="solid"/>
+                      <a:round/>
+                      <a:headEnd type="none" w="med" len="med"/>
+                      <a:tailEnd type="none" w="med" len="med"/>
+                    </a:lnB>
+                    <a:solidFill>
+                      <a:srgbClr val="101A2D"/>
+                    </a:solidFill>
+                  </a:tcPr>
+                </a:tc>
+                <a:tc>
+                  <a:txBody>
+                    <a:bodyPr/>
+                    <a:lstStyle/>
+                    <a:p>
+                      <a:pPr indent="0" marL="0">
+                        <a:buNone/>
+                      </a:pPr>
+                      <a:r>
+                        <a:rPr lang="en-US" sz="1080" dirty="0">
+                          <a:solidFill>
+                            <a:srgbClr val="CBD5E1"/>
+                          </a:solidFill>
+                          <a:latin typeface="Segoe UI" pitchFamily="34" charset="0"/>
+                          <a:ea typeface="Segoe UI" pitchFamily="34" charset="-122"/>
+                          <a:cs typeface="Segoe UI" pitchFamily="34" charset="-120"/>
+                        </a:rPr>
+                        <a:t>One blocked item means no deploy</a:t>
+                      </a:r>
+                      <a:endParaRPr lang="en-US" sz="1080" dirty="0">
+                        <a:latin typeface="Segoe UI" charset="0"/>
+                        <a:ea typeface="Segoe UI" charset="0"/>
+                        <a:cs typeface="Segoe UI" charset="0"/>
+                      </a:endParaRPr>
+                    </a:p>
+                  </a:txBody>
+                  <a:tcPr marL="64008" marR="64008" marT="64008" marB="64008" anchor="ctr">
+                    <a:lnL w="6350" cap="flat" cmpd="sng" algn="ctr">
+                      <a:solidFill>
+                        <a:srgbClr val="24365A"/>
+                      </a:solidFill>
+                      <a:prstDash val="solid"/>
+                      <a:round/>
+                      <a:headEnd type="none" w="med" len="med"/>
+                      <a:tailEnd type="none" w="med" len="med"/>
+                    </a:lnL>
+                    <a:lnR w="6350" cap="flat" cmpd="sng" algn="ctr">
+                      <a:solidFill>
+                        <a:srgbClr val="24365A"/>
+                      </a:solidFill>
+                      <a:prstDash val="solid"/>
+                      <a:round/>
+                      <a:headEnd type="none" w="med" len="med"/>
+                      <a:tailEnd type="none" w="med" len="med"/>
+                    </a:lnR>
+                    <a:lnT w="6350" cap="flat" cmpd="sng" algn="ctr">
+                      <a:solidFill>
+                        <a:srgbClr val="24365A"/>
+                      </a:solidFill>
+                      <a:prstDash val="solid"/>
+                      <a:round/>
+                      <a:headEnd type="none" w="med" len="med"/>
+                      <a:tailEnd type="none" w="med" len="med"/>
+                    </a:lnT>
+                    <a:lnB w="6350" cap="flat" cmpd="sng" algn="ctr">
+                      <a:solidFill>
+                        <a:srgbClr val="24365A"/>
+                      </a:solidFill>
+                      <a:prstDash val="solid"/>
+                      <a:round/>
+                      <a:headEnd type="none" w="med" len="med"/>
+                      <a:tailEnd type="none" w="med" len="med"/>
+                    </a:lnB>
+                    <a:solidFill>
+                      <a:srgbClr val="101A2D"/>
+                    </a:solidFill>
+                  </a:tcPr>
+                </a:tc>
+                <a:tc>
+                  <a:txBody>
+                    <a:bodyPr/>
+                    <a:lstStyle/>
+                    <a:p>
+                      <a:pPr indent="0" marL="0">
+                        <a:buNone/>
+                      </a:pPr>
+                      <a:r>
+                        <a:rPr lang="en-US" sz="1080" dirty="0">
+                          <a:solidFill>
+                            <a:srgbClr val="CBD5E1"/>
+                          </a:solidFill>
+                          <a:latin typeface="Segoe UI" pitchFamily="34" charset="0"/>
+                          <a:ea typeface="Segoe UI" pitchFamily="34" charset="-122"/>
+                          <a:cs typeface="Segoe UI" pitchFamily="34" charset="-120"/>
+                        </a:rPr>
+                        <a:t>No exceptions and no just-this-once</a:t>
+                      </a:r>
+                      <a:endParaRPr lang="en-US" sz="1080" dirty="0">
+                        <a:latin typeface="Segoe UI" charset="0"/>
+                        <a:ea typeface="Segoe UI" charset="0"/>
+                        <a:cs typeface="Segoe UI" charset="0"/>
+                      </a:endParaRPr>
+                    </a:p>
+                  </a:txBody>
+                  <a:tcPr marL="64008" marR="64008" marT="64008" marB="64008" anchor="ctr">
+                    <a:lnL w="6350" cap="flat" cmpd="sng" algn="ctr">
+                      <a:solidFill>
+                        <a:srgbClr val="24365A"/>
+                      </a:solidFill>
+                      <a:prstDash val="solid"/>
+                      <a:round/>
+                      <a:headEnd type="none" w="med" len="med"/>
+                      <a:tailEnd type="none" w="med" len="med"/>
+                    </a:lnL>
+                    <a:lnR w="6350" cap="flat" cmpd="sng" algn="ctr">
+                      <a:solidFill>
+                        <a:srgbClr val="24365A"/>
+                      </a:solidFill>
+                      <a:prstDash val="solid"/>
+                      <a:round/>
+                      <a:headEnd type="none" w="med" len="med"/>
+                      <a:tailEnd type="none" w="med" len="med"/>
+                    </a:lnR>
+                    <a:lnT w="6350" cap="flat" cmpd="sng" algn="ctr">
+                      <a:solidFill>
+                        <a:srgbClr val="24365A"/>
+                      </a:solidFill>
+                      <a:prstDash val="solid"/>
+                      <a:round/>
+                      <a:headEnd type="none" w="med" len="med"/>
+                      <a:tailEnd type="none" w="med" len="med"/>
+                    </a:lnT>
+                    <a:lnB w="6350" cap="flat" cmpd="sng" algn="ctr">
+                      <a:solidFill>
+                        <a:srgbClr val="24365A"/>
+                      </a:solidFill>
+                      <a:prstDash val="solid"/>
+                      <a:round/>
+                      <a:headEnd type="none" w="med" len="med"/>
+                      <a:tailEnd type="none" w="med" len="med"/>
+                    </a:lnB>
+                    <a:solidFill>
+                      <a:srgbClr val="101A2D"/>
+                    </a:solidFill>
+                  </a:tcPr>
+                </a:tc>
+              </a:tr>
+            </a:tbl>
+          </a:graphicData>
+        </a:graphic>
+      </p:graphicFrame>
+      <p:sp>
+        <p:nvSpPr>
+          <p:cNvPr id="7" name="Shape 4"/>
+          <p:cNvSpPr/>
+          <p:nvPr/>
+        </p:nvSpPr>
+        <p:spPr>
+          <a:xfrm>
+            <a:off x="822960" y="5961888"/>
+            <a:ext cx="10515600" cy="0"/>
+          </a:xfrm>
+          <a:prstGeom prst="line">
+            <a:avLst/>
+          </a:prstGeom>
+          <a:noFill/>
+          <a:ln w="12700">
+            <a:solidFill>
+              <a:srgbClr val="1E2D45"/>
+            </a:solidFill>
+            <a:prstDash val="solid"/>
+          </a:ln>
+        </p:spPr>
+      </p:sp>
+      <p:sp>
+        <p:nvSpPr>
+          <p:cNvPr id="8" name="Text 5"/>
+          <p:cNvSpPr/>
+          <p:nvPr/>
+        </p:nvSpPr>
+        <p:spPr>
+          <a:xfrm>
+            <a:off x="822960" y="6053328"/>
+            <a:ext cx="9692640" cy="457200"/>
+          </a:xfrm>
+          <a:prstGeom prst="rect">
+            <a:avLst/>
+          </a:prstGeom>
+          <a:noFill/>
+          <a:ln/>
+        </p:spPr>
+        <p:txBody>
+          <a:bodyPr wrap="square" rtlCol="0" anchor="ctr"/>
+          <a:lstStyle/>
+          <a:p>
+            <a:pPr indent="0" marL="0">
+              <a:buNone/>
+            </a:pPr>
+            <a:r>
+              <a:rPr lang="en-US" sz="1150" dirty="0">
+                <a:solidFill>
+                  <a:srgbClr val="64748B"/>
+                </a:solidFill>
+                <a:latin typeface="Segoe UI" pitchFamily="34" charset="0"/>
+                <a:ea typeface="Segoe UI" pitchFamily="34" charset="-122"/>
+                <a:cs typeface="Segoe UI" pitchFamily="34" charset="-120"/>
+              </a:rPr>
+              <a:t>Gates turn machine-speed output from a liability into an asset.</a:t>
+            </a:r>
+            <a:endParaRPr lang="en-US" sz="1150" dirty="0"/>
+          </a:p>
+        </p:txBody>
+      </p:sp>
+      <p:sp>
+        <p:nvSpPr>
+          <p:cNvPr id="9" name="Text 6"/>
+          <p:cNvSpPr/>
+          <p:nvPr/>
+        </p:nvSpPr>
+        <p:spPr>
+          <a:xfrm>
+            <a:off x="10698480" y="6382512"/>
+            <a:ext cx="1188720" cy="365760"/>
+          </a:xfrm>
+          <a:prstGeom prst="rect">
+            <a:avLst/>
+          </a:prstGeom>
+          <a:noFill/>
+          <a:ln/>
+        </p:spPr>
+        <p:txBody>
+          <a:bodyPr wrap="square" rtlCol="0" anchor="ctr"/>
+          <a:lstStyle/>
+          <a:p>
+            <a:pPr algn="r" indent="0" marL="0">
+              <a:buNone/>
+            </a:pPr>
+            <a:r>
+              <a:rPr lang="en-US" sz="1000" dirty="0">
+                <a:solidFill>
+                  <a:srgbClr val="64748B"/>
+                </a:solidFill>
+                <a:latin typeface="Consolas" pitchFamily="34" charset="0"/>
+                <a:ea typeface="Consolas" pitchFamily="34" charset="-122"/>
+                <a:cs typeface="Consolas" pitchFamily="34" charset="-120"/>
+              </a:rPr>
+              <a:t>9 / 14</a:t>
             </a:r>
             <a:endParaRPr lang="en-US" sz="1000" dirty="0"/>
           </a:p>

--- a/decks/zalinos-architecture.pptx
+++ b/decks/zalinos-architecture.pptx
@@ -377,7 +377,7 @@
           <a:lstStyle/>
           <a:p>
             <a:pPr>
-              <a:defRPr sz="1100" b="0" i="0" u="none" strike="noStrike">
+              <a:defRPr sz="1800" b="0" i="0" u="none" strike="noStrike">
                 <a:solidFill>
                   <a:srgbClr val="94A3B8"/>
                 </a:solidFill>
@@ -397,6 +397,7 @@
         <c:axId val="2094734552"/>
         <c:scaling>
           <c:orientation val="minMax"/>
+          <c:min val="0"/>
         </c:scaling>
         <c:delete val="0"/>
         <c:axPos val="l"/>
@@ -429,7 +430,7 @@
           <a:lstStyle/>
           <a:p>
             <a:pPr>
-              <a:defRPr sz="1000" b="0" i="0" u="none" strike="noStrike">
+              <a:defRPr sz="1800" b="0" i="0" u="none" strike="noStrike">
                 <a:solidFill>
                   <a:srgbClr val="94A3B8"/>
                 </a:solidFill>
@@ -461,7 +462,7 @@
         <a:lstStyle/>
         <a:p>
           <a:pPr>
-            <a:defRPr sz="1100">
+            <a:defRPr sz="1800">
               <a:solidFill>
                 <a:srgbClr val="CBD5E1"/>
               </a:solidFill>
@@ -590,7 +591,7 @@
                 <a:lstStyle/>
                 <a:p>
                   <a:pPr>
-                    <a:defRPr sz="1000" b="0" i="0" u="none" strike="noStrike">
+                    <a:defRPr sz="1800" b="0" i="0" u="none" strike="noStrike">
                       <a:solidFill>
                         <a:srgbClr val="E2E8F0"/>
                       </a:solidFill>
@@ -615,7 +616,7 @@
                 <a:lstStyle/>
                 <a:p>
                   <a:pPr>
-                    <a:defRPr sz="1000" b="0" i="0" u="none" strike="noStrike">
+                    <a:defRPr sz="1800" b="0" i="0" u="none" strike="noStrike">
                       <a:solidFill>
                         <a:srgbClr val="E2E8F0"/>
                       </a:solidFill>
@@ -640,7 +641,7 @@
                 <a:lstStyle/>
                 <a:p>
                   <a:pPr>
-                    <a:defRPr sz="1000" b="0" i="0" u="none" strike="noStrike">
+                    <a:defRPr sz="1800" b="0" i="0" u="none" strike="noStrike">
                       <a:solidFill>
                         <a:srgbClr val="E2E8F0"/>
                       </a:solidFill>
@@ -665,7 +666,7 @@
                 <a:lstStyle/>
                 <a:p>
                   <a:pPr>
-                    <a:defRPr sz="1000" b="0" i="0" u="none" strike="noStrike">
+                    <a:defRPr sz="1800" b="0" i="0" u="none" strike="noStrike">
                       <a:solidFill>
                         <a:srgbClr val="E2E8F0"/>
                       </a:solidFill>
@@ -690,7 +691,7 @@
                 <a:lstStyle/>
                 <a:p>
                   <a:pPr>
-                    <a:defRPr sz="1000" b="0" i="0" u="none" strike="noStrike">
+                    <a:defRPr sz="1800" b="0" i="0" u="none" strike="noStrike">
                       <a:solidFill>
                         <a:srgbClr val="E2E8F0"/>
                       </a:solidFill>
@@ -777,7 +778,7 @@
           </c:val>
         </c:ser>
         <c:firstSliceAng val="0"/>
-        <c:holeSize val="62"/>
+        <c:holeSize val="60"/>
       </c:doughnutChart>
       <c:spPr>
         <a:solidFill>
@@ -797,7 +798,7 @@
         <a:lstStyle/>
         <a:p>
           <a:pPr>
-            <a:defRPr sz="1100">
+            <a:defRPr sz="1800">
               <a:solidFill>
                 <a:srgbClr val="CBD5E1"/>
               </a:solidFill>
@@ -1019,7 +1020,7 @@
           <a:lstStyle/>
           <a:p>
             <a:pPr>
-              <a:defRPr sz="1100" b="0" i="0" u="none" strike="noStrike">
+              <a:defRPr sz="1800" b="0" i="0" u="none" strike="noStrike">
                 <a:solidFill>
                   <a:srgbClr val="94A3B8"/>
                 </a:solidFill>
@@ -1039,6 +1040,7 @@
         <c:axId val="2094734552"/>
         <c:scaling>
           <c:orientation val="minMax"/>
+          <c:min val="0"/>
         </c:scaling>
         <c:delete val="0"/>
         <c:axPos val="l"/>
@@ -1071,7 +1073,7 @@
           <a:lstStyle/>
           <a:p>
             <a:pPr>
-              <a:defRPr sz="1000" b="0" i="0" u="none" strike="noStrike">
+              <a:defRPr sz="1800" b="0" i="0" u="none" strike="noStrike">
                 <a:solidFill>
                   <a:srgbClr val="94A3B8"/>
                 </a:solidFill>
@@ -1510,7 +1512,7 @@
           <a:p>
             <a:r>
               <a:rPr lang="en-US" dirty="0"/>
-              <a:t/>
+              <a:t>Opening: introduce yourself and this deck, "ZalinOS: A Local-First AI Agent Operating System". | Transition: next up - "What this deck covers".</a:t>
             </a:r>
             <a:endParaRPr lang="en-US" dirty="0"/>
           </a:p>
@@ -1598,7 +1600,7 @@
           <a:p>
             <a:r>
               <a:rPr lang="en-US" dirty="0"/>
-              <a:t/>
+              <a:t>Key message: Routing accuracy is a number, read after every change | Insight: Fewer categories with sharper edges took a small local model to 100% on 30 real queries. | Talk track: Production today: 51/52 automated checks passing; the single miss was a genuinely ambiguous query. | Transition: next up - "Local-first is a decision, not a religion".</a:t>
             </a:r>
             <a:endParaRPr lang="en-US" dirty="0"/>
           </a:p>
@@ -1686,7 +1688,7 @@
           <a:p>
             <a:r>
               <a:rPr lang="en-US" dirty="0"/>
-              <a:t/>
+              <a:t>Key message: Local-first is a decision, not a religion | Talk track: For an always-on operational workforce, the trade is not close. | Transition: next up - "Nine scoped agents beat one generalist".</a:t>
             </a:r>
             <a:endParaRPr lang="en-US" dirty="0"/>
           </a:p>
@@ -1774,7 +1776,7 @@
           <a:p>
             <a:r>
               <a:rPr lang="en-US" dirty="0"/>
-              <a:t/>
+              <a:t>Key message: Nine scoped agents beat one generalist | Talk track: A general chatbot can attempt anything; a scoped agent does one thing repeatably. | Transition: next up - "What building an agent OS actually taught me".</a:t>
             </a:r>
             <a:endParaRPr lang="en-US" dirty="0"/>
           </a:p>
@@ -1862,7 +1864,7 @@
           <a:p>
             <a:r>
               <a:rPr lang="en-US" dirty="0"/>
-              <a:t/>
+              <a:t>Key message: What building an agent OS actually taught me | Talk track: The intelligence ceiling matters less than the system design around it. | Transition: next up - "Want architecture like this on your team?".</a:t>
             </a:r>
             <a:endParaRPr lang="en-US" dirty="0"/>
           </a:p>
@@ -1950,7 +1952,7 @@
           <a:p>
             <a:r>
               <a:rPr lang="en-US" dirty="0"/>
-              <a:t/>
+              <a:t>Key message: Want architecture like this on your team? | Transition: close with the call to action on the contact slide, invite questions.</a:t>
             </a:r>
             <a:endParaRPr lang="en-US" dirty="0"/>
           </a:p>
@@ -2038,7 +2040,7 @@
           <a:p>
             <a:r>
               <a:rPr lang="en-US" dirty="0"/>
-              <a:t/>
+              <a:t>Key message: What this deck covers | Agenda: Why one founder needed an operating system, not another chatbot; The five-layer architecture on a single machine; The intent router: 100% accuracy on a 30-query validation set; Structured memory: rules, status, lessons; Quality gates and the 9-agent workforce they hold together; The scoreboard: 30+ apps and 8.7K+ lines of open-source frameworks | Transition: next up - "One person cannot scale execution - until the architecture changes".</a:t>
             </a:r>
             <a:endParaRPr lang="en-US" dirty="0"/>
           </a:p>
@@ -2126,7 +2128,7 @@
           <a:p>
             <a:r>
               <a:rPr lang="en-US" dirty="0"/>
-              <a:t/>
+              <a:t>Key message: One person cannot scale execution - until the architecture changes | Talk track: ZalinOS was designed as infrastructure, not as a demo. | Transition: next up - "Five layers, one machine".</a:t>
             </a:r>
             <a:endParaRPr lang="en-US" dirty="0"/>
           </a:p>
@@ -2214,7 +2216,7 @@
           <a:p>
             <a:r>
               <a:rPr lang="en-US" dirty="0"/>
-              <a:t/>
+              <a:t>Key message: Five layers, one machine | Talk track: Each layer is replaceable; the contracts between layers are not. | Transition: next up - "The system is measured, not vibes".</a:t>
             </a:r>
             <a:endParaRPr lang="en-US" dirty="0"/>
           </a:p>
@@ -2302,7 +2304,7 @@
           <a:p>
             <a:r>
               <a:rPr lang="en-US" dirty="0"/>
-              <a:t/>
+              <a:t>Key message: The system is measured, not vibes | Talk track: Every number on this slide is readable from artifacts, not from a status field. | Transition: next up - "The bottleneck was never model intelligence - it was context quality".</a:t>
             </a:r>
             <a:endParaRPr lang="en-US" dirty="0"/>
           </a:p>
@@ -2390,7 +2392,7 @@
           <a:p>
             <a:r>
               <a:rPr lang="en-US" dirty="0"/>
-              <a:t/>
+              <a:t>Key message: The bottleneck was never model intelligence - it was context quality | Insight: The same 7B model produced mediocre output with vague context and excellent output with structured memory. | Talk track: Task-quality index, illustrative - consistent with six months of production behavior. | Transition: next up - "Structured memory, not a text dump".</a:t>
             </a:r>
             <a:endParaRPr lang="en-US" dirty="0"/>
           </a:p>
@@ -2478,7 +2480,7 @@
           <a:p>
             <a:r>
               <a:rPr lang="en-US" dirty="0"/>
-              <a:t/>
+              <a:t>Key message: Structured memory, not a text dump | Talk track: Retrieval gives you text that looks relevant; structure gives you facts that are current. | Transition: next up - "A day of agent work is mostly well-specified, repeatable work".</a:t>
             </a:r>
             <a:endParaRPr lang="en-US" dirty="0"/>
           </a:p>
@@ -2566,7 +2568,7 @@
           <a:p>
             <a:r>
               <a:rPr lang="en-US" dirty="0"/>
-              <a:t/>
+              <a:t>Key message: A day of agent work is mostly well-specified, repeatable work | Insight: That is exactly the work agents do reliably - and exactly the work that used to consume the founder. | Talk track: Illustrative effort distribution across the 9-agent workforce. | Transition: next up - "Four gates plus one rule: a blocker stops the line".</a:t>
             </a:r>
             <a:endParaRPr lang="en-US" dirty="0"/>
           </a:p>
@@ -2654,7 +2656,7 @@
           <a:p>
             <a:r>
               <a:rPr lang="en-US" dirty="0"/>
-              <a:t/>
+              <a:t>Key message: Four gates plus one rule: a blocker stops the line | Talk track: Gates turn machine-speed output from a liability into an asset. | Transition: next up - "Routing accuracy is a number, read after every change".</a:t>
             </a:r>
             <a:endParaRPr lang="en-US" dirty="0"/>
           </a:p>
@@ -3075,7 +3077,7 @@
         </p:nvSpPr>
         <p:spPr>
           <a:xfrm>
-            <a:off x="822960" y="1783080"/>
+            <a:off x="822960" y="1737360"/>
             <a:ext cx="10515600" cy="457200"/>
           </a:xfrm>
           <a:prstGeom prst="rect">
@@ -3092,7 +3094,7 @@
               <a:buNone/>
             </a:pPr>
             <a:r>
-              <a:rPr lang="en-US" sz="1400" spc="400" kern="0" dirty="0">
+              <a:rPr lang="en-US" sz="1800" spc="400" kern="0" dirty="0">
                 <a:solidFill>
                   <a:srgbClr val="06B6D4"/>
                 </a:solidFill>
@@ -3102,7 +3104,7 @@
               </a:rPr>
               <a:t>ZALIN PLATFORM · AI ENGINEERING</a:t>
             </a:r>
-            <a:endParaRPr lang="en-US" sz="1400" dirty="0"/>
+            <a:endParaRPr lang="en-US" sz="1800" dirty="0"/>
           </a:p>
         </p:txBody>
       </p:sp>
@@ -3114,7 +3116,7 @@
         </p:nvSpPr>
         <p:spPr>
           <a:xfrm>
-            <a:off x="822960" y="2286000"/>
+            <a:off x="822960" y="2240280"/>
             <a:ext cx="10607040" cy="1691640"/>
           </a:xfrm>
           <a:prstGeom prst="rect">
@@ -3153,8 +3155,8 @@
         </p:nvSpPr>
         <p:spPr>
           <a:xfrm>
-            <a:off x="822960" y="4023360"/>
-            <a:ext cx="10058400" cy="777240"/>
+            <a:off x="822960" y="3977640"/>
+            <a:ext cx="10058400" cy="822960"/>
           </a:xfrm>
           <a:prstGeom prst="rect">
             <a:avLst/>
@@ -3170,7 +3172,7 @@
               <a:buNone/>
             </a:pPr>
             <a:r>
-              <a:rPr lang="en-US" sz="1700" dirty="0">
+              <a:rPr lang="en-US" sz="2000" dirty="0">
                 <a:solidFill>
                   <a:srgbClr val="94A3B8"/>
                 </a:solidFill>
@@ -3180,7 +3182,7 @@
               </a:rPr>
               <a:t>A modular agent operating system that runs a real software company - 100% locally</a:t>
             </a:r>
-            <a:endParaRPr lang="en-US" sz="1700" dirty="0"/>
+            <a:endParaRPr lang="en-US" sz="2000" dirty="0"/>
           </a:p>
         </p:txBody>
       </p:sp>
@@ -3192,7 +3194,7 @@
         </p:nvSpPr>
         <p:spPr>
           <a:xfrm>
-            <a:off x="822960" y="5440680"/>
+            <a:off x="822960" y="5349240"/>
             <a:ext cx="4114800" cy="0"/>
           </a:xfrm>
           <a:prstGeom prst="line">
@@ -3215,8 +3217,8 @@
         </p:nvSpPr>
         <p:spPr>
           <a:xfrm>
-            <a:off x="822960" y="5596128"/>
-            <a:ext cx="10058400" cy="457200"/>
+            <a:off x="822960" y="5532120"/>
+            <a:ext cx="10058400" cy="502920"/>
           </a:xfrm>
           <a:prstGeom prst="rect">
             <a:avLst/>
@@ -3232,9 +3234,9 @@
               <a:buNone/>
             </a:pPr>
             <a:r>
-              <a:rPr lang="en-US" sz="1250" dirty="0">
-                <a:solidFill>
-                  <a:srgbClr val="64748B"/>
+              <a:rPr lang="en-US" sz="1800" dirty="0">
+                <a:solidFill>
+                  <a:srgbClr val="8FA3BF"/>
                 </a:solidFill>
                 <a:latin typeface="Segoe UI" pitchFamily="34" charset="0"/>
                 <a:ea typeface="Segoe UI" pitchFamily="34" charset="-122"/>
@@ -3242,7 +3244,7 @@
               </a:rPr>
               <a:t>Rezalian Vatiady · Zalin Labs · 2026</a:t>
             </a:r>
-            <a:endParaRPr lang="en-US" sz="1250" dirty="0"/>
+            <a:endParaRPr lang="en-US" sz="1800" dirty="0"/>
           </a:p>
         </p:txBody>
       </p:sp>
@@ -3254,8 +3256,8 @@
         </p:nvSpPr>
         <p:spPr>
           <a:xfrm>
-            <a:off x="10698480" y="6382512"/>
-            <a:ext cx="1188720" cy="365760"/>
+            <a:off x="10698480" y="6309360"/>
+            <a:ext cx="1188720" cy="411480"/>
           </a:xfrm>
           <a:prstGeom prst="rect">
             <a:avLst/>
@@ -3271,9 +3273,9 @@
               <a:buNone/>
             </a:pPr>
             <a:r>
-              <a:rPr lang="en-US" sz="1000" dirty="0">
-                <a:solidFill>
-                  <a:srgbClr val="64748B"/>
+              <a:rPr lang="en-US" sz="1800" dirty="0">
+                <a:solidFill>
+                  <a:srgbClr val="8FA3BF"/>
                 </a:solidFill>
                 <a:latin typeface="Consolas" pitchFamily="34" charset="0"/>
                 <a:ea typeface="Consolas" pitchFamily="34" charset="-122"/>
@@ -3281,7 +3283,7 @@
               </a:rPr>
               <a:t>1 / 14</a:t>
             </a:r>
-            <a:endParaRPr lang="en-US" sz="1000" dirty="0"/>
+            <a:endParaRPr lang="en-US" sz="1800" dirty="0"/>
           </a:p>
         </p:txBody>
       </p:sp>
@@ -3365,8 +3367,8 @@
         </p:nvSpPr>
         <p:spPr>
           <a:xfrm>
-            <a:off x="822960" y="502920"/>
-            <a:ext cx="10515600" cy="365760"/>
+            <a:off x="822960" y="457200"/>
+            <a:ext cx="10515600" cy="411480"/>
           </a:xfrm>
           <a:prstGeom prst="rect">
             <a:avLst/>
@@ -3382,7 +3384,7 @@
               <a:buNone/>
             </a:pPr>
             <a:r>
-              <a:rPr lang="en-US" sz="1200" spc="300" kern="0" dirty="0">
+              <a:rPr lang="en-US" sz="1800" spc="300" kern="0" dirty="0">
                 <a:solidFill>
                   <a:srgbClr val="06B6D4"/>
                 </a:solidFill>
@@ -3392,7 +3394,7 @@
               </a:rPr>
               <a:t>THE FRONT DOOR</a:t>
             </a:r>
-            <a:endParaRPr lang="en-US" sz="1200" dirty="0"/>
+            <a:endParaRPr lang="en-US" sz="1800" dirty="0"/>
           </a:p>
         </p:txBody>
       </p:sp>
@@ -3443,7 +3445,7 @@
         </p:nvGraphicFramePr>
         <p:xfrm>
           <a:off x="822960" y="1874520"/>
-          <a:ext cx="10515600" cy="3337560"/>
+          <a:ext cx="10515600" cy="3246120"/>
         </p:xfrm>
         <a:graphic xmlns:a="http://schemas.openxmlformats.org/drawingml/2006/main">
           <a:graphicData uri="http://schemas.openxmlformats.org/drawingml/2006/chart">
@@ -3459,7 +3461,7 @@
         </p:nvSpPr>
         <p:spPr>
           <a:xfrm>
-            <a:off x="822960" y="5413248"/>
+            <a:off x="822960" y="5321808"/>
             <a:ext cx="10515600" cy="0"/>
           </a:xfrm>
           <a:prstGeom prst="line">
@@ -3482,8 +3484,8 @@
         </p:nvSpPr>
         <p:spPr>
           <a:xfrm>
-            <a:off x="822960" y="5504688"/>
-            <a:ext cx="10424160" cy="411480"/>
+            <a:off x="822960" y="5394960"/>
+            <a:ext cx="10424160" cy="502920"/>
           </a:xfrm>
           <a:prstGeom prst="rect">
             <a:avLst/>
@@ -3499,7 +3501,7 @@
               <a:buNone/>
             </a:pPr>
             <a:r>
-              <a:rPr lang="en-US" sz="1300" i="1" dirty="0">
+              <a:rPr lang="en-US" sz="1800" i="1" dirty="0">
                 <a:solidFill>
                   <a:srgbClr val="06B6D4"/>
                 </a:solidFill>
@@ -3509,7 +3511,7 @@
               </a:rPr>
               <a:t>→  Fewer categories with sharper edges took a small local model to 100% on 30 real queries.</a:t>
             </a:r>
-            <a:endParaRPr lang="en-US" sz="1300" dirty="0"/>
+            <a:endParaRPr lang="en-US" sz="1800" dirty="0"/>
           </a:p>
         </p:txBody>
       </p:sp>
@@ -3544,8 +3546,8 @@
         </p:nvSpPr>
         <p:spPr>
           <a:xfrm>
-            <a:off x="822960" y="6053328"/>
-            <a:ext cx="9692640" cy="457200"/>
+            <a:off x="822960" y="6035040"/>
+            <a:ext cx="10424160" cy="566928"/>
           </a:xfrm>
           <a:prstGeom prst="rect">
             <a:avLst/>
@@ -3561,9 +3563,9 @@
               <a:buNone/>
             </a:pPr>
             <a:r>
-              <a:rPr lang="en-US" sz="1150" dirty="0">
-                <a:solidFill>
-                  <a:srgbClr val="64748B"/>
+              <a:rPr lang="en-US" sz="1800" dirty="0">
+                <a:solidFill>
+                  <a:srgbClr val="8FA3BF"/>
                 </a:solidFill>
                 <a:latin typeface="Segoe UI" pitchFamily="34" charset="0"/>
                 <a:ea typeface="Segoe UI" pitchFamily="34" charset="-122"/>
@@ -3571,7 +3573,7 @@
               </a:rPr>
               <a:t>Production today: 51/52 automated checks passing; the single miss was a genuinely ambiguous query.</a:t>
             </a:r>
-            <a:endParaRPr lang="en-US" sz="1150" dirty="0"/>
+            <a:endParaRPr lang="en-US" sz="1800" dirty="0"/>
           </a:p>
         </p:txBody>
       </p:sp>
@@ -3583,8 +3585,8 @@
         </p:nvSpPr>
         <p:spPr>
           <a:xfrm>
-            <a:off x="10698480" y="6382512"/>
-            <a:ext cx="1188720" cy="365760"/>
+            <a:off x="10698480" y="6309360"/>
+            <a:ext cx="1188720" cy="411480"/>
           </a:xfrm>
           <a:prstGeom prst="rect">
             <a:avLst/>
@@ -3600,9 +3602,9 @@
               <a:buNone/>
             </a:pPr>
             <a:r>
-              <a:rPr lang="en-US" sz="1000" dirty="0">
-                <a:solidFill>
-                  <a:srgbClr val="64748B"/>
+              <a:rPr lang="en-US" sz="1800" dirty="0">
+                <a:solidFill>
+                  <a:srgbClr val="8FA3BF"/>
                 </a:solidFill>
                 <a:latin typeface="Consolas" pitchFamily="34" charset="0"/>
                 <a:ea typeface="Consolas" pitchFamily="34" charset="-122"/>
@@ -3610,7 +3612,7 @@
               </a:rPr>
               <a:t>10 / 14</a:t>
             </a:r>
-            <a:endParaRPr lang="en-US" sz="1000" dirty="0"/>
+            <a:endParaRPr lang="en-US" sz="1800" dirty="0"/>
           </a:p>
         </p:txBody>
       </p:sp>
@@ -3694,8 +3696,8 @@
         </p:nvSpPr>
         <p:spPr>
           <a:xfrm>
-            <a:off x="822960" y="502920"/>
-            <a:ext cx="10515600" cy="365760"/>
+            <a:off x="822960" y="457200"/>
+            <a:ext cx="10515600" cy="411480"/>
           </a:xfrm>
           <a:prstGeom prst="rect">
             <a:avLst/>
@@ -3711,7 +3713,7 @@
               <a:buNone/>
             </a:pPr>
             <a:r>
-              <a:rPr lang="en-US" sz="1200" spc="300" kern="0" dirty="0">
+              <a:rPr lang="en-US" sz="1800" spc="300" kern="0" dirty="0">
                 <a:solidFill>
                   <a:srgbClr val="06B6D4"/>
                 </a:solidFill>
@@ -3721,7 +3723,7 @@
               </a:rPr>
               <a:t>TRADE-OFFS</a:t>
             </a:r>
-            <a:endParaRPr lang="en-US" sz="1200" dirty="0"/>
+            <a:endParaRPr lang="en-US" sz="1800" dirty="0"/>
           </a:p>
         </p:txBody>
       </p:sp>
@@ -3772,12 +3774,12 @@
         </p:nvSpPr>
         <p:spPr>
           <a:xfrm>
-            <a:off x="822960" y="2011680"/>
-            <a:ext cx="5074920" cy="3611880"/>
+            <a:off x="822960" y="1965960"/>
+            <a:ext cx="5074920" cy="3657600"/>
           </a:xfrm>
           <a:prstGeom prst="roundRect">
             <a:avLst>
-              <a:gd name="adj" fmla="val 2025"/>
+              <a:gd name="adj" fmla="val 2000"/>
             </a:avLst>
           </a:prstGeom>
           <a:solidFill>
@@ -3799,8 +3801,8 @@
         </p:nvSpPr>
         <p:spPr>
           <a:xfrm>
-            <a:off x="1097280" y="2240280"/>
-            <a:ext cx="4526280" cy="502920"/>
+            <a:off x="1097280" y="2194560"/>
+            <a:ext cx="4526280" cy="548640"/>
           </a:xfrm>
           <a:prstGeom prst="rect">
             <a:avLst/>
@@ -3816,7 +3818,7 @@
               <a:buNone/>
             </a:pPr>
             <a:r>
-              <a:rPr lang="en-US" sz="1650" b="1" dirty="0">
+              <a:rPr lang="en-US" sz="2000" b="1" dirty="0">
                 <a:solidFill>
                   <a:srgbClr val="06B6D4"/>
                 </a:solidFill>
@@ -3826,7 +3828,7 @@
               </a:rPr>
               <a:t>What local-first gives up</a:t>
             </a:r>
-            <a:endParaRPr lang="en-US" sz="1650" dirty="0"/>
+            <a:endParaRPr lang="en-US" sz="2000" dirty="0"/>
           </a:p>
         </p:txBody>
       </p:sp>
@@ -3862,7 +3864,7 @@
               <a:buChar char="▸"/>
             </a:pPr>
             <a:r>
-              <a:rPr lang="en-US" sz="1280" dirty="0">
+              <a:rPr lang="en-US" sz="1800" dirty="0">
                 <a:solidFill>
                   <a:srgbClr val="CBD5E1"/>
                 </a:solidFill>
@@ -3872,7 +3874,7 @@
               </a:rPr>
               <a:t>The frontier-model ceiling on the hardest reasoning tasks</a:t>
             </a:r>
-            <a:endParaRPr lang="en-US" sz="1280" dirty="0"/>
+            <a:endParaRPr lang="en-US" sz="1800" dirty="0"/>
           </a:p>
           <a:p>
             <a:pPr marL="342900" indent="-342900">
@@ -3886,7 +3888,7 @@
               <a:buChar char="▸"/>
             </a:pPr>
             <a:r>
-              <a:rPr lang="en-US" sz="1280" dirty="0">
+              <a:rPr lang="en-US" sz="1800" dirty="0">
                 <a:solidFill>
                   <a:srgbClr val="CBD5E1"/>
                 </a:solidFill>
@@ -3896,7 +3898,7 @@
               </a:rPr>
               <a:t>Hardware planning becomes your responsibility</a:t>
             </a:r>
-            <a:endParaRPr lang="en-US" sz="1280" dirty="0"/>
+            <a:endParaRPr lang="en-US" sz="1800" dirty="0"/>
           </a:p>
           <a:p>
             <a:pPr marL="342900" indent="-342900">
@@ -3910,7 +3912,7 @@
               <a:buChar char="▸"/>
             </a:pPr>
             <a:r>
-              <a:rPr lang="en-US" sz="1280" dirty="0">
+              <a:rPr lang="en-US" sz="1800" dirty="0">
                 <a:solidFill>
                   <a:srgbClr val="CBD5E1"/>
                 </a:solidFill>
@@ -3920,7 +3922,7 @@
               </a:rPr>
               <a:t>Vendor conveniences you now build yourself</a:t>
             </a:r>
-            <a:endParaRPr lang="en-US" sz="1280" dirty="0"/>
+            <a:endParaRPr lang="en-US" sz="1800" dirty="0"/>
           </a:p>
         </p:txBody>
       </p:sp>
@@ -3932,12 +3934,12 @@
         </p:nvSpPr>
         <p:spPr>
           <a:xfrm>
-            <a:off x="6291072" y="2011680"/>
-            <a:ext cx="5074920" cy="3611880"/>
+            <a:off x="6291072" y="1965960"/>
+            <a:ext cx="5074920" cy="3657600"/>
           </a:xfrm>
           <a:prstGeom prst="roundRect">
             <a:avLst>
-              <a:gd name="adj" fmla="val 2025"/>
+              <a:gd name="adj" fmla="val 2000"/>
             </a:avLst>
           </a:prstGeom>
           <a:solidFill>
@@ -3959,8 +3961,8 @@
         </p:nvSpPr>
         <p:spPr>
           <a:xfrm>
-            <a:off x="6565392" y="2240280"/>
-            <a:ext cx="4526280" cy="502920"/>
+            <a:off x="6565392" y="2194560"/>
+            <a:ext cx="4526280" cy="548640"/>
           </a:xfrm>
           <a:prstGeom prst="rect">
             <a:avLst/>
@@ -3976,7 +3978,7 @@
               <a:buNone/>
             </a:pPr>
             <a:r>
-              <a:rPr lang="en-US" sz="1650" b="1" dirty="0">
+              <a:rPr lang="en-US" sz="2000" b="1" dirty="0">
                 <a:solidFill>
                   <a:srgbClr val="93C5FD"/>
                 </a:solidFill>
@@ -3986,7 +3988,7 @@
               </a:rPr>
               <a:t>What it buys back</a:t>
             </a:r>
-            <a:endParaRPr lang="en-US" sz="1650" dirty="0"/>
+            <a:endParaRPr lang="en-US" sz="2000" dirty="0"/>
           </a:p>
         </p:txBody>
       </p:sp>
@@ -4022,7 +4024,7 @@
               <a:buChar char="▸"/>
             </a:pPr>
             <a:r>
-              <a:rPr lang="en-US" sz="1280" dirty="0">
+              <a:rPr lang="en-US" sz="1800" dirty="0">
                 <a:solidFill>
                   <a:srgbClr val="CBD5E1"/>
                 </a:solidFill>
@@ -4032,7 +4034,7 @@
               </a:rPr>
               <a:t>Flat cost: iteration is free, so agents re-check and document freely</a:t>
             </a:r>
-            <a:endParaRPr lang="en-US" sz="1280" dirty="0"/>
+            <a:endParaRPr lang="en-US" sz="1800" dirty="0"/>
           </a:p>
           <a:p>
             <a:pPr marL="342900" indent="-342900">
@@ -4046,7 +4048,7 @@
               <a:buChar char="▸"/>
             </a:pPr>
             <a:r>
-              <a:rPr lang="en-US" sz="1280" dirty="0">
+              <a:rPr lang="en-US" sz="1800" dirty="0">
                 <a:solidFill>
                   <a:srgbClr val="CBD5E1"/>
                 </a:solidFill>
@@ -4056,7 +4058,7 @@
               </a:rPr>
               <a:t>Privacy: business data never leaves the machine</a:t>
             </a:r>
-            <a:endParaRPr lang="en-US" sz="1280" dirty="0"/>
+            <a:endParaRPr lang="en-US" sz="1800" dirty="0"/>
           </a:p>
           <a:p>
             <a:pPr marL="342900" indent="-342900">
@@ -4070,7 +4072,7 @@
               <a:buChar char="▸"/>
             </a:pPr>
             <a:r>
-              <a:rPr lang="en-US" sz="1280" dirty="0">
+              <a:rPr lang="en-US" sz="1800" dirty="0">
                 <a:solidFill>
                   <a:srgbClr val="CBD5E1"/>
                 </a:solidFill>
@@ -4080,7 +4082,7 @@
               </a:rPr>
               <a:t>Reliability: no rate limits and no 2 a.m. deprecations</a:t>
             </a:r>
-            <a:endParaRPr lang="en-US" sz="1280" dirty="0"/>
+            <a:endParaRPr lang="en-US" sz="1800" dirty="0"/>
           </a:p>
         </p:txBody>
       </p:sp>
@@ -4115,8 +4117,8 @@
         </p:nvSpPr>
         <p:spPr>
           <a:xfrm>
-            <a:off x="822960" y="6053328"/>
-            <a:ext cx="9692640" cy="457200"/>
+            <a:off x="822960" y="6035040"/>
+            <a:ext cx="10424160" cy="566928"/>
           </a:xfrm>
           <a:prstGeom prst="rect">
             <a:avLst/>
@@ -4132,9 +4134,9 @@
               <a:buNone/>
             </a:pPr>
             <a:r>
-              <a:rPr lang="en-US" sz="1150" dirty="0">
-                <a:solidFill>
-                  <a:srgbClr val="64748B"/>
+              <a:rPr lang="en-US" sz="1800" dirty="0">
+                <a:solidFill>
+                  <a:srgbClr val="8FA3BF"/>
                 </a:solidFill>
                 <a:latin typeface="Segoe UI" pitchFamily="34" charset="0"/>
                 <a:ea typeface="Segoe UI" pitchFamily="34" charset="-122"/>
@@ -4142,7 +4144,7 @@
               </a:rPr>
               <a:t>For an always-on operational workforce, the trade is not close.</a:t>
             </a:r>
-            <a:endParaRPr lang="en-US" sz="1150" dirty="0"/>
+            <a:endParaRPr lang="en-US" sz="1800" dirty="0"/>
           </a:p>
         </p:txBody>
       </p:sp>
@@ -4154,8 +4156,8 @@
         </p:nvSpPr>
         <p:spPr>
           <a:xfrm>
-            <a:off x="10698480" y="6382512"/>
-            <a:ext cx="1188720" cy="365760"/>
+            <a:off x="10698480" y="6309360"/>
+            <a:ext cx="1188720" cy="411480"/>
           </a:xfrm>
           <a:prstGeom prst="rect">
             <a:avLst/>
@@ -4171,9 +4173,9 @@
               <a:buNone/>
             </a:pPr>
             <a:r>
-              <a:rPr lang="en-US" sz="1000" dirty="0">
-                <a:solidFill>
-                  <a:srgbClr val="64748B"/>
+              <a:rPr lang="en-US" sz="1800" dirty="0">
+                <a:solidFill>
+                  <a:srgbClr val="8FA3BF"/>
                 </a:solidFill>
                 <a:latin typeface="Consolas" pitchFamily="34" charset="0"/>
                 <a:ea typeface="Consolas" pitchFamily="34" charset="-122"/>
@@ -4181,7 +4183,7 @@
               </a:rPr>
               <a:t>11 / 14</a:t>
             </a:r>
-            <a:endParaRPr lang="en-US" sz="1000" dirty="0"/>
+            <a:endParaRPr lang="en-US" sz="1800" dirty="0"/>
           </a:p>
         </p:txBody>
       </p:sp>
@@ -4265,8 +4267,8 @@
         </p:nvSpPr>
         <p:spPr>
           <a:xfrm>
-            <a:off x="822960" y="502920"/>
-            <a:ext cx="10515600" cy="365760"/>
+            <a:off x="822960" y="457200"/>
+            <a:ext cx="10515600" cy="411480"/>
           </a:xfrm>
           <a:prstGeom prst="rect">
             <a:avLst/>
@@ -4282,7 +4284,7 @@
               <a:buNone/>
             </a:pPr>
             <a:r>
-              <a:rPr lang="en-US" sz="1200" spc="300" kern="0" dirty="0">
+              <a:rPr lang="en-US" sz="1800" spc="300" kern="0" dirty="0">
                 <a:solidFill>
                   <a:srgbClr val="06B6D4"/>
                 </a:solidFill>
@@ -4292,7 +4294,7 @@
               </a:rPr>
               <a:t>THE WORKFORCE</a:t>
             </a:r>
-            <a:endParaRPr lang="en-US" sz="1200" dirty="0"/>
+            <a:endParaRPr lang="en-US" sz="1800" dirty="0"/>
           </a:p>
         </p:txBody>
       </p:sp>
@@ -4343,8 +4345,8 @@
         </p:nvSpPr>
         <p:spPr>
           <a:xfrm>
-            <a:off x="868680" y="2011680"/>
-            <a:ext cx="10424160" cy="3566160"/>
+            <a:off x="868680" y="1965960"/>
+            <a:ext cx="10424160" cy="3840480"/>
           </a:xfrm>
           <a:prstGeom prst="rect">
             <a:avLst/>
@@ -4367,7 +4369,7 @@
               <a:buChar char="▸"/>
             </a:pPr>
             <a:r>
-              <a:rPr lang="en-US" sz="1600" dirty="0">
+              <a:rPr lang="en-US" sz="2000" dirty="0">
                 <a:solidFill>
                   <a:srgbClr val="CBD5E1"/>
                 </a:solidFill>
@@ -4377,7 +4379,7 @@
               </a:rPr>
               <a:t>Engineering agents build and maintain apps end-to-end, from structured specs to shipped builds.</a:t>
             </a:r>
-            <a:endParaRPr lang="en-US" sz="1600" dirty="0"/>
+            <a:endParaRPr lang="en-US" sz="2000" dirty="0"/>
           </a:p>
           <a:p>
             <a:pPr marL="342900" indent="-342900">
@@ -4391,7 +4393,7 @@
               <a:buChar char="▸"/>
             </a:pPr>
             <a:r>
-              <a:rPr lang="en-US" sz="1600" dirty="0">
+              <a:rPr lang="en-US" sz="2000" dirty="0">
                 <a:solidFill>
                   <a:srgbClr val="CBD5E1"/>
                 </a:solidFill>
@@ -4401,7 +4403,7 @@
               </a:rPr>
               <a:t>QA, PM, and Docs agents enforce the gate, track status, and make sure the company never forgets.</a:t>
             </a:r>
-            <a:endParaRPr lang="en-US" sz="1600" dirty="0"/>
+            <a:endParaRPr lang="en-US" sz="2000" dirty="0"/>
           </a:p>
           <a:p>
             <a:pPr marL="342900" indent="-342900">
@@ -4415,7 +4417,7 @@
               <a:buChar char="▸"/>
             </a:pPr>
             <a:r>
-              <a:rPr lang="en-US" sz="1600" dirty="0">
+              <a:rPr lang="en-US" sz="2000" dirty="0">
                 <a:solidFill>
                   <a:srgbClr val="CBD5E1"/>
                 </a:solidFill>
@@ -4425,7 +4427,7 @@
               </a:rPr>
               <a:t>Specialists cover data, GIS, OSINT, and system watching, using public data with strict provenance.</a:t>
             </a:r>
-            <a:endParaRPr lang="en-US" sz="1600" dirty="0"/>
+            <a:endParaRPr lang="en-US" sz="2000" dirty="0"/>
           </a:p>
           <a:p>
             <a:pPr marL="342900" indent="-342900">
@@ -4439,7 +4441,7 @@
               <a:buChar char="▸"/>
             </a:pPr>
             <a:r>
-              <a:rPr lang="en-US" sz="1600" dirty="0">
+              <a:rPr lang="en-US" sz="2000" dirty="0">
                 <a:solidFill>
                   <a:srgbClr val="CBD5E1"/>
                 </a:solidFill>
@@ -4449,7 +4451,7 @@
               </a:rPr>
               <a:t>Every agent has a scoped mandate, its own queue, and the same shared memory.</a:t>
             </a:r>
-            <a:endParaRPr lang="en-US" sz="1600" dirty="0"/>
+            <a:endParaRPr lang="en-US" sz="2000" dirty="0"/>
           </a:p>
         </p:txBody>
       </p:sp>
@@ -4484,8 +4486,8 @@
         </p:nvSpPr>
         <p:spPr>
           <a:xfrm>
-            <a:off x="822960" y="6053328"/>
-            <a:ext cx="9692640" cy="457200"/>
+            <a:off x="822960" y="6035040"/>
+            <a:ext cx="10424160" cy="566928"/>
           </a:xfrm>
           <a:prstGeom prst="rect">
             <a:avLst/>
@@ -4501,9 +4503,9 @@
               <a:buNone/>
             </a:pPr>
             <a:r>
-              <a:rPr lang="en-US" sz="1150" dirty="0">
-                <a:solidFill>
-                  <a:srgbClr val="64748B"/>
+              <a:rPr lang="en-US" sz="1800" dirty="0">
+                <a:solidFill>
+                  <a:srgbClr val="8FA3BF"/>
                 </a:solidFill>
                 <a:latin typeface="Segoe UI" pitchFamily="34" charset="0"/>
                 <a:ea typeface="Segoe UI" pitchFamily="34" charset="-122"/>
@@ -4511,7 +4513,7 @@
               </a:rPr>
               <a:t>A general chatbot can attempt anything; a scoped agent does one thing repeatably.</a:t>
             </a:r>
-            <a:endParaRPr lang="en-US" sz="1150" dirty="0"/>
+            <a:endParaRPr lang="en-US" sz="1800" dirty="0"/>
           </a:p>
         </p:txBody>
       </p:sp>
@@ -4523,8 +4525,8 @@
         </p:nvSpPr>
         <p:spPr>
           <a:xfrm>
-            <a:off x="10698480" y="6382512"/>
-            <a:ext cx="1188720" cy="365760"/>
+            <a:off x="10698480" y="6309360"/>
+            <a:ext cx="1188720" cy="411480"/>
           </a:xfrm>
           <a:prstGeom prst="rect">
             <a:avLst/>
@@ -4540,9 +4542,9 @@
               <a:buNone/>
             </a:pPr>
             <a:r>
-              <a:rPr lang="en-US" sz="1000" dirty="0">
-                <a:solidFill>
-                  <a:srgbClr val="64748B"/>
+              <a:rPr lang="en-US" sz="1800" dirty="0">
+                <a:solidFill>
+                  <a:srgbClr val="8FA3BF"/>
                 </a:solidFill>
                 <a:latin typeface="Consolas" pitchFamily="34" charset="0"/>
                 <a:ea typeface="Consolas" pitchFamily="34" charset="-122"/>
@@ -4550,7 +4552,7 @@
               </a:rPr>
               <a:t>12 / 14</a:t>
             </a:r>
-            <a:endParaRPr lang="en-US" sz="1000" dirty="0"/>
+            <a:endParaRPr lang="en-US" sz="1800" dirty="0"/>
           </a:p>
         </p:txBody>
       </p:sp>
@@ -4634,8 +4636,8 @@
         </p:nvSpPr>
         <p:spPr>
           <a:xfrm>
-            <a:off x="822960" y="502920"/>
-            <a:ext cx="10515600" cy="365760"/>
+            <a:off x="822960" y="457200"/>
+            <a:ext cx="10515600" cy="411480"/>
           </a:xfrm>
           <a:prstGeom prst="rect">
             <a:avLst/>
@@ -4651,7 +4653,7 @@
               <a:buNone/>
             </a:pPr>
             <a:r>
-              <a:rPr lang="en-US" sz="1200" spc="300" kern="0" dirty="0">
+              <a:rPr lang="en-US" sz="1800" spc="300" kern="0" dirty="0">
                 <a:solidFill>
                   <a:srgbClr val="06B6D4"/>
                 </a:solidFill>
@@ -4661,7 +4663,7 @@
               </a:rPr>
               <a:t>LESSONS</a:t>
             </a:r>
-            <a:endParaRPr lang="en-US" sz="1200" dirty="0"/>
+            <a:endParaRPr lang="en-US" sz="1800" dirty="0"/>
           </a:p>
         </p:txBody>
       </p:sp>
@@ -4712,8 +4714,8 @@
         </p:nvSpPr>
         <p:spPr>
           <a:xfrm>
-            <a:off x="868680" y="2011680"/>
-            <a:ext cx="10424160" cy="3566160"/>
+            <a:off x="868680" y="1965960"/>
+            <a:ext cx="10424160" cy="3840480"/>
           </a:xfrm>
           <a:prstGeom prst="rect">
             <a:avLst/>
@@ -4736,7 +4738,7 @@
               <a:buChar char="▸"/>
             </a:pPr>
             <a:r>
-              <a:rPr lang="en-US" sz="1600" dirty="0">
+              <a:rPr lang="en-US" sz="2000" dirty="0">
                 <a:solidFill>
                   <a:srgbClr val="CBD5E1"/>
                 </a:solidFill>
@@ -4746,7 +4748,7 @@
               </a:rPr>
               <a:t>Routing is the real intelligence: a small model with an excellent router beats a giant model guessing.</a:t>
             </a:r>
-            <a:endParaRPr lang="en-US" sz="1600" dirty="0"/>
+            <a:endParaRPr lang="en-US" sz="2000" dirty="0"/>
           </a:p>
           <a:p>
             <a:pPr marL="342900" indent="-342900">
@@ -4760,7 +4762,7 @@
               <a:buChar char="▸"/>
             </a:pPr>
             <a:r>
-              <a:rPr lang="en-US" sz="1600" dirty="0">
+              <a:rPr lang="en-US" sz="2000" dirty="0">
                 <a:solidFill>
                   <a:srgbClr val="CBD5E1"/>
                 </a:solidFill>
@@ -4770,7 +4772,7 @@
               </a:rPr>
               <a:t>Free-form memory rots; structured memory compounds, because format is governance.</a:t>
             </a:r>
-            <a:endParaRPr lang="en-US" sz="1600" dirty="0"/>
+            <a:endParaRPr lang="en-US" sz="2000" dirty="0"/>
           </a:p>
           <a:p>
             <a:pPr marL="342900" indent="-342900">
@@ -4784,7 +4786,7 @@
               <a:buChar char="▸"/>
             </a:pPr>
             <a:r>
-              <a:rPr lang="en-US" sz="1600" dirty="0">
+              <a:rPr lang="en-US" sz="2000" dirty="0">
                 <a:solidFill>
                   <a:srgbClr val="CBD5E1"/>
                 </a:solidFill>
@@ -4794,7 +4796,7 @@
               </a:rPr>
               <a:t>Prompts are suggestions and protocols are law: binding, versioned rules outlive phrasing.</a:t>
             </a:r>
-            <a:endParaRPr lang="en-US" sz="1600" dirty="0"/>
+            <a:endParaRPr lang="en-US" sz="2000" dirty="0"/>
           </a:p>
           <a:p>
             <a:pPr marL="342900" indent="-342900">
@@ -4808,7 +4810,7 @@
               <a:buChar char="▸"/>
             </a:pPr>
             <a:r>
-              <a:rPr lang="en-US" sz="1600" dirty="0">
+              <a:rPr lang="en-US" sz="2000" dirty="0">
                 <a:solidFill>
                   <a:srgbClr val="CBD5E1"/>
                 </a:solidFill>
@@ -4818,7 +4820,7 @@
               </a:rPr>
               <a:t>Design the system so intelligence is fungible, and the model brand stops mattering.</a:t>
             </a:r>
-            <a:endParaRPr lang="en-US" sz="1600" dirty="0"/>
+            <a:endParaRPr lang="en-US" sz="2000" dirty="0"/>
           </a:p>
         </p:txBody>
       </p:sp>
@@ -4853,8 +4855,8 @@
         </p:nvSpPr>
         <p:spPr>
           <a:xfrm>
-            <a:off x="822960" y="6053328"/>
-            <a:ext cx="9692640" cy="457200"/>
+            <a:off x="822960" y="6035040"/>
+            <a:ext cx="10424160" cy="566928"/>
           </a:xfrm>
           <a:prstGeom prst="rect">
             <a:avLst/>
@@ -4870,9 +4872,9 @@
               <a:buNone/>
             </a:pPr>
             <a:r>
-              <a:rPr lang="en-US" sz="1150" dirty="0">
-                <a:solidFill>
-                  <a:srgbClr val="64748B"/>
+              <a:rPr lang="en-US" sz="1800" dirty="0">
+                <a:solidFill>
+                  <a:srgbClr val="8FA3BF"/>
                 </a:solidFill>
                 <a:latin typeface="Segoe UI" pitchFamily="34" charset="0"/>
                 <a:ea typeface="Segoe UI" pitchFamily="34" charset="-122"/>
@@ -4880,7 +4882,7 @@
               </a:rPr>
               <a:t>The intelligence ceiling matters less than the system design around it.</a:t>
             </a:r>
-            <a:endParaRPr lang="en-US" sz="1150" dirty="0"/>
+            <a:endParaRPr lang="en-US" sz="1800" dirty="0"/>
           </a:p>
         </p:txBody>
       </p:sp>
@@ -4892,8 +4894,8 @@
         </p:nvSpPr>
         <p:spPr>
           <a:xfrm>
-            <a:off x="10698480" y="6382512"/>
-            <a:ext cx="1188720" cy="365760"/>
+            <a:off x="10698480" y="6309360"/>
+            <a:ext cx="1188720" cy="411480"/>
           </a:xfrm>
           <a:prstGeom prst="rect">
             <a:avLst/>
@@ -4909,9 +4911,9 @@
               <a:buNone/>
             </a:pPr>
             <a:r>
-              <a:rPr lang="en-US" sz="1000" dirty="0">
-                <a:solidFill>
-                  <a:srgbClr val="64748B"/>
+              <a:rPr lang="en-US" sz="1800" dirty="0">
+                <a:solidFill>
+                  <a:srgbClr val="8FA3BF"/>
                 </a:solidFill>
                 <a:latin typeface="Consolas" pitchFamily="34" charset="0"/>
                 <a:ea typeface="Consolas" pitchFamily="34" charset="-122"/>
@@ -4919,7 +4921,7 @@
               </a:rPr>
               <a:t>13 / 14</a:t>
             </a:r>
-            <a:endParaRPr lang="en-US" sz="1000" dirty="0"/>
+            <a:endParaRPr lang="en-US" sz="1800" dirty="0"/>
           </a:p>
         </p:txBody>
       </p:sp>
@@ -5003,8 +5005,8 @@
         </p:nvSpPr>
         <p:spPr>
           <a:xfrm>
-            <a:off x="822960" y="1417320"/>
-            <a:ext cx="10515600" cy="411480"/>
+            <a:off x="822960" y="1371600"/>
+            <a:ext cx="10515600" cy="457200"/>
           </a:xfrm>
           <a:prstGeom prst="rect">
             <a:avLst/>
@@ -5020,7 +5022,7 @@
               <a:buNone/>
             </a:pPr>
             <a:r>
-              <a:rPr lang="en-US" sz="1300" spc="400" kern="0" dirty="0">
+              <a:rPr lang="en-US" sz="1800" spc="400" kern="0" dirty="0">
                 <a:solidFill>
                   <a:srgbClr val="06B6D4"/>
                 </a:solidFill>
@@ -5030,7 +5032,7 @@
               </a:rPr>
               <a:t>WORK WITH ME</a:t>
             </a:r>
-            <a:endParaRPr lang="en-US" sz="1300" dirty="0"/>
+            <a:endParaRPr lang="en-US" sz="1800" dirty="0"/>
           </a:p>
         </p:txBody>
       </p:sp>
@@ -5042,7 +5044,7 @@
         </p:nvSpPr>
         <p:spPr>
           <a:xfrm>
-            <a:off x="822960" y="1920240"/>
+            <a:off x="822960" y="1874520"/>
             <a:ext cx="10515600" cy="1371600"/>
           </a:xfrm>
           <a:prstGeom prst="rect">
@@ -5081,8 +5083,8 @@
         </p:nvSpPr>
         <p:spPr>
           <a:xfrm>
-            <a:off x="2011680" y="3429000"/>
-            <a:ext cx="8183880" cy="1554480"/>
+            <a:off x="2011680" y="3383280"/>
+            <a:ext cx="8183880" cy="1691640"/>
           </a:xfrm>
           <a:prstGeom prst="rect">
             <a:avLst/>
@@ -5101,7 +5103,7 @@
               <a:buNone/>
             </a:pPr>
             <a:r>
-              <a:rPr lang="en-US" sz="1500" dirty="0">
+              <a:rPr lang="en-US" sz="2000" dirty="0">
                 <a:solidFill>
                   <a:srgbClr val="CBD5E1"/>
                 </a:solidFill>
@@ -5118,7 +5120,7 @@
               <a:buNone/>
             </a:pPr>
             <a:r>
-              <a:rPr lang="en-US" sz="1500" dirty="0">
+              <a:rPr lang="en-US" sz="2000" dirty="0">
                 <a:solidFill>
                   <a:srgbClr val="CBD5E1"/>
                 </a:solidFill>
@@ -5128,7 +5130,7 @@
               </a:rPr>
               <a:t>I also take BI, data engineering, and web scraping projects worldwide via Upwork.</a:t>
             </a:r>
-            <a:endParaRPr lang="en-US" sz="1500" dirty="0"/>
+            <a:endParaRPr lang="en-US" sz="2000" dirty="0"/>
           </a:p>
         </p:txBody>
       </p:sp>
@@ -5163,8 +5165,8 @@
         </p:nvSpPr>
         <p:spPr>
           <a:xfrm>
-            <a:off x="822960" y="5376672"/>
-            <a:ext cx="10515600" cy="457200"/>
+            <a:off x="822960" y="5349240"/>
+            <a:ext cx="10515600" cy="502920"/>
           </a:xfrm>
           <a:prstGeom prst="rect">
             <a:avLst/>
@@ -5180,7 +5182,7 @@
               <a:buNone/>
             </a:pPr>
             <a:r>
-              <a:rPr lang="en-US" sz="1350" b="1" dirty="0">
+              <a:rPr lang="en-US" sz="1800" b="1" dirty="0">
                 <a:solidFill>
                   <a:srgbClr val="06B6D4"/>
                 </a:solidFill>
@@ -5190,7 +5192,7 @@
               </a:rPr>
               <a:t>rezalianvatiady.github.io · github.com/rezalianvatiady</a:t>
             </a:r>
-            <a:endParaRPr lang="en-US" sz="1350" dirty="0"/>
+            <a:endParaRPr lang="en-US" sz="1800" dirty="0"/>
           </a:p>
         </p:txBody>
       </p:sp>
@@ -5202,8 +5204,8 @@
         </p:nvSpPr>
         <p:spPr>
           <a:xfrm>
-            <a:off x="10698480" y="6382512"/>
-            <a:ext cx="1188720" cy="365760"/>
+            <a:off x="10698480" y="6309360"/>
+            <a:ext cx="1188720" cy="411480"/>
           </a:xfrm>
           <a:prstGeom prst="rect">
             <a:avLst/>
@@ -5219,9 +5221,9 @@
               <a:buNone/>
             </a:pPr>
             <a:r>
-              <a:rPr lang="en-US" sz="1000" dirty="0">
-                <a:solidFill>
-                  <a:srgbClr val="64748B"/>
+              <a:rPr lang="en-US" sz="1800" dirty="0">
+                <a:solidFill>
+                  <a:srgbClr val="8FA3BF"/>
                 </a:solidFill>
                 <a:latin typeface="Consolas" pitchFamily="34" charset="0"/>
                 <a:ea typeface="Consolas" pitchFamily="34" charset="-122"/>
@@ -5229,7 +5231,7 @@
               </a:rPr>
               <a:t>14 / 14</a:t>
             </a:r>
-            <a:endParaRPr lang="en-US" sz="1000" dirty="0"/>
+            <a:endParaRPr lang="en-US" sz="1800" dirty="0"/>
           </a:p>
         </p:txBody>
       </p:sp>
@@ -5313,8 +5315,8 @@
         </p:nvSpPr>
         <p:spPr>
           <a:xfrm>
-            <a:off x="822960" y="502920"/>
-            <a:ext cx="10515600" cy="365760"/>
+            <a:off x="822960" y="457200"/>
+            <a:ext cx="10515600" cy="411480"/>
           </a:xfrm>
           <a:prstGeom prst="rect">
             <a:avLst/>
@@ -5330,7 +5332,7 @@
               <a:buNone/>
             </a:pPr>
             <a:r>
-              <a:rPr lang="en-US" sz="1200" spc="300" kern="0" dirty="0">
+              <a:rPr lang="en-US" sz="1800" spc="300" kern="0" dirty="0">
                 <a:solidFill>
                   <a:srgbClr val="06B6D4"/>
                 </a:solidFill>
@@ -5340,7 +5342,7 @@
               </a:rPr>
               <a:t>AGENDA</a:t>
             </a:r>
-            <a:endParaRPr lang="en-US" sz="1200" dirty="0"/>
+            <a:endParaRPr lang="en-US" sz="1800" dirty="0"/>
           </a:p>
         </p:txBody>
       </p:sp>
@@ -5391,8 +5393,8 @@
         </p:nvSpPr>
         <p:spPr>
           <a:xfrm>
-            <a:off x="868680" y="2112264"/>
-            <a:ext cx="420624" cy="420624"/>
+            <a:off x="868680" y="2103120"/>
+            <a:ext cx="457200" cy="457200"/>
           </a:xfrm>
           <a:prstGeom prst="ellipse">
             <a:avLst/>
@@ -5416,8 +5418,8 @@
         </p:nvSpPr>
         <p:spPr>
           <a:xfrm>
-            <a:off x="868680" y="2112264"/>
-            <a:ext cx="420624" cy="420624"/>
+            <a:off x="868680" y="2103120"/>
+            <a:ext cx="457200" cy="457200"/>
           </a:xfrm>
           <a:prstGeom prst="rect">
             <a:avLst/>
@@ -5433,7 +5435,7 @@
               <a:buNone/>
             </a:pPr>
             <a:r>
-              <a:rPr lang="en-US" sz="1300" b="1" dirty="0">
+              <a:rPr lang="en-US" sz="1800" b="1" dirty="0">
                 <a:solidFill>
                   <a:srgbClr val="3B82F6"/>
                 </a:solidFill>
@@ -5443,7 +5445,7 @@
               </a:rPr>
               <a:t>1</a:t>
             </a:r>
-            <a:endParaRPr lang="en-US" sz="1300" dirty="0"/>
+            <a:endParaRPr lang="en-US" sz="1800" dirty="0"/>
           </a:p>
         </p:txBody>
       </p:sp>
@@ -5455,8 +5457,8 @@
         </p:nvSpPr>
         <p:spPr>
           <a:xfrm>
-            <a:off x="1435608" y="2057400"/>
-            <a:ext cx="4480560" cy="822960"/>
+            <a:off x="1472184" y="2011680"/>
+            <a:ext cx="4443984" cy="960120"/>
           </a:xfrm>
           <a:prstGeom prst="rect">
             <a:avLst/>
@@ -5472,7 +5474,7 @@
               <a:buNone/>
             </a:pPr>
             <a:r>
-              <a:rPr lang="en-US" sz="1450" dirty="0">
+              <a:rPr lang="en-US" sz="2000" dirty="0">
                 <a:solidFill>
                   <a:srgbClr val="CBD5E1"/>
                 </a:solidFill>
@@ -5482,7 +5484,7 @@
               </a:rPr>
               <a:t>Why one founder needed an operating system, not another chatbot</a:t>
             </a:r>
-            <a:endParaRPr lang="en-US" sz="1450" dirty="0"/>
+            <a:endParaRPr lang="en-US" sz="2000" dirty="0"/>
           </a:p>
         </p:txBody>
       </p:sp>
@@ -5494,8 +5496,8 @@
         </p:nvSpPr>
         <p:spPr>
           <a:xfrm>
-            <a:off x="868680" y="3044952"/>
-            <a:ext cx="420624" cy="420624"/>
+            <a:off x="868680" y="3182112"/>
+            <a:ext cx="457200" cy="457200"/>
           </a:xfrm>
           <a:prstGeom prst="ellipse">
             <a:avLst/>
@@ -5519,8 +5521,8 @@
         </p:nvSpPr>
         <p:spPr>
           <a:xfrm>
-            <a:off x="868680" y="3044952"/>
-            <a:ext cx="420624" cy="420624"/>
+            <a:off x="868680" y="3182112"/>
+            <a:ext cx="457200" cy="457200"/>
           </a:xfrm>
           <a:prstGeom prst="rect">
             <a:avLst/>
@@ -5536,7 +5538,7 @@
               <a:buNone/>
             </a:pPr>
             <a:r>
-              <a:rPr lang="en-US" sz="1300" b="1" dirty="0">
+              <a:rPr lang="en-US" sz="1800" b="1" dirty="0">
                 <a:solidFill>
                   <a:srgbClr val="06B6D4"/>
                 </a:solidFill>
@@ -5546,7 +5548,7 @@
               </a:rPr>
               <a:t>2</a:t>
             </a:r>
-            <a:endParaRPr lang="en-US" sz="1300" dirty="0"/>
+            <a:endParaRPr lang="en-US" sz="1800" dirty="0"/>
           </a:p>
         </p:txBody>
       </p:sp>
@@ -5558,8 +5560,8 @@
         </p:nvSpPr>
         <p:spPr>
           <a:xfrm>
-            <a:off x="1435608" y="2990088"/>
-            <a:ext cx="4480560" cy="822960"/>
+            <a:off x="1472184" y="3090672"/>
+            <a:ext cx="4443984" cy="960120"/>
           </a:xfrm>
           <a:prstGeom prst="rect">
             <a:avLst/>
@@ -5575,7 +5577,7 @@
               <a:buNone/>
             </a:pPr>
             <a:r>
-              <a:rPr lang="en-US" sz="1450" dirty="0">
+              <a:rPr lang="en-US" sz="2000" dirty="0">
                 <a:solidFill>
                   <a:srgbClr val="CBD5E1"/>
                 </a:solidFill>
@@ -5585,7 +5587,7 @@
               </a:rPr>
               <a:t>The five-layer architecture on a single machine</a:t>
             </a:r>
-            <a:endParaRPr lang="en-US" sz="1450" dirty="0"/>
+            <a:endParaRPr lang="en-US" sz="2000" dirty="0"/>
           </a:p>
         </p:txBody>
       </p:sp>
@@ -5597,8 +5599,8 @@
         </p:nvSpPr>
         <p:spPr>
           <a:xfrm>
-            <a:off x="868680" y="3977640"/>
-            <a:ext cx="420624" cy="420624"/>
+            <a:off x="868680" y="4261104"/>
+            <a:ext cx="457200" cy="457200"/>
           </a:xfrm>
           <a:prstGeom prst="ellipse">
             <a:avLst/>
@@ -5622,8 +5624,8 @@
         </p:nvSpPr>
         <p:spPr>
           <a:xfrm>
-            <a:off x="868680" y="3977640"/>
-            <a:ext cx="420624" cy="420624"/>
+            <a:off x="868680" y="4261104"/>
+            <a:ext cx="457200" cy="457200"/>
           </a:xfrm>
           <a:prstGeom prst="rect">
             <a:avLst/>
@@ -5639,7 +5641,7 @@
               <a:buNone/>
             </a:pPr>
             <a:r>
-              <a:rPr lang="en-US" sz="1300" b="1" dirty="0">
+              <a:rPr lang="en-US" sz="1800" b="1" dirty="0">
                 <a:solidFill>
                   <a:srgbClr val="3B82F6"/>
                 </a:solidFill>
@@ -5649,7 +5651,7 @@
               </a:rPr>
               <a:t>3</a:t>
             </a:r>
-            <a:endParaRPr lang="en-US" sz="1300" dirty="0"/>
+            <a:endParaRPr lang="en-US" sz="1800" dirty="0"/>
           </a:p>
         </p:txBody>
       </p:sp>
@@ -5661,8 +5663,8 @@
         </p:nvSpPr>
         <p:spPr>
           <a:xfrm>
-            <a:off x="1435608" y="3922776"/>
-            <a:ext cx="4480560" cy="822960"/>
+            <a:off x="1472184" y="4169664"/>
+            <a:ext cx="4443984" cy="960120"/>
           </a:xfrm>
           <a:prstGeom prst="rect">
             <a:avLst/>
@@ -5678,7 +5680,7 @@
               <a:buNone/>
             </a:pPr>
             <a:r>
-              <a:rPr lang="en-US" sz="1450" dirty="0">
+              <a:rPr lang="en-US" sz="2000" dirty="0">
                 <a:solidFill>
                   <a:srgbClr val="CBD5E1"/>
                 </a:solidFill>
@@ -5688,7 +5690,7 @@
               </a:rPr>
               <a:t>The intent router: 100% accuracy on a 30-query validation set</a:t>
             </a:r>
-            <a:endParaRPr lang="en-US" sz="1450" dirty="0"/>
+            <a:endParaRPr lang="en-US" sz="2000" dirty="0"/>
           </a:p>
         </p:txBody>
       </p:sp>
@@ -5700,8 +5702,8 @@
         </p:nvSpPr>
         <p:spPr>
           <a:xfrm>
-            <a:off x="6355080" y="2112264"/>
-            <a:ext cx="420624" cy="420624"/>
+            <a:off x="6355080" y="2103120"/>
+            <a:ext cx="457200" cy="457200"/>
           </a:xfrm>
           <a:prstGeom prst="ellipse">
             <a:avLst/>
@@ -5725,8 +5727,8 @@
         </p:nvSpPr>
         <p:spPr>
           <a:xfrm>
-            <a:off x="6355080" y="2112264"/>
-            <a:ext cx="420624" cy="420624"/>
+            <a:off x="6355080" y="2103120"/>
+            <a:ext cx="457200" cy="457200"/>
           </a:xfrm>
           <a:prstGeom prst="rect">
             <a:avLst/>
@@ -5742,7 +5744,7 @@
               <a:buNone/>
             </a:pPr>
             <a:r>
-              <a:rPr lang="en-US" sz="1300" b="1" dirty="0">
+              <a:rPr lang="en-US" sz="1800" b="1" dirty="0">
                 <a:solidFill>
                   <a:srgbClr val="06B6D4"/>
                 </a:solidFill>
@@ -5752,7 +5754,7 @@
               </a:rPr>
               <a:t>4</a:t>
             </a:r>
-            <a:endParaRPr lang="en-US" sz="1300" dirty="0"/>
+            <a:endParaRPr lang="en-US" sz="1800" dirty="0"/>
           </a:p>
         </p:txBody>
       </p:sp>
@@ -5764,8 +5766,8 @@
         </p:nvSpPr>
         <p:spPr>
           <a:xfrm>
-            <a:off x="6922008" y="2057400"/>
-            <a:ext cx="4480560" cy="822960"/>
+            <a:off x="6958584" y="2011680"/>
+            <a:ext cx="4443984" cy="960120"/>
           </a:xfrm>
           <a:prstGeom prst="rect">
             <a:avLst/>
@@ -5781,7 +5783,7 @@
               <a:buNone/>
             </a:pPr>
             <a:r>
-              <a:rPr lang="en-US" sz="1450" dirty="0">
+              <a:rPr lang="en-US" sz="2000" dirty="0">
                 <a:solidFill>
                   <a:srgbClr val="CBD5E1"/>
                 </a:solidFill>
@@ -5791,7 +5793,7 @@
               </a:rPr>
               <a:t>Structured memory: rules, status, lessons</a:t>
             </a:r>
-            <a:endParaRPr lang="en-US" sz="1450" dirty="0"/>
+            <a:endParaRPr lang="en-US" sz="2000" dirty="0"/>
           </a:p>
         </p:txBody>
       </p:sp>
@@ -5803,8 +5805,8 @@
         </p:nvSpPr>
         <p:spPr>
           <a:xfrm>
-            <a:off x="6355080" y="3044952"/>
-            <a:ext cx="420624" cy="420624"/>
+            <a:off x="6355080" y="3182112"/>
+            <a:ext cx="457200" cy="457200"/>
           </a:xfrm>
           <a:prstGeom prst="ellipse">
             <a:avLst/>
@@ -5828,8 +5830,8 @@
         </p:nvSpPr>
         <p:spPr>
           <a:xfrm>
-            <a:off x="6355080" y="3044952"/>
-            <a:ext cx="420624" cy="420624"/>
+            <a:off x="6355080" y="3182112"/>
+            <a:ext cx="457200" cy="457200"/>
           </a:xfrm>
           <a:prstGeom prst="rect">
             <a:avLst/>
@@ -5845,7 +5847,7 @@
               <a:buNone/>
             </a:pPr>
             <a:r>
-              <a:rPr lang="en-US" sz="1300" b="1" dirty="0">
+              <a:rPr lang="en-US" sz="1800" b="1" dirty="0">
                 <a:solidFill>
                   <a:srgbClr val="3B82F6"/>
                 </a:solidFill>
@@ -5855,7 +5857,7 @@
               </a:rPr>
               <a:t>5</a:t>
             </a:r>
-            <a:endParaRPr lang="en-US" sz="1300" dirty="0"/>
+            <a:endParaRPr lang="en-US" sz="1800" dirty="0"/>
           </a:p>
         </p:txBody>
       </p:sp>
@@ -5867,8 +5869,8 @@
         </p:nvSpPr>
         <p:spPr>
           <a:xfrm>
-            <a:off x="6922008" y="2990088"/>
-            <a:ext cx="4480560" cy="822960"/>
+            <a:off x="6958584" y="3090672"/>
+            <a:ext cx="4443984" cy="960120"/>
           </a:xfrm>
           <a:prstGeom prst="rect">
             <a:avLst/>
@@ -5884,7 +5886,7 @@
               <a:buNone/>
             </a:pPr>
             <a:r>
-              <a:rPr lang="en-US" sz="1450" dirty="0">
+              <a:rPr lang="en-US" sz="2000" dirty="0">
                 <a:solidFill>
                   <a:srgbClr val="CBD5E1"/>
                 </a:solidFill>
@@ -5894,7 +5896,7 @@
               </a:rPr>
               <a:t>Quality gates and the 9-agent workforce they hold together</a:t>
             </a:r>
-            <a:endParaRPr lang="en-US" sz="1450" dirty="0"/>
+            <a:endParaRPr lang="en-US" sz="2000" dirty="0"/>
           </a:p>
         </p:txBody>
       </p:sp>
@@ -5906,8 +5908,8 @@
         </p:nvSpPr>
         <p:spPr>
           <a:xfrm>
-            <a:off x="6355080" y="3977640"/>
-            <a:ext cx="420624" cy="420624"/>
+            <a:off x="6355080" y="4261104"/>
+            <a:ext cx="457200" cy="457200"/>
           </a:xfrm>
           <a:prstGeom prst="ellipse">
             <a:avLst/>
@@ -5931,8 +5933,8 @@
         </p:nvSpPr>
         <p:spPr>
           <a:xfrm>
-            <a:off x="6355080" y="3977640"/>
-            <a:ext cx="420624" cy="420624"/>
+            <a:off x="6355080" y="4261104"/>
+            <a:ext cx="457200" cy="457200"/>
           </a:xfrm>
           <a:prstGeom prst="rect">
             <a:avLst/>
@@ -5948,7 +5950,7 @@
               <a:buNone/>
             </a:pPr>
             <a:r>
-              <a:rPr lang="en-US" sz="1300" b="1" dirty="0">
+              <a:rPr lang="en-US" sz="1800" b="1" dirty="0">
                 <a:solidFill>
                   <a:srgbClr val="06B6D4"/>
                 </a:solidFill>
@@ -5958,7 +5960,7 @@
               </a:rPr>
               <a:t>6</a:t>
             </a:r>
-            <a:endParaRPr lang="en-US" sz="1300" dirty="0"/>
+            <a:endParaRPr lang="en-US" sz="1800" dirty="0"/>
           </a:p>
         </p:txBody>
       </p:sp>
@@ -5970,8 +5972,8 @@
         </p:nvSpPr>
         <p:spPr>
           <a:xfrm>
-            <a:off x="6922008" y="3922776"/>
-            <a:ext cx="4480560" cy="822960"/>
+            <a:off x="6958584" y="4169664"/>
+            <a:ext cx="4443984" cy="960120"/>
           </a:xfrm>
           <a:prstGeom prst="rect">
             <a:avLst/>
@@ -5987,7 +5989,7 @@
               <a:buNone/>
             </a:pPr>
             <a:r>
-              <a:rPr lang="en-US" sz="1450" dirty="0">
+              <a:rPr lang="en-US" sz="2000" dirty="0">
                 <a:solidFill>
                   <a:srgbClr val="CBD5E1"/>
                 </a:solidFill>
@@ -5997,7 +5999,7 @@
               </a:rPr>
               <a:t>The scoreboard: 30+ apps and 8.7K+ lines of open-source frameworks</a:t>
             </a:r>
-            <a:endParaRPr lang="en-US" sz="1450" dirty="0"/>
+            <a:endParaRPr lang="en-US" sz="2000" dirty="0"/>
           </a:p>
         </p:txBody>
       </p:sp>
@@ -6009,8 +6011,8 @@
         </p:nvSpPr>
         <p:spPr>
           <a:xfrm>
-            <a:off x="10698480" y="6382512"/>
-            <a:ext cx="1188720" cy="365760"/>
+            <a:off x="10698480" y="6309360"/>
+            <a:ext cx="1188720" cy="411480"/>
           </a:xfrm>
           <a:prstGeom prst="rect">
             <a:avLst/>
@@ -6026,9 +6028,9 @@
               <a:buNone/>
             </a:pPr>
             <a:r>
-              <a:rPr lang="en-US" sz="1000" dirty="0">
-                <a:solidFill>
-                  <a:srgbClr val="64748B"/>
+              <a:rPr lang="en-US" sz="1800" dirty="0">
+                <a:solidFill>
+                  <a:srgbClr val="8FA3BF"/>
                 </a:solidFill>
                 <a:latin typeface="Consolas" pitchFamily="34" charset="0"/>
                 <a:ea typeface="Consolas" pitchFamily="34" charset="-122"/>
@@ -6036,7 +6038,7 @@
               </a:rPr>
               <a:t>2 / 14</a:t>
             </a:r>
-            <a:endParaRPr lang="en-US" sz="1000" dirty="0"/>
+            <a:endParaRPr lang="en-US" sz="1800" dirty="0"/>
           </a:p>
         </p:txBody>
       </p:sp>
@@ -6120,8 +6122,8 @@
         </p:nvSpPr>
         <p:spPr>
           <a:xfrm>
-            <a:off x="822960" y="502920"/>
-            <a:ext cx="10515600" cy="365760"/>
+            <a:off x="822960" y="457200"/>
+            <a:ext cx="10515600" cy="411480"/>
           </a:xfrm>
           <a:prstGeom prst="rect">
             <a:avLst/>
@@ -6137,7 +6139,7 @@
               <a:buNone/>
             </a:pPr>
             <a:r>
-              <a:rPr lang="en-US" sz="1200" spc="300" kern="0" dirty="0">
+              <a:rPr lang="en-US" sz="1800" spc="300" kern="0" dirty="0">
                 <a:solidFill>
                   <a:srgbClr val="06B6D4"/>
                 </a:solidFill>
@@ -6147,7 +6149,7 @@
               </a:rPr>
               <a:t>THE PROBLEM</a:t>
             </a:r>
-            <a:endParaRPr lang="en-US" sz="1200" dirty="0"/>
+            <a:endParaRPr lang="en-US" sz="1800" dirty="0"/>
           </a:p>
         </p:txBody>
       </p:sp>
@@ -6198,8 +6200,8 @@
         </p:nvSpPr>
         <p:spPr>
           <a:xfrm>
-            <a:off x="868680" y="2011680"/>
-            <a:ext cx="10424160" cy="3566160"/>
+            <a:off x="868680" y="1965960"/>
+            <a:ext cx="10424160" cy="3840480"/>
           </a:xfrm>
           <a:prstGeom prst="rect">
             <a:avLst/>
@@ -6222,7 +6224,7 @@
               <a:buChar char="▸"/>
             </a:pPr>
             <a:r>
-              <a:rPr lang="en-US" sz="1600" dirty="0">
+              <a:rPr lang="en-US" sz="2000" dirty="0">
                 <a:solidFill>
                   <a:srgbClr val="CBD5E1"/>
                 </a:solidFill>
@@ -6232,7 +6234,7 @@
               </a:rPr>
               <a:t>Every task you do yourself is a task you cannot parallelize, and a company is a queue of tasks.</a:t>
             </a:r>
-            <a:endParaRPr lang="en-US" sz="1600" dirty="0"/>
+            <a:endParaRPr lang="en-US" sz="2000" dirty="0"/>
           </a:p>
           <a:p>
             <a:pPr marL="342900" indent="-342900">
@@ -6246,7 +6248,7 @@
               <a:buChar char="▸"/>
             </a:pPr>
             <a:r>
-              <a:rPr lang="en-US" sz="1600" dirty="0">
+              <a:rPr lang="en-US" sz="2000" dirty="0">
                 <a:solidFill>
                   <a:srgbClr val="CBD5E1"/>
                 </a:solidFill>
@@ -6256,7 +6258,7 @@
               </a:rPr>
               <a:t>Cloud APIs meter every thought, so iteration gets taxed and agents learn to be stingy.</a:t>
             </a:r>
-            <a:endParaRPr lang="en-US" sz="1600" dirty="0"/>
+            <a:endParaRPr lang="en-US" sz="2000" dirty="0"/>
           </a:p>
           <a:p>
             <a:pPr marL="342900" indent="-342900">
@@ -6270,7 +6272,7 @@
               <a:buChar char="▸"/>
             </a:pPr>
             <a:r>
-              <a:rPr lang="en-US" sz="1600" dirty="0">
+              <a:rPr lang="en-US" sz="2000" dirty="0">
                 <a:solidFill>
                   <a:srgbClr val="CBD5E1"/>
                 </a:solidFill>
@@ -6280,7 +6282,7 @@
               </a:rPr>
               <a:t>Business data, credentials, and client material deserve to stay on your own machine.</a:t>
             </a:r>
-            <a:endParaRPr lang="en-US" sz="1600" dirty="0"/>
+            <a:endParaRPr lang="en-US" sz="2000" dirty="0"/>
           </a:p>
           <a:p>
             <a:pPr marL="342900" indent="-342900">
@@ -6294,7 +6296,7 @@
               <a:buChar char="▸"/>
             </a:pPr>
             <a:r>
-              <a:rPr lang="en-US" sz="1600" dirty="0">
+              <a:rPr lang="en-US" sz="2000" dirty="0">
                 <a:solidFill>
                   <a:srgbClr val="CBD5E1"/>
                 </a:solidFill>
@@ -6304,7 +6306,7 @@
               </a:rPr>
               <a:t>The answer is not a smarter chatbot; it is an operating system that routes, remembers, and enforces.</a:t>
             </a:r>
-            <a:endParaRPr lang="en-US" sz="1600" dirty="0"/>
+            <a:endParaRPr lang="en-US" sz="2000" dirty="0"/>
           </a:p>
         </p:txBody>
       </p:sp>
@@ -6339,8 +6341,8 @@
         </p:nvSpPr>
         <p:spPr>
           <a:xfrm>
-            <a:off x="822960" y="6053328"/>
-            <a:ext cx="9692640" cy="457200"/>
+            <a:off x="822960" y="6035040"/>
+            <a:ext cx="10424160" cy="566928"/>
           </a:xfrm>
           <a:prstGeom prst="rect">
             <a:avLst/>
@@ -6356,9 +6358,9 @@
               <a:buNone/>
             </a:pPr>
             <a:r>
-              <a:rPr lang="en-US" sz="1150" dirty="0">
-                <a:solidFill>
-                  <a:srgbClr val="64748B"/>
+              <a:rPr lang="en-US" sz="1800" dirty="0">
+                <a:solidFill>
+                  <a:srgbClr val="8FA3BF"/>
                 </a:solidFill>
                 <a:latin typeface="Segoe UI" pitchFamily="34" charset="0"/>
                 <a:ea typeface="Segoe UI" pitchFamily="34" charset="-122"/>
@@ -6366,7 +6368,7 @@
               </a:rPr>
               <a:t>ZalinOS was designed as infrastructure, not as a demo.</a:t>
             </a:r>
-            <a:endParaRPr lang="en-US" sz="1150" dirty="0"/>
+            <a:endParaRPr lang="en-US" sz="1800" dirty="0"/>
           </a:p>
         </p:txBody>
       </p:sp>
@@ -6378,8 +6380,8 @@
         </p:nvSpPr>
         <p:spPr>
           <a:xfrm>
-            <a:off x="10698480" y="6382512"/>
-            <a:ext cx="1188720" cy="365760"/>
+            <a:off x="10698480" y="6309360"/>
+            <a:ext cx="1188720" cy="411480"/>
           </a:xfrm>
           <a:prstGeom prst="rect">
             <a:avLst/>
@@ -6395,9 +6397,9 @@
               <a:buNone/>
             </a:pPr>
             <a:r>
-              <a:rPr lang="en-US" sz="1000" dirty="0">
-                <a:solidFill>
-                  <a:srgbClr val="64748B"/>
+              <a:rPr lang="en-US" sz="1800" dirty="0">
+                <a:solidFill>
+                  <a:srgbClr val="8FA3BF"/>
                 </a:solidFill>
                 <a:latin typeface="Consolas" pitchFamily="34" charset="0"/>
                 <a:ea typeface="Consolas" pitchFamily="34" charset="-122"/>
@@ -6405,7 +6407,7 @@
               </a:rPr>
               <a:t>3 / 14</a:t>
             </a:r>
-            <a:endParaRPr lang="en-US" sz="1000" dirty="0"/>
+            <a:endParaRPr lang="en-US" sz="1800" dirty="0"/>
           </a:p>
         </p:txBody>
       </p:sp>
@@ -6489,8 +6491,8 @@
         </p:nvSpPr>
         <p:spPr>
           <a:xfrm>
-            <a:off x="822960" y="502920"/>
-            <a:ext cx="10515600" cy="365760"/>
+            <a:off x="822960" y="457200"/>
+            <a:ext cx="10515600" cy="411480"/>
           </a:xfrm>
           <a:prstGeom prst="rect">
             <a:avLst/>
@@ -6506,7 +6508,7 @@
               <a:buNone/>
             </a:pPr>
             <a:r>
-              <a:rPr lang="en-US" sz="1200" spc="300" kern="0" dirty="0">
+              <a:rPr lang="en-US" sz="1800" spc="300" kern="0" dirty="0">
                 <a:solidFill>
                   <a:srgbClr val="06B6D4"/>
                 </a:solidFill>
@@ -6516,7 +6518,7 @@
               </a:rPr>
               <a:t>ARCHITECTURE</a:t>
             </a:r>
-            <a:endParaRPr lang="en-US" sz="1200" dirty="0"/>
+            <a:endParaRPr lang="en-US" sz="1800" dirty="0"/>
           </a:p>
         </p:txBody>
       </p:sp>
@@ -6567,8 +6569,8 @@
         </p:nvSpPr>
         <p:spPr>
           <a:xfrm>
-            <a:off x="774040" y="2514600"/>
-            <a:ext cx="1938528" cy="2103120"/>
+            <a:off x="774040" y="2331720"/>
+            <a:ext cx="1938528" cy="2697480"/>
           </a:xfrm>
           <a:prstGeom prst="roundRect">
             <a:avLst>
@@ -6594,8 +6596,8 @@
         </p:nvSpPr>
         <p:spPr>
           <a:xfrm>
-            <a:off x="902056" y="2633472"/>
-            <a:ext cx="1682496" cy="310896"/>
+            <a:off x="902056" y="2450592"/>
+            <a:ext cx="1682496" cy="365760"/>
           </a:xfrm>
           <a:prstGeom prst="rect">
             <a:avLst/>
@@ -6611,7 +6613,7 @@
               <a:buNone/>
             </a:pPr>
             <a:r>
-              <a:rPr lang="en-US" sz="1100" b="1" dirty="0">
+              <a:rPr lang="en-US" sz="1800" b="1" dirty="0">
                 <a:solidFill>
                   <a:srgbClr val="3B82F6"/>
                 </a:solidFill>
@@ -6621,7 +6623,7 @@
               </a:rPr>
               <a:t>01</a:t>
             </a:r>
-            <a:endParaRPr lang="en-US" sz="1100" dirty="0"/>
+            <a:endParaRPr lang="en-US" sz="1800" dirty="0"/>
           </a:p>
         </p:txBody>
       </p:sp>
@@ -6633,8 +6635,8 @@
         </p:nvSpPr>
         <p:spPr>
           <a:xfrm>
-            <a:off x="902056" y="2962656"/>
-            <a:ext cx="1682496" cy="566928"/>
+            <a:off x="902056" y="2834640"/>
+            <a:ext cx="1682496" cy="713232"/>
           </a:xfrm>
           <a:prstGeom prst="rect">
             <a:avLst/>
@@ -6650,7 +6652,7 @@
               <a:buNone/>
             </a:pPr>
             <a:r>
-              <a:rPr lang="en-US" sz="1350" b="1" dirty="0">
+              <a:rPr lang="en-US" sz="1800" b="1" dirty="0">
                 <a:solidFill>
                   <a:srgbClr val="FFFFFF"/>
                 </a:solidFill>
@@ -6660,7 +6662,7 @@
               </a:rPr>
               <a:t>Kernel</a:t>
             </a:r>
-            <a:endParaRPr lang="en-US" sz="1350" dirty="0"/>
+            <a:endParaRPr lang="en-US" sz="1800" dirty="0"/>
           </a:p>
         </p:txBody>
       </p:sp>
@@ -6672,8 +6674,8 @@
         </p:nvSpPr>
         <p:spPr>
           <a:xfrm>
-            <a:off x="902056" y="3566160"/>
-            <a:ext cx="1682496" cy="960120"/>
+            <a:off x="902056" y="3584448"/>
+            <a:ext cx="1682496" cy="1371600"/>
           </a:xfrm>
           <a:prstGeom prst="rect">
             <a:avLst/>
@@ -6689,7 +6691,7 @@
               <a:buNone/>
             </a:pPr>
             <a:r>
-              <a:rPr lang="en-US" sz="980" dirty="0">
+              <a:rPr lang="en-US" sz="1800" dirty="0">
                 <a:solidFill>
                   <a:srgbClr val="CBD5E1"/>
                 </a:solidFill>
@@ -6699,7 +6701,7 @@
               </a:rPr>
               <a:t>Intent routing, policy, and agent lifecycle for the whole platform.</a:t>
             </a:r>
-            <a:endParaRPr lang="en-US" sz="980" dirty="0"/>
+            <a:endParaRPr lang="en-US" sz="1800" dirty="0"/>
           </a:p>
         </p:txBody>
       </p:sp>
@@ -6711,7 +6713,7 @@
         </p:nvSpPr>
         <p:spPr>
           <a:xfrm>
-            <a:off x="2726284" y="3419856"/>
+            <a:off x="2726284" y="3566160"/>
             <a:ext cx="210312" cy="274320"/>
           </a:xfrm>
           <a:prstGeom prst="rightArrow">
@@ -6731,8 +6733,8 @@
         </p:nvSpPr>
         <p:spPr>
           <a:xfrm>
-            <a:off x="2950312" y="2514600"/>
-            <a:ext cx="1938528" cy="2103120"/>
+            <a:off x="2950312" y="2331720"/>
+            <a:ext cx="1938528" cy="2697480"/>
           </a:xfrm>
           <a:prstGeom prst="roundRect">
             <a:avLst>
@@ -6758,8 +6760,8 @@
         </p:nvSpPr>
         <p:spPr>
           <a:xfrm>
-            <a:off x="3078328" y="2633472"/>
-            <a:ext cx="1682496" cy="310896"/>
+            <a:off x="3078328" y="2450592"/>
+            <a:ext cx="1682496" cy="365760"/>
           </a:xfrm>
           <a:prstGeom prst="rect">
             <a:avLst/>
@@ -6775,7 +6777,7 @@
               <a:buNone/>
             </a:pPr>
             <a:r>
-              <a:rPr lang="en-US" sz="1100" b="1" dirty="0">
+              <a:rPr lang="en-US" sz="1800" b="1" dirty="0">
                 <a:solidFill>
                   <a:srgbClr val="06B6D4"/>
                 </a:solidFill>
@@ -6785,7 +6787,7 @@
               </a:rPr>
               <a:t>02</a:t>
             </a:r>
-            <a:endParaRPr lang="en-US" sz="1100" dirty="0"/>
+            <a:endParaRPr lang="en-US" sz="1800" dirty="0"/>
           </a:p>
         </p:txBody>
       </p:sp>
@@ -6797,8 +6799,8 @@
         </p:nvSpPr>
         <p:spPr>
           <a:xfrm>
-            <a:off x="3078328" y="2962656"/>
-            <a:ext cx="1682496" cy="566928"/>
+            <a:off x="3078328" y="2834640"/>
+            <a:ext cx="1682496" cy="713232"/>
           </a:xfrm>
           <a:prstGeom prst="rect">
             <a:avLst/>
@@ -6814,7 +6816,7 @@
               <a:buNone/>
             </a:pPr>
             <a:r>
-              <a:rPr lang="en-US" sz="1350" b="1" dirty="0">
+              <a:rPr lang="en-US" sz="1800" b="1" dirty="0">
                 <a:solidFill>
                   <a:srgbClr val="FFFFFF"/>
                 </a:solidFill>
@@ -6824,7 +6826,7 @@
               </a:rPr>
               <a:t>Agent workforce</a:t>
             </a:r>
-            <a:endParaRPr lang="en-US" sz="1350" dirty="0"/>
+            <a:endParaRPr lang="en-US" sz="1800" dirty="0"/>
           </a:p>
         </p:txBody>
       </p:sp>
@@ -6836,8 +6838,8 @@
         </p:nvSpPr>
         <p:spPr>
           <a:xfrm>
-            <a:off x="3078328" y="3566160"/>
-            <a:ext cx="1682496" cy="960120"/>
+            <a:off x="3078328" y="3584448"/>
+            <a:ext cx="1682496" cy="1371600"/>
           </a:xfrm>
           <a:prstGeom prst="rect">
             <a:avLst/>
@@ -6853,7 +6855,7 @@
               <a:buNone/>
             </a:pPr>
             <a:r>
-              <a:rPr lang="en-US" sz="980" dirty="0">
+              <a:rPr lang="en-US" sz="1800" dirty="0">
                 <a:solidFill>
                   <a:srgbClr val="CBD5E1"/>
                 </a:solidFill>
@@ -6863,7 +6865,7 @@
               </a:rPr>
               <a:t>Nine specialist agents with scoped mandates, from engineering to OSINT.</a:t>
             </a:r>
-            <a:endParaRPr lang="en-US" sz="980" dirty="0"/>
+            <a:endParaRPr lang="en-US" sz="1800" dirty="0"/>
           </a:p>
         </p:txBody>
       </p:sp>
@@ -6875,7 +6877,7 @@
         </p:nvSpPr>
         <p:spPr>
           <a:xfrm>
-            <a:off x="4902556" y="3419856"/>
+            <a:off x="4902556" y="3566160"/>
             <a:ext cx="210312" cy="274320"/>
           </a:xfrm>
           <a:prstGeom prst="rightArrow">
@@ -6895,8 +6897,8 @@
         </p:nvSpPr>
         <p:spPr>
           <a:xfrm>
-            <a:off x="5126584" y="2514600"/>
-            <a:ext cx="1938528" cy="2103120"/>
+            <a:off x="5126584" y="2331720"/>
+            <a:ext cx="1938528" cy="2697480"/>
           </a:xfrm>
           <a:prstGeom prst="roundRect">
             <a:avLst>
@@ -6922,8 +6924,8 @@
         </p:nvSpPr>
         <p:spPr>
           <a:xfrm>
-            <a:off x="5254600" y="2633472"/>
-            <a:ext cx="1682496" cy="310896"/>
+            <a:off x="5254600" y="2450592"/>
+            <a:ext cx="1682496" cy="365760"/>
           </a:xfrm>
           <a:prstGeom prst="rect">
             <a:avLst/>
@@ -6939,7 +6941,7 @@
               <a:buNone/>
             </a:pPr>
             <a:r>
-              <a:rPr lang="en-US" sz="1100" b="1" dirty="0">
+              <a:rPr lang="en-US" sz="1800" b="1" dirty="0">
                 <a:solidFill>
                   <a:srgbClr val="3B82F6"/>
                 </a:solidFill>
@@ -6949,7 +6951,7 @@
               </a:rPr>
               <a:t>03</a:t>
             </a:r>
-            <a:endParaRPr lang="en-US" sz="1100" dirty="0"/>
+            <a:endParaRPr lang="en-US" sz="1800" dirty="0"/>
           </a:p>
         </p:txBody>
       </p:sp>
@@ -6961,8 +6963,8 @@
         </p:nvSpPr>
         <p:spPr>
           <a:xfrm>
-            <a:off x="5254600" y="2962656"/>
-            <a:ext cx="1682496" cy="566928"/>
+            <a:off x="5254600" y="2834640"/>
+            <a:ext cx="1682496" cy="713232"/>
           </a:xfrm>
           <a:prstGeom prst="rect">
             <a:avLst/>
@@ -6978,7 +6980,7 @@
               <a:buNone/>
             </a:pPr>
             <a:r>
-              <a:rPr lang="en-US" sz="1350" b="1" dirty="0">
+              <a:rPr lang="en-US" sz="1800" b="1" dirty="0">
                 <a:solidFill>
                   <a:srgbClr val="FFFFFF"/>
                 </a:solidFill>
@@ -6988,7 +6990,7 @@
               </a:rPr>
               <a:t>Structured memory</a:t>
             </a:r>
-            <a:endParaRPr lang="en-US" sz="1350" dirty="0"/>
+            <a:endParaRPr lang="en-US" sz="1800" dirty="0"/>
           </a:p>
         </p:txBody>
       </p:sp>
@@ -7000,8 +7002,8 @@
         </p:nvSpPr>
         <p:spPr>
           <a:xfrm>
-            <a:off x="5254600" y="3566160"/>
-            <a:ext cx="1682496" cy="960120"/>
+            <a:off x="5254600" y="3584448"/>
+            <a:ext cx="1682496" cy="1371600"/>
           </a:xfrm>
           <a:prstGeom prst="rect">
             <a:avLst/>
@@ -7017,7 +7019,7 @@
               <a:buNone/>
             </a:pPr>
             <a:r>
-              <a:rPr lang="en-US" sz="980" dirty="0">
+              <a:rPr lang="en-US" sz="1800" dirty="0">
                 <a:solidFill>
                   <a:srgbClr val="CBD5E1"/>
                 </a:solidFill>
@@ -7027,7 +7029,7 @@
               </a:rPr>
               <a:t>Rules, status, and lessons in strict formats every agent reads before working.</a:t>
             </a:r>
-            <a:endParaRPr lang="en-US" sz="980" dirty="0"/>
+            <a:endParaRPr lang="en-US" sz="1800" dirty="0"/>
           </a:p>
         </p:txBody>
       </p:sp>
@@ -7039,7 +7041,7 @@
         </p:nvSpPr>
         <p:spPr>
           <a:xfrm>
-            <a:off x="7078828" y="3419856"/>
+            <a:off x="7078828" y="3566160"/>
             <a:ext cx="210312" cy="274320"/>
           </a:xfrm>
           <a:prstGeom prst="rightArrow">
@@ -7059,8 +7061,8 @@
         </p:nvSpPr>
         <p:spPr>
           <a:xfrm>
-            <a:off x="7302856" y="2514600"/>
-            <a:ext cx="1938528" cy="2103120"/>
+            <a:off x="7302856" y="2331720"/>
+            <a:ext cx="1938528" cy="2697480"/>
           </a:xfrm>
           <a:prstGeom prst="roundRect">
             <a:avLst>
@@ -7086,8 +7088,8 @@
         </p:nvSpPr>
         <p:spPr>
           <a:xfrm>
-            <a:off x="7430872" y="2633472"/>
-            <a:ext cx="1682496" cy="310896"/>
+            <a:off x="7430872" y="2450592"/>
+            <a:ext cx="1682496" cy="365760"/>
           </a:xfrm>
           <a:prstGeom prst="rect">
             <a:avLst/>
@@ -7103,7 +7105,7 @@
               <a:buNone/>
             </a:pPr>
             <a:r>
-              <a:rPr lang="en-US" sz="1100" b="1" dirty="0">
+              <a:rPr lang="en-US" sz="1800" b="1" dirty="0">
                 <a:solidFill>
                   <a:srgbClr val="06B6D4"/>
                 </a:solidFill>
@@ -7113,7 +7115,7 @@
               </a:rPr>
               <a:t>04</a:t>
             </a:r>
-            <a:endParaRPr lang="en-US" sz="1100" dirty="0"/>
+            <a:endParaRPr lang="en-US" sz="1800" dirty="0"/>
           </a:p>
         </p:txBody>
       </p:sp>
@@ -7125,8 +7127,8 @@
         </p:nvSpPr>
         <p:spPr>
           <a:xfrm>
-            <a:off x="7430872" y="2962656"/>
-            <a:ext cx="1682496" cy="566928"/>
+            <a:off x="7430872" y="2834640"/>
+            <a:ext cx="1682496" cy="713232"/>
           </a:xfrm>
           <a:prstGeom prst="rect">
             <a:avLst/>
@@ -7142,7 +7144,7 @@
               <a:buNone/>
             </a:pPr>
             <a:r>
-              <a:rPr lang="en-US" sz="1350" b="1" dirty="0">
+              <a:rPr lang="en-US" sz="1800" b="1" dirty="0">
                 <a:solidFill>
                   <a:srgbClr val="FFFFFF"/>
                 </a:solidFill>
@@ -7152,7 +7154,7 @@
               </a:rPr>
               <a:t>Quality gates</a:t>
             </a:r>
-            <a:endParaRPr lang="en-US" sz="1350" dirty="0"/>
+            <a:endParaRPr lang="en-US" sz="1800" dirty="0"/>
           </a:p>
         </p:txBody>
       </p:sp>
@@ -7164,8 +7166,8 @@
         </p:nvSpPr>
         <p:spPr>
           <a:xfrm>
-            <a:off x="7430872" y="3566160"/>
-            <a:ext cx="1682496" cy="960120"/>
+            <a:off x="7430872" y="3584448"/>
+            <a:ext cx="1682496" cy="1371600"/>
           </a:xfrm>
           <a:prstGeom prst="rect">
             <a:avLst/>
@@ -7181,7 +7183,7 @@
               <a:buNone/>
             </a:pPr>
             <a:r>
-              <a:rPr lang="en-US" sz="980" dirty="0">
+              <a:rPr lang="en-US" sz="1800" dirty="0">
                 <a:solidFill>
                   <a:srgbClr val="CBD5E1"/>
                 </a:solidFill>
@@ -7191,7 +7193,7 @@
               </a:rPr>
               <a:t>Nothing ships without evidence - gates that can actually stop the line.</a:t>
             </a:r>
-            <a:endParaRPr lang="en-US" sz="980" dirty="0"/>
+            <a:endParaRPr lang="en-US" sz="1800" dirty="0"/>
           </a:p>
         </p:txBody>
       </p:sp>
@@ -7203,7 +7205,7 @@
         </p:nvSpPr>
         <p:spPr>
           <a:xfrm>
-            <a:off x="9255100" y="3419856"/>
+            <a:off x="9255100" y="3566160"/>
             <a:ext cx="210312" cy="274320"/>
           </a:xfrm>
           <a:prstGeom prst="rightArrow">
@@ -7223,8 +7225,8 @@
         </p:nvSpPr>
         <p:spPr>
           <a:xfrm>
-            <a:off x="9479128" y="2514600"/>
-            <a:ext cx="1938528" cy="2103120"/>
+            <a:off x="9479128" y="2331720"/>
+            <a:ext cx="1938528" cy="2697480"/>
           </a:xfrm>
           <a:prstGeom prst="roundRect">
             <a:avLst>
@@ -7250,8 +7252,8 @@
         </p:nvSpPr>
         <p:spPr>
           <a:xfrm>
-            <a:off x="9607144" y="2633472"/>
-            <a:ext cx="1682496" cy="310896"/>
+            <a:off x="9607144" y="2450592"/>
+            <a:ext cx="1682496" cy="365760"/>
           </a:xfrm>
           <a:prstGeom prst="rect">
             <a:avLst/>
@@ -7267,7 +7269,7 @@
               <a:buNone/>
             </a:pPr>
             <a:r>
-              <a:rPr lang="en-US" sz="1100" b="1" dirty="0">
+              <a:rPr lang="en-US" sz="1800" b="1" dirty="0">
                 <a:solidFill>
                   <a:srgbClr val="3B82F6"/>
                 </a:solidFill>
@@ -7277,7 +7279,7 @@
               </a:rPr>
               <a:t>05</a:t>
             </a:r>
-            <a:endParaRPr lang="en-US" sz="1100" dirty="0"/>
+            <a:endParaRPr lang="en-US" sz="1800" dirty="0"/>
           </a:p>
         </p:txBody>
       </p:sp>
@@ -7289,8 +7291,8 @@
         </p:nvSpPr>
         <p:spPr>
           <a:xfrm>
-            <a:off x="9607144" y="2962656"/>
-            <a:ext cx="1682496" cy="566928"/>
+            <a:off x="9607144" y="2834640"/>
+            <a:ext cx="1682496" cy="713232"/>
           </a:xfrm>
           <a:prstGeom prst="rect">
             <a:avLst/>
@@ -7306,7 +7308,7 @@
               <a:buNone/>
             </a:pPr>
             <a:r>
-              <a:rPr lang="en-US" sz="1350" b="1" dirty="0">
+              <a:rPr lang="en-US" sz="1800" b="1" dirty="0">
                 <a:solidFill>
                   <a:srgbClr val="FFFFFF"/>
                 </a:solidFill>
@@ -7316,7 +7318,7 @@
               </a:rPr>
               <a:t>Local runtime</a:t>
             </a:r>
-            <a:endParaRPr lang="en-US" sz="1350" dirty="0"/>
+            <a:endParaRPr lang="en-US" sz="1800" dirty="0"/>
           </a:p>
         </p:txBody>
       </p:sp>
@@ -7328,8 +7330,8 @@
         </p:nvSpPr>
         <p:spPr>
           <a:xfrm>
-            <a:off x="9607144" y="3566160"/>
-            <a:ext cx="1682496" cy="960120"/>
+            <a:off x="9607144" y="3584448"/>
+            <a:ext cx="1682496" cy="1371600"/>
           </a:xfrm>
           <a:prstGeom prst="rect">
             <a:avLst/>
@@ -7345,7 +7347,7 @@
               <a:buNone/>
             </a:pPr>
             <a:r>
-              <a:rPr lang="en-US" sz="980" dirty="0">
+              <a:rPr lang="en-US" sz="1800" dirty="0">
                 <a:solidFill>
                   <a:srgbClr val="CBD5E1"/>
                 </a:solidFill>
@@ -7355,7 +7357,7 @@
               </a:rPr>
               <a:t>Ollama serving Qwen 2.5:7b; no API keys and no data egress.</a:t>
             </a:r>
-            <a:endParaRPr lang="en-US" sz="980" dirty="0"/>
+            <a:endParaRPr lang="en-US" sz="1800" dirty="0"/>
           </a:p>
         </p:txBody>
       </p:sp>
@@ -7390,8 +7392,8 @@
         </p:nvSpPr>
         <p:spPr>
           <a:xfrm>
-            <a:off x="822960" y="6053328"/>
-            <a:ext cx="9692640" cy="457200"/>
+            <a:off x="822960" y="6035040"/>
+            <a:ext cx="10424160" cy="566928"/>
           </a:xfrm>
           <a:prstGeom prst="rect">
             <a:avLst/>
@@ -7407,9 +7409,9 @@
               <a:buNone/>
             </a:pPr>
             <a:r>
-              <a:rPr lang="en-US" sz="1150" dirty="0">
-                <a:solidFill>
-                  <a:srgbClr val="64748B"/>
+              <a:rPr lang="en-US" sz="1800" dirty="0">
+                <a:solidFill>
+                  <a:srgbClr val="8FA3BF"/>
                 </a:solidFill>
                 <a:latin typeface="Segoe UI" pitchFamily="34" charset="0"/>
                 <a:ea typeface="Segoe UI" pitchFamily="34" charset="-122"/>
@@ -7417,7 +7419,7 @@
               </a:rPr>
               <a:t>Each layer is replaceable; the contracts between layers are not.</a:t>
             </a:r>
-            <a:endParaRPr lang="en-US" sz="1150" dirty="0"/>
+            <a:endParaRPr lang="en-US" sz="1800" dirty="0"/>
           </a:p>
         </p:txBody>
       </p:sp>
@@ -7429,8 +7431,8 @@
         </p:nvSpPr>
         <p:spPr>
           <a:xfrm>
-            <a:off x="10698480" y="6382512"/>
-            <a:ext cx="1188720" cy="365760"/>
+            <a:off x="10698480" y="6309360"/>
+            <a:ext cx="1188720" cy="411480"/>
           </a:xfrm>
           <a:prstGeom prst="rect">
             <a:avLst/>
@@ -7446,9 +7448,9 @@
               <a:buNone/>
             </a:pPr>
             <a:r>
-              <a:rPr lang="en-US" sz="1000" dirty="0">
-                <a:solidFill>
-                  <a:srgbClr val="64748B"/>
+              <a:rPr lang="en-US" sz="1800" dirty="0">
+                <a:solidFill>
+                  <a:srgbClr val="8FA3BF"/>
                 </a:solidFill>
                 <a:latin typeface="Consolas" pitchFamily="34" charset="0"/>
                 <a:ea typeface="Consolas" pitchFamily="34" charset="-122"/>
@@ -7456,7 +7458,7 @@
               </a:rPr>
               <a:t>4 / 14</a:t>
             </a:r>
-            <a:endParaRPr lang="en-US" sz="1000" dirty="0"/>
+            <a:endParaRPr lang="en-US" sz="1800" dirty="0"/>
           </a:p>
         </p:txBody>
       </p:sp>
@@ -7540,8 +7542,8 @@
         </p:nvSpPr>
         <p:spPr>
           <a:xfrm>
-            <a:off x="822960" y="502920"/>
-            <a:ext cx="10515600" cy="365760"/>
+            <a:off x="822960" y="457200"/>
+            <a:ext cx="10515600" cy="411480"/>
           </a:xfrm>
           <a:prstGeom prst="rect">
             <a:avLst/>
@@ -7557,7 +7559,7 @@
               <a:buNone/>
             </a:pPr>
             <a:r>
-              <a:rPr lang="en-US" sz="1200" spc="300" kern="0" dirty="0">
+              <a:rPr lang="en-US" sz="1800" spc="300" kern="0" dirty="0">
                 <a:solidFill>
                   <a:srgbClr val="06B6D4"/>
                 </a:solidFill>
@@ -7567,7 +7569,7 @@
               </a:rPr>
               <a:t>THE SCOREBOARD</a:t>
             </a:r>
-            <a:endParaRPr lang="en-US" sz="1200" dirty="0"/>
+            <a:endParaRPr lang="en-US" sz="1800" dirty="0"/>
           </a:p>
         </p:txBody>
       </p:sp>
@@ -7618,8 +7620,8 @@
         </p:nvSpPr>
         <p:spPr>
           <a:xfrm>
-            <a:off x="822960" y="2194560"/>
-            <a:ext cx="2423160" cy="2697480"/>
+            <a:off x="822960" y="1965960"/>
+            <a:ext cx="2423160" cy="3154680"/>
           </a:xfrm>
           <a:prstGeom prst="roundRect">
             <a:avLst>
@@ -7645,7 +7647,7 @@
         </p:nvSpPr>
         <p:spPr>
           <a:xfrm>
-            <a:off x="960120" y="2514600"/>
+            <a:off x="960120" y="2194560"/>
             <a:ext cx="2148840" cy="914400"/>
           </a:xfrm>
           <a:prstGeom prst="rect">
@@ -7684,8 +7686,8 @@
         </p:nvSpPr>
         <p:spPr>
           <a:xfrm>
-            <a:off x="960120" y="3520440"/>
-            <a:ext cx="2148840" cy="502920"/>
+            <a:off x="960120" y="3200400"/>
+            <a:ext cx="2148840" cy="868680"/>
           </a:xfrm>
           <a:prstGeom prst="rect">
             <a:avLst/>
@@ -7701,7 +7703,7 @@
               <a:buNone/>
             </a:pPr>
             <a:r>
-              <a:rPr lang="en-US" sz="1450" b="1" dirty="0">
+              <a:rPr lang="en-US" sz="1800" b="1" dirty="0">
                 <a:solidFill>
                   <a:srgbClr val="FFFFFF"/>
                 </a:solidFill>
@@ -7711,7 +7713,7 @@
               </a:rPr>
               <a:t>Router accuracy</a:t>
             </a:r>
-            <a:endParaRPr lang="en-US" sz="1450" dirty="0"/>
+            <a:endParaRPr lang="en-US" sz="1800" dirty="0"/>
           </a:p>
         </p:txBody>
       </p:sp>
@@ -7723,8 +7725,8 @@
         </p:nvSpPr>
         <p:spPr>
           <a:xfrm>
-            <a:off x="1005840" y="4069080"/>
-            <a:ext cx="2057400" cy="685800"/>
+            <a:off x="1005840" y="4114800"/>
+            <a:ext cx="2057400" cy="914400"/>
           </a:xfrm>
           <a:prstGeom prst="rect">
             <a:avLst/>
@@ -7740,7 +7742,7 @@
               <a:buNone/>
             </a:pPr>
             <a:r>
-              <a:rPr lang="en-US" sz="1050" dirty="0">
+              <a:rPr lang="en-US" sz="1800" dirty="0">
                 <a:solidFill>
                   <a:srgbClr val="94A3B8"/>
                 </a:solidFill>
@@ -7750,7 +7752,7 @@
               </a:rPr>
               <a:t>On a 30-query validation set built from real daily phrasings</a:t>
             </a:r>
-            <a:endParaRPr lang="en-US" sz="1050" dirty="0"/>
+            <a:endParaRPr lang="en-US" sz="1800" dirty="0"/>
           </a:p>
         </p:txBody>
       </p:sp>
@@ -7762,8 +7764,8 @@
         </p:nvSpPr>
         <p:spPr>
           <a:xfrm>
-            <a:off x="3520440" y="2194560"/>
-            <a:ext cx="2423160" cy="2697480"/>
+            <a:off x="3520440" y="1965960"/>
+            <a:ext cx="2423160" cy="3154680"/>
           </a:xfrm>
           <a:prstGeom prst="roundRect">
             <a:avLst>
@@ -7789,7 +7791,7 @@
         </p:nvSpPr>
         <p:spPr>
           <a:xfrm>
-            <a:off x="3657600" y="2514600"/>
+            <a:off x="3657600" y="2194560"/>
             <a:ext cx="2148840" cy="914400"/>
           </a:xfrm>
           <a:prstGeom prst="rect">
@@ -7828,8 +7830,8 @@
         </p:nvSpPr>
         <p:spPr>
           <a:xfrm>
-            <a:off x="3657600" y="3520440"/>
-            <a:ext cx="2148840" cy="502920"/>
+            <a:off x="3657600" y="3200400"/>
+            <a:ext cx="2148840" cy="868680"/>
           </a:xfrm>
           <a:prstGeom prst="rect">
             <a:avLst/>
@@ -7845,7 +7847,7 @@
               <a:buNone/>
             </a:pPr>
             <a:r>
-              <a:rPr lang="en-US" sz="1450" b="1" dirty="0">
+              <a:rPr lang="en-US" sz="1800" b="1" dirty="0">
                 <a:solidFill>
                   <a:srgbClr val="FFFFFF"/>
                 </a:solidFill>
@@ -7855,7 +7857,7 @@
               </a:rPr>
               <a:t>Production checks</a:t>
             </a:r>
-            <a:endParaRPr lang="en-US" sz="1450" dirty="0"/>
+            <a:endParaRPr lang="en-US" sz="1800" dirty="0"/>
           </a:p>
         </p:txBody>
       </p:sp>
@@ -7867,8 +7869,8 @@
         </p:nvSpPr>
         <p:spPr>
           <a:xfrm>
-            <a:off x="3703320" y="4069080"/>
-            <a:ext cx="2057400" cy="685800"/>
+            <a:off x="3703320" y="4114800"/>
+            <a:ext cx="2057400" cy="914400"/>
           </a:xfrm>
           <a:prstGeom prst="rect">
             <a:avLst/>
@@ -7884,7 +7886,7 @@
               <a:buNone/>
             </a:pPr>
             <a:r>
-              <a:rPr lang="en-US" sz="1050" dirty="0">
+              <a:rPr lang="en-US" sz="1800" dirty="0">
                 <a:solidFill>
                   <a:srgbClr val="94A3B8"/>
                 </a:solidFill>
@@ -7894,7 +7896,7 @@
               </a:rPr>
               <a:t>The one miss exposed a category boundary - which got sharpened</a:t>
             </a:r>
-            <a:endParaRPr lang="en-US" sz="1050" dirty="0"/>
+            <a:endParaRPr lang="en-US" sz="1800" dirty="0"/>
           </a:p>
         </p:txBody>
       </p:sp>
@@ -7906,8 +7908,8 @@
         </p:nvSpPr>
         <p:spPr>
           <a:xfrm>
-            <a:off x="6217920" y="2194560"/>
-            <a:ext cx="2423160" cy="2697480"/>
+            <a:off x="6217920" y="1965960"/>
+            <a:ext cx="2423160" cy="3154680"/>
           </a:xfrm>
           <a:prstGeom prst="roundRect">
             <a:avLst>
@@ -7933,7 +7935,7 @@
         </p:nvSpPr>
         <p:spPr>
           <a:xfrm>
-            <a:off x="6355080" y="2514600"/>
+            <a:off x="6355080" y="2194560"/>
             <a:ext cx="2148840" cy="914400"/>
           </a:xfrm>
           <a:prstGeom prst="rect">
@@ -7972,8 +7974,8 @@
         </p:nvSpPr>
         <p:spPr>
           <a:xfrm>
-            <a:off x="6355080" y="3520440"/>
-            <a:ext cx="2148840" cy="502920"/>
+            <a:off x="6355080" y="3200400"/>
+            <a:ext cx="2148840" cy="868680"/>
           </a:xfrm>
           <a:prstGeom prst="rect">
             <a:avLst/>
@@ -7989,7 +7991,7 @@
               <a:buNone/>
             </a:pPr>
             <a:r>
-              <a:rPr lang="en-US" sz="1450" b="1" dirty="0">
+              <a:rPr lang="en-US" sz="1800" b="1" dirty="0">
                 <a:solidFill>
                   <a:srgbClr val="FFFFFF"/>
                 </a:solidFill>
@@ -7999,7 +8001,7 @@
               </a:rPr>
               <a:t>Specialist agents</a:t>
             </a:r>
-            <a:endParaRPr lang="en-US" sz="1450" dirty="0"/>
+            <a:endParaRPr lang="en-US" sz="1800" dirty="0"/>
           </a:p>
         </p:txBody>
       </p:sp>
@@ -8011,8 +8013,8 @@
         </p:nvSpPr>
         <p:spPr>
           <a:xfrm>
-            <a:off x="6400800" y="4069080"/>
-            <a:ext cx="2057400" cy="685800"/>
+            <a:off x="6400800" y="4114800"/>
+            <a:ext cx="2057400" cy="914400"/>
           </a:xfrm>
           <a:prstGeom prst="rect">
             <a:avLst/>
@@ -8028,7 +8030,7 @@
               <a:buNone/>
             </a:pPr>
             <a:r>
-              <a:rPr lang="en-US" sz="1050" dirty="0">
+              <a:rPr lang="en-US" sz="1800" dirty="0">
                 <a:solidFill>
                   <a:srgbClr val="94A3B8"/>
                 </a:solidFill>
@@ -8038,7 +8040,7 @@
               </a:rPr>
               <a:t>Scoped mandates, per-agent queues, one shared memory</a:t>
             </a:r>
-            <a:endParaRPr lang="en-US" sz="1050" dirty="0"/>
+            <a:endParaRPr lang="en-US" sz="1800" dirty="0"/>
           </a:p>
         </p:txBody>
       </p:sp>
@@ -8050,8 +8052,8 @@
         </p:nvSpPr>
         <p:spPr>
           <a:xfrm>
-            <a:off x="8915400" y="2194560"/>
-            <a:ext cx="2423160" cy="2697480"/>
+            <a:off x="8915400" y="1965960"/>
+            <a:ext cx="2423160" cy="3154680"/>
           </a:xfrm>
           <a:prstGeom prst="roundRect">
             <a:avLst>
@@ -8077,7 +8079,7 @@
         </p:nvSpPr>
         <p:spPr>
           <a:xfrm>
-            <a:off x="9052560" y="2514600"/>
+            <a:off x="9052560" y="2194560"/>
             <a:ext cx="2148840" cy="914400"/>
           </a:xfrm>
           <a:prstGeom prst="rect">
@@ -8116,8 +8118,8 @@
         </p:nvSpPr>
         <p:spPr>
           <a:xfrm>
-            <a:off x="9052560" y="3520440"/>
-            <a:ext cx="2148840" cy="502920"/>
+            <a:off x="9052560" y="3200400"/>
+            <a:ext cx="2148840" cy="868680"/>
           </a:xfrm>
           <a:prstGeom prst="rect">
             <a:avLst/>
@@ -8133,7 +8135,7 @@
               <a:buNone/>
             </a:pPr>
             <a:r>
-              <a:rPr lang="en-US" sz="1450" b="1" dirty="0">
+              <a:rPr lang="en-US" sz="1800" b="1" dirty="0">
                 <a:solidFill>
                   <a:srgbClr val="FFFFFF"/>
                 </a:solidFill>
@@ -8143,7 +8145,7 @@
               </a:rPr>
               <a:t>LOC open source</a:t>
             </a:r>
-            <a:endParaRPr lang="en-US" sz="1450" dirty="0"/>
+            <a:endParaRPr lang="en-US" sz="1800" dirty="0"/>
           </a:p>
         </p:txBody>
       </p:sp>
@@ -8155,8 +8157,8 @@
         </p:nvSpPr>
         <p:spPr>
           <a:xfrm>
-            <a:off x="9098280" y="4069080"/>
-            <a:ext cx="2057400" cy="685800"/>
+            <a:off x="9098280" y="4114800"/>
+            <a:ext cx="2057400" cy="914400"/>
           </a:xfrm>
           <a:prstGeom prst="rect">
             <a:avLst/>
@@ -8172,7 +8174,7 @@
               <a:buNone/>
             </a:pPr>
             <a:r>
-              <a:rPr lang="en-US" sz="1050" dirty="0">
+              <a:rPr lang="en-US" sz="1800" dirty="0">
                 <a:solidFill>
                   <a:srgbClr val="94A3B8"/>
                 </a:solidFill>
@@ -8182,7 +8184,7 @@
               </a:rPr>
               <a:t>Two production frameworks maintained under the same gates</a:t>
             </a:r>
-            <a:endParaRPr lang="en-US" sz="1050" dirty="0"/>
+            <a:endParaRPr lang="en-US" sz="1800" dirty="0"/>
           </a:p>
         </p:txBody>
       </p:sp>
@@ -8194,7 +8196,7 @@
         </p:nvSpPr>
         <p:spPr>
           <a:xfrm>
-            <a:off x="822960" y="5413248"/>
+            <a:off x="822960" y="5321808"/>
             <a:ext cx="10515600" cy="0"/>
           </a:xfrm>
           <a:prstGeom prst="line">
@@ -8217,8 +8219,8 @@
         </p:nvSpPr>
         <p:spPr>
           <a:xfrm>
-            <a:off x="822960" y="5504688"/>
-            <a:ext cx="10424160" cy="411480"/>
+            <a:off x="822960" y="5394960"/>
+            <a:ext cx="10424160" cy="502920"/>
           </a:xfrm>
           <a:prstGeom prst="rect">
             <a:avLst/>
@@ -8234,7 +8236,7 @@
               <a:buNone/>
             </a:pPr>
             <a:r>
-              <a:rPr lang="en-US" sz="1300" i="1" dirty="0">
+              <a:rPr lang="en-US" sz="1800" i="1" dirty="0">
                 <a:solidFill>
                   <a:srgbClr val="06B6D4"/>
                 </a:solidFill>
@@ -8244,7 +8246,7 @@
               </a:rPr>
               <a:t>→  Every number on this slide is readable from artifacts, not from a status field.</a:t>
             </a:r>
-            <a:endParaRPr lang="en-US" sz="1300" dirty="0"/>
+            <a:endParaRPr lang="en-US" sz="1800" dirty="0"/>
           </a:p>
         </p:txBody>
       </p:sp>
@@ -8256,8 +8258,8 @@
         </p:nvSpPr>
         <p:spPr>
           <a:xfrm>
-            <a:off x="10698480" y="6382512"/>
-            <a:ext cx="1188720" cy="365760"/>
+            <a:off x="10698480" y="6309360"/>
+            <a:ext cx="1188720" cy="411480"/>
           </a:xfrm>
           <a:prstGeom prst="rect">
             <a:avLst/>
@@ -8273,9 +8275,9 @@
               <a:buNone/>
             </a:pPr>
             <a:r>
-              <a:rPr lang="en-US" sz="1000" dirty="0">
-                <a:solidFill>
-                  <a:srgbClr val="64748B"/>
+              <a:rPr lang="en-US" sz="1800" dirty="0">
+                <a:solidFill>
+                  <a:srgbClr val="8FA3BF"/>
                 </a:solidFill>
                 <a:latin typeface="Consolas" pitchFamily="34" charset="0"/>
                 <a:ea typeface="Consolas" pitchFamily="34" charset="-122"/>
@@ -8283,7 +8285,7 @@
               </a:rPr>
               <a:t>5 / 14</a:t>
             </a:r>
-            <a:endParaRPr lang="en-US" sz="1000" dirty="0"/>
+            <a:endParaRPr lang="en-US" sz="1800" dirty="0"/>
           </a:p>
         </p:txBody>
       </p:sp>
@@ -8367,8 +8369,8 @@
         </p:nvSpPr>
         <p:spPr>
           <a:xfrm>
-            <a:off x="822960" y="502920"/>
-            <a:ext cx="10515600" cy="365760"/>
+            <a:off x="822960" y="457200"/>
+            <a:ext cx="10515600" cy="411480"/>
           </a:xfrm>
           <a:prstGeom prst="rect">
             <a:avLst/>
@@ -8384,7 +8386,7 @@
               <a:buNone/>
             </a:pPr>
             <a:r>
-              <a:rPr lang="en-US" sz="1200" spc="300" kern="0" dirty="0">
+              <a:rPr lang="en-US" sz="1800" spc="300" kern="0" dirty="0">
                 <a:solidFill>
                   <a:srgbClr val="06B6D4"/>
                 </a:solidFill>
@@ -8394,7 +8396,7 @@
               </a:rPr>
               <a:t>THE MODEL QUESTION</a:t>
             </a:r>
-            <a:endParaRPr lang="en-US" sz="1200" dirty="0"/>
+            <a:endParaRPr lang="en-US" sz="1800" dirty="0"/>
           </a:p>
         </p:txBody>
       </p:sp>
@@ -8445,7 +8447,7 @@
         </p:nvGraphicFramePr>
         <p:xfrm>
           <a:off x="822960" y="1874520"/>
-          <a:ext cx="10515600" cy="3337560"/>
+          <a:ext cx="10515600" cy="3246120"/>
         </p:xfrm>
         <a:graphic xmlns:a="http://schemas.openxmlformats.org/drawingml/2006/main">
           <a:graphicData uri="http://schemas.openxmlformats.org/drawingml/2006/chart">
@@ -8461,7 +8463,7 @@
         </p:nvSpPr>
         <p:spPr>
           <a:xfrm>
-            <a:off x="822960" y="5413248"/>
+            <a:off x="822960" y="5321808"/>
             <a:ext cx="10515600" cy="0"/>
           </a:xfrm>
           <a:prstGeom prst="line">
@@ -8484,8 +8486,8 @@
         </p:nvSpPr>
         <p:spPr>
           <a:xfrm>
-            <a:off x="822960" y="5504688"/>
-            <a:ext cx="10424160" cy="411480"/>
+            <a:off x="822960" y="5394960"/>
+            <a:ext cx="10424160" cy="502920"/>
           </a:xfrm>
           <a:prstGeom prst="rect">
             <a:avLst/>
@@ -8501,7 +8503,7 @@
               <a:buNone/>
             </a:pPr>
             <a:r>
-              <a:rPr lang="en-US" sz="1300" i="1" dirty="0">
+              <a:rPr lang="en-US" sz="1800" i="1" dirty="0">
                 <a:solidFill>
                   <a:srgbClr val="06B6D4"/>
                 </a:solidFill>
@@ -8511,7 +8513,7 @@
               </a:rPr>
               <a:t>→  The same 7B model produced mediocre output with vague context and excellent output with structured memory.</a:t>
             </a:r>
-            <a:endParaRPr lang="en-US" sz="1300" dirty="0"/>
+            <a:endParaRPr lang="en-US" sz="1800" dirty="0"/>
           </a:p>
         </p:txBody>
       </p:sp>
@@ -8546,8 +8548,8 @@
         </p:nvSpPr>
         <p:spPr>
           <a:xfrm>
-            <a:off x="822960" y="6053328"/>
-            <a:ext cx="9692640" cy="457200"/>
+            <a:off x="822960" y="6035040"/>
+            <a:ext cx="10424160" cy="566928"/>
           </a:xfrm>
           <a:prstGeom prst="rect">
             <a:avLst/>
@@ -8563,9 +8565,9 @@
               <a:buNone/>
             </a:pPr>
             <a:r>
-              <a:rPr lang="en-US" sz="1150" dirty="0">
-                <a:solidFill>
-                  <a:srgbClr val="64748B"/>
+              <a:rPr lang="en-US" sz="1800" dirty="0">
+                <a:solidFill>
+                  <a:srgbClr val="8FA3BF"/>
                 </a:solidFill>
                 <a:latin typeface="Segoe UI" pitchFamily="34" charset="0"/>
                 <a:ea typeface="Segoe UI" pitchFamily="34" charset="-122"/>
@@ -8573,7 +8575,7 @@
               </a:rPr>
               <a:t>Task-quality index, illustrative - consistent with six months of production behavior.</a:t>
             </a:r>
-            <a:endParaRPr lang="en-US" sz="1150" dirty="0"/>
+            <a:endParaRPr lang="en-US" sz="1800" dirty="0"/>
           </a:p>
         </p:txBody>
       </p:sp>
@@ -8585,8 +8587,8 @@
         </p:nvSpPr>
         <p:spPr>
           <a:xfrm>
-            <a:off x="10698480" y="6382512"/>
-            <a:ext cx="1188720" cy="365760"/>
+            <a:off x="10698480" y="6309360"/>
+            <a:ext cx="1188720" cy="411480"/>
           </a:xfrm>
           <a:prstGeom prst="rect">
             <a:avLst/>
@@ -8602,9 +8604,9 @@
               <a:buNone/>
             </a:pPr>
             <a:r>
-              <a:rPr lang="en-US" sz="1000" dirty="0">
-                <a:solidFill>
-                  <a:srgbClr val="64748B"/>
+              <a:rPr lang="en-US" sz="1800" dirty="0">
+                <a:solidFill>
+                  <a:srgbClr val="8FA3BF"/>
                 </a:solidFill>
                 <a:latin typeface="Consolas" pitchFamily="34" charset="0"/>
                 <a:ea typeface="Consolas" pitchFamily="34" charset="-122"/>
@@ -8612,7 +8614,7 @@
               </a:rPr>
               <a:t>6 / 14</a:t>
             </a:r>
-            <a:endParaRPr lang="en-US" sz="1000" dirty="0"/>
+            <a:endParaRPr lang="en-US" sz="1800" dirty="0"/>
           </a:p>
         </p:txBody>
       </p:sp>
@@ -8696,8 +8698,8 @@
         </p:nvSpPr>
         <p:spPr>
           <a:xfrm>
-            <a:off x="822960" y="502920"/>
-            <a:ext cx="10515600" cy="365760"/>
+            <a:off x="822960" y="457200"/>
+            <a:ext cx="10515600" cy="411480"/>
           </a:xfrm>
           <a:prstGeom prst="rect">
             <a:avLst/>
@@ -8713,7 +8715,7 @@
               <a:buNone/>
             </a:pPr>
             <a:r>
-              <a:rPr lang="en-US" sz="1200" spc="300" kern="0" dirty="0">
+              <a:rPr lang="en-US" sz="1800" spc="300" kern="0" dirty="0">
                 <a:solidFill>
                   <a:srgbClr val="06B6D4"/>
                 </a:solidFill>
@@ -8723,7 +8725,7 @@
               </a:rPr>
               <a:t>MEMORY</a:t>
             </a:r>
-            <a:endParaRPr lang="en-US" sz="1200" dirty="0"/>
+            <a:endParaRPr lang="en-US" sz="1800" dirty="0"/>
           </a:p>
         </p:txBody>
       </p:sp>
@@ -8774,8 +8776,8 @@
         </p:nvSpPr>
         <p:spPr>
           <a:xfrm>
-            <a:off x="868680" y="2011680"/>
-            <a:ext cx="10424160" cy="3566160"/>
+            <a:off x="868680" y="1965960"/>
+            <a:ext cx="10424160" cy="3840480"/>
           </a:xfrm>
           <a:prstGeom prst="rect">
             <a:avLst/>
@@ -8798,7 +8800,7 @@
               <a:buChar char="▸"/>
             </a:pPr>
             <a:r>
-              <a:rPr lang="en-US" sz="1600" dirty="0">
+              <a:rPr lang="en-US" sz="2000" dirty="0">
                 <a:solidFill>
                   <a:srgbClr val="CBD5E1"/>
                 </a:solidFill>
@@ -8808,7 +8810,7 @@
               </a:rPr>
               <a:t>Rules are binding and append-only: true until changed, versioned, never silently edited.</a:t>
             </a:r>
-            <a:endParaRPr lang="en-US" sz="1600" dirty="0"/>
+            <a:endParaRPr lang="en-US" sz="2000" dirty="0"/>
           </a:p>
           <a:p>
             <a:pPr marL="342900" indent="-342900">
@@ -8822,7 +8824,7 @@
               <a:buChar char="▸"/>
             </a:pPr>
             <a:r>
-              <a:rPr lang="en-US" sz="1600" dirty="0">
+              <a:rPr lang="en-US" sz="2000" dirty="0">
                 <a:solidFill>
                   <a:srgbClr val="CBD5E1"/>
                 </a:solidFill>
@@ -8832,7 +8834,7 @@
               </a:rPr>
               <a:t>Status is current truth: overwritten constantly, always what is happening right now.</a:t>
             </a:r>
-            <a:endParaRPr lang="en-US" sz="1600" dirty="0"/>
+            <a:endParaRPr lang="en-US" sz="2000" dirty="0"/>
           </a:p>
           <a:p>
             <a:pPr marL="342900" indent="-342900">
@@ -8846,7 +8848,7 @@
               <a:buChar char="▸"/>
             </a:pPr>
             <a:r>
-              <a:rPr lang="en-US" sz="1600" dirty="0">
+              <a:rPr lang="en-US" sz="2000" dirty="0">
                 <a:solidFill>
                   <a:srgbClr val="CBD5E1"/>
                 </a:solidFill>
@@ -8856,7 +8858,7 @@
               </a:rPr>
               <a:t>Lessons are incident reports: what broke, why, and the fix, attached to evidence.</a:t>
             </a:r>
-            <a:endParaRPr lang="en-US" sz="1600" dirty="0"/>
+            <a:endParaRPr lang="en-US" sz="2000" dirty="0"/>
           </a:p>
           <a:p>
             <a:pPr marL="342900" indent="-342900">
@@ -8870,7 +8872,7 @@
               <a:buChar char="▸"/>
             </a:pPr>
             <a:r>
-              <a:rPr lang="en-US" sz="1600" dirty="0">
+              <a:rPr lang="en-US" sz="2000" dirty="0">
                 <a:solidFill>
                   <a:srgbClr val="CBD5E1"/>
                 </a:solidFill>
@@ -8880,7 +8882,7 @@
               </a:rPr>
               <a:t>Every agent reads all three before starting work, so every session starts with the full picture.</a:t>
             </a:r>
-            <a:endParaRPr lang="en-US" sz="1600" dirty="0"/>
+            <a:endParaRPr lang="en-US" sz="2000" dirty="0"/>
           </a:p>
         </p:txBody>
       </p:sp>
@@ -8915,8 +8917,8 @@
         </p:nvSpPr>
         <p:spPr>
           <a:xfrm>
-            <a:off x="822960" y="6053328"/>
-            <a:ext cx="9692640" cy="457200"/>
+            <a:off x="822960" y="6035040"/>
+            <a:ext cx="10424160" cy="566928"/>
           </a:xfrm>
           <a:prstGeom prst="rect">
             <a:avLst/>
@@ -8932,9 +8934,9 @@
               <a:buNone/>
             </a:pPr>
             <a:r>
-              <a:rPr lang="en-US" sz="1150" dirty="0">
-                <a:solidFill>
-                  <a:srgbClr val="64748B"/>
+              <a:rPr lang="en-US" sz="1800" dirty="0">
+                <a:solidFill>
+                  <a:srgbClr val="8FA3BF"/>
                 </a:solidFill>
                 <a:latin typeface="Segoe UI" pitchFamily="34" charset="0"/>
                 <a:ea typeface="Segoe UI" pitchFamily="34" charset="-122"/>
@@ -8942,7 +8944,7 @@
               </a:rPr>
               <a:t>Retrieval gives you text that looks relevant; structure gives you facts that are current.</a:t>
             </a:r>
-            <a:endParaRPr lang="en-US" sz="1150" dirty="0"/>
+            <a:endParaRPr lang="en-US" sz="1800" dirty="0"/>
           </a:p>
         </p:txBody>
       </p:sp>
@@ -8954,8 +8956,8 @@
         </p:nvSpPr>
         <p:spPr>
           <a:xfrm>
-            <a:off x="10698480" y="6382512"/>
-            <a:ext cx="1188720" cy="365760"/>
+            <a:off x="10698480" y="6309360"/>
+            <a:ext cx="1188720" cy="411480"/>
           </a:xfrm>
           <a:prstGeom prst="rect">
             <a:avLst/>
@@ -8971,9 +8973,9 @@
               <a:buNone/>
             </a:pPr>
             <a:r>
-              <a:rPr lang="en-US" sz="1000" dirty="0">
-                <a:solidFill>
-                  <a:srgbClr val="64748B"/>
+              <a:rPr lang="en-US" sz="1800" dirty="0">
+                <a:solidFill>
+                  <a:srgbClr val="8FA3BF"/>
                 </a:solidFill>
                 <a:latin typeface="Consolas" pitchFamily="34" charset="0"/>
                 <a:ea typeface="Consolas" pitchFamily="34" charset="-122"/>
@@ -8981,7 +8983,7 @@
               </a:rPr>
               <a:t>7 / 14</a:t>
             </a:r>
-            <a:endParaRPr lang="en-US" sz="1000" dirty="0"/>
+            <a:endParaRPr lang="en-US" sz="1800" dirty="0"/>
           </a:p>
         </p:txBody>
       </p:sp>
@@ -9065,8 +9067,8 @@
         </p:nvSpPr>
         <p:spPr>
           <a:xfrm>
-            <a:off x="822960" y="502920"/>
-            <a:ext cx="10515600" cy="365760"/>
+            <a:off x="822960" y="457200"/>
+            <a:ext cx="10515600" cy="411480"/>
           </a:xfrm>
           <a:prstGeom prst="rect">
             <a:avLst/>
@@ -9082,7 +9084,7 @@
               <a:buNone/>
             </a:pPr>
             <a:r>
-              <a:rPr lang="en-US" sz="1200" spc="300" kern="0" dirty="0">
+              <a:rPr lang="en-US" sz="1800" spc="300" kern="0" dirty="0">
                 <a:solidFill>
                   <a:srgbClr val="06B6D4"/>
                 </a:solidFill>
@@ -9092,7 +9094,7 @@
               </a:rPr>
               <a:t>OPERATIONS</a:t>
             </a:r>
-            <a:endParaRPr lang="en-US" sz="1200" dirty="0"/>
+            <a:endParaRPr lang="en-US" sz="1800" dirty="0"/>
           </a:p>
         </p:txBody>
       </p:sp>
@@ -9142,8 +9144,8 @@
           <p:nvPr/>
         </p:nvGraphicFramePr>
         <p:xfrm>
-          <a:off x="822960" y="1874520"/>
-          <a:ext cx="10515600" cy="3337560"/>
+          <a:off x="822960" y="1783080"/>
+          <a:ext cx="10515600" cy="3383280"/>
         </p:xfrm>
         <a:graphic xmlns:a="http://schemas.openxmlformats.org/drawingml/2006/main">
           <a:graphicData uri="http://schemas.openxmlformats.org/drawingml/2006/chart">
@@ -9159,7 +9161,7 @@
         </p:nvSpPr>
         <p:spPr>
           <a:xfrm>
-            <a:off x="822960" y="5413248"/>
+            <a:off x="822960" y="5321808"/>
             <a:ext cx="10515600" cy="0"/>
           </a:xfrm>
           <a:prstGeom prst="line">
@@ -9182,8 +9184,8 @@
         </p:nvSpPr>
         <p:spPr>
           <a:xfrm>
-            <a:off x="822960" y="5504688"/>
-            <a:ext cx="10424160" cy="411480"/>
+            <a:off x="822960" y="5394960"/>
+            <a:ext cx="10424160" cy="502920"/>
           </a:xfrm>
           <a:prstGeom prst="rect">
             <a:avLst/>
@@ -9199,7 +9201,7 @@
               <a:buNone/>
             </a:pPr>
             <a:r>
-              <a:rPr lang="en-US" sz="1300" i="1" dirty="0">
+              <a:rPr lang="en-US" sz="1800" i="1" dirty="0">
                 <a:solidFill>
                   <a:srgbClr val="06B6D4"/>
                 </a:solidFill>
@@ -9209,7 +9211,7 @@
               </a:rPr>
               <a:t>→  That is exactly the work agents do reliably - and exactly the work that used to consume the founder.</a:t>
             </a:r>
-            <a:endParaRPr lang="en-US" sz="1300" dirty="0"/>
+            <a:endParaRPr lang="en-US" sz="1800" dirty="0"/>
           </a:p>
         </p:txBody>
       </p:sp>
@@ -9244,8 +9246,8 @@
         </p:nvSpPr>
         <p:spPr>
           <a:xfrm>
-            <a:off x="822960" y="6053328"/>
-            <a:ext cx="9692640" cy="457200"/>
+            <a:off x="822960" y="6035040"/>
+            <a:ext cx="10424160" cy="566928"/>
           </a:xfrm>
           <a:prstGeom prst="rect">
             <a:avLst/>
@@ -9261,9 +9263,9 @@
               <a:buNone/>
             </a:pPr>
             <a:r>
-              <a:rPr lang="en-US" sz="1150" dirty="0">
-                <a:solidFill>
-                  <a:srgbClr val="64748B"/>
+              <a:rPr lang="en-US" sz="1800" dirty="0">
+                <a:solidFill>
+                  <a:srgbClr val="8FA3BF"/>
                 </a:solidFill>
                 <a:latin typeface="Segoe UI" pitchFamily="34" charset="0"/>
                 <a:ea typeface="Segoe UI" pitchFamily="34" charset="-122"/>
@@ -9271,7 +9273,7 @@
               </a:rPr>
               <a:t>Illustrative effort distribution across the 9-agent workforce.</a:t>
             </a:r>
-            <a:endParaRPr lang="en-US" sz="1150" dirty="0"/>
+            <a:endParaRPr lang="en-US" sz="1800" dirty="0"/>
           </a:p>
         </p:txBody>
       </p:sp>
@@ -9283,8 +9285,8 @@
         </p:nvSpPr>
         <p:spPr>
           <a:xfrm>
-            <a:off x="10698480" y="6382512"/>
-            <a:ext cx="1188720" cy="365760"/>
+            <a:off x="10698480" y="6309360"/>
+            <a:ext cx="1188720" cy="411480"/>
           </a:xfrm>
           <a:prstGeom prst="rect">
             <a:avLst/>
@@ -9300,9 +9302,9 @@
               <a:buNone/>
             </a:pPr>
             <a:r>
-              <a:rPr lang="en-US" sz="1000" dirty="0">
-                <a:solidFill>
-                  <a:srgbClr val="64748B"/>
+              <a:rPr lang="en-US" sz="1800" dirty="0">
+                <a:solidFill>
+                  <a:srgbClr val="8FA3BF"/>
                 </a:solidFill>
                 <a:latin typeface="Consolas" pitchFamily="34" charset="0"/>
                 <a:ea typeface="Consolas" pitchFamily="34" charset="-122"/>
@@ -9310,7 +9312,7 @@
               </a:rPr>
               <a:t>8 / 14</a:t>
             </a:r>
-            <a:endParaRPr lang="en-US" sz="1000" dirty="0"/>
+            <a:endParaRPr lang="en-US" sz="1800" dirty="0"/>
           </a:p>
         </p:txBody>
       </p:sp>
@@ -9394,8 +9396,8 @@
         </p:nvSpPr>
         <p:spPr>
           <a:xfrm>
-            <a:off x="822960" y="502920"/>
-            <a:ext cx="10515600" cy="365760"/>
+            <a:off x="822960" y="457200"/>
+            <a:ext cx="10515600" cy="411480"/>
           </a:xfrm>
           <a:prstGeom prst="rect">
             <a:avLst/>
@@ -9411,7 +9413,7 @@
               <a:buNone/>
             </a:pPr>
             <a:r>
-              <a:rPr lang="en-US" sz="1200" spc="300" kern="0" dirty="0">
+              <a:rPr lang="en-US" sz="1800" spc="300" kern="0" dirty="0">
                 <a:solidFill>
                   <a:srgbClr val="06B6D4"/>
                 </a:solidFill>
@@ -9421,7 +9423,7 @@
               </a:rPr>
               <a:t>QUALITY GATES</a:t>
             </a:r>
-            <a:endParaRPr lang="en-US" sz="1200" dirty="0"/>
+            <a:endParaRPr lang="en-US" sz="1800" dirty="0"/>
           </a:p>
         </p:txBody>
       </p:sp>
@@ -9479,7 +9481,7 @@
           </p:nvPr>
         </p:nvGraphicFramePr>
         <p:xfrm>
-          <a:off x="822960" y="2011680"/>
+          <a:off x="822960" y="1828800"/>
           <a:ext cx="10515600" cy="914400"/>
         </p:xfrm>
         <a:graphic>
@@ -9491,7 +9493,7 @@
                 <a:gridCol w="3505200"/>
                 <a:gridCol w="3505200"/>
               </a:tblGrid>
-              <a:tr h="402336">
+              <a:tr h="457200">
                 <a:tc>
                   <a:txBody>
                     <a:bodyPr/>
@@ -9501,7 +9503,7 @@
                         <a:buNone/>
                       </a:pPr>
                       <a:r>
-                        <a:rPr lang="en-US" sz="1150" b="1" dirty="0">
+                        <a:rPr lang="en-US" sz="1800" b="1" dirty="0">
                           <a:solidFill>
                             <a:srgbClr val="FFFFFF"/>
                           </a:solidFill>
@@ -9511,14 +9513,14 @@
                         </a:rPr>
                         <a:t>Gate</a:t>
                       </a:r>
-                      <a:endParaRPr lang="en-US" sz="1150" dirty="0">
+                      <a:endParaRPr lang="en-US" sz="1800" dirty="0">
                         <a:latin typeface="Segoe UI" charset="0"/>
                         <a:ea typeface="Segoe UI" charset="0"/>
                         <a:cs typeface="Segoe UI" charset="0"/>
                       </a:endParaRPr>
                     </a:p>
                   </a:txBody>
-                  <a:tcPr marL="64008" marR="64008" marT="64008" marB="64008" anchor="ctr">
+                  <a:tcPr marL="36576" marR="36576" marT="36576" marB="36576" anchor="ctr">
                     <a:lnL w="6350" cap="flat" cmpd="sng" algn="ctr">
                       <a:solidFill>
                         <a:srgbClr val="24365A"/>
@@ -9569,7 +9571,7 @@
                         <a:buNone/>
                       </a:pPr>
                       <a:r>
-                        <a:rPr lang="en-US" sz="1150" b="1" dirty="0">
+                        <a:rPr lang="en-US" sz="1800" b="1" dirty="0">
                           <a:solidFill>
                             <a:srgbClr val="FFFFFF"/>
                           </a:solidFill>
@@ -9579,14 +9581,14 @@
                         </a:rPr>
                         <a:t>Check</a:t>
                       </a:r>
-                      <a:endParaRPr lang="en-US" sz="1150" dirty="0">
+                      <a:endParaRPr lang="en-US" sz="1800" dirty="0">
                         <a:latin typeface="Segoe UI" charset="0"/>
                         <a:ea typeface="Segoe UI" charset="0"/>
                         <a:cs typeface="Segoe UI" charset="0"/>
                       </a:endParaRPr>
                     </a:p>
                   </a:txBody>
-                  <a:tcPr marL="64008" marR="64008" marT="64008" marB="64008" anchor="ctr">
+                  <a:tcPr marL="36576" marR="36576" marT="36576" marB="36576" anchor="ctr">
                     <a:lnL w="6350" cap="flat" cmpd="sng" algn="ctr">
                       <a:solidFill>
                         <a:srgbClr val="24365A"/>
@@ -9637,7 +9639,7 @@
                         <a:buNone/>
                       </a:pPr>
                       <a:r>
-                        <a:rPr lang="en-US" sz="1150" b="1" dirty="0">
+                        <a:rPr lang="en-US" sz="1800" b="1" dirty="0">
                           <a:solidFill>
                             <a:srgbClr val="FFFFFF"/>
                           </a:solidFill>
@@ -9647,14 +9649,14 @@
                         </a:rPr>
                         <a:t>Enforcement</a:t>
                       </a:r>
-                      <a:endParaRPr lang="en-US" sz="1150" dirty="0">
+                      <a:endParaRPr lang="en-US" sz="1800" dirty="0">
                         <a:latin typeface="Segoe UI" charset="0"/>
                         <a:ea typeface="Segoe UI" charset="0"/>
                         <a:cs typeface="Segoe UI" charset="0"/>
                       </a:endParaRPr>
                     </a:p>
                   </a:txBody>
-                  <a:tcPr marL="64008" marR="64008" marT="64008" marB="64008" anchor="ctr">
+                  <a:tcPr marL="36576" marR="36576" marT="36576" marB="36576" anchor="ctr">
                     <a:lnL w="6350" cap="flat" cmpd="sng" algn="ctr">
                       <a:solidFill>
                         <a:srgbClr val="24365A"/>
@@ -9697,7 +9699,7 @@
                   </a:tcPr>
                 </a:tc>
               </a:tr>
-              <a:tr h="402336">
+              <a:tr h="457200">
                 <a:tc>
                   <a:txBody>
                     <a:bodyPr/>
@@ -9707,7 +9709,7 @@
                         <a:buNone/>
                       </a:pPr>
                       <a:r>
-                        <a:rPr lang="en-US" sz="1080" dirty="0">
+                        <a:rPr lang="en-US" sz="1800" dirty="0">
                           <a:solidFill>
                             <a:srgbClr val="CBD5E1"/>
                           </a:solidFill>
@@ -9717,14 +9719,14 @@
                         </a:rPr>
                         <a:t>Golden path</a:t>
                       </a:r>
-                      <a:endParaRPr lang="en-US" sz="1080" dirty="0">
+                      <a:endParaRPr lang="en-US" sz="1800" dirty="0">
                         <a:latin typeface="Segoe UI" charset="0"/>
                         <a:ea typeface="Segoe UI" charset="0"/>
                         <a:cs typeface="Segoe UI" charset="0"/>
                       </a:endParaRPr>
                     </a:p>
                   </a:txBody>
-                  <a:tcPr marL="64008" marR="64008" marT="64008" marB="64008" anchor="ctr">
+                  <a:tcPr marL="36576" marR="36576" marT="36576" marB="36576" anchor="ctr">
                     <a:lnL w="6350" cap="flat" cmpd="sng" algn="ctr">
                       <a:solidFill>
                         <a:srgbClr val="24365A"/>
@@ -9775,7 +9777,7 @@
                         <a:buNone/>
                       </a:pPr>
                       <a:r>
-                        <a:rPr lang="en-US" sz="1080" dirty="0">
+                        <a:rPr lang="en-US" sz="1800" dirty="0">
                           <a:solidFill>
                             <a:srgbClr val="CBD5E1"/>
                           </a:solidFill>
@@ -9785,14 +9787,14 @@
                         </a:rPr>
                         <a:t>The single most important user journey works end-to-end</a:t>
                       </a:r>
-                      <a:endParaRPr lang="en-US" sz="1080" dirty="0">
+                      <a:endParaRPr lang="en-US" sz="1800" dirty="0">
                         <a:latin typeface="Segoe UI" charset="0"/>
                         <a:ea typeface="Segoe UI" charset="0"/>
                         <a:cs typeface="Segoe UI" charset="0"/>
                       </a:endParaRPr>
                     </a:p>
                   </a:txBody>
-                  <a:tcPr marL="64008" marR="64008" marT="64008" marB="64008" anchor="ctr">
+                  <a:tcPr marL="36576" marR="36576" marT="36576" marB="36576" anchor="ctr">
                     <a:lnL w="6350" cap="flat" cmpd="sng" algn="ctr">
                       <a:solidFill>
                         <a:srgbClr val="24365A"/>
@@ -9843,7 +9845,7 @@
                         <a:buNone/>
                       </a:pPr>
                       <a:r>
-                        <a:rPr lang="en-US" sz="1080" dirty="0">
+                        <a:rPr lang="en-US" sz="1800" dirty="0">
                           <a:solidFill>
                             <a:srgbClr val="CBD5E1"/>
                           </a:solidFill>
@@ -9853,14 +9855,14 @@
                         </a:rPr>
                         <a:t>If it breaks, the build does not ship</a:t>
                       </a:r>
-                      <a:endParaRPr lang="en-US" sz="1080" dirty="0">
+                      <a:endParaRPr lang="en-US" sz="1800" dirty="0">
                         <a:latin typeface="Segoe UI" charset="0"/>
                         <a:ea typeface="Segoe UI" charset="0"/>
                         <a:cs typeface="Segoe UI" charset="0"/>
                       </a:endParaRPr>
                     </a:p>
                   </a:txBody>
-                  <a:tcPr marL="64008" marR="64008" marT="64008" marB="64008" anchor="ctr">
+                  <a:tcPr marL="36576" marR="36576" marT="36576" marB="36576" anchor="ctr">
                     <a:lnL w="6350" cap="flat" cmpd="sng" algn="ctr">
                       <a:solidFill>
                         <a:srgbClr val="24365A"/>
@@ -9903,7 +9905,7 @@
                   </a:tcPr>
                 </a:tc>
               </a:tr>
-              <a:tr h="402336">
+              <a:tr h="457200">
                 <a:tc>
                   <a:txBody>
                     <a:bodyPr/>
@@ -9913,7 +9915,7 @@
                         <a:buNone/>
                       </a:pPr>
                       <a:r>
-                        <a:rPr lang="en-US" sz="1080" dirty="0">
+                        <a:rPr lang="en-US" sz="1800" dirty="0">
                           <a:solidFill>
                             <a:srgbClr val="CBD5E1"/>
                           </a:solidFill>
@@ -9923,14 +9925,14 @@
                         </a:rPr>
                         <a:t>Zero dead buttons</a:t>
                       </a:r>
-                      <a:endParaRPr lang="en-US" sz="1080" dirty="0">
+                      <a:endParaRPr lang="en-US" sz="1800" dirty="0">
                         <a:latin typeface="Segoe UI" charset="0"/>
                         <a:ea typeface="Segoe UI" charset="0"/>
                         <a:cs typeface="Segoe UI" charset="0"/>
                       </a:endParaRPr>
                     </a:p>
                   </a:txBody>
-                  <a:tcPr marL="64008" marR="64008" marT="64008" marB="64008" anchor="ctr">
+                  <a:tcPr marL="36576" marR="36576" marT="36576" marB="36576" anchor="ctr">
                     <a:lnL w="6350" cap="flat" cmpd="sng" algn="ctr">
                       <a:solidFill>
                         <a:srgbClr val="24365A"/>
@@ -9981,7 +9983,7 @@
                         <a:buNone/>
                       </a:pPr>
                       <a:r>
-                        <a:rPr lang="en-US" sz="1080" dirty="0">
+                        <a:rPr lang="en-US" sz="1800" dirty="0">
                           <a:solidFill>
                             <a:srgbClr val="CBD5E1"/>
                           </a:solidFill>
@@ -9991,14 +9993,14 @@
                         </a:rPr>
                         <a:t>Every interactive element does what it claims</a:t>
                       </a:r>
-                      <a:endParaRPr lang="en-US" sz="1080" dirty="0">
+                      <a:endParaRPr lang="en-US" sz="1800" dirty="0">
                         <a:latin typeface="Segoe UI" charset="0"/>
                         <a:ea typeface="Segoe UI" charset="0"/>
                         <a:cs typeface="Segoe UI" charset="0"/>
                       </a:endParaRPr>
                     </a:p>
                   </a:txBody>
-                  <a:tcPr marL="64008" marR="64008" marT="64008" marB="64008" anchor="ctr">
+                  <a:tcPr marL="36576" marR="36576" marT="36576" marB="36576" anchor="ctr">
                     <a:lnL w="6350" cap="flat" cmpd="sng" algn="ctr">
                       <a:solidFill>
                         <a:srgbClr val="24365A"/>
@@ -10049,7 +10051,7 @@
                         <a:buNone/>
                       </a:pPr>
                       <a:r>
-                        <a:rPr lang="en-US" sz="1080" dirty="0">
+                        <a:rPr lang="en-US" sz="1800" dirty="0">
                           <a:solidFill>
                             <a:srgbClr val="CBD5E1"/>
                           </a:solidFill>
@@ -10059,14 +10061,14 @@
                         </a:rPr>
                         <a:t>Anything that lies is fixed or removed</a:t>
                       </a:r>
-                      <a:endParaRPr lang="en-US" sz="1080" dirty="0">
+                      <a:endParaRPr lang="en-US" sz="1800" dirty="0">
                         <a:latin typeface="Segoe UI" charset="0"/>
                         <a:ea typeface="Segoe UI" charset="0"/>
                         <a:cs typeface="Segoe UI" charset="0"/>
                       </a:endParaRPr>
                     </a:p>
                   </a:txBody>
-                  <a:tcPr marL="64008" marR="64008" marT="64008" marB="64008" anchor="ctr">
+                  <a:tcPr marL="36576" marR="36576" marT="36576" marB="36576" anchor="ctr">
                     <a:lnL w="6350" cap="flat" cmpd="sng" algn="ctr">
                       <a:solidFill>
                         <a:srgbClr val="24365A"/>
@@ -10109,7 +10111,7 @@
                   </a:tcPr>
                 </a:tc>
               </a:tr>
-              <a:tr h="402336">
+              <a:tr h="457200">
                 <a:tc>
                   <a:txBody>
                     <a:bodyPr/>
@@ -10119,7 +10121,7 @@
                         <a:buNone/>
                       </a:pPr>
                       <a:r>
-                        <a:rPr lang="en-US" sz="1080" dirty="0">
+                        <a:rPr lang="en-US" sz="1800" dirty="0">
                           <a:solidFill>
                             <a:srgbClr val="CBD5E1"/>
                           </a:solidFill>
@@ -10129,14 +10131,14 @@
                         </a:rPr>
                         <a:t>Version bump + backup</a:t>
                       </a:r>
-                      <a:endParaRPr lang="en-US" sz="1080" dirty="0">
+                      <a:endParaRPr lang="en-US" sz="1800" dirty="0">
                         <a:latin typeface="Segoe UI" charset="0"/>
                         <a:ea typeface="Segoe UI" charset="0"/>
                         <a:cs typeface="Segoe UI" charset="0"/>
                       </a:endParaRPr>
                     </a:p>
                   </a:txBody>
-                  <a:tcPr marL="64008" marR="64008" marT="64008" marB="64008" anchor="ctr">
+                  <a:tcPr marL="36576" marR="36576" marT="36576" marB="36576" anchor="ctr">
                     <a:lnL w="6350" cap="flat" cmpd="sng" algn="ctr">
                       <a:solidFill>
                         <a:srgbClr val="24365A"/>
@@ -10187,7 +10189,7 @@
                         <a:buNone/>
                       </a:pPr>
                       <a:r>
-                        <a:rPr lang="en-US" sz="1080" dirty="0">
+                        <a:rPr lang="en-US" sz="1800" dirty="0">
                           <a:solidFill>
                             <a:srgbClr val="CBD5E1"/>
                           </a:solidFill>
@@ -10197,14 +10199,14 @@
                         </a:rPr>
                         <a:t>Version increments and the previous build is archived</a:t>
                       </a:r>
-                      <a:endParaRPr lang="en-US" sz="1080" dirty="0">
+                      <a:endParaRPr lang="en-US" sz="1800" dirty="0">
                         <a:latin typeface="Segoe UI" charset="0"/>
                         <a:ea typeface="Segoe UI" charset="0"/>
                         <a:cs typeface="Segoe UI" charset="0"/>
                       </a:endParaRPr>
                     </a:p>
                   </a:txBody>
-                  <a:tcPr marL="64008" marR="64008" marT="64008" marB="64008" anchor="ctr">
+                  <a:tcPr marL="36576" marR="36576" marT="36576" marB="36576" anchor="ctr">
                     <a:lnL w="6350" cap="flat" cmpd="sng" algn="ctr">
                       <a:solidFill>
                         <a:srgbClr val="24365A"/>
@@ -10255,7 +10257,7 @@
                         <a:buNone/>
                       </a:pPr>
                       <a:r>
-                        <a:rPr lang="en-US" sz="1080" dirty="0">
+                        <a:rPr lang="en-US" sz="1800" dirty="0">
                           <a:solidFill>
                             <a:srgbClr val="CBD5E1"/>
                           </a:solidFill>
@@ -10265,14 +10267,14 @@
                         </a:rPr>
                         <a:t>Rollback is routine, not an emergency</a:t>
                       </a:r>
-                      <a:endParaRPr lang="en-US" sz="1080" dirty="0">
+                      <a:endParaRPr lang="en-US" sz="1800" dirty="0">
                         <a:latin typeface="Segoe UI" charset="0"/>
                         <a:ea typeface="Segoe UI" charset="0"/>
                         <a:cs typeface="Segoe UI" charset="0"/>
                       </a:endParaRPr>
                     </a:p>
                   </a:txBody>
-                  <a:tcPr marL="64008" marR="64008" marT="64008" marB="64008" anchor="ctr">
+                  <a:tcPr marL="36576" marR="36576" marT="36576" marB="36576" anchor="ctr">
                     <a:lnL w="6350" cap="flat" cmpd="sng" algn="ctr">
                       <a:solidFill>
                         <a:srgbClr val="24365A"/>
@@ -10315,7 +10317,7 @@
                   </a:tcPr>
                 </a:tc>
               </a:tr>
-              <a:tr h="402336">
+              <a:tr h="457200">
                 <a:tc>
                   <a:txBody>
                     <a:bodyPr/>
@@ -10325,7 +10327,7 @@
                         <a:buNone/>
                       </a:pPr>
                       <a:r>
-                        <a:rPr lang="en-US" sz="1080" dirty="0">
+                        <a:rPr lang="en-US" sz="1800" dirty="0">
                           <a:solidFill>
                             <a:srgbClr val="CBD5E1"/>
                           </a:solidFill>
@@ -10335,14 +10337,14 @@
                         </a:rPr>
                         <a:t>Physical evidence</a:t>
                       </a:r>
-                      <a:endParaRPr lang="en-US" sz="1080" dirty="0">
+                      <a:endParaRPr lang="en-US" sz="1800" dirty="0">
                         <a:latin typeface="Segoe UI" charset="0"/>
                         <a:ea typeface="Segoe UI" charset="0"/>
                         <a:cs typeface="Segoe UI" charset="0"/>
                       </a:endParaRPr>
                     </a:p>
                   </a:txBody>
-                  <a:tcPr marL="64008" marR="64008" marT="64008" marB="64008" anchor="ctr">
+                  <a:tcPr marL="36576" marR="36576" marT="36576" marB="36576" anchor="ctr">
                     <a:lnL w="6350" cap="flat" cmpd="sng" algn="ctr">
                       <a:solidFill>
                         <a:srgbClr val="24365A"/>
@@ -10393,7 +10395,7 @@
                         <a:buNone/>
                       </a:pPr>
                       <a:r>
-                        <a:rPr lang="en-US" sz="1080" dirty="0">
+                        <a:rPr lang="en-US" sz="1800" dirty="0">
                           <a:solidFill>
                             <a:srgbClr val="CBD5E1"/>
                           </a:solidFill>
@@ -10403,14 +10405,14 @@
                         </a:rPr>
                         <a:t>A log, file, or marker a stranger could audit</a:t>
                       </a:r>
-                      <a:endParaRPr lang="en-US" sz="1080" dirty="0">
+                      <a:endParaRPr lang="en-US" sz="1800" dirty="0">
                         <a:latin typeface="Segoe UI" charset="0"/>
                         <a:ea typeface="Segoe UI" charset="0"/>
                         <a:cs typeface="Segoe UI" charset="0"/>
                       </a:endParaRPr>
                     </a:p>
                   </a:txBody>
-                  <a:tcPr marL="64008" marR="64008" marT="64008" marB="64008" anchor="ctr">
+                  <a:tcPr marL="36576" marR="36576" marT="36576" marB="36576" anchor="ctr">
                     <a:lnL w="6350" cap="flat" cmpd="sng" algn="ctr">
                       <a:solidFill>
                         <a:srgbClr val="24365A"/>
@@ -10461,7 +10463,7 @@
                         <a:buNone/>
                       </a:pPr>
                       <a:r>
-                        <a:rPr lang="en-US" sz="1080" dirty="0">
+                        <a:rPr lang="en-US" sz="1800" dirty="0">
                           <a:solidFill>
                             <a:srgbClr val="CBD5E1"/>
                           </a:solidFill>
@@ -10471,14 +10473,14 @@
                         </a:rPr>
                         <a:t>A status field is not evidence</a:t>
                       </a:r>
-                      <a:endParaRPr lang="en-US" sz="1080" dirty="0">
+                      <a:endParaRPr lang="en-US" sz="1800" dirty="0">
                         <a:latin typeface="Segoe UI" charset="0"/>
                         <a:ea typeface="Segoe UI" charset="0"/>
                         <a:cs typeface="Segoe UI" charset="0"/>
                       </a:endParaRPr>
                     </a:p>
                   </a:txBody>
-                  <a:tcPr marL="64008" marR="64008" marT="64008" marB="64008" anchor="ctr">
+                  <a:tcPr marL="36576" marR="36576" marT="36576" marB="36576" anchor="ctr">
                     <a:lnL w="6350" cap="flat" cmpd="sng" algn="ctr">
                       <a:solidFill>
                         <a:srgbClr val="24365A"/>
@@ -10521,7 +10523,7 @@
                   </a:tcPr>
                 </a:tc>
               </a:tr>
-              <a:tr h="402336">
+              <a:tr h="457200">
                 <a:tc>
                   <a:txBody>
                     <a:bodyPr/>
@@ -10531,7 +10533,7 @@
                         <a:buNone/>
                       </a:pPr>
                       <a:r>
-                        <a:rPr lang="en-US" sz="1080" dirty="0">
+                        <a:rPr lang="en-US" sz="1800" dirty="0">
                           <a:solidFill>
                             <a:srgbClr val="CBD5E1"/>
                           </a:solidFill>
@@ -10541,14 +10543,14 @@
                         </a:rPr>
                         <a:t>The rule</a:t>
                       </a:r>
-                      <a:endParaRPr lang="en-US" sz="1080" dirty="0">
+                      <a:endParaRPr lang="en-US" sz="1800" dirty="0">
                         <a:latin typeface="Segoe UI" charset="0"/>
                         <a:ea typeface="Segoe UI" charset="0"/>
                         <a:cs typeface="Segoe UI" charset="0"/>
                       </a:endParaRPr>
                     </a:p>
                   </a:txBody>
-                  <a:tcPr marL="64008" marR="64008" marT="64008" marB="64008" anchor="ctr">
+                  <a:tcPr marL="36576" marR="36576" marT="36576" marB="36576" anchor="ctr">
                     <a:lnL w="6350" cap="flat" cmpd="sng" algn="ctr">
                       <a:solidFill>
                         <a:srgbClr val="24365A"/>
@@ -10599,7 +10601,7 @@
                         <a:buNone/>
                       </a:pPr>
                       <a:r>
-                        <a:rPr lang="en-US" sz="1080" dirty="0">
+                        <a:rPr lang="en-US" sz="1800" dirty="0">
                           <a:solidFill>
                             <a:srgbClr val="CBD5E1"/>
                           </a:solidFill>
@@ -10609,14 +10611,14 @@
                         </a:rPr>
                         <a:t>One blocked item means no deploy</a:t>
                       </a:r>
-                      <a:endParaRPr lang="en-US" sz="1080" dirty="0">
+                      <a:endParaRPr lang="en-US" sz="1800" dirty="0">
                         <a:latin typeface="Segoe UI" charset="0"/>
                         <a:ea typeface="Segoe UI" charset="0"/>
                         <a:cs typeface="Segoe UI" charset="0"/>
                       </a:endParaRPr>
                     </a:p>
                   </a:txBody>
-                  <a:tcPr marL="64008" marR="64008" marT="64008" marB="64008" anchor="ctr">
+                  <a:tcPr marL="36576" marR="36576" marT="36576" marB="36576" anchor="ctr">
                     <a:lnL w="6350" cap="flat" cmpd="sng" algn="ctr">
                       <a:solidFill>
                         <a:srgbClr val="24365A"/>
@@ -10667,7 +10669,7 @@
                         <a:buNone/>
                       </a:pPr>
                       <a:r>
-                        <a:rPr lang="en-US" sz="1080" dirty="0">
+                        <a:rPr lang="en-US" sz="1800" dirty="0">
                           <a:solidFill>
                             <a:srgbClr val="CBD5E1"/>
                           </a:solidFill>
@@ -10677,14 +10679,14 @@
                         </a:rPr>
                         <a:t>No exceptions and no just-this-once</a:t>
                       </a:r>
-                      <a:endParaRPr lang="en-US" sz="1080" dirty="0">
+                      <a:endParaRPr lang="en-US" sz="1800" dirty="0">
                         <a:latin typeface="Segoe UI" charset="0"/>
                         <a:ea typeface="Segoe UI" charset="0"/>
                         <a:cs typeface="Segoe UI" charset="0"/>
                       </a:endParaRPr>
                     </a:p>
                   </a:txBody>
-                  <a:tcPr marL="64008" marR="64008" marT="64008" marB="64008" anchor="ctr">
+                  <a:tcPr marL="36576" marR="36576" marT="36576" marB="36576" anchor="ctr">
                     <a:lnL w="6350" cap="flat" cmpd="sng" algn="ctr">
                       <a:solidFill>
                         <a:srgbClr val="24365A"/>
@@ -10762,8 +10764,8 @@
         </p:nvSpPr>
         <p:spPr>
           <a:xfrm>
-            <a:off x="822960" y="6053328"/>
-            <a:ext cx="9692640" cy="457200"/>
+            <a:off x="822960" y="6035040"/>
+            <a:ext cx="10424160" cy="566928"/>
           </a:xfrm>
           <a:prstGeom prst="rect">
             <a:avLst/>
@@ -10779,9 +10781,9 @@
               <a:buNone/>
             </a:pPr>
             <a:r>
-              <a:rPr lang="en-US" sz="1150" dirty="0">
-                <a:solidFill>
-                  <a:srgbClr val="64748B"/>
+              <a:rPr lang="en-US" sz="1800" dirty="0">
+                <a:solidFill>
+                  <a:srgbClr val="8FA3BF"/>
                 </a:solidFill>
                 <a:latin typeface="Segoe UI" pitchFamily="34" charset="0"/>
                 <a:ea typeface="Segoe UI" pitchFamily="34" charset="-122"/>
@@ -10789,7 +10791,7 @@
               </a:rPr>
               <a:t>Gates turn machine-speed output from a liability into an asset.</a:t>
             </a:r>
-            <a:endParaRPr lang="en-US" sz="1150" dirty="0"/>
+            <a:endParaRPr lang="en-US" sz="1800" dirty="0"/>
           </a:p>
         </p:txBody>
       </p:sp>
@@ -10801,8 +10803,8 @@
         </p:nvSpPr>
         <p:spPr>
           <a:xfrm>
-            <a:off x="10698480" y="6382512"/>
-            <a:ext cx="1188720" cy="365760"/>
+            <a:off x="10698480" y="6309360"/>
+            <a:ext cx="1188720" cy="411480"/>
           </a:xfrm>
           <a:prstGeom prst="rect">
             <a:avLst/>
@@ -10818,9 +10820,9 @@
               <a:buNone/>
             </a:pPr>
             <a:r>
-              <a:rPr lang="en-US" sz="1000" dirty="0">
-                <a:solidFill>
-                  <a:srgbClr val="64748B"/>
+              <a:rPr lang="en-US" sz="1800" dirty="0">
+                <a:solidFill>
+                  <a:srgbClr val="8FA3BF"/>
                 </a:solidFill>
                 <a:latin typeface="Consolas" pitchFamily="34" charset="0"/>
                 <a:ea typeface="Consolas" pitchFamily="34" charset="-122"/>
@@ -10828,7 +10830,7 @@
               </a:rPr>
               <a:t>9 / 14</a:t>
             </a:r>
-            <a:endParaRPr lang="en-US" sz="1000" dirty="0"/>
+            <a:endParaRPr lang="en-US" sz="1800" dirty="0"/>
           </a:p>
         </p:txBody>
       </p:sp>

--- a/decks/zalinos-architecture.pptx
+++ b/decks/zalinos-architecture.pptx
@@ -576,7 +576,7 @@
             <c:bubble3D val="0"/>
             <c:spPr>
               <a:solidFill>
-                <a:srgbClr val="06B6D4"/>
+                <a:srgbClr val="3B82F6"/>
               </a:solidFill>
               <a:effectLst/>
             </c:spPr>
@@ -6232,7 +6232,7 @@
                 <a:ea typeface="Segoe UI" pitchFamily="34" charset="-122"/>
                 <a:cs typeface="Segoe UI" pitchFamily="34" charset="-120"/>
               </a:rPr>
-              <a:t>Every task you do yourself is a task you cannot parallelize, and a company is a queue of tasks.</a:t>
+              <a:t>Every task you do yourself is a task you cannot parallelize.</a:t>
             </a:r>
             <a:endParaRPr lang="en-US" sz="2000" dirty="0"/>
           </a:p>
